--- a/納品レポート/ホテル別レポート/keisei_kinshicho_口コミ分析レポート.pptx
+++ b/納品レポート/ホテル別レポート/keisei_kinshicho_口コミ分析レポート.pptx
@@ -202,13 +202,13 @@
                 <c:formatCode>General</c:formatCode>
                 <c:ptCount val="4"/>
                 <c:pt idx="0">
-                  <c:v>9.5</c:v>
+                  <c:v>9.53</c:v>
                 </c:pt>
                 <c:pt idx="1">
                   <c:v>9.05</c:v>
                 </c:pt>
                 <c:pt idx="2">
-                  <c:v>8.61</c:v>
+                  <c:v>8.63</c:v>
                 </c:pt>
                 <c:pt idx="3">
                   <c:v>8</c:v>
@@ -554,7 +554,7 @@
               <c:numCache>
                 <c:ptCount val="3"/>
                 <c:pt idx="0">
-                  <c:v>96</c:v>
+                  <c:v>102</c:v>
                 </c:pt>
                 <c:pt idx="1">
                   <c:v>13</c:v>
@@ -783,13 +783,13 @@
                 <c:formatCode>General</c:formatCode>
                 <c:ptCount val="7"/>
                 <c:pt idx="0">
-                  <c:v>58</c:v>
+                  <c:v>62</c:v>
                 </c:pt>
                 <c:pt idx="1">
-                  <c:v>21</c:v>
+                  <c:v>22</c:v>
                 </c:pt>
                 <c:pt idx="2">
-                  <c:v>17</c:v>
+                  <c:v>18</c:v>
                 </c:pt>
                 <c:pt idx="3">
                   <c:v>5</c:v>
@@ -2752,7 +2752,7 @@
                 <a:ea typeface="Arial" pitchFamily="34" charset="-122"/>
                 <a:cs typeface="Arial" pitchFamily="34" charset="-120"/>
               </a:rPr>
-              <a:t>レビュー総数：110件（4サイト）</a:t>
+              <a:t>レビュー総数：116件（4サイト）</a:t>
             </a:r>
             <a:endParaRPr lang="en-US" sz="1000" dirty="0"/>
           </a:p>
@@ -2772,7 +2772,7 @@
                 <a:ea typeface="Arial" pitchFamily="34" charset="-122"/>
                 <a:cs typeface="Arial" pitchFamily="34" charset="-120"/>
               </a:rPr>
-              <a:t>作成日：2026年3月17日</a:t>
+              <a:t>作成日：2026年3月18日</a:t>
             </a:r>
             <a:endParaRPr lang="en-US" sz="1000" dirty="0"/>
           </a:p>
@@ -3318,7 +3318,7 @@
                           <a:ea typeface="Arial" pitchFamily="34" charset="-122"/>
                           <a:cs typeface="Arial" pitchFamily="34" charset="-120"/>
                         </a:rPr>
-                        <a:t>9.00点</a:t>
+                        <a:t>9.03点</a:t>
                       </a:r>
                       <a:endParaRPr lang="en-US" sz="1000" dirty="0">
                         <a:latin typeface="Arial" charset="0"/>
@@ -3592,7 +3592,7 @@
                           <a:ea typeface="Arial" pitchFamily="34" charset="-122"/>
                           <a:cs typeface="Arial" pitchFamily="34" charset="-120"/>
                         </a:rPr>
-                        <a:t>87.3%</a:t>
+                        <a:t>87.9%</a:t>
                       </a:r>
                       <a:endParaRPr lang="en-US" sz="1000" dirty="0">
                         <a:latin typeface="Arial" charset="0"/>
@@ -3660,7 +3660,7 @@
                           <a:ea typeface="Arial" pitchFamily="34" charset="-122"/>
                           <a:cs typeface="Arial" pitchFamily="34" charset="-120"/>
                         </a:rPr>
-                        <a:t>92%以上</a:t>
+                        <a:t>93%以上</a:t>
                       </a:r>
                       <a:endParaRPr lang="en-US" sz="1000" dirty="0">
                         <a:latin typeface="Arial" charset="0"/>
@@ -4688,7 +4688,7 @@
                           <a:ea typeface="Arial" pitchFamily="34" charset="-122"/>
                           <a:cs typeface="Arial" pitchFamily="34" charset="-120"/>
                         </a:rPr>
-                        <a:t>約16件/期間</a:t>
+                        <a:t>約17件/期間</a:t>
                       </a:r>
                       <a:endParaRPr lang="en-US" sz="1000" dirty="0">
                         <a:latin typeface="Arial" charset="0"/>
@@ -5327,7 +5327,7 @@
                 <a:ea typeface="Arial" pitchFamily="34" charset="-122"/>
                 <a:cs typeface="Arial" pitchFamily="34" charset="-120"/>
               </a:rPr>
-              <a:t>9.00</a:t>
+              <a:t>9.03</a:t>
             </a:r>
             <a:endParaRPr lang="en-US" sz="3200" dirty="0"/>
           </a:p>
@@ -5452,7 +5452,7 @@
                 <a:ea typeface="Arial" pitchFamily="34" charset="-122"/>
                 <a:cs typeface="Arial" pitchFamily="34" charset="-120"/>
               </a:rPr>
-              <a:t>87.3%</a:t>
+              <a:t>87.9%</a:t>
             </a:r>
             <a:endParaRPr lang="en-US" sz="3200" dirty="0"/>
           </a:p>
@@ -5702,7 +5702,7 @@
                 <a:ea typeface="Arial" pitchFamily="34" charset="-122"/>
                 <a:cs typeface="Arial" pitchFamily="34" charset="-120"/>
               </a:rPr>
-              <a:t>110件</a:t>
+              <a:t>116件</a:t>
             </a:r>
             <a:endParaRPr lang="en-US" sz="3200" dirty="0"/>
           </a:p>
@@ -5850,7 +5850,7 @@
                 <a:ea typeface="Arial" pitchFamily="34" charset="-122"/>
                 <a:cs typeface="Arial" pitchFamily="34" charset="-120"/>
               </a:rPr>
-              <a:t>  近くにコンビニやレストランがたくさんあり、交通の便も良く、電車でもアクセスできます</a:t>
+              <a:t>  酒店大堂也提供面膜，浴鹽 立地が最高に便利</a:t>
             </a:r>
             <a:endParaRPr lang="en-US" sz="1100" dirty="0"/>
           </a:p>
@@ -5930,7 +5930,7 @@
                 <a:ea typeface="Arial" pitchFamily="34" charset="-122"/>
                 <a:cs typeface="Arial" pitchFamily="34" charset="-120"/>
               </a:rPr>
-              <a:t>  下次會再入住 部屋は全体的に快適で清潔でしたが、枕が柔らかすぎて寝心地が悪かったです</a:t>
+              <a:t>  部屋も清潔で快適で、とても気持ちの良い滞在になりました</a:t>
             </a:r>
             <a:endParaRPr lang="en-US" sz="1100" dirty="0"/>
           </a:p>
@@ -6078,7 +6078,7 @@
                 <a:ea typeface="Arial" pitchFamily="34" charset="-122"/>
                 <a:cs typeface="Arial" pitchFamily="34" charset="-120"/>
               </a:rPr>
-              <a:t>  Good location and service, facilities in very good condition</a:t>
+              <a:t>  Instalaciones cómodas , zona muy tranquila y relativament...</a:t>
             </a:r>
             <a:endParaRPr lang="en-US" sz="1100" dirty="0"/>
           </a:p>
@@ -6118,7 +6118,7 @@
                 <a:ea typeface="Arial" pitchFamily="34" charset="-122"/>
                 <a:cs typeface="Arial" pitchFamily="34" charset="-120"/>
               </a:rPr>
-              <a:t>  ロビーには無料のバスアメニティとコーヒー・紅茶のティーバッグが用意されています</a:t>
+              <a:t>  ホテルのロビーにはフェイスマスクやバスソルトまで用意されていました</a:t>
             </a:r>
             <a:endParaRPr lang="en-US" sz="1100" dirty="0"/>
           </a:p>
@@ -6511,7 +6511,7 @@
                 <a:ea typeface="Arial" pitchFamily="34" charset="-122"/>
                 <a:cs typeface="Arial" pitchFamily="34" charset="-120"/>
               </a:rPr>
-              <a:t>9.00</a:t>
+              <a:t>9.03</a:t>
             </a:r>
             <a:endParaRPr lang="en-US" sz="3200" dirty="0"/>
           </a:p>
@@ -6636,7 +6636,7 @@
                 <a:ea typeface="Arial" pitchFamily="34" charset="-122"/>
                 <a:cs typeface="Arial" pitchFamily="34" charset="-120"/>
               </a:rPr>
-              <a:t>87.3%</a:t>
+              <a:t>87.9%</a:t>
             </a:r>
             <a:endParaRPr lang="en-US" sz="3200" dirty="0"/>
           </a:p>
@@ -6886,7 +6886,7 @@
                 <a:ea typeface="Arial" pitchFamily="34" charset="-122"/>
                 <a:cs typeface="Arial" pitchFamily="34" charset="-120"/>
               </a:rPr>
-              <a:t>110件</a:t>
+              <a:t>116件</a:t>
             </a:r>
             <a:endParaRPr lang="en-US" sz="3200" dirty="0"/>
           </a:p>
@@ -7307,7 +7307,7 @@
                 <a:ea typeface="Arial" pitchFamily="34" charset="-122"/>
                 <a:cs typeface="Arial" pitchFamily="34" charset="-120"/>
               </a:rPr>
-              <a:t>Trip.com(9.50)が最高スコア。</a:t>
+              <a:t>Trip.com(9.53)が最高スコア。</a:t>
             </a:r>
             <a:endParaRPr lang="en-US" sz="1100" dirty="0"/>
           </a:p>
@@ -7865,7 +7865,7 @@
                           <a:ea typeface="Arial" pitchFamily="34" charset="-122"/>
                           <a:cs typeface="Arial" pitchFamily="34" charset="-120"/>
                         </a:rPr>
-                        <a:t>40</a:t>
+                        <a:t>43</a:t>
                       </a:r>
                       <a:endParaRPr lang="en-US" sz="900" dirty="0">
                         <a:latin typeface="Arial" charset="0"/>
@@ -7933,7 +7933,7 @@
                           <a:ea typeface="Arial" pitchFamily="34" charset="-122"/>
                           <a:cs typeface="Arial" pitchFamily="34" charset="-120"/>
                         </a:rPr>
-                        <a:t>9.5</a:t>
+                        <a:t>9.53</a:t>
                       </a:r>
                       <a:endParaRPr lang="en-US" sz="900" dirty="0">
                         <a:latin typeface="Arial" charset="0"/>
@@ -8069,7 +8069,7 @@
                           <a:ea typeface="Arial" pitchFamily="34" charset="-122"/>
                           <a:cs typeface="Arial" pitchFamily="34" charset="-120"/>
                         </a:rPr>
-                        <a:t>9.5</a:t>
+                        <a:t>9.53</a:t>
                       </a:r>
                       <a:endParaRPr lang="en-US" sz="900" dirty="0">
                         <a:latin typeface="Arial" charset="0"/>
@@ -8549,7 +8549,7 @@
                           <a:ea typeface="Arial" pitchFamily="34" charset="-122"/>
                           <a:cs typeface="Arial" pitchFamily="34" charset="-120"/>
                         </a:rPr>
-                        <a:t>46</a:t>
+                        <a:t>49</a:t>
                       </a:r>
                       <a:endParaRPr lang="en-US" sz="900" dirty="0">
                         <a:latin typeface="Arial" charset="0"/>
@@ -8617,7 +8617,7 @@
                           <a:ea typeface="Arial" pitchFamily="34" charset="-122"/>
                           <a:cs typeface="Arial" pitchFamily="34" charset="-120"/>
                         </a:rPr>
-                        <a:t>8.61</a:t>
+                        <a:t>8.63</a:t>
                       </a:r>
                       <a:endParaRPr lang="en-US" sz="900" dirty="0">
                         <a:latin typeface="Arial" charset="0"/>
@@ -8753,7 +8753,7 @@
                           <a:ea typeface="Arial" pitchFamily="34" charset="-122"/>
                           <a:cs typeface="Arial" pitchFamily="34" charset="-120"/>
                         </a:rPr>
-                        <a:t>8.61</a:t>
+                        <a:t>8.63</a:t>
                       </a:r>
                       <a:endParaRPr lang="en-US" sz="900" dirty="0">
                         <a:latin typeface="Arial" charset="0"/>
@@ -9503,7 +9503,7 @@
                 <a:ea typeface="Arial" pitchFamily="34" charset="-122"/>
                 <a:cs typeface="Arial" pitchFamily="34" charset="-120"/>
               </a:rPr>
-              <a:t>96件（87.3%）</a:t>
+              <a:t>102件（87.9%）</a:t>
             </a:r>
             <a:endParaRPr lang="en-US" sz="1100" dirty="0"/>
           </a:p>
@@ -9601,7 +9601,7 @@
                 <a:ea typeface="Arial" pitchFamily="34" charset="-122"/>
                 <a:cs typeface="Arial" pitchFamily="34" charset="-120"/>
               </a:rPr>
-              <a:t>13件（11.8%）</a:t>
+              <a:t>13件（11.2%）</a:t>
             </a:r>
             <a:endParaRPr lang="en-US" sz="1100" dirty="0"/>
           </a:p>
@@ -10111,7 +10111,7 @@
                 <a:ea typeface="Arial" pitchFamily="34" charset="-122"/>
                 <a:cs typeface="Arial" pitchFamily="34" charset="-120"/>
               </a:rPr>
-              <a:t>近くにコンビニやレストランがたくさんあり、交通の便も良く、電車でもアクセスできます</a:t>
+              <a:t>酒店大堂也提供面膜，浴鹽 立地が最高に便利</a:t>
             </a:r>
             <a:endParaRPr lang="en-US" sz="900" dirty="0"/>
           </a:p>
@@ -10150,7 +10150,7 @@
                 <a:ea typeface="Arial" pitchFamily="34" charset="-122"/>
                 <a:cs typeface="Arial" pitchFamily="34" charset="-120"/>
               </a:rPr>
-              <a:t>「近くにはMTR駅や大型ショッピングモールがあり、徒歩約5分で買い物に便利です」</a:t>
+              <a:t>「駅からもとても近いので、非常に便利です」</a:t>
             </a:r>
             <a:endParaRPr lang="en-US" sz="900" dirty="0"/>
           </a:p>
@@ -10557,7 +10557,7 @@
                 <a:ea typeface="Arial" pitchFamily="34" charset="-122"/>
                 <a:cs typeface="Arial" pitchFamily="34" charset="-120"/>
               </a:rPr>
-              <a:t>下次會再入住 部屋は全体的に快適で清潔でしたが、枕が柔らかすぎて寝心地が悪かったです</a:t>
+              <a:t>部屋も清潔で快適で、とても気持ちの良い滞在になりました</a:t>
             </a:r>
             <a:endParaRPr lang="en-US" sz="900" dirty="0"/>
           </a:p>
@@ -10596,7 +10596,7 @@
                 <a:ea typeface="Arial" pitchFamily="34" charset="-122"/>
                 <a:cs typeface="Arial" pitchFamily="34" charset="-120"/>
               </a:rPr>
-              <a:t>「清潔 特になし 特になし」</a:t>
+              <a:t>「キレイなホテルでした 特にありません」</a:t>
             </a:r>
             <a:endParaRPr lang="en-US" sz="900" dirty="0"/>
           </a:p>
@@ -10741,7 +10741,7 @@
                 <a:ea typeface="Arial" pitchFamily="34" charset="-122"/>
                 <a:cs typeface="Arial" pitchFamily="34" charset="-120"/>
               </a:rPr>
-              <a:t>コンビニ・周辺施設</a:t>
+              <a:t>快適さ・設備</a:t>
             </a:r>
             <a:endParaRPr lang="en-US" sz="1300" dirty="0"/>
           </a:p>
@@ -10780,7 +10780,7 @@
                 <a:ea typeface="Arial" pitchFamily="34" charset="-122"/>
                 <a:cs typeface="Arial" pitchFamily="34" charset="-120"/>
               </a:rPr>
-              <a:t>近くにコンビニやレストランがたくさんあり、交通の便も良く、電車でもアクセスできます</a:t>
+              <a:t>部屋も清潔で快適で、とても気持ちの良い滞在になりました</a:t>
             </a:r>
             <a:endParaRPr lang="en-US" sz="900" dirty="0"/>
           </a:p>
@@ -10819,7 +10819,7 @@
                 <a:ea typeface="Arial" pitchFamily="34" charset="-122"/>
                 <a:cs typeface="Arial" pitchFamily="34" charset="-120"/>
               </a:rPr>
-              <a:t>「近くにはMTR駅や大型ショッピングモールがあり、徒歩約5分で買い物に便利です」</a:t>
+              <a:t>「機能很好 このレストランは清潔で整頓されていて快適です」</a:t>
             </a:r>
             <a:endParaRPr lang="en-US" sz="900" dirty="0"/>
           </a:p>
@@ -10964,7 +10964,7 @@
                 <a:ea typeface="Arial" pitchFamily="34" charset="-122"/>
                 <a:cs typeface="Arial" pitchFamily="34" charset="-120"/>
               </a:rPr>
-              <a:t>快適さ・設備</a:t>
+              <a:t>コンビニ・周辺施設</a:t>
             </a:r>
             <a:endParaRPr lang="en-US" sz="1300" dirty="0"/>
           </a:p>
@@ -11003,7 +11003,7 @@
                 <a:ea typeface="Arial" pitchFamily="34" charset="-122"/>
                 <a:cs typeface="Arial" pitchFamily="34" charset="-120"/>
               </a:rPr>
-              <a:t>ベッドはあまり良くありませんが、全体的には良いホテルです</a:t>
+              <a:t>地下鉄の駅やショッピングエリアにとても近く、買い物や食事、観光に出かける際に時間を大幅に節約できます</a:t>
             </a:r>
             <a:endParaRPr lang="en-US" sz="900" dirty="0"/>
           </a:p>
@@ -11042,7 +11042,7 @@
                 <a:ea typeface="Arial" pitchFamily="34" charset="-122"/>
                 <a:cs typeface="Arial" pitchFamily="34" charset="-120"/>
               </a:rPr>
-              <a:t>「下次會再入住 部屋は全体的に快適で清潔でしたが、枕が柔らかすぎて寝心地が悪かったです」</a:t>
+              <a:t>「周辺は活気があり、飲食店やコンビニエンスストアも数多くあります」</a:t>
             </a:r>
             <a:endParaRPr lang="en-US" sz="900" dirty="0"/>
           </a:p>
@@ -11955,7 +11955,7 @@
                           <a:ea typeface="Arial" pitchFamily="34" charset="-122"/>
                           <a:cs typeface="Arial" pitchFamily="34" charset="-120"/>
                         </a:rPr>
-                        <a:t>Good location and service, facilities in very good condition</a:t>
+                        <a:t>Instalaciones cómodas , zona muy tranquila y relativament...</a:t>
                       </a:r>
                       <a:endParaRPr lang="en-US" sz="900" dirty="0">
                         <a:latin typeface="Arial" charset="0"/>
@@ -12023,7 +12023,7 @@
                           <a:ea typeface="Arial" pitchFamily="34" charset="-122"/>
                           <a:cs typeface="Arial" pitchFamily="34" charset="-120"/>
                         </a:rPr>
-                        <a:t>16件</a:t>
+                        <a:t>17件</a:t>
                       </a:r>
                       <a:endParaRPr lang="en-US" sz="900" dirty="0">
                         <a:latin typeface="Arial" charset="0"/>
@@ -12229,7 +12229,7 @@
                           <a:ea typeface="Arial" pitchFamily="34" charset="-122"/>
                           <a:cs typeface="Arial" pitchFamily="34" charset="-120"/>
                         </a:rPr>
-                        <a:t>ロビーには無料のバスアメニティとコーヒー・紅茶のティーバッグが用意されています</a:t>
+                        <a:t>ホテルのロビーにはフェイスマスクやバスソルトまで用意されていました</a:t>
                       </a:r>
                       <a:endParaRPr lang="en-US" sz="900" dirty="0">
                         <a:latin typeface="Arial" charset="0"/>
@@ -12297,7 +12297,7 @@
                           <a:ea typeface="Arial" pitchFamily="34" charset="-122"/>
                           <a:cs typeface="Arial" pitchFamily="34" charset="-120"/>
                         </a:rPr>
-                        <a:t>13件</a:t>
+                        <a:t>14件</a:t>
                       </a:r>
                       <a:endParaRPr lang="en-US" sz="900" dirty="0">
                         <a:latin typeface="Arial" charset="0"/>

--- a/納品レポート/ホテル別レポート/keisei_kinshicho_口コミ分析レポート.pptx
+++ b/納品レポート/ホテル別レポート/keisei_kinshicho_口コミ分析レポート.pptx
@@ -202,7 +202,7 @@
                 <c:formatCode>General</c:formatCode>
                 <c:ptCount val="4"/>
                 <c:pt idx="0">
-                  <c:v>9.53</c:v>
+                  <c:v>9.52</c:v>
                 </c:pt>
                 <c:pt idx="1">
                   <c:v>9.05</c:v>
@@ -554,7 +554,7 @@
               <c:numCache>
                 <c:ptCount val="3"/>
                 <c:pt idx="0">
-                  <c:v>102</c:v>
+                  <c:v>103</c:v>
                 </c:pt>
                 <c:pt idx="1">
                   <c:v>13</c:v>
@@ -786,7 +786,7 @@
                   <c:v>62</c:v>
                 </c:pt>
                 <c:pt idx="1">
-                  <c:v>22</c:v>
+                  <c:v>23</c:v>
                 </c:pt>
                 <c:pt idx="2">
                   <c:v>18</c:v>
@@ -2752,7 +2752,7 @@
                 <a:ea typeface="Arial" pitchFamily="34" charset="-122"/>
                 <a:cs typeface="Arial" pitchFamily="34" charset="-120"/>
               </a:rPr>
-              <a:t>レビュー総数：116件（4サイト）</a:t>
+              <a:t>レビュー総数：117件（4サイト）</a:t>
             </a:r>
             <a:endParaRPr lang="en-US" sz="1000" dirty="0"/>
           </a:p>
@@ -2772,7 +2772,7 @@
                 <a:ea typeface="Arial" pitchFamily="34" charset="-122"/>
                 <a:cs typeface="Arial" pitchFamily="34" charset="-120"/>
               </a:rPr>
-              <a:t>作成日：2026年3月18日</a:t>
+              <a:t>作成日：2026年3月19日</a:t>
             </a:r>
             <a:endParaRPr lang="en-US" sz="1000" dirty="0"/>
           </a:p>
@@ -3592,7 +3592,7 @@
                           <a:ea typeface="Arial" pitchFamily="34" charset="-122"/>
                           <a:cs typeface="Arial" pitchFamily="34" charset="-120"/>
                         </a:rPr>
-                        <a:t>87.9%</a:t>
+                        <a:t>88.0%</a:t>
                       </a:r>
                       <a:endParaRPr lang="en-US" sz="1000" dirty="0">
                         <a:latin typeface="Arial" charset="0"/>
@@ -5452,7 +5452,7 @@
                 <a:ea typeface="Arial" pitchFamily="34" charset="-122"/>
                 <a:cs typeface="Arial" pitchFamily="34" charset="-120"/>
               </a:rPr>
-              <a:t>87.9%</a:t>
+              <a:t>88.0%</a:t>
             </a:r>
             <a:endParaRPr lang="en-US" sz="3200" dirty="0"/>
           </a:p>
@@ -5702,7 +5702,7 @@
                 <a:ea typeface="Arial" pitchFamily="34" charset="-122"/>
                 <a:cs typeface="Arial" pitchFamily="34" charset="-120"/>
               </a:rPr>
-              <a:t>116件</a:t>
+              <a:t>117件</a:t>
             </a:r>
             <a:endParaRPr lang="en-US" sz="3200" dirty="0"/>
           </a:p>
@@ -5850,7 +5850,7 @@
                 <a:ea typeface="Arial" pitchFamily="34" charset="-122"/>
                 <a:cs typeface="Arial" pitchFamily="34" charset="-120"/>
               </a:rPr>
-              <a:t>  酒店大堂也提供面膜，浴鹽 立地が最高に便利</a:t>
+              <a:t>  立地も良く、何度も利用出来る安心なビジネスホテルです</a:t>
             </a:r>
             <a:endParaRPr lang="en-US" sz="1100" dirty="0"/>
           </a:p>
@@ -6636,7 +6636,7 @@
                 <a:ea typeface="Arial" pitchFamily="34" charset="-122"/>
                 <a:cs typeface="Arial" pitchFamily="34" charset="-120"/>
               </a:rPr>
-              <a:t>87.9%</a:t>
+              <a:t>88.0%</a:t>
             </a:r>
             <a:endParaRPr lang="en-US" sz="3200" dirty="0"/>
           </a:p>
@@ -6886,7 +6886,7 @@
                 <a:ea typeface="Arial" pitchFamily="34" charset="-122"/>
                 <a:cs typeface="Arial" pitchFamily="34" charset="-120"/>
               </a:rPr>
-              <a:t>116件</a:t>
+              <a:t>117件</a:t>
             </a:r>
             <a:endParaRPr lang="en-US" sz="3200" dirty="0"/>
           </a:p>
@@ -7307,7 +7307,7 @@
                 <a:ea typeface="Arial" pitchFamily="34" charset="-122"/>
                 <a:cs typeface="Arial" pitchFamily="34" charset="-120"/>
               </a:rPr>
-              <a:t>Trip.com(9.53)が最高スコア。</a:t>
+              <a:t>Trip.com(9.52)が最高スコア。</a:t>
             </a:r>
             <a:endParaRPr lang="en-US" sz="1100" dirty="0"/>
           </a:p>
@@ -7865,7 +7865,7 @@
                           <a:ea typeface="Arial" pitchFamily="34" charset="-122"/>
                           <a:cs typeface="Arial" pitchFamily="34" charset="-120"/>
                         </a:rPr>
-                        <a:t>43</a:t>
+                        <a:t>44</a:t>
                       </a:r>
                       <a:endParaRPr lang="en-US" sz="900" dirty="0">
                         <a:latin typeface="Arial" charset="0"/>
@@ -7933,7 +7933,7 @@
                           <a:ea typeface="Arial" pitchFamily="34" charset="-122"/>
                           <a:cs typeface="Arial" pitchFamily="34" charset="-120"/>
                         </a:rPr>
-                        <a:t>9.53</a:t>
+                        <a:t>9.52</a:t>
                       </a:r>
                       <a:endParaRPr lang="en-US" sz="900" dirty="0">
                         <a:latin typeface="Arial" charset="0"/>
@@ -8069,7 +8069,7 @@
                           <a:ea typeface="Arial" pitchFamily="34" charset="-122"/>
                           <a:cs typeface="Arial" pitchFamily="34" charset="-120"/>
                         </a:rPr>
-                        <a:t>9.53</a:t>
+                        <a:t>9.52</a:t>
                       </a:r>
                       <a:endParaRPr lang="en-US" sz="900" dirty="0">
                         <a:latin typeface="Arial" charset="0"/>
@@ -9503,7 +9503,7 @@
                 <a:ea typeface="Arial" pitchFamily="34" charset="-122"/>
                 <a:cs typeface="Arial" pitchFamily="34" charset="-120"/>
               </a:rPr>
-              <a:t>102件（87.9%）</a:t>
+              <a:t>103件（88.0%）</a:t>
             </a:r>
             <a:endParaRPr lang="en-US" sz="1100" dirty="0"/>
           </a:p>
@@ -9601,7 +9601,7 @@
                 <a:ea typeface="Arial" pitchFamily="34" charset="-122"/>
                 <a:cs typeface="Arial" pitchFamily="34" charset="-120"/>
               </a:rPr>
-              <a:t>13件（11.2%）</a:t>
+              <a:t>13件（11.1%）</a:t>
             </a:r>
             <a:endParaRPr lang="en-US" sz="1100" dirty="0"/>
           </a:p>
@@ -10111,7 +10111,7 @@
                 <a:ea typeface="Arial" pitchFamily="34" charset="-122"/>
                 <a:cs typeface="Arial" pitchFamily="34" charset="-120"/>
               </a:rPr>
-              <a:t>酒店大堂也提供面膜，浴鹽 立地が最高に便利</a:t>
+              <a:t>立地も良く、何度も利用出来る安心なビジネスホテルです</a:t>
             </a:r>
             <a:endParaRPr lang="en-US" sz="900" dirty="0"/>
           </a:p>
@@ -10150,7 +10150,7 @@
                 <a:ea typeface="Arial" pitchFamily="34" charset="-122"/>
                 <a:cs typeface="Arial" pitchFamily="34" charset="-120"/>
               </a:rPr>
-              <a:t>「駅からもとても近いので、非常に便利です」</a:t>
+              <a:t>「酒店大堂也提供面膜，浴鹽 立地が最高に便利」</a:t>
             </a:r>
             <a:endParaRPr lang="en-US" sz="900" dirty="0"/>
           </a:p>

--- a/納品レポート/ホテル別レポート/keisei_kinshicho_口コミ分析レポート.pptx
+++ b/納品レポート/ホテル別レポート/keisei_kinshicho_口コミ分析レポート.pptx
@@ -208,7 +208,7 @@
                   <c:v>9.05</c:v>
                 </c:pt>
                 <c:pt idx="2">
-                  <c:v>8.63</c:v>
+                  <c:v>8.66</c:v>
                 </c:pt>
                 <c:pt idx="3">
                   <c:v>8</c:v>
@@ -554,7 +554,7 @@
               <c:numCache>
                 <c:ptCount val="3"/>
                 <c:pt idx="0">
-                  <c:v>103</c:v>
+                  <c:v>104</c:v>
                 </c:pt>
                 <c:pt idx="1">
                   <c:v>13</c:v>
@@ -783,7 +783,7 @@
                 <c:formatCode>General</c:formatCode>
                 <c:ptCount val="7"/>
                 <c:pt idx="0">
-                  <c:v>62</c:v>
+                  <c:v>63</c:v>
                 </c:pt>
                 <c:pt idx="1">
                   <c:v>23</c:v>
@@ -2752,7 +2752,7 @@
                 <a:ea typeface="Arial" pitchFamily="34" charset="-122"/>
                 <a:cs typeface="Arial" pitchFamily="34" charset="-120"/>
               </a:rPr>
-              <a:t>レビュー総数：117件（4サイト）</a:t>
+              <a:t>レビュー総数：118件（4サイト）</a:t>
             </a:r>
             <a:endParaRPr lang="en-US" sz="1000" dirty="0"/>
           </a:p>
@@ -2772,7 +2772,7 @@
                 <a:ea typeface="Arial" pitchFamily="34" charset="-122"/>
                 <a:cs typeface="Arial" pitchFamily="34" charset="-120"/>
               </a:rPr>
-              <a:t>作成日：2026年3月19日</a:t>
+              <a:t>作成日：2026年3月20日</a:t>
             </a:r>
             <a:endParaRPr lang="en-US" sz="1000" dirty="0"/>
           </a:p>
@@ -3592,7 +3592,7 @@
                           <a:ea typeface="Arial" pitchFamily="34" charset="-122"/>
                           <a:cs typeface="Arial" pitchFamily="34" charset="-120"/>
                         </a:rPr>
-                        <a:t>88.0%</a:t>
+                        <a:t>88.1%</a:t>
                       </a:r>
                       <a:endParaRPr lang="en-US" sz="1000" dirty="0">
                         <a:latin typeface="Arial" charset="0"/>
@@ -3866,7 +3866,7 @@
                           <a:ea typeface="Arial" pitchFamily="34" charset="-122"/>
                           <a:cs typeface="Arial" pitchFamily="34" charset="-120"/>
                         </a:rPr>
-                        <a:t>0.9%</a:t>
+                        <a:t>0.8%</a:t>
                       </a:r>
                       <a:endParaRPr lang="en-US" sz="1000" dirty="0">
                         <a:latin typeface="Arial" charset="0"/>
@@ -5452,7 +5452,7 @@
                 <a:ea typeface="Arial" pitchFamily="34" charset="-122"/>
                 <a:cs typeface="Arial" pitchFamily="34" charset="-120"/>
               </a:rPr>
-              <a:t>88.0%</a:t>
+              <a:t>88.1%</a:t>
             </a:r>
             <a:endParaRPr lang="en-US" sz="3200" dirty="0"/>
           </a:p>
@@ -5577,7 +5577,7 @@
                 <a:ea typeface="Arial" pitchFamily="34" charset="-122"/>
                 <a:cs typeface="Arial" pitchFamily="34" charset="-120"/>
               </a:rPr>
-              <a:t>0.9%</a:t>
+              <a:t>0.8%</a:t>
             </a:r>
             <a:endParaRPr lang="en-US" sz="3200" dirty="0"/>
           </a:p>
@@ -5702,7 +5702,7 @@
                 <a:ea typeface="Arial" pitchFamily="34" charset="-122"/>
                 <a:cs typeface="Arial" pitchFamily="34" charset="-120"/>
               </a:rPr>
-              <a:t>117件</a:t>
+              <a:t>118件</a:t>
             </a:r>
             <a:endParaRPr lang="en-US" sz="3200" dirty="0"/>
           </a:p>
@@ -6636,7 +6636,7 @@
                 <a:ea typeface="Arial" pitchFamily="34" charset="-122"/>
                 <a:cs typeface="Arial" pitchFamily="34" charset="-120"/>
               </a:rPr>
-              <a:t>88.0%</a:t>
+              <a:t>88.1%</a:t>
             </a:r>
             <a:endParaRPr lang="en-US" sz="3200" dirty="0"/>
           </a:p>
@@ -6761,7 +6761,7 @@
                 <a:ea typeface="Arial" pitchFamily="34" charset="-122"/>
                 <a:cs typeface="Arial" pitchFamily="34" charset="-120"/>
               </a:rPr>
-              <a:t>0.9%</a:t>
+              <a:t>0.8%</a:t>
             </a:r>
             <a:endParaRPr lang="en-US" sz="3200" dirty="0"/>
           </a:p>
@@ -6886,7 +6886,7 @@
                 <a:ea typeface="Arial" pitchFamily="34" charset="-122"/>
                 <a:cs typeface="Arial" pitchFamily="34" charset="-120"/>
               </a:rPr>
-              <a:t>117件</a:t>
+              <a:t>118件</a:t>
             </a:r>
             <a:endParaRPr lang="en-US" sz="3200" dirty="0"/>
           </a:p>
@@ -8549,7 +8549,7 @@
                           <a:ea typeface="Arial" pitchFamily="34" charset="-122"/>
                           <a:cs typeface="Arial" pitchFamily="34" charset="-120"/>
                         </a:rPr>
-                        <a:t>49</a:t>
+                        <a:t>50</a:t>
                       </a:r>
                       <a:endParaRPr lang="en-US" sz="900" dirty="0">
                         <a:latin typeface="Arial" charset="0"/>
@@ -8617,7 +8617,7 @@
                           <a:ea typeface="Arial" pitchFamily="34" charset="-122"/>
                           <a:cs typeface="Arial" pitchFamily="34" charset="-120"/>
                         </a:rPr>
-                        <a:t>8.63</a:t>
+                        <a:t>8.66</a:t>
                       </a:r>
                       <a:endParaRPr lang="en-US" sz="900" dirty="0">
                         <a:latin typeface="Arial" charset="0"/>
@@ -8753,7 +8753,7 @@
                           <a:ea typeface="Arial" pitchFamily="34" charset="-122"/>
                           <a:cs typeface="Arial" pitchFamily="34" charset="-120"/>
                         </a:rPr>
-                        <a:t>8.63</a:t>
+                        <a:t>8.66</a:t>
                       </a:r>
                       <a:endParaRPr lang="en-US" sz="900" dirty="0">
                         <a:latin typeface="Arial" charset="0"/>
@@ -9503,7 +9503,7 @@
                 <a:ea typeface="Arial" pitchFamily="34" charset="-122"/>
                 <a:cs typeface="Arial" pitchFamily="34" charset="-120"/>
               </a:rPr>
-              <a:t>103件（88.0%）</a:t>
+              <a:t>104件（88.1%）</a:t>
             </a:r>
             <a:endParaRPr lang="en-US" sz="1100" dirty="0"/>
           </a:p>
@@ -9601,7 +9601,7 @@
                 <a:ea typeface="Arial" pitchFamily="34" charset="-122"/>
                 <a:cs typeface="Arial" pitchFamily="34" charset="-120"/>
               </a:rPr>
-              <a:t>13件（11.1%）</a:t>
+              <a:t>13件（11.0%）</a:t>
             </a:r>
             <a:endParaRPr lang="en-US" sz="1100" dirty="0"/>
           </a:p>
@@ -9699,7 +9699,7 @@
                 <a:ea typeface="Arial" pitchFamily="34" charset="-122"/>
                 <a:cs typeface="Arial" pitchFamily="34" charset="-120"/>
               </a:rPr>
-              <a:t>1件（0.9%）</a:t>
+              <a:t>1件（0.8%）</a:t>
             </a:r>
             <a:endParaRPr lang="en-US" sz="1100" dirty="0"/>
           </a:p>
@@ -10741,6 +10741,229 @@
                 <a:ea typeface="Arial" pitchFamily="34" charset="-122"/>
                 <a:cs typeface="Arial" pitchFamily="34" charset="-120"/>
               </a:rPr>
+              <a:t>コンビニ・周辺施設</a:t>
+            </a:r>
+            <a:endParaRPr lang="en-US" sz="1300" dirty="0"/>
+          </a:p>
+        </p:txBody>
+      </p:sp>
+      <p:sp>
+        <p:nvSpPr>
+          <p:cNvPr id="31" name="Text 29"/>
+          <p:cNvSpPr/>
+          <p:nvPr/>
+        </p:nvSpPr>
+        <p:spPr>
+          <a:xfrm>
+            <a:off x="594360" y="3246120"/>
+            <a:ext cx="2377440" cy="365760"/>
+          </a:xfrm>
+          <a:prstGeom prst="rect">
+            <a:avLst/>
+          </a:prstGeom>
+          <a:noFill/>
+          <a:ln/>
+        </p:spPr>
+        <p:txBody>
+          <a:bodyPr wrap="square" lIns="0" tIns="0" rIns="0" bIns="0" rtlCol="0" anchor="ctr"/>
+          <a:lstStyle/>
+          <a:p>
+            <a:pPr indent="0" marL="0">
+              <a:buNone/>
+            </a:pPr>
+            <a:r>
+              <a:rPr lang="en-US" sz="900" dirty="0">
+                <a:solidFill>
+                  <a:srgbClr val="64748B"/>
+                </a:solidFill>
+                <a:latin typeface="Arial" pitchFamily="34" charset="0"/>
+                <a:ea typeface="Arial" pitchFamily="34" charset="-122"/>
+                <a:cs typeface="Arial" pitchFamily="34" charset="-120"/>
+              </a:rPr>
+              <a:t>地下鉄の駅やショッピングエリアにとても近く、買い物や食事、観光に出かける際に時間を大幅に節約できます</a:t>
+            </a:r>
+            <a:endParaRPr lang="en-US" sz="900" dirty="0"/>
+          </a:p>
+        </p:txBody>
+      </p:sp>
+      <p:sp>
+        <p:nvSpPr>
+          <p:cNvPr id="32" name="Text 30"/>
+          <p:cNvSpPr/>
+          <p:nvPr/>
+        </p:nvSpPr>
+        <p:spPr>
+          <a:xfrm>
+            <a:off x="594360" y="3657600"/>
+            <a:ext cx="2377440" cy="640080"/>
+          </a:xfrm>
+          <a:prstGeom prst="rect">
+            <a:avLst/>
+          </a:prstGeom>
+          <a:noFill/>
+          <a:ln/>
+        </p:spPr>
+        <p:txBody>
+          <a:bodyPr wrap="square" lIns="0" tIns="0" rIns="0" bIns="0" rtlCol="0" anchor="ctr"/>
+          <a:lstStyle/>
+          <a:p>
+            <a:pPr indent="0" marL="0">
+              <a:buNone/>
+            </a:pPr>
+            <a:r>
+              <a:rPr lang="en-US" sz="900" i="1" dirty="0">
+                <a:solidFill>
+                  <a:srgbClr val="3B7DD8"/>
+                </a:solidFill>
+                <a:latin typeface="Arial" pitchFamily="34" charset="0"/>
+                <a:ea typeface="Arial" pitchFamily="34" charset="-122"/>
+                <a:cs typeface="Arial" pitchFamily="34" charset="-120"/>
+              </a:rPr>
+              <a:t>「周辺は活気があり、飲食店やコンビニエンスストアも数多くあります」</a:t>
+            </a:r>
+            <a:endParaRPr lang="en-US" sz="900" dirty="0"/>
+          </a:p>
+        </p:txBody>
+      </p:sp>
+      <p:sp>
+        <p:nvSpPr>
+          <p:cNvPr id="33" name="Shape 31"/>
+          <p:cNvSpPr/>
+          <p:nvPr/>
+        </p:nvSpPr>
+        <p:spPr>
+          <a:xfrm>
+            <a:off x="3291840" y="2880360"/>
+            <a:ext cx="2651760" cy="1600200"/>
+          </a:xfrm>
+          <a:prstGeom prst="rect">
+            <a:avLst/>
+          </a:prstGeom>
+          <a:solidFill>
+            <a:srgbClr val="FFFFFF"/>
+          </a:solidFill>
+          <a:ln/>
+          <a:effectLst>
+            <a:outerShdw sx="100000" sy="100000" kx="0" ky="0" algn="bl" rotWithShape="0" blurRad="50800" dist="25400" dir="8100000">
+              <a:srgbClr val="000000">
+                <a:alpha val="10000"/>
+              </a:srgbClr>
+            </a:outerShdw>
+          </a:effectLst>
+        </p:spPr>
+      </p:sp>
+      <p:sp>
+        <p:nvSpPr>
+          <p:cNvPr id="34" name="Shape 32"/>
+          <p:cNvSpPr/>
+          <p:nvPr/>
+        </p:nvSpPr>
+        <p:spPr>
+          <a:xfrm>
+            <a:off x="3291840" y="2880360"/>
+            <a:ext cx="54864" cy="1600200"/>
+          </a:xfrm>
+          <a:prstGeom prst="rect">
+            <a:avLst/>
+          </a:prstGeom>
+          <a:solidFill>
+            <a:srgbClr val="16A34A"/>
+          </a:solidFill>
+          <a:ln/>
+        </p:spPr>
+      </p:sp>
+      <p:sp>
+        <p:nvSpPr>
+          <p:cNvPr id="35" name="Shape 33"/>
+          <p:cNvSpPr/>
+          <p:nvPr/>
+        </p:nvSpPr>
+        <p:spPr>
+          <a:xfrm>
+            <a:off x="5120640" y="2953512"/>
+            <a:ext cx="658368" cy="228600"/>
+          </a:xfrm>
+          <a:prstGeom prst="rect">
+            <a:avLst/>
+          </a:prstGeom>
+          <a:solidFill>
+            <a:srgbClr val="DCFCE7"/>
+          </a:solidFill>
+          <a:ln/>
+        </p:spPr>
+      </p:sp>
+      <p:sp>
+        <p:nvSpPr>
+          <p:cNvPr id="36" name="Text 34"/>
+          <p:cNvSpPr/>
+          <p:nvPr/>
+        </p:nvSpPr>
+        <p:spPr>
+          <a:xfrm>
+            <a:off x="5120640" y="2953512"/>
+            <a:ext cx="658368" cy="228600"/>
+          </a:xfrm>
+          <a:prstGeom prst="rect">
+            <a:avLst/>
+          </a:prstGeom>
+          <a:noFill/>
+          <a:ln/>
+        </p:spPr>
+        <p:txBody>
+          <a:bodyPr wrap="square" lIns="0" tIns="0" rIns="0" bIns="0" rtlCol="0" anchor="ctr"/>
+          <a:lstStyle/>
+          <a:p>
+            <a:pPr algn="ctr" indent="0" marL="0">
+              <a:buNone/>
+            </a:pPr>
+            <a:r>
+              <a:rPr lang="en-US" sz="900" b="1" dirty="0">
+                <a:solidFill>
+                  <a:srgbClr val="16A34A"/>
+                </a:solidFill>
+                <a:latin typeface="Arial" pitchFamily="34" charset="0"/>
+                <a:ea typeface="Arial" pitchFamily="34" charset="-122"/>
+                <a:cs typeface="Arial" pitchFamily="34" charset="-120"/>
+              </a:rPr>
+              <a:t>20件+</a:t>
+            </a:r>
+            <a:endParaRPr lang="en-US" sz="900" dirty="0"/>
+          </a:p>
+        </p:txBody>
+      </p:sp>
+      <p:sp>
+        <p:nvSpPr>
+          <p:cNvPr id="37" name="Text 35"/>
+          <p:cNvSpPr/>
+          <p:nvPr/>
+        </p:nvSpPr>
+        <p:spPr>
+          <a:xfrm>
+            <a:off x="3429000" y="2953512"/>
+            <a:ext cx="1645920" cy="274320"/>
+          </a:xfrm>
+          <a:prstGeom prst="rect">
+            <a:avLst/>
+          </a:prstGeom>
+          <a:noFill/>
+          <a:ln/>
+        </p:spPr>
+        <p:txBody>
+          <a:bodyPr wrap="square" lIns="0" tIns="0" rIns="0" bIns="0" rtlCol="0" anchor="ctr"/>
+          <a:lstStyle/>
+          <a:p>
+            <a:pPr indent="0" marL="0">
+              <a:buNone/>
+            </a:pPr>
+            <a:r>
+              <a:rPr lang="en-US" sz="1300" b="1" dirty="0">
+                <a:solidFill>
+                  <a:srgbClr val="1A2744"/>
+                </a:solidFill>
+                <a:latin typeface="Arial" pitchFamily="34" charset="0"/>
+                <a:ea typeface="Arial" pitchFamily="34" charset="-122"/>
+                <a:cs typeface="Arial" pitchFamily="34" charset="-120"/>
+              </a:rPr>
               <a:t>快適さ・設備</a:t>
             </a:r>
             <a:endParaRPr lang="en-US" sz="1300" dirty="0"/>
@@ -10749,13 +10972,13 @@
       </p:sp>
       <p:sp>
         <p:nvSpPr>
-          <p:cNvPr id="31" name="Text 29"/>
-          <p:cNvSpPr/>
-          <p:nvPr/>
-        </p:nvSpPr>
-        <p:spPr>
-          <a:xfrm>
-            <a:off x="594360" y="3246120"/>
+          <p:cNvPr id="38" name="Text 36"/>
+          <p:cNvSpPr/>
+          <p:nvPr/>
+        </p:nvSpPr>
+        <p:spPr>
+          <a:xfrm>
+            <a:off x="3429000" y="3246120"/>
             <a:ext cx="2377440" cy="365760"/>
           </a:xfrm>
           <a:prstGeom prst="rect">
@@ -10788,13 +11011,13 @@
       </p:sp>
       <p:sp>
         <p:nvSpPr>
-          <p:cNvPr id="32" name="Text 30"/>
-          <p:cNvSpPr/>
-          <p:nvPr/>
-        </p:nvSpPr>
-        <p:spPr>
-          <a:xfrm>
-            <a:off x="594360" y="3657600"/>
+          <p:cNvPr id="39" name="Text 37"/>
+          <p:cNvSpPr/>
+          <p:nvPr/>
+        </p:nvSpPr>
+        <p:spPr>
+          <a:xfrm>
+            <a:off x="3429000" y="3657600"/>
             <a:ext cx="2377440" cy="640080"/>
           </a:xfrm>
           <a:prstGeom prst="rect">
@@ -10820,229 +11043,6 @@
                 <a:cs typeface="Arial" pitchFamily="34" charset="-120"/>
               </a:rPr>
               <a:t>「機能很好 このレストランは清潔で整頓されていて快適です」</a:t>
-            </a:r>
-            <a:endParaRPr lang="en-US" sz="900" dirty="0"/>
-          </a:p>
-        </p:txBody>
-      </p:sp>
-      <p:sp>
-        <p:nvSpPr>
-          <p:cNvPr id="33" name="Shape 31"/>
-          <p:cNvSpPr/>
-          <p:nvPr/>
-        </p:nvSpPr>
-        <p:spPr>
-          <a:xfrm>
-            <a:off x="3291840" y="2880360"/>
-            <a:ext cx="2651760" cy="1600200"/>
-          </a:xfrm>
-          <a:prstGeom prst="rect">
-            <a:avLst/>
-          </a:prstGeom>
-          <a:solidFill>
-            <a:srgbClr val="FFFFFF"/>
-          </a:solidFill>
-          <a:ln/>
-          <a:effectLst>
-            <a:outerShdw sx="100000" sy="100000" kx="0" ky="0" algn="bl" rotWithShape="0" blurRad="50800" dist="25400" dir="8100000">
-              <a:srgbClr val="000000">
-                <a:alpha val="10000"/>
-              </a:srgbClr>
-            </a:outerShdw>
-          </a:effectLst>
-        </p:spPr>
-      </p:sp>
-      <p:sp>
-        <p:nvSpPr>
-          <p:cNvPr id="34" name="Shape 32"/>
-          <p:cNvSpPr/>
-          <p:nvPr/>
-        </p:nvSpPr>
-        <p:spPr>
-          <a:xfrm>
-            <a:off x="3291840" y="2880360"/>
-            <a:ext cx="54864" cy="1600200"/>
-          </a:xfrm>
-          <a:prstGeom prst="rect">
-            <a:avLst/>
-          </a:prstGeom>
-          <a:solidFill>
-            <a:srgbClr val="16A34A"/>
-          </a:solidFill>
-          <a:ln/>
-        </p:spPr>
-      </p:sp>
-      <p:sp>
-        <p:nvSpPr>
-          <p:cNvPr id="35" name="Shape 33"/>
-          <p:cNvSpPr/>
-          <p:nvPr/>
-        </p:nvSpPr>
-        <p:spPr>
-          <a:xfrm>
-            <a:off x="5120640" y="2953512"/>
-            <a:ext cx="658368" cy="228600"/>
-          </a:xfrm>
-          <a:prstGeom prst="rect">
-            <a:avLst/>
-          </a:prstGeom>
-          <a:solidFill>
-            <a:srgbClr val="DCFCE7"/>
-          </a:solidFill>
-          <a:ln/>
-        </p:spPr>
-      </p:sp>
-      <p:sp>
-        <p:nvSpPr>
-          <p:cNvPr id="36" name="Text 34"/>
-          <p:cNvSpPr/>
-          <p:nvPr/>
-        </p:nvSpPr>
-        <p:spPr>
-          <a:xfrm>
-            <a:off x="5120640" y="2953512"/>
-            <a:ext cx="658368" cy="228600"/>
-          </a:xfrm>
-          <a:prstGeom prst="rect">
-            <a:avLst/>
-          </a:prstGeom>
-          <a:noFill/>
-          <a:ln/>
-        </p:spPr>
-        <p:txBody>
-          <a:bodyPr wrap="square" lIns="0" tIns="0" rIns="0" bIns="0" rtlCol="0" anchor="ctr"/>
-          <a:lstStyle/>
-          <a:p>
-            <a:pPr algn="ctr" indent="0" marL="0">
-              <a:buNone/>
-            </a:pPr>
-            <a:r>
-              <a:rPr lang="en-US" sz="900" b="1" dirty="0">
-                <a:solidFill>
-                  <a:srgbClr val="16A34A"/>
-                </a:solidFill>
-                <a:latin typeface="Arial" pitchFamily="34" charset="0"/>
-                <a:ea typeface="Arial" pitchFamily="34" charset="-122"/>
-                <a:cs typeface="Arial" pitchFamily="34" charset="-120"/>
-              </a:rPr>
-              <a:t>20件+</a:t>
-            </a:r>
-            <a:endParaRPr lang="en-US" sz="900" dirty="0"/>
-          </a:p>
-        </p:txBody>
-      </p:sp>
-      <p:sp>
-        <p:nvSpPr>
-          <p:cNvPr id="37" name="Text 35"/>
-          <p:cNvSpPr/>
-          <p:nvPr/>
-        </p:nvSpPr>
-        <p:spPr>
-          <a:xfrm>
-            <a:off x="3429000" y="2953512"/>
-            <a:ext cx="1645920" cy="274320"/>
-          </a:xfrm>
-          <a:prstGeom prst="rect">
-            <a:avLst/>
-          </a:prstGeom>
-          <a:noFill/>
-          <a:ln/>
-        </p:spPr>
-        <p:txBody>
-          <a:bodyPr wrap="square" lIns="0" tIns="0" rIns="0" bIns="0" rtlCol="0" anchor="ctr"/>
-          <a:lstStyle/>
-          <a:p>
-            <a:pPr indent="0" marL="0">
-              <a:buNone/>
-            </a:pPr>
-            <a:r>
-              <a:rPr lang="en-US" sz="1300" b="1" dirty="0">
-                <a:solidFill>
-                  <a:srgbClr val="1A2744"/>
-                </a:solidFill>
-                <a:latin typeface="Arial" pitchFamily="34" charset="0"/>
-                <a:ea typeface="Arial" pitchFamily="34" charset="-122"/>
-                <a:cs typeface="Arial" pitchFamily="34" charset="-120"/>
-              </a:rPr>
-              <a:t>コンビニ・周辺施設</a:t>
-            </a:r>
-            <a:endParaRPr lang="en-US" sz="1300" dirty="0"/>
-          </a:p>
-        </p:txBody>
-      </p:sp>
-      <p:sp>
-        <p:nvSpPr>
-          <p:cNvPr id="38" name="Text 36"/>
-          <p:cNvSpPr/>
-          <p:nvPr/>
-        </p:nvSpPr>
-        <p:spPr>
-          <a:xfrm>
-            <a:off x="3429000" y="3246120"/>
-            <a:ext cx="2377440" cy="365760"/>
-          </a:xfrm>
-          <a:prstGeom prst="rect">
-            <a:avLst/>
-          </a:prstGeom>
-          <a:noFill/>
-          <a:ln/>
-        </p:spPr>
-        <p:txBody>
-          <a:bodyPr wrap="square" lIns="0" tIns="0" rIns="0" bIns="0" rtlCol="0" anchor="ctr"/>
-          <a:lstStyle/>
-          <a:p>
-            <a:pPr indent="0" marL="0">
-              <a:buNone/>
-            </a:pPr>
-            <a:r>
-              <a:rPr lang="en-US" sz="900" dirty="0">
-                <a:solidFill>
-                  <a:srgbClr val="64748B"/>
-                </a:solidFill>
-                <a:latin typeface="Arial" pitchFamily="34" charset="0"/>
-                <a:ea typeface="Arial" pitchFamily="34" charset="-122"/>
-                <a:cs typeface="Arial" pitchFamily="34" charset="-120"/>
-              </a:rPr>
-              <a:t>地下鉄の駅やショッピングエリアにとても近く、買い物や食事、観光に出かける際に時間を大幅に節約できます</a:t>
-            </a:r>
-            <a:endParaRPr lang="en-US" sz="900" dirty="0"/>
-          </a:p>
-        </p:txBody>
-      </p:sp>
-      <p:sp>
-        <p:nvSpPr>
-          <p:cNvPr id="39" name="Text 37"/>
-          <p:cNvSpPr/>
-          <p:nvPr/>
-        </p:nvSpPr>
-        <p:spPr>
-          <a:xfrm>
-            <a:off x="3429000" y="3657600"/>
-            <a:ext cx="2377440" cy="640080"/>
-          </a:xfrm>
-          <a:prstGeom prst="rect">
-            <a:avLst/>
-          </a:prstGeom>
-          <a:noFill/>
-          <a:ln/>
-        </p:spPr>
-        <p:txBody>
-          <a:bodyPr wrap="square" lIns="0" tIns="0" rIns="0" bIns="0" rtlCol="0" anchor="ctr"/>
-          <a:lstStyle/>
-          <a:p>
-            <a:pPr indent="0" marL="0">
-              <a:buNone/>
-            </a:pPr>
-            <a:r>
-              <a:rPr lang="en-US" sz="900" i="1" dirty="0">
-                <a:solidFill>
-                  <a:srgbClr val="3B7DD8"/>
-                </a:solidFill>
-                <a:latin typeface="Arial" pitchFamily="34" charset="0"/>
-                <a:ea typeface="Arial" pitchFamily="34" charset="-122"/>
-                <a:cs typeface="Arial" pitchFamily="34" charset="-120"/>
-              </a:rPr>
-              <a:t>「周辺は活気があり、飲食店やコンビニエンスストアも数多くあります」</a:t>
             </a:r>
             <a:endParaRPr lang="en-US" sz="900" dirty="0"/>
           </a:p>

--- a/納品レポート/ホテル別レポート/keisei_kinshicho_口コミ分析レポート.pptx
+++ b/納品レポート/ホテル別レポート/keisei_kinshicho_口コミ分析レポート.pptx
@@ -202,10 +202,10 @@
                 <c:formatCode>General</c:formatCode>
                 <c:ptCount val="4"/>
                 <c:pt idx="0">
-                  <c:v>9.52</c:v>
+                  <c:v>9.55</c:v>
                 </c:pt>
                 <c:pt idx="1">
-                  <c:v>9.05</c:v>
+                  <c:v>9</c:v>
                 </c:pt>
                 <c:pt idx="2">
                   <c:v>8.66</c:v>
@@ -554,7 +554,7 @@
               <c:numCache>
                 <c:ptCount val="3"/>
                 <c:pt idx="0">
-                  <c:v>104</c:v>
+                  <c:v>108</c:v>
                 </c:pt>
                 <c:pt idx="1">
                   <c:v>13</c:v>
@@ -783,13 +783,13 @@
                 <c:formatCode>General</c:formatCode>
                 <c:ptCount val="7"/>
                 <c:pt idx="0">
-                  <c:v>63</c:v>
+                  <c:v>66</c:v>
                 </c:pt>
                 <c:pt idx="1">
                   <c:v>23</c:v>
                 </c:pt>
                 <c:pt idx="2">
-                  <c:v>18</c:v>
+                  <c:v>19</c:v>
                 </c:pt>
                 <c:pt idx="3">
                   <c:v>5</c:v>
@@ -2752,7 +2752,7 @@
                 <a:ea typeface="Arial" pitchFamily="34" charset="-122"/>
                 <a:cs typeface="Arial" pitchFamily="34" charset="-120"/>
               </a:rPr>
-              <a:t>レビュー総数：118件（4サイト）</a:t>
+              <a:t>レビュー総数：122件（4サイト）</a:t>
             </a:r>
             <a:endParaRPr lang="en-US" sz="1000" dirty="0"/>
           </a:p>
@@ -2772,7 +2772,7 @@
                 <a:ea typeface="Arial" pitchFamily="34" charset="-122"/>
                 <a:cs typeface="Arial" pitchFamily="34" charset="-120"/>
               </a:rPr>
-              <a:t>作成日：2026年3月20日</a:t>
+              <a:t>作成日：2026年3月21日</a:t>
             </a:r>
             <a:endParaRPr lang="en-US" sz="1000" dirty="0"/>
           </a:p>
@@ -3318,7 +3318,7 @@
                           <a:ea typeface="Arial" pitchFamily="34" charset="-122"/>
                           <a:cs typeface="Arial" pitchFamily="34" charset="-120"/>
                         </a:rPr>
-                        <a:t>9.03点</a:t>
+                        <a:t>9.05点</a:t>
                       </a:r>
                       <a:endParaRPr lang="en-US" sz="1000" dirty="0">
                         <a:latin typeface="Arial" charset="0"/>
@@ -3386,7 +3386,7 @@
                           <a:ea typeface="Arial" pitchFamily="34" charset="-122"/>
                           <a:cs typeface="Arial" pitchFamily="34" charset="-120"/>
                         </a:rPr>
-                        <a:t>9.2点以上</a:t>
+                        <a:t>9.3点以上</a:t>
                       </a:r>
                       <a:endParaRPr lang="en-US" sz="1000" dirty="0">
                         <a:latin typeface="Arial" charset="0"/>
@@ -3592,7 +3592,7 @@
                           <a:ea typeface="Arial" pitchFamily="34" charset="-122"/>
                           <a:cs typeface="Arial" pitchFamily="34" charset="-120"/>
                         </a:rPr>
-                        <a:t>88.1%</a:t>
+                        <a:t>88.5%</a:t>
                       </a:r>
                       <a:endParaRPr lang="en-US" sz="1000" dirty="0">
                         <a:latin typeface="Arial" charset="0"/>
@@ -3660,7 +3660,7 @@
                           <a:ea typeface="Arial" pitchFamily="34" charset="-122"/>
                           <a:cs typeface="Arial" pitchFamily="34" charset="-120"/>
                         </a:rPr>
-                        <a:t>93%以上</a:t>
+                        <a:t>94%以上</a:t>
                       </a:r>
                       <a:endParaRPr lang="en-US" sz="1000" dirty="0">
                         <a:latin typeface="Arial" charset="0"/>
@@ -5327,7 +5327,7 @@
                 <a:ea typeface="Arial" pitchFamily="34" charset="-122"/>
                 <a:cs typeface="Arial" pitchFamily="34" charset="-120"/>
               </a:rPr>
-              <a:t>9.03</a:t>
+              <a:t>9.05</a:t>
             </a:r>
             <a:endParaRPr lang="en-US" sz="3200" dirty="0"/>
           </a:p>
@@ -5452,7 +5452,7 @@
                 <a:ea typeface="Arial" pitchFamily="34" charset="-122"/>
                 <a:cs typeface="Arial" pitchFamily="34" charset="-120"/>
               </a:rPr>
-              <a:t>88.1%</a:t>
+              <a:t>88.5%</a:t>
             </a:r>
             <a:endParaRPr lang="en-US" sz="3200" dirty="0"/>
           </a:p>
@@ -5702,7 +5702,7 @@
                 <a:ea typeface="Arial" pitchFamily="34" charset="-122"/>
                 <a:cs typeface="Arial" pitchFamily="34" charset="-120"/>
               </a:rPr>
-              <a:t>118件</a:t>
+              <a:t>122件</a:t>
             </a:r>
             <a:endParaRPr lang="en-US" sz="3200" dirty="0"/>
           </a:p>
@@ -5850,7 +5850,7 @@
                 <a:ea typeface="Arial" pitchFamily="34" charset="-122"/>
                 <a:cs typeface="Arial" pitchFamily="34" charset="-120"/>
               </a:rPr>
-              <a:t>  立地も良く、何度も利用出来る安心なビジネスホテルです</a:t>
+              <a:t>  Highly recommended 4人家族に最適な立地と部屋の広さ</a:t>
             </a:r>
             <a:endParaRPr lang="en-US" sz="1100" dirty="0"/>
           </a:p>
@@ -5930,7 +5930,7 @@
                 <a:ea typeface="Arial" pitchFamily="34" charset="-122"/>
                 <a:cs typeface="Arial" pitchFamily="34" charset="-120"/>
               </a:rPr>
-              <a:t>  部屋も清潔で快適で、とても気持ちの良い滞在になりました</a:t>
+              <a:t>  房間大 乾淨 有乾濕分離 部屋は広くて清潔で、濡れた場所と乾いた場所が分かれている</a:t>
             </a:r>
             <a:endParaRPr lang="en-US" sz="1100" dirty="0"/>
           </a:p>
@@ -6511,7 +6511,7 @@
                 <a:ea typeface="Arial" pitchFamily="34" charset="-122"/>
                 <a:cs typeface="Arial" pitchFamily="34" charset="-120"/>
               </a:rPr>
-              <a:t>9.03</a:t>
+              <a:t>9.05</a:t>
             </a:r>
             <a:endParaRPr lang="en-US" sz="3200" dirty="0"/>
           </a:p>
@@ -6636,7 +6636,7 @@
                 <a:ea typeface="Arial" pitchFamily="34" charset="-122"/>
                 <a:cs typeface="Arial" pitchFamily="34" charset="-120"/>
               </a:rPr>
-              <a:t>88.1%</a:t>
+              <a:t>88.5%</a:t>
             </a:r>
             <a:endParaRPr lang="en-US" sz="3200" dirty="0"/>
           </a:p>
@@ -6886,7 +6886,7 @@
                 <a:ea typeface="Arial" pitchFamily="34" charset="-122"/>
                 <a:cs typeface="Arial" pitchFamily="34" charset="-120"/>
               </a:rPr>
-              <a:t>118件</a:t>
+              <a:t>122件</a:t>
             </a:r>
             <a:endParaRPr lang="en-US" sz="3200" dirty="0"/>
           </a:p>
@@ -7307,7 +7307,7 @@
                 <a:ea typeface="Arial" pitchFamily="34" charset="-122"/>
                 <a:cs typeface="Arial" pitchFamily="34" charset="-120"/>
               </a:rPr>
-              <a:t>Trip.com(9.52)が最高スコア。</a:t>
+              <a:t>Trip.com(9.55)が最高スコア。</a:t>
             </a:r>
             <a:endParaRPr lang="en-US" sz="1100" dirty="0"/>
           </a:p>
@@ -7865,7 +7865,7 @@
                           <a:ea typeface="Arial" pitchFamily="34" charset="-122"/>
                           <a:cs typeface="Arial" pitchFamily="34" charset="-120"/>
                         </a:rPr>
-                        <a:t>44</a:t>
+                        <a:t>47</a:t>
                       </a:r>
                       <a:endParaRPr lang="en-US" sz="900" dirty="0">
                         <a:latin typeface="Arial" charset="0"/>
@@ -7933,7 +7933,7 @@
                           <a:ea typeface="Arial" pitchFamily="34" charset="-122"/>
                           <a:cs typeface="Arial" pitchFamily="34" charset="-120"/>
                         </a:rPr>
-                        <a:t>9.52</a:t>
+                        <a:t>9.55</a:t>
                       </a:r>
                       <a:endParaRPr lang="en-US" sz="900" dirty="0">
                         <a:latin typeface="Arial" charset="0"/>
@@ -8069,7 +8069,7 @@
                           <a:ea typeface="Arial" pitchFamily="34" charset="-122"/>
                           <a:cs typeface="Arial" pitchFamily="34" charset="-120"/>
                         </a:rPr>
-                        <a:t>9.52</a:t>
+                        <a:t>9.55</a:t>
                       </a:r>
                       <a:endParaRPr lang="en-US" sz="900" dirty="0">
                         <a:latin typeface="Arial" charset="0"/>
@@ -8207,7 +8207,7 @@
                           <a:ea typeface="Arial" pitchFamily="34" charset="-122"/>
                           <a:cs typeface="Arial" pitchFamily="34" charset="-120"/>
                         </a:rPr>
-                        <a:t>21</a:t>
+                        <a:t>22</a:t>
                       </a:r>
                       <a:endParaRPr lang="en-US" sz="900" dirty="0">
                         <a:latin typeface="Arial" charset="0"/>
@@ -8275,7 +8275,7 @@
                           <a:ea typeface="Arial" pitchFamily="34" charset="-122"/>
                           <a:cs typeface="Arial" pitchFamily="34" charset="-120"/>
                         </a:rPr>
-                        <a:t>4.52</a:t>
+                        <a:t>4.5</a:t>
                       </a:r>
                       <a:endParaRPr lang="en-US" sz="900" dirty="0">
                         <a:latin typeface="Arial" charset="0"/>
@@ -8411,7 +8411,7 @@
                           <a:ea typeface="Arial" pitchFamily="34" charset="-122"/>
                           <a:cs typeface="Arial" pitchFamily="34" charset="-120"/>
                         </a:rPr>
-                        <a:t>9.05</a:t>
+                        <a:t>9</a:t>
                       </a:r>
                       <a:endParaRPr lang="en-US" sz="900" dirty="0">
                         <a:latin typeface="Arial" charset="0"/>
@@ -9503,7 +9503,7 @@
                 <a:ea typeface="Arial" pitchFamily="34" charset="-122"/>
                 <a:cs typeface="Arial" pitchFamily="34" charset="-120"/>
               </a:rPr>
-              <a:t>104件（88.1%）</a:t>
+              <a:t>108件（88.5%）</a:t>
             </a:r>
             <a:endParaRPr lang="en-US" sz="1100" dirty="0"/>
           </a:p>
@@ -9601,7 +9601,7 @@
                 <a:ea typeface="Arial" pitchFamily="34" charset="-122"/>
                 <a:cs typeface="Arial" pitchFamily="34" charset="-120"/>
               </a:rPr>
-              <a:t>13件（11.0%）</a:t>
+              <a:t>13件（10.7%）</a:t>
             </a:r>
             <a:endParaRPr lang="en-US" sz="1100" dirty="0"/>
           </a:p>
@@ -10111,7 +10111,7 @@
                 <a:ea typeface="Arial" pitchFamily="34" charset="-122"/>
                 <a:cs typeface="Arial" pitchFamily="34" charset="-120"/>
               </a:rPr>
-              <a:t>立地も良く、何度も利用出来る安心なビジネスホテルです</a:t>
+              <a:t>Highly recommended 4人家族に最適な立地と部屋の広さ</a:t>
             </a:r>
             <a:endParaRPr lang="en-US" sz="900" dirty="0"/>
           </a:p>
@@ -10150,7 +10150,7 @@
                 <a:ea typeface="Arial" pitchFamily="34" charset="-122"/>
                 <a:cs typeface="Arial" pitchFamily="34" charset="-120"/>
               </a:rPr>
-              <a:t>「酒店大堂也提供面膜，浴鹽 立地が最高に便利」</a:t>
+              <a:t>「内装は新しく、交通の便も良く、地下鉄駅から歩いてすぐですが、それほど遠くはありません」</a:t>
             </a:r>
             <a:endParaRPr lang="en-US" sz="900" dirty="0"/>
           </a:p>
@@ -10557,7 +10557,7 @@
                 <a:ea typeface="Arial" pitchFamily="34" charset="-122"/>
                 <a:cs typeface="Arial" pitchFamily="34" charset="-120"/>
               </a:rPr>
-              <a:t>部屋も清潔で快適で、とても気持ちの良い滞在になりました</a:t>
+              <a:t>房間大 乾淨 有乾濕分離 部屋は広くて清潔で、濡れた場所と乾いた場所が分かれている</a:t>
             </a:r>
             <a:endParaRPr lang="en-US" sz="900" dirty="0"/>
           </a:p>
@@ -10596,7 +10596,7 @@
                 <a:ea typeface="Arial" pitchFamily="34" charset="-122"/>
                 <a:cs typeface="Arial" pitchFamily="34" charset="-120"/>
               </a:rPr>
-              <a:t>「キレイなホテルでした 特にありません」</a:t>
+              <a:t>「部屋も清潔で快適で、とても気持ちの良い滞在になりました」</a:t>
             </a:r>
             <a:endParaRPr lang="en-US" sz="900" dirty="0"/>
           </a:p>

--- a/納品レポート/ホテル別レポート/keisei_kinshicho_口コミ分析レポート.pptx
+++ b/納品レポート/ホテル別レポート/keisei_kinshicho_口コミ分析レポート.pptx
@@ -202,13 +202,13 @@
                 <c:formatCode>General</c:formatCode>
                 <c:ptCount val="4"/>
                 <c:pt idx="0">
-                  <c:v>9.55</c:v>
+                  <c:v>9.52</c:v>
                 </c:pt>
                 <c:pt idx="1">
-                  <c:v>9</c:v>
+                  <c:v>8.95</c:v>
                 </c:pt>
                 <c:pt idx="2">
-                  <c:v>8.66</c:v>
+                  <c:v>8.69</c:v>
                 </c:pt>
                 <c:pt idx="3">
                   <c:v>8</c:v>
@@ -554,7 +554,7 @@
               <c:numCache>
                 <c:ptCount val="3"/>
                 <c:pt idx="0">
-                  <c:v>108</c:v>
+                  <c:v>113</c:v>
                 </c:pt>
                 <c:pt idx="1">
                   <c:v>13</c:v>
@@ -783,13 +783,13 @@
                 <c:formatCode>General</c:formatCode>
                 <c:ptCount val="7"/>
                 <c:pt idx="0">
-                  <c:v>66</c:v>
+                  <c:v>68</c:v>
                 </c:pt>
                 <c:pt idx="1">
-                  <c:v>23</c:v>
+                  <c:v>25</c:v>
                 </c:pt>
                 <c:pt idx="2">
-                  <c:v>19</c:v>
+                  <c:v>20</c:v>
                 </c:pt>
                 <c:pt idx="3">
                   <c:v>5</c:v>
@@ -2752,7 +2752,7 @@
                 <a:ea typeface="Arial" pitchFamily="34" charset="-122"/>
                 <a:cs typeface="Arial" pitchFamily="34" charset="-120"/>
               </a:rPr>
-              <a:t>レビュー総数：122件（4サイト）</a:t>
+              <a:t>レビュー総数：127件（4サイト）</a:t>
             </a:r>
             <a:endParaRPr lang="en-US" sz="1000" dirty="0"/>
           </a:p>
@@ -2772,7 +2772,7 @@
                 <a:ea typeface="Arial" pitchFamily="34" charset="-122"/>
                 <a:cs typeface="Arial" pitchFamily="34" charset="-120"/>
               </a:rPr>
-              <a:t>作成日：2026年3月21日</a:t>
+              <a:t>作成日：2026年3月23日</a:t>
             </a:r>
             <a:endParaRPr lang="en-US" sz="1000" dirty="0"/>
           </a:p>
@@ -3318,7 +3318,7 @@
                           <a:ea typeface="Arial" pitchFamily="34" charset="-122"/>
                           <a:cs typeface="Arial" pitchFamily="34" charset="-120"/>
                         </a:rPr>
-                        <a:t>9.05点</a:t>
+                        <a:t>9.06点</a:t>
                       </a:r>
                       <a:endParaRPr lang="en-US" sz="1000" dirty="0">
                         <a:latin typeface="Arial" charset="0"/>
@@ -3592,7 +3592,7 @@
                           <a:ea typeface="Arial" pitchFamily="34" charset="-122"/>
                           <a:cs typeface="Arial" pitchFamily="34" charset="-120"/>
                         </a:rPr>
-                        <a:t>88.5%</a:t>
+                        <a:t>89.0%</a:t>
                       </a:r>
                       <a:endParaRPr lang="en-US" sz="1000" dirty="0">
                         <a:latin typeface="Arial" charset="0"/>
@@ -4688,7 +4688,7 @@
                           <a:ea typeface="Arial" pitchFamily="34" charset="-122"/>
                           <a:cs typeface="Arial" pitchFamily="34" charset="-120"/>
                         </a:rPr>
-                        <a:t>約17件/期間</a:t>
+                        <a:t>約18件/期間</a:t>
                       </a:r>
                       <a:endParaRPr lang="en-US" sz="1000" dirty="0">
                         <a:latin typeface="Arial" charset="0"/>
@@ -4756,7 +4756,7 @@
                           <a:ea typeface="Arial" pitchFamily="34" charset="-122"/>
                           <a:cs typeface="Arial" pitchFamily="34" charset="-120"/>
                         </a:rPr>
-                        <a:t>8件以下</a:t>
+                        <a:t>9件以下</a:t>
                       </a:r>
                       <a:endParaRPr lang="en-US" sz="1000" dirty="0">
                         <a:latin typeface="Arial" charset="0"/>
@@ -5327,7 +5327,7 @@
                 <a:ea typeface="Arial" pitchFamily="34" charset="-122"/>
                 <a:cs typeface="Arial" pitchFamily="34" charset="-120"/>
               </a:rPr>
-              <a:t>9.05</a:t>
+              <a:t>9.06</a:t>
             </a:r>
             <a:endParaRPr lang="en-US" sz="3200" dirty="0"/>
           </a:p>
@@ -5452,7 +5452,7 @@
                 <a:ea typeface="Arial" pitchFamily="34" charset="-122"/>
                 <a:cs typeface="Arial" pitchFamily="34" charset="-120"/>
               </a:rPr>
-              <a:t>88.5%</a:t>
+              <a:t>89.0%</a:t>
             </a:r>
             <a:endParaRPr lang="en-US" sz="3200" dirty="0"/>
           </a:p>
@@ -5702,7 +5702,7 @@
                 <a:ea typeface="Arial" pitchFamily="34" charset="-122"/>
                 <a:cs typeface="Arial" pitchFamily="34" charset="-120"/>
               </a:rPr>
-              <a:t>122件</a:t>
+              <a:t>127件</a:t>
             </a:r>
             <a:endParaRPr lang="en-US" sz="3200" dirty="0"/>
           </a:p>
@@ -5850,7 +5850,7 @@
                 <a:ea typeface="Arial" pitchFamily="34" charset="-122"/>
                 <a:cs typeface="Arial" pitchFamily="34" charset="-120"/>
               </a:rPr>
-              <a:t>  Highly recommended 4人家族に最適な立地と部屋の広さ</a:t>
+              <a:t>  このエリアは比較的混雑しておらず、近くにはパルコやテルミナなどのショッピングモールがいくつかあるので、食事や基本的...</a:t>
             </a:r>
             <a:endParaRPr lang="en-US" sz="1100" dirty="0"/>
           </a:p>
@@ -5890,7 +5890,7 @@
                 <a:ea typeface="Arial" pitchFamily="34" charset="-122"/>
                 <a:cs typeface="Arial" pitchFamily="34" charset="-120"/>
               </a:rPr>
-              <a:t>  いつも使うので、特別な価格サービスをお願いできればありがたいです</a:t>
+              <a:t>  As foreigners, it was very scary to come and try to commu...</a:t>
             </a:r>
             <a:endParaRPr lang="en-US" sz="1100" dirty="0"/>
           </a:p>
@@ -6078,7 +6078,7 @@
                 <a:ea typeface="Arial" pitchFamily="34" charset="-122"/>
                 <a:cs typeface="Arial" pitchFamily="34" charset="-120"/>
               </a:rPr>
-              <a:t>  Instalaciones cómodas , zona muy tranquila y relativament...</a:t>
+              <a:t>  This area is less crowded, with a couple of malls nearby ...</a:t>
             </a:r>
             <a:endParaRPr lang="en-US" sz="1100" dirty="0"/>
           </a:p>
@@ -6118,7 +6118,7 @@
                 <a:ea typeface="Arial" pitchFamily="34" charset="-122"/>
                 <a:cs typeface="Arial" pitchFamily="34" charset="-120"/>
               </a:rPr>
-              <a:t>  ホテルのロビーにはフェイスマスクやバスソルトまで用意されていました</a:t>
+              <a:t>  部屋とバスルームが通常よりも広々としているのがとても気に入りました</a:t>
             </a:r>
             <a:endParaRPr lang="en-US" sz="1100" dirty="0"/>
           </a:p>
@@ -6138,7 +6138,7 @@
                 <a:ea typeface="Arial" pitchFamily="34" charset="-122"/>
                 <a:cs typeface="Arial" pitchFamily="34" charset="-120"/>
               </a:rPr>
-              <a:t>対応・サービスの不満 </a:t>
+              <a:t>部屋の狭さ </a:t>
             </a:r>
             <a:endParaRPr lang="en-US" sz="1100" dirty="0"/>
           </a:p>
@@ -6158,7 +6158,7 @@
                 <a:ea typeface="Arial" pitchFamily="34" charset="-122"/>
                 <a:cs typeface="Arial" pitchFamily="34" charset="-120"/>
               </a:rPr>
-              <a:t>  櫃檯人員辦理入住手續很快速，服務態度非常親切有禮</a:t>
+              <a:t>  部屋は小さいですが、必要なものはすべて揃っています</a:t>
             </a:r>
             <a:endParaRPr lang="en-US" sz="1100" dirty="0"/>
           </a:p>
@@ -6511,7 +6511,7 @@
                 <a:ea typeface="Arial" pitchFamily="34" charset="-122"/>
                 <a:cs typeface="Arial" pitchFamily="34" charset="-120"/>
               </a:rPr>
-              <a:t>9.05</a:t>
+              <a:t>9.06</a:t>
             </a:r>
             <a:endParaRPr lang="en-US" sz="3200" dirty="0"/>
           </a:p>
@@ -6636,7 +6636,7 @@
                 <a:ea typeface="Arial" pitchFamily="34" charset="-122"/>
                 <a:cs typeface="Arial" pitchFamily="34" charset="-120"/>
               </a:rPr>
-              <a:t>88.5%</a:t>
+              <a:t>89.0%</a:t>
             </a:r>
             <a:endParaRPr lang="en-US" sz="3200" dirty="0"/>
           </a:p>
@@ -6886,7 +6886,7 @@
                 <a:ea typeface="Arial" pitchFamily="34" charset="-122"/>
                 <a:cs typeface="Arial" pitchFamily="34" charset="-120"/>
               </a:rPr>
-              <a:t>122件</a:t>
+              <a:t>127件</a:t>
             </a:r>
             <a:endParaRPr lang="en-US" sz="3200" dirty="0"/>
           </a:p>
@@ -7307,7 +7307,7 @@
                 <a:ea typeface="Arial" pitchFamily="34" charset="-122"/>
                 <a:cs typeface="Arial" pitchFamily="34" charset="-120"/>
               </a:rPr>
-              <a:t>Trip.com(9.55)が最高スコア。</a:t>
+              <a:t>Trip.com(9.52)が最高スコア。</a:t>
             </a:r>
             <a:endParaRPr lang="en-US" sz="1100" dirty="0"/>
           </a:p>
@@ -7865,7 +7865,7 @@
                           <a:ea typeface="Arial" pitchFamily="34" charset="-122"/>
                           <a:cs typeface="Arial" pitchFamily="34" charset="-120"/>
                         </a:rPr>
-                        <a:t>47</a:t>
+                        <a:t>52</a:t>
                       </a:r>
                       <a:endParaRPr lang="en-US" sz="900" dirty="0">
                         <a:latin typeface="Arial" charset="0"/>
@@ -7933,7 +7933,7 @@
                           <a:ea typeface="Arial" pitchFamily="34" charset="-122"/>
                           <a:cs typeface="Arial" pitchFamily="34" charset="-120"/>
                         </a:rPr>
-                        <a:t>9.55</a:t>
+                        <a:t>9.52</a:t>
                       </a:r>
                       <a:endParaRPr lang="en-US" sz="900" dirty="0">
                         <a:latin typeface="Arial" charset="0"/>
@@ -8069,7 +8069,7 @@
                           <a:ea typeface="Arial" pitchFamily="34" charset="-122"/>
                           <a:cs typeface="Arial" pitchFamily="34" charset="-120"/>
                         </a:rPr>
-                        <a:t>9.55</a:t>
+                        <a:t>9.52</a:t>
                       </a:r>
                       <a:endParaRPr lang="en-US" sz="900" dirty="0">
                         <a:latin typeface="Arial" charset="0"/>
@@ -8207,7 +8207,7 @@
                           <a:ea typeface="Arial" pitchFamily="34" charset="-122"/>
                           <a:cs typeface="Arial" pitchFamily="34" charset="-120"/>
                         </a:rPr>
-                        <a:t>22</a:t>
+                        <a:t>21</a:t>
                       </a:r>
                       <a:endParaRPr lang="en-US" sz="900" dirty="0">
                         <a:latin typeface="Arial" charset="0"/>
@@ -8275,7 +8275,7 @@
                           <a:ea typeface="Arial" pitchFamily="34" charset="-122"/>
                           <a:cs typeface="Arial" pitchFamily="34" charset="-120"/>
                         </a:rPr>
-                        <a:t>4.5</a:t>
+                        <a:t>4.48</a:t>
                       </a:r>
                       <a:endParaRPr lang="en-US" sz="900" dirty="0">
                         <a:latin typeface="Arial" charset="0"/>
@@ -8411,7 +8411,7 @@
                           <a:ea typeface="Arial" pitchFamily="34" charset="-122"/>
                           <a:cs typeface="Arial" pitchFamily="34" charset="-120"/>
                         </a:rPr>
-                        <a:t>9</a:t>
+                        <a:t>8.95</a:t>
                       </a:r>
                       <a:endParaRPr lang="en-US" sz="900" dirty="0">
                         <a:latin typeface="Arial" charset="0"/>
@@ -8549,7 +8549,7 @@
                           <a:ea typeface="Arial" pitchFamily="34" charset="-122"/>
                           <a:cs typeface="Arial" pitchFamily="34" charset="-120"/>
                         </a:rPr>
-                        <a:t>50</a:t>
+                        <a:t>51</a:t>
                       </a:r>
                       <a:endParaRPr lang="en-US" sz="900" dirty="0">
                         <a:latin typeface="Arial" charset="0"/>
@@ -8617,7 +8617,7 @@
                           <a:ea typeface="Arial" pitchFamily="34" charset="-122"/>
                           <a:cs typeface="Arial" pitchFamily="34" charset="-120"/>
                         </a:rPr>
-                        <a:t>8.66</a:t>
+                        <a:t>8.69</a:t>
                       </a:r>
                       <a:endParaRPr lang="en-US" sz="900" dirty="0">
                         <a:latin typeface="Arial" charset="0"/>
@@ -8753,7 +8753,7 @@
                           <a:ea typeface="Arial" pitchFamily="34" charset="-122"/>
                           <a:cs typeface="Arial" pitchFamily="34" charset="-120"/>
                         </a:rPr>
-                        <a:t>8.66</a:t>
+                        <a:t>8.69</a:t>
                       </a:r>
                       <a:endParaRPr lang="en-US" sz="900" dirty="0">
                         <a:latin typeface="Arial" charset="0"/>
@@ -9503,7 +9503,7 @@
                 <a:ea typeface="Arial" pitchFamily="34" charset="-122"/>
                 <a:cs typeface="Arial" pitchFamily="34" charset="-120"/>
               </a:rPr>
-              <a:t>108件（88.5%）</a:t>
+              <a:t>113件（89.0%）</a:t>
             </a:r>
             <a:endParaRPr lang="en-US" sz="1100" dirty="0"/>
           </a:p>
@@ -9601,7 +9601,7 @@
                 <a:ea typeface="Arial" pitchFamily="34" charset="-122"/>
                 <a:cs typeface="Arial" pitchFamily="34" charset="-120"/>
               </a:rPr>
-              <a:t>13件（10.7%）</a:t>
+              <a:t>13件（10.2%）</a:t>
             </a:r>
             <a:endParaRPr lang="en-US" sz="1100" dirty="0"/>
           </a:p>
@@ -10111,7 +10111,7 @@
                 <a:ea typeface="Arial" pitchFamily="34" charset="-122"/>
                 <a:cs typeface="Arial" pitchFamily="34" charset="-120"/>
               </a:rPr>
-              <a:t>Highly recommended 4人家族に最適な立地と部屋の広さ</a:t>
+              <a:t>このエリアは比較的混雑しておらず、近くにはパルコやテルミナなどのショッピングモールがいくつかあるので、食事や基本的...</a:t>
             </a:r>
             <a:endParaRPr lang="en-US" sz="900" dirty="0"/>
           </a:p>
@@ -10150,7 +10150,7 @@
                 <a:ea typeface="Arial" pitchFamily="34" charset="-122"/>
                 <a:cs typeface="Arial" pitchFamily="34" charset="-120"/>
               </a:rPr>
-              <a:t>「内装は新しく、交通の便も良く、地下鉄駅から歩いてすぐですが、それほど遠くはありません」</a:t>
+              <a:t>「駅やショッピングエリアからはまだ少し距離があります」</a:t>
             </a:r>
             <a:endParaRPr lang="en-US" sz="900" dirty="0"/>
           </a:p>
@@ -10334,7 +10334,7 @@
                 <a:ea typeface="Arial" pitchFamily="34" charset="-122"/>
                 <a:cs typeface="Arial" pitchFamily="34" charset="-120"/>
               </a:rPr>
-              <a:t>いつも使うので、特別な価格サービスをお願いできればありがたいです</a:t>
+              <a:t>As foreigners, it was very scary to come and try to commu...</a:t>
             </a:r>
             <a:endParaRPr lang="en-US" sz="900" dirty="0"/>
           </a:p>
@@ -10373,7 +10373,7 @@
                 <a:ea typeface="Arial" pitchFamily="34" charset="-122"/>
                 <a:cs typeface="Arial" pitchFamily="34" charset="-120"/>
               </a:rPr>
-              <a:t>「Attenzione dello staff buona」</a:t>
+              <a:t>「離地鐵站非常近，樓下化粧品自助，面膜自助非常棒，周邊吃，買都很方便 地下鉄の駅からとても近く、階下には便利なセルフ...」</a:t>
             </a:r>
             <a:endParaRPr lang="en-US" sz="900" dirty="0"/>
           </a:p>
@@ -10780,7 +10780,7 @@
                 <a:ea typeface="Arial" pitchFamily="34" charset="-122"/>
                 <a:cs typeface="Arial" pitchFamily="34" charset="-120"/>
               </a:rPr>
-              <a:t>地下鉄の駅やショッピングエリアにとても近く、買い物や食事、観光に出かける際に時間を大幅に節約できます</a:t>
+              <a:t>24時間営業のスーパーマーケットも利用可能です</a:t>
             </a:r>
             <a:endParaRPr lang="en-US" sz="900" dirty="0"/>
           </a:p>
@@ -10819,7 +10819,7 @@
                 <a:ea typeface="Arial" pitchFamily="34" charset="-122"/>
                 <a:cs typeface="Arial" pitchFamily="34" charset="-120"/>
               </a:rPr>
-              <a:t>「周辺は活気があり、飲食店やコンビニエンスストアも数多くあります」</a:t>
+              <a:t>「コンビニエンスストアやショッピングモールも徒歩5分圏内です」</a:t>
             </a:r>
             <a:endParaRPr lang="en-US" sz="900" dirty="0"/>
           </a:p>
@@ -11003,7 +11003,7 @@
                 <a:ea typeface="Arial" pitchFamily="34" charset="-122"/>
                 <a:cs typeface="Arial" pitchFamily="34" charset="-120"/>
               </a:rPr>
-              <a:t>部屋も清潔で快適で、とても気持ちの良い滞在になりました</a:t>
+              <a:t>シングルベッド2台の部屋を予約しましたが、私たちと子供1人にはちょうど良い広さでした</a:t>
             </a:r>
             <a:endParaRPr lang="en-US" sz="900" dirty="0"/>
           </a:p>
@@ -11042,7 +11042,7 @@
                 <a:ea typeface="Arial" pitchFamily="34" charset="-122"/>
                 <a:cs typeface="Arial" pitchFamily="34" charset="-120"/>
               </a:rPr>
-              <a:t>「機能很好 このレストランは清潔で整頓されていて快適です」</a:t>
+              <a:t>「部屋も清潔で快適で、とても気持ちの良い滞在になりました」</a:t>
             </a:r>
             <a:endParaRPr lang="en-US" sz="900" dirty="0"/>
           </a:p>
@@ -11955,7 +11955,7 @@
                           <a:ea typeface="Arial" pitchFamily="34" charset="-122"/>
                           <a:cs typeface="Arial" pitchFamily="34" charset="-120"/>
                         </a:rPr>
-                        <a:t>Instalaciones cómodas , zona muy tranquila y relativament...</a:t>
+                        <a:t>This area is less crowded, with a couple of malls nearby ...</a:t>
                       </a:r>
                       <a:endParaRPr lang="en-US" sz="900" dirty="0">
                         <a:latin typeface="Arial" charset="0"/>
@@ -12023,7 +12023,7 @@
                           <a:ea typeface="Arial" pitchFamily="34" charset="-122"/>
                           <a:cs typeface="Arial" pitchFamily="34" charset="-120"/>
                         </a:rPr>
-                        <a:t>17件</a:t>
+                        <a:t>18件</a:t>
                       </a:r>
                       <a:endParaRPr lang="en-US" sz="900" dirty="0">
                         <a:latin typeface="Arial" charset="0"/>
@@ -12229,7 +12229,7 @@
                           <a:ea typeface="Arial" pitchFamily="34" charset="-122"/>
                           <a:cs typeface="Arial" pitchFamily="34" charset="-120"/>
                         </a:rPr>
-                        <a:t>ホテルのロビーにはフェイスマスクやバスソルトまで用意されていました</a:t>
+                        <a:t>部屋とバスルームが通常よりも広々としているのがとても気に入りました</a:t>
                       </a:r>
                       <a:endParaRPr lang="en-US" sz="900" dirty="0">
                         <a:latin typeface="Arial" charset="0"/>
@@ -12297,7 +12297,7 @@
                           <a:ea typeface="Arial" pitchFamily="34" charset="-122"/>
                           <a:cs typeface="Arial" pitchFamily="34" charset="-120"/>
                         </a:rPr>
-                        <a:t>14件</a:t>
+                        <a:t>15件</a:t>
                       </a:r>
                       <a:endParaRPr lang="en-US" sz="900" dirty="0">
                         <a:latin typeface="Arial" charset="0"/>
@@ -12435,7 +12435,7 @@
                           <a:ea typeface="Arial" pitchFamily="34" charset="-122"/>
                           <a:cs typeface="Arial" pitchFamily="34" charset="-120"/>
                         </a:rPr>
-                        <a:t>対応・サービスの不満</a:t>
+                        <a:t>部屋の狭さ</a:t>
                       </a:r>
                       <a:endParaRPr lang="en-US" sz="900" dirty="0">
                         <a:latin typeface="Arial" charset="0"/>
@@ -12503,7 +12503,7 @@
                           <a:ea typeface="Arial" pitchFamily="34" charset="-122"/>
                           <a:cs typeface="Arial" pitchFamily="34" charset="-120"/>
                         </a:rPr>
-                        <a:t>櫃檯人員辦理入住手續很快速，服務態度非常親切有禮</a:t>
+                        <a:t>部屋は小さいですが、必要なものはすべて揃っています</a:t>
                       </a:r>
                       <a:endParaRPr lang="en-US" sz="900" dirty="0">
                         <a:latin typeface="Arial" charset="0"/>
@@ -12571,7 +12571,7 @@
                           <a:ea typeface="Arial" pitchFamily="34" charset="-122"/>
                           <a:cs typeface="Arial" pitchFamily="34" charset="-120"/>
                         </a:rPr>
-                        <a:t>5件</a:t>
+                        <a:t>4件</a:t>
                       </a:r>
                       <a:endParaRPr lang="en-US" sz="900" dirty="0">
                         <a:latin typeface="Arial" charset="0"/>
@@ -12709,7 +12709,7 @@
                           <a:ea typeface="Arial" pitchFamily="34" charset="-122"/>
                           <a:cs typeface="Arial" pitchFamily="34" charset="-120"/>
                         </a:rPr>
-                        <a:t>部屋の狭さ</a:t>
+                        <a:t>対応・サービスの不満</a:t>
                       </a:r>
                       <a:endParaRPr lang="en-US" sz="900" dirty="0">
                         <a:latin typeface="Arial" charset="0"/>
@@ -12777,7 +12777,7 @@
                           <a:ea typeface="Arial" pitchFamily="34" charset="-122"/>
                           <a:cs typeface="Arial" pitchFamily="34" charset="-120"/>
                         </a:rPr>
-                        <a:t>部屋は小さいですが、必要なものはすべて揃っています</a:t>
+                        <a:t>櫃檯人員辦理入住手續很快速，服務態度非常親切有禮</a:t>
                       </a:r>
                       <a:endParaRPr lang="en-US" sz="900" dirty="0">
                         <a:latin typeface="Arial" charset="0"/>
@@ -12845,7 +12845,7 @@
                           <a:ea typeface="Arial" pitchFamily="34" charset="-122"/>
                           <a:cs typeface="Arial" pitchFamily="34" charset="-120"/>
                         </a:rPr>
-                        <a:t>4件</a:t>
+                        <a:t>3件</a:t>
                       </a:r>
                       <a:endParaRPr lang="en-US" sz="900" dirty="0">
                         <a:latin typeface="Arial" charset="0"/>

--- a/納品レポート/ホテル別レポート/keisei_kinshicho_口コミ分析レポート.pptx
+++ b/納品レポート/ホテル別レポート/keisei_kinshicho_口コミ分析レポート.pptx
@@ -205,7 +205,7 @@
                   <c:v>9.52</c:v>
                 </c:pt>
                 <c:pt idx="1">
-                  <c:v>8.95</c:v>
+                  <c:v>9.14</c:v>
                 </c:pt>
                 <c:pt idx="2">
                   <c:v>8.69</c:v>
@@ -557,7 +557,7 @@
                   <c:v>113</c:v>
                 </c:pt>
                 <c:pt idx="1">
-                  <c:v>13</c:v>
+                  <c:v>12</c:v>
                 </c:pt>
                 <c:pt idx="2">
                   <c:v>1</c:v>
@@ -795,7 +795,7 @@
                   <c:v>5</c:v>
                 </c:pt>
                 <c:pt idx="4">
-                  <c:v>6</c:v>
+                  <c:v>5</c:v>
                 </c:pt>
                 <c:pt idx="5">
                   <c:v>2</c:v>
@@ -2752,7 +2752,7 @@
                 <a:ea typeface="Arial" pitchFamily="34" charset="-122"/>
                 <a:cs typeface="Arial" pitchFamily="34" charset="-120"/>
               </a:rPr>
-              <a:t>レビュー総数：127件（4サイト）</a:t>
+              <a:t>レビュー総数：126件（4サイト）</a:t>
             </a:r>
             <a:endParaRPr lang="en-US" sz="1000" dirty="0"/>
           </a:p>
@@ -2772,7 +2772,7 @@
                 <a:ea typeface="Arial" pitchFamily="34" charset="-122"/>
                 <a:cs typeface="Arial" pitchFamily="34" charset="-120"/>
               </a:rPr>
-              <a:t>作成日：2026年3月23日</a:t>
+              <a:t>作成日：2026年3月24日</a:t>
             </a:r>
             <a:endParaRPr lang="en-US" sz="1000" dirty="0"/>
           </a:p>
@@ -3318,7 +3318,7 @@
                           <a:ea typeface="Arial" pitchFamily="34" charset="-122"/>
                           <a:cs typeface="Arial" pitchFamily="34" charset="-120"/>
                         </a:rPr>
-                        <a:t>9.06点</a:t>
+                        <a:t>9.08点</a:t>
                       </a:r>
                       <a:endParaRPr lang="en-US" sz="1000" dirty="0">
                         <a:latin typeface="Arial" charset="0"/>
@@ -3592,7 +3592,7 @@
                           <a:ea typeface="Arial" pitchFamily="34" charset="-122"/>
                           <a:cs typeface="Arial" pitchFamily="34" charset="-120"/>
                         </a:rPr>
-                        <a:t>89.0%</a:t>
+                        <a:t>89.7%</a:t>
                       </a:r>
                       <a:endParaRPr lang="en-US" sz="1000" dirty="0">
                         <a:latin typeface="Arial" charset="0"/>
@@ -3660,7 +3660,7 @@
                           <a:ea typeface="Arial" pitchFamily="34" charset="-122"/>
                           <a:cs typeface="Arial" pitchFamily="34" charset="-120"/>
                         </a:rPr>
-                        <a:t>94%以上</a:t>
+                        <a:t>95%以上</a:t>
                       </a:r>
                       <a:endParaRPr lang="en-US" sz="1000" dirty="0">
                         <a:latin typeface="Arial" charset="0"/>
@@ -5327,7 +5327,7 @@
                 <a:ea typeface="Arial" pitchFamily="34" charset="-122"/>
                 <a:cs typeface="Arial" pitchFamily="34" charset="-120"/>
               </a:rPr>
-              <a:t>9.06</a:t>
+              <a:t>9.08</a:t>
             </a:r>
             <a:endParaRPr lang="en-US" sz="3200" dirty="0"/>
           </a:p>
@@ -5452,7 +5452,7 @@
                 <a:ea typeface="Arial" pitchFamily="34" charset="-122"/>
                 <a:cs typeface="Arial" pitchFamily="34" charset="-120"/>
               </a:rPr>
-              <a:t>89.0%</a:t>
+              <a:t>89.7%</a:t>
             </a:r>
             <a:endParaRPr lang="en-US" sz="3200" dirty="0"/>
           </a:p>
@@ -5702,7 +5702,7 @@
                 <a:ea typeface="Arial" pitchFamily="34" charset="-122"/>
                 <a:cs typeface="Arial" pitchFamily="34" charset="-120"/>
               </a:rPr>
-              <a:t>127件</a:t>
+              <a:t>126件</a:t>
             </a:r>
             <a:endParaRPr lang="en-US" sz="3200" dirty="0"/>
           </a:p>
@@ -5890,7 +5890,7 @@
                 <a:ea typeface="Arial" pitchFamily="34" charset="-122"/>
                 <a:cs typeface="Arial" pitchFamily="34" charset="-120"/>
               </a:rPr>
-              <a:t>  As foreigners, it was very scary to come and try to commu...</a:t>
+              <a:t>  ホテルのスタッフは親切で協力的で、部屋も清潔で整頓されていました</a:t>
             </a:r>
             <a:endParaRPr lang="en-US" sz="1100" dirty="0"/>
           </a:p>
@@ -5930,7 +5930,7 @@
                 <a:ea typeface="Arial" pitchFamily="34" charset="-122"/>
                 <a:cs typeface="Arial" pitchFamily="34" charset="-120"/>
               </a:rPr>
-              <a:t>  房間大 乾淨 有乾濕分離 部屋は広くて清潔で、濡れた場所と乾いた場所が分かれている</a:t>
+              <a:t>  ホテルのスタッフは親切で協力的で、部屋も清潔で整頓されていました</a:t>
             </a:r>
             <a:endParaRPr lang="en-US" sz="1100" dirty="0"/>
           </a:p>
@@ -6511,7 +6511,7 @@
                 <a:ea typeface="Arial" pitchFamily="34" charset="-122"/>
                 <a:cs typeface="Arial" pitchFamily="34" charset="-120"/>
               </a:rPr>
-              <a:t>9.06</a:t>
+              <a:t>9.08</a:t>
             </a:r>
             <a:endParaRPr lang="en-US" sz="3200" dirty="0"/>
           </a:p>
@@ -6636,7 +6636,7 @@
                 <a:ea typeface="Arial" pitchFamily="34" charset="-122"/>
                 <a:cs typeface="Arial" pitchFamily="34" charset="-120"/>
               </a:rPr>
-              <a:t>89.0%</a:t>
+              <a:t>89.7%</a:t>
             </a:r>
             <a:endParaRPr lang="en-US" sz="3200" dirty="0"/>
           </a:p>
@@ -6886,7 +6886,7 @@
                 <a:ea typeface="Arial" pitchFamily="34" charset="-122"/>
                 <a:cs typeface="Arial" pitchFamily="34" charset="-120"/>
               </a:rPr>
-              <a:t>127件</a:t>
+              <a:t>126件</a:t>
             </a:r>
             <a:endParaRPr lang="en-US" sz="3200" dirty="0"/>
           </a:p>
@@ -7865,7 +7865,7 @@
                           <a:ea typeface="Arial" pitchFamily="34" charset="-122"/>
                           <a:cs typeface="Arial" pitchFamily="34" charset="-120"/>
                         </a:rPr>
-                        <a:t>52</a:t>
+                        <a:t>50</a:t>
                       </a:r>
                       <a:endParaRPr lang="en-US" sz="900" dirty="0">
                         <a:latin typeface="Arial" charset="0"/>
@@ -8275,7 +8275,7 @@
                           <a:ea typeface="Arial" pitchFamily="34" charset="-122"/>
                           <a:cs typeface="Arial" pitchFamily="34" charset="-120"/>
                         </a:rPr>
-                        <a:t>4.48</a:t>
+                        <a:t>4.57</a:t>
                       </a:r>
                       <a:endParaRPr lang="en-US" sz="900" dirty="0">
                         <a:latin typeface="Arial" charset="0"/>
@@ -8411,7 +8411,7 @@
                           <a:ea typeface="Arial" pitchFamily="34" charset="-122"/>
                           <a:cs typeface="Arial" pitchFamily="34" charset="-120"/>
                         </a:rPr>
-                        <a:t>8.95</a:t>
+                        <a:t>9.14</a:t>
                       </a:r>
                       <a:endParaRPr lang="en-US" sz="900" dirty="0">
                         <a:latin typeface="Arial" charset="0"/>
@@ -8549,7 +8549,7 @@
                           <a:ea typeface="Arial" pitchFamily="34" charset="-122"/>
                           <a:cs typeface="Arial" pitchFamily="34" charset="-120"/>
                         </a:rPr>
-                        <a:t>51</a:t>
+                        <a:t>52</a:t>
                       </a:r>
                       <a:endParaRPr lang="en-US" sz="900" dirty="0">
                         <a:latin typeface="Arial" charset="0"/>
@@ -9503,7 +9503,7 @@
                 <a:ea typeface="Arial" pitchFamily="34" charset="-122"/>
                 <a:cs typeface="Arial" pitchFamily="34" charset="-120"/>
               </a:rPr>
-              <a:t>113件（89.0%）</a:t>
+              <a:t>113件（89.7%）</a:t>
             </a:r>
             <a:endParaRPr lang="en-US" sz="1100" dirty="0"/>
           </a:p>
@@ -9601,7 +9601,7 @@
                 <a:ea typeface="Arial" pitchFamily="34" charset="-122"/>
                 <a:cs typeface="Arial" pitchFamily="34" charset="-120"/>
               </a:rPr>
-              <a:t>13件（10.2%）</a:t>
+              <a:t>12件（9.5%）</a:t>
             </a:r>
             <a:endParaRPr lang="en-US" sz="1100" dirty="0"/>
           </a:p>
@@ -10334,7 +10334,7 @@
                 <a:ea typeface="Arial" pitchFamily="34" charset="-122"/>
                 <a:cs typeface="Arial" pitchFamily="34" charset="-120"/>
               </a:rPr>
-              <a:t>As foreigners, it was very scary to come and try to commu...</a:t>
+              <a:t>ホテルのスタッフは親切で協力的で、部屋も清潔で整頓されていました</a:t>
             </a:r>
             <a:endParaRPr lang="en-US" sz="900" dirty="0"/>
           </a:p>
@@ -10373,7 +10373,7 @@
                 <a:ea typeface="Arial" pitchFamily="34" charset="-122"/>
                 <a:cs typeface="Arial" pitchFamily="34" charset="-120"/>
               </a:rPr>
-              <a:t>「離地鐵站非常近，樓下化粧品自助，面膜自助非常棒，周邊吃，買都很方便 地下鉄の駅からとても近く、階下には便利なセルフ...」</a:t>
+              <a:t>「As foreigners, it was very scary to come and try to commu...」</a:t>
             </a:r>
             <a:endParaRPr lang="en-US" sz="900" dirty="0"/>
           </a:p>
@@ -10557,7 +10557,7 @@
                 <a:ea typeface="Arial" pitchFamily="34" charset="-122"/>
                 <a:cs typeface="Arial" pitchFamily="34" charset="-120"/>
               </a:rPr>
-              <a:t>房間大 乾淨 有乾濕分離 部屋は広くて清潔で、濡れた場所と乾いた場所が分かれている</a:t>
+              <a:t>ホテルのスタッフは親切で協力的で、部屋も清潔で整頓されていました</a:t>
             </a:r>
             <a:endParaRPr lang="en-US" sz="900" dirty="0"/>
           </a:p>
@@ -10596,7 +10596,7 @@
                 <a:ea typeface="Arial" pitchFamily="34" charset="-122"/>
                 <a:cs typeface="Arial" pitchFamily="34" charset="-120"/>
               </a:rPr>
-              <a:t>「部屋も清潔で快適で、とても気持ちの良い滞在になりました」</a:t>
+              <a:t>「房間大 乾淨 有乾濕分離 部屋は広くて清潔で、濡れた場所と乾いた場所が分かれている」</a:t>
             </a:r>
             <a:endParaRPr lang="en-US" sz="900" dirty="0"/>
           </a:p>
@@ -11003,7 +11003,7 @@
                 <a:ea typeface="Arial" pitchFamily="34" charset="-122"/>
                 <a:cs typeface="Arial" pitchFamily="34" charset="-120"/>
               </a:rPr>
-              <a:t>シングルベッド2台の部屋を予約しましたが、私たちと子供1人にはちょうど良い広さでした</a:t>
+              <a:t>お風呂場が広くて快適だった</a:t>
             </a:r>
             <a:endParaRPr lang="en-US" sz="900" dirty="0"/>
           </a:p>
@@ -11042,7 +11042,7 @@
                 <a:ea typeface="Arial" pitchFamily="34" charset="-122"/>
                 <a:cs typeface="Arial" pitchFamily="34" charset="-120"/>
               </a:rPr>
-              <a:t>「部屋も清潔で快適で、とても気持ちの良い滞在になりました」</a:t>
+              <a:t>「シングルベッド2台の部屋を予約しましたが、私たちと子供1人にはちょうど良い広さでした」</a:t>
             </a:r>
             <a:endParaRPr lang="en-US" sz="900" dirty="0"/>
           </a:p>
@@ -12777,7 +12777,7 @@
                           <a:ea typeface="Arial" pitchFamily="34" charset="-122"/>
                           <a:cs typeface="Arial" pitchFamily="34" charset="-120"/>
                         </a:rPr>
-                        <a:t>櫃檯人員辦理入住手續很快速，服務態度非常親切有禮</a:t>
+                        <a:t>酒店員工服務態度良好，房間乾淨企理</a:t>
                       </a:r>
                       <a:endParaRPr lang="en-US" sz="900" dirty="0">
                         <a:latin typeface="Arial" charset="0"/>
@@ -12845,7 +12845,7 @@
                           <a:ea typeface="Arial" pitchFamily="34" charset="-122"/>
                           <a:cs typeface="Arial" pitchFamily="34" charset="-120"/>
                         </a:rPr>
-                        <a:t>3件</a:t>
+                        <a:t>4件</a:t>
                       </a:r>
                       <a:endParaRPr lang="en-US" sz="900" dirty="0">
                         <a:latin typeface="Arial" charset="0"/>

--- a/納品レポート/ホテル別レポート/keisei_kinshicho_口コミ分析レポート.pptx
+++ b/納品レポート/ホテル別レポート/keisei_kinshicho_口コミ分析レポート.pptx
@@ -202,13 +202,13 @@
                 <c:formatCode>General</c:formatCode>
                 <c:ptCount val="4"/>
                 <c:pt idx="0">
-                  <c:v>9.52</c:v>
+                  <c:v>9.48</c:v>
                 </c:pt>
                 <c:pt idx="1">
-                  <c:v>9.14</c:v>
+                  <c:v>9.18</c:v>
                 </c:pt>
                 <c:pt idx="2">
-                  <c:v>8.69</c:v>
+                  <c:v>8.78</c:v>
                 </c:pt>
                 <c:pt idx="3">
                   <c:v>8</c:v>
@@ -554,7 +554,7 @@
               <c:numCache>
                 <c:ptCount val="3"/>
                 <c:pt idx="0">
-                  <c:v>113</c:v>
+                  <c:v>114</c:v>
                 </c:pt>
                 <c:pt idx="1">
                   <c:v>12</c:v>
@@ -783,22 +783,22 @@
                 <c:formatCode>General</c:formatCode>
                 <c:ptCount val="7"/>
                 <c:pt idx="0">
-                  <c:v>68</c:v>
+                  <c:v>70</c:v>
                 </c:pt>
                 <c:pt idx="1">
                   <c:v>25</c:v>
                 </c:pt>
                 <c:pt idx="2">
-                  <c:v>20</c:v>
+                  <c:v>19</c:v>
                 </c:pt>
                 <c:pt idx="3">
-                  <c:v>5</c:v>
+                  <c:v>6</c:v>
                 </c:pt>
                 <c:pt idx="4">
                   <c:v>5</c:v>
                 </c:pt>
                 <c:pt idx="5">
-                  <c:v>2</c:v>
+                  <c:v>1</c:v>
                 </c:pt>
                 <c:pt idx="6">
                   <c:v>1</c:v>
@@ -2752,7 +2752,7 @@
                 <a:ea typeface="Arial" pitchFamily="34" charset="-122"/>
                 <a:cs typeface="Arial" pitchFamily="34" charset="-120"/>
               </a:rPr>
-              <a:t>レビュー総数：126件（4サイト）</a:t>
+              <a:t>レビュー総数：127件（4サイト）</a:t>
             </a:r>
             <a:endParaRPr lang="en-US" sz="1000" dirty="0"/>
           </a:p>
@@ -2772,7 +2772,7 @@
                 <a:ea typeface="Arial" pitchFamily="34" charset="-122"/>
                 <a:cs typeface="Arial" pitchFamily="34" charset="-120"/>
               </a:rPr>
-              <a:t>作成日：2026年3月24日</a:t>
+              <a:t>作成日：2026年3月25日</a:t>
             </a:r>
             <a:endParaRPr lang="en-US" sz="1000" dirty="0"/>
           </a:p>
@@ -3318,7 +3318,7 @@
                           <a:ea typeface="Arial" pitchFamily="34" charset="-122"/>
                           <a:cs typeface="Arial" pitchFamily="34" charset="-120"/>
                         </a:rPr>
-                        <a:t>9.08点</a:t>
+                        <a:t>9.12点</a:t>
                       </a:r>
                       <a:endParaRPr lang="en-US" sz="1000" dirty="0">
                         <a:latin typeface="Arial" charset="0"/>
@@ -3592,7 +3592,7 @@
                           <a:ea typeface="Arial" pitchFamily="34" charset="-122"/>
                           <a:cs typeface="Arial" pitchFamily="34" charset="-120"/>
                         </a:rPr>
-                        <a:t>89.7%</a:t>
+                        <a:t>89.8%</a:t>
                       </a:r>
                       <a:endParaRPr lang="en-US" sz="1000" dirty="0">
                         <a:latin typeface="Arial" charset="0"/>
@@ -5327,7 +5327,7 @@
                 <a:ea typeface="Arial" pitchFamily="34" charset="-122"/>
                 <a:cs typeface="Arial" pitchFamily="34" charset="-120"/>
               </a:rPr>
-              <a:t>9.08</a:t>
+              <a:t>9.12</a:t>
             </a:r>
             <a:endParaRPr lang="en-US" sz="3200" dirty="0"/>
           </a:p>
@@ -5452,7 +5452,7 @@
                 <a:ea typeface="Arial" pitchFamily="34" charset="-122"/>
                 <a:cs typeface="Arial" pitchFamily="34" charset="-120"/>
               </a:rPr>
-              <a:t>89.7%</a:t>
+              <a:t>89.8%</a:t>
             </a:r>
             <a:endParaRPr lang="en-US" sz="3200" dirty="0"/>
           </a:p>
@@ -5702,7 +5702,7 @@
                 <a:ea typeface="Arial" pitchFamily="34" charset="-122"/>
                 <a:cs typeface="Arial" pitchFamily="34" charset="-120"/>
               </a:rPr>
-              <a:t>126件</a:t>
+              <a:t>127件</a:t>
             </a:r>
             <a:endParaRPr lang="en-US" sz="3200" dirty="0"/>
           </a:p>
@@ -5850,7 +5850,7 @@
                 <a:ea typeface="Arial" pitchFamily="34" charset="-122"/>
                 <a:cs typeface="Arial" pitchFamily="34" charset="-120"/>
               </a:rPr>
-              <a:t>  このエリアは比較的混雑しておらず、近くにはパルコやテルミナなどのショッピングモールがいくつかあるので、食事や基本的...</a:t>
+              <a:t>  電車とバスの駅にも非常に近く（徒歩5～7分）、毎日清掃が行われ、部屋にタバコの臭いもありませんでした</a:t>
             </a:r>
             <a:endParaRPr lang="en-US" sz="1100" dirty="0"/>
           </a:p>
@@ -5890,7 +5890,7 @@
                 <a:ea typeface="Arial" pitchFamily="34" charset="-122"/>
                 <a:cs typeface="Arial" pitchFamily="34" charset="-120"/>
               </a:rPr>
-              <a:t>  ホテルのスタッフは親切で協力的で、部屋も清潔で整頓されていました</a:t>
+              <a:t>  バスルームのアメニティは、階下のフロントデスクでセルフサービスで利用できました</a:t>
             </a:r>
             <a:endParaRPr lang="en-US" sz="1100" dirty="0"/>
           </a:p>
@@ -5930,7 +5930,7 @@
                 <a:ea typeface="Arial" pitchFamily="34" charset="-122"/>
                 <a:cs typeface="Arial" pitchFamily="34" charset="-120"/>
               </a:rPr>
-              <a:t>  ホテルのスタッフは親切で協力的で、部屋も清潔で整頓されていました</a:t>
+              <a:t>  宿泊施設はとても清潔で快適でした</a:t>
             </a:r>
             <a:endParaRPr lang="en-US" sz="1100" dirty="0"/>
           </a:p>
@@ -6118,7 +6118,7 @@
                 <a:ea typeface="Arial" pitchFamily="34" charset="-122"/>
                 <a:cs typeface="Arial" pitchFamily="34" charset="-120"/>
               </a:rPr>
-              <a:t>  部屋とバスルームが通常よりも広々としているのがとても気に入りました</a:t>
+              <a:t>  バスルームのアメニティは、階下のフロントデスクでセルフサービスで利用できました</a:t>
             </a:r>
             <a:endParaRPr lang="en-US" sz="1100" dirty="0"/>
           </a:p>
@@ -6511,7 +6511,7 @@
                 <a:ea typeface="Arial" pitchFamily="34" charset="-122"/>
                 <a:cs typeface="Arial" pitchFamily="34" charset="-120"/>
               </a:rPr>
-              <a:t>9.08</a:t>
+              <a:t>9.12</a:t>
             </a:r>
             <a:endParaRPr lang="en-US" sz="3200" dirty="0"/>
           </a:p>
@@ -6636,7 +6636,7 @@
                 <a:ea typeface="Arial" pitchFamily="34" charset="-122"/>
                 <a:cs typeface="Arial" pitchFamily="34" charset="-120"/>
               </a:rPr>
-              <a:t>89.7%</a:t>
+              <a:t>89.8%</a:t>
             </a:r>
             <a:endParaRPr lang="en-US" sz="3200" dirty="0"/>
           </a:p>
@@ -6886,7 +6886,7 @@
                 <a:ea typeface="Arial" pitchFamily="34" charset="-122"/>
                 <a:cs typeface="Arial" pitchFamily="34" charset="-120"/>
               </a:rPr>
-              <a:t>126件</a:t>
+              <a:t>127件</a:t>
             </a:r>
             <a:endParaRPr lang="en-US" sz="3200" dirty="0"/>
           </a:p>
@@ -7307,7 +7307,7 @@
                 <a:ea typeface="Arial" pitchFamily="34" charset="-122"/>
                 <a:cs typeface="Arial" pitchFamily="34" charset="-120"/>
               </a:rPr>
-              <a:t>Trip.com(9.52)が最高スコア。</a:t>
+              <a:t>Trip.com(9.48)が最高スコア。</a:t>
             </a:r>
             <a:endParaRPr lang="en-US" sz="1100" dirty="0"/>
           </a:p>
@@ -7865,7 +7865,7 @@
                           <a:ea typeface="Arial" pitchFamily="34" charset="-122"/>
                           <a:cs typeface="Arial" pitchFamily="34" charset="-120"/>
                         </a:rPr>
-                        <a:t>50</a:t>
+                        <a:t>52</a:t>
                       </a:r>
                       <a:endParaRPr lang="en-US" sz="900" dirty="0">
                         <a:latin typeface="Arial" charset="0"/>
@@ -7933,7 +7933,7 @@
                           <a:ea typeface="Arial" pitchFamily="34" charset="-122"/>
                           <a:cs typeface="Arial" pitchFamily="34" charset="-120"/>
                         </a:rPr>
-                        <a:t>9.52</a:t>
+                        <a:t>9.48</a:t>
                       </a:r>
                       <a:endParaRPr lang="en-US" sz="900" dirty="0">
                         <a:latin typeface="Arial" charset="0"/>
@@ -8069,7 +8069,7 @@
                           <a:ea typeface="Arial" pitchFamily="34" charset="-122"/>
                           <a:cs typeface="Arial" pitchFamily="34" charset="-120"/>
                         </a:rPr>
-                        <a:t>9.52</a:t>
+                        <a:t>9.48</a:t>
                       </a:r>
                       <a:endParaRPr lang="en-US" sz="900" dirty="0">
                         <a:latin typeface="Arial" charset="0"/>
@@ -8207,7 +8207,7 @@
                           <a:ea typeface="Arial" pitchFamily="34" charset="-122"/>
                           <a:cs typeface="Arial" pitchFamily="34" charset="-120"/>
                         </a:rPr>
-                        <a:t>21</a:t>
+                        <a:t>22</a:t>
                       </a:r>
                       <a:endParaRPr lang="en-US" sz="900" dirty="0">
                         <a:latin typeface="Arial" charset="0"/>
@@ -8275,7 +8275,7 @@
                           <a:ea typeface="Arial" pitchFamily="34" charset="-122"/>
                           <a:cs typeface="Arial" pitchFamily="34" charset="-120"/>
                         </a:rPr>
-                        <a:t>4.57</a:t>
+                        <a:t>4.59</a:t>
                       </a:r>
                       <a:endParaRPr lang="en-US" sz="900" dirty="0">
                         <a:latin typeface="Arial" charset="0"/>
@@ -8411,7 +8411,7 @@
                           <a:ea typeface="Arial" pitchFamily="34" charset="-122"/>
                           <a:cs typeface="Arial" pitchFamily="34" charset="-120"/>
                         </a:rPr>
-                        <a:t>9.14</a:t>
+                        <a:t>9.18</a:t>
                       </a:r>
                       <a:endParaRPr lang="en-US" sz="900" dirty="0">
                         <a:latin typeface="Arial" charset="0"/>
@@ -8549,7 +8549,7 @@
                           <a:ea typeface="Arial" pitchFamily="34" charset="-122"/>
                           <a:cs typeface="Arial" pitchFamily="34" charset="-120"/>
                         </a:rPr>
-                        <a:t>52</a:t>
+                        <a:t>50</a:t>
                       </a:r>
                       <a:endParaRPr lang="en-US" sz="900" dirty="0">
                         <a:latin typeface="Arial" charset="0"/>
@@ -8617,7 +8617,7 @@
                           <a:ea typeface="Arial" pitchFamily="34" charset="-122"/>
                           <a:cs typeface="Arial" pitchFamily="34" charset="-120"/>
                         </a:rPr>
-                        <a:t>8.69</a:t>
+                        <a:t>8.78</a:t>
                       </a:r>
                       <a:endParaRPr lang="en-US" sz="900" dirty="0">
                         <a:latin typeface="Arial" charset="0"/>
@@ -8753,7 +8753,7 @@
                           <a:ea typeface="Arial" pitchFamily="34" charset="-122"/>
                           <a:cs typeface="Arial" pitchFamily="34" charset="-120"/>
                         </a:rPr>
-                        <a:t>8.69</a:t>
+                        <a:t>8.78</a:t>
                       </a:r>
                       <a:endParaRPr lang="en-US" sz="900" dirty="0">
                         <a:latin typeface="Arial" charset="0"/>
@@ -9503,7 +9503,7 @@
                 <a:ea typeface="Arial" pitchFamily="34" charset="-122"/>
                 <a:cs typeface="Arial" pitchFamily="34" charset="-120"/>
               </a:rPr>
-              <a:t>113件（89.7%）</a:t>
+              <a:t>114件（89.8%）</a:t>
             </a:r>
             <a:endParaRPr lang="en-US" sz="1100" dirty="0"/>
           </a:p>
@@ -9601,7 +9601,7 @@
                 <a:ea typeface="Arial" pitchFamily="34" charset="-122"/>
                 <a:cs typeface="Arial" pitchFamily="34" charset="-120"/>
               </a:rPr>
-              <a:t>12件（9.5%）</a:t>
+              <a:t>12件（9.4%）</a:t>
             </a:r>
             <a:endParaRPr lang="en-US" sz="1100" dirty="0"/>
           </a:p>
@@ -10111,7 +10111,7 @@
                 <a:ea typeface="Arial" pitchFamily="34" charset="-122"/>
                 <a:cs typeface="Arial" pitchFamily="34" charset="-120"/>
               </a:rPr>
-              <a:t>このエリアは比較的混雑しておらず、近くにはパルコやテルミナなどのショッピングモールがいくつかあるので、食事や基本的...</a:t>
+              <a:t>電車とバスの駅にも非常に近く（徒歩5～7分）、毎日清掃が行われ、部屋にタバコの臭いもありませんでした</a:t>
             </a:r>
             <a:endParaRPr lang="en-US" sz="900" dirty="0"/>
           </a:p>
@@ -10150,7 +10150,7 @@
                 <a:ea typeface="Arial" pitchFamily="34" charset="-122"/>
                 <a:cs typeface="Arial" pitchFamily="34" charset="-120"/>
               </a:rPr>
-              <a:t>「駅やショッピングエリアからはまだ少し距離があります」</a:t>
+              <a:t>「立地は最高で、錦糸町駅から徒歩圏内、JR線と半蔵門線にもアクセスでき、交通の便が非常に良いです」</a:t>
             </a:r>
             <a:endParaRPr lang="en-US" sz="900" dirty="0"/>
           </a:p>
@@ -10334,7 +10334,7 @@
                 <a:ea typeface="Arial" pitchFamily="34" charset="-122"/>
                 <a:cs typeface="Arial" pitchFamily="34" charset="-120"/>
               </a:rPr>
-              <a:t>ホテルのスタッフは親切で協力的で、部屋も清潔で整頓されていました</a:t>
+              <a:t>バスルームのアメニティは、階下のフロントデスクでセルフサービスで利用できました</a:t>
             </a:r>
             <a:endParaRPr lang="en-US" sz="900" dirty="0"/>
           </a:p>
@@ -10373,7 +10373,7 @@
                 <a:ea typeface="Arial" pitchFamily="34" charset="-122"/>
                 <a:cs typeface="Arial" pitchFamily="34" charset="-120"/>
               </a:rPr>
-              <a:t>「As foreigners, it was very scary to come and try to commu...」</a:t>
+              <a:t>「）フロントのスタッフもとてもフレンドリーで親切でした」</a:t>
             </a:r>
             <a:endParaRPr lang="en-US" sz="900" dirty="0"/>
           </a:p>
@@ -10557,7 +10557,7 @@
                 <a:ea typeface="Arial" pitchFamily="34" charset="-122"/>
                 <a:cs typeface="Arial" pitchFamily="34" charset="-120"/>
               </a:rPr>
-              <a:t>ホテルのスタッフは親切で協力的で、部屋も清潔で整頓されていました</a:t>
+              <a:t>宿泊施設はとても清潔で快適でした</a:t>
             </a:r>
             <a:endParaRPr lang="en-US" sz="900" dirty="0"/>
           </a:p>
@@ -10596,7 +10596,7 @@
                 <a:ea typeface="Arial" pitchFamily="34" charset="-122"/>
                 <a:cs typeface="Arial" pitchFamily="34" charset="-120"/>
               </a:rPr>
-              <a:t>「房間大 乾淨 有乾濕分離 部屋は広くて清潔で、濡れた場所と乾いた場所が分かれている」</a:t>
+              <a:t>「部屋自体もとても清潔で快適で居心地が良かったです」</a:t>
             </a:r>
             <a:endParaRPr lang="en-US" sz="900" dirty="0"/>
           </a:p>
@@ -10780,7 +10780,7 @@
                 <a:ea typeface="Arial" pitchFamily="34" charset="-122"/>
                 <a:cs typeface="Arial" pitchFamily="34" charset="-120"/>
               </a:rPr>
-              <a:t>24時間営業のスーパーマーケットも利用可能です</a:t>
+              <a:t>周辺にはレストラン、コンビニ、24時間営業のスーパーマーケットもたくさんあり、日常生活や食事にとても便利です</a:t>
             </a:r>
             <a:endParaRPr lang="en-US" sz="900" dirty="0"/>
           </a:p>
@@ -10819,7 +10819,7 @@
                 <a:ea typeface="Arial" pitchFamily="34" charset="-122"/>
                 <a:cs typeface="Arial" pitchFamily="34" charset="-120"/>
               </a:rPr>
-              <a:t>「コンビニエンスストアやショッピングモールも徒歩5分圏内です」</a:t>
+              <a:t>「24時間営業のスーパーマーケットも利用可能です」</a:t>
             </a:r>
             <a:endParaRPr lang="en-US" sz="900" dirty="0"/>
           </a:p>
@@ -11003,7 +11003,7 @@
                 <a:ea typeface="Arial" pitchFamily="34" charset="-122"/>
                 <a:cs typeface="Arial" pitchFamily="34" charset="-120"/>
               </a:rPr>
-              <a:t>お風呂場が広くて快適だった</a:t>
+              <a:t>宿泊施設はとても清潔で快適でした</a:t>
             </a:r>
             <a:endParaRPr lang="en-US" sz="900" dirty="0"/>
           </a:p>
@@ -11042,7 +11042,7 @@
                 <a:ea typeface="Arial" pitchFamily="34" charset="-122"/>
                 <a:cs typeface="Arial" pitchFamily="34" charset="-120"/>
               </a:rPr>
-              <a:t>「シングルベッド2台の部屋を予約しましたが、私たちと子供1人にはちょうど良い広さでした」</a:t>
+              <a:t>「部屋自体もとても清潔で快適で居心地が良かったです」</a:t>
             </a:r>
             <a:endParaRPr lang="en-US" sz="900" dirty="0"/>
           </a:p>
@@ -12229,7 +12229,7 @@
                           <a:ea typeface="Arial" pitchFamily="34" charset="-122"/>
                           <a:cs typeface="Arial" pitchFamily="34" charset="-120"/>
                         </a:rPr>
-                        <a:t>部屋とバスルームが通常よりも広々としているのがとても気に入りました</a:t>
+                        <a:t>バスルームのアメニティは、階下のフロントデスクでセルフサービスで利用できました</a:t>
                       </a:r>
                       <a:endParaRPr lang="en-US" sz="900" dirty="0">
                         <a:latin typeface="Arial" charset="0"/>
@@ -12297,7 +12297,7 @@
                           <a:ea typeface="Arial" pitchFamily="34" charset="-122"/>
                           <a:cs typeface="Arial" pitchFamily="34" charset="-120"/>
                         </a:rPr>
-                        <a:t>15件</a:t>
+                        <a:t>17件</a:t>
                       </a:r>
                       <a:endParaRPr lang="en-US" sz="900" dirty="0">
                         <a:latin typeface="Arial" charset="0"/>
@@ -13531,7 +13531,7 @@
                           <a:ea typeface="Arial" pitchFamily="34" charset="-122"/>
                           <a:cs typeface="Arial" pitchFamily="34" charset="-120"/>
                         </a:rPr>
-                        <a:t>清掃不備</a:t>
+                        <a:t>臭い・匂い</a:t>
                       </a:r>
                       <a:endParaRPr lang="en-US" sz="900" dirty="0">
                         <a:latin typeface="Arial" charset="0"/>
@@ -13599,7 +13599,7 @@
                           <a:ea typeface="Arial" pitchFamily="34" charset="-122"/>
                           <a:cs typeface="Arial" pitchFamily="34" charset="-120"/>
                         </a:rPr>
-                        <a:t>タオル交換やゴミ捨ても毎日行ってくれました</a:t>
+                        <a:t>電車とバスの駅にも非常に近く（徒歩5～7分）、毎日清掃が行われ、部屋にタバコの臭いもありませんでした</a:t>
                       </a:r>
                       <a:endParaRPr lang="en-US" sz="900" dirty="0">
                         <a:latin typeface="Arial" charset="0"/>
@@ -13719,6 +13719,554 @@
                   </a:tcPr>
                 </a:tc>
               </a:tr>
+              <a:tr h="320040">
+                <a:tc>
+                  <a:txBody>
+                    <a:bodyPr/>
+                    <a:lstStyle/>
+                    <a:p>
+                      <a:pPr algn="ctr" indent="0" marL="0">
+                        <a:buNone/>
+                      </a:pPr>
+                      <a:r>
+                        <a:rPr lang="en-US" sz="1200" b="1" dirty="0">
+                          <a:solidFill>
+                            <a:srgbClr val="94A3B8"/>
+                          </a:solidFill>
+                          <a:latin typeface="Arial" pitchFamily="34" charset="0"/>
+                          <a:ea typeface="Arial" pitchFamily="34" charset="-122"/>
+                          <a:cs typeface="Arial" pitchFamily="34" charset="-120"/>
+                        </a:rPr>
+                        <a:t>C</a:t>
+                      </a:r>
+                      <a:endParaRPr lang="en-US" sz="1200" dirty="0">
+                        <a:latin typeface="Arial" charset="0"/>
+                        <a:ea typeface="Arial" charset="0"/>
+                        <a:cs typeface="Arial" charset="0"/>
+                      </a:endParaRPr>
+                    </a:p>
+                  </a:txBody>
+                  <a:tcPr marL="91440" marR="91440" marT="45720" marB="45720">
+                    <a:lnL w="6350" cap="flat" cmpd="sng" algn="ctr">
+                      <a:solidFill>
+                        <a:srgbClr val="CBD5E1"/>
+                      </a:solidFill>
+                      <a:prstDash val="solid"/>
+                      <a:round/>
+                      <a:headEnd type="none" w="med" len="med"/>
+                      <a:tailEnd type="none" w="med" len="med"/>
+                    </a:lnL>
+                    <a:lnR w="6350" cap="flat" cmpd="sng" algn="ctr">
+                      <a:solidFill>
+                        <a:srgbClr val="CBD5E1"/>
+                      </a:solidFill>
+                      <a:prstDash val="solid"/>
+                      <a:round/>
+                      <a:headEnd type="none" w="med" len="med"/>
+                      <a:tailEnd type="none" w="med" len="med"/>
+                    </a:lnR>
+                    <a:lnT w="6350" cap="flat" cmpd="sng" algn="ctr">
+                      <a:solidFill>
+                        <a:srgbClr val="CBD5E1"/>
+                      </a:solidFill>
+                      <a:prstDash val="solid"/>
+                      <a:round/>
+                      <a:headEnd type="none" w="med" len="med"/>
+                      <a:tailEnd type="none" w="med" len="med"/>
+                    </a:lnT>
+                    <a:lnB w="6350" cap="flat" cmpd="sng" algn="ctr">
+                      <a:solidFill>
+                        <a:srgbClr val="CBD5E1"/>
+                      </a:solidFill>
+                      <a:prstDash val="solid"/>
+                      <a:round/>
+                      <a:headEnd type="none" w="med" len="med"/>
+                      <a:tailEnd type="none" w="med" len="med"/>
+                    </a:lnB>
+                    <a:solidFill>
+                      <a:srgbClr val="FFFFFF"/>
+                    </a:solidFill>
+                  </a:tcPr>
+                </a:tc>
+                <a:tc>
+                  <a:txBody>
+                    <a:bodyPr/>
+                    <a:lstStyle/>
+                    <a:p>
+                      <a:pPr indent="0" marL="0">
+                        <a:buNone/>
+                      </a:pPr>
+                      <a:r>
+                        <a:rPr lang="en-US" sz="900" b="1" dirty="0">
+                          <a:solidFill>
+                            <a:srgbClr val="334155"/>
+                          </a:solidFill>
+                          <a:latin typeface="Arial" pitchFamily="34" charset="0"/>
+                          <a:ea typeface="Arial" pitchFamily="34" charset="-122"/>
+                          <a:cs typeface="Arial" pitchFamily="34" charset="-120"/>
+                        </a:rPr>
+                        <a:t>清掃不備</a:t>
+                      </a:r>
+                      <a:endParaRPr lang="en-US" sz="900" dirty="0">
+                        <a:latin typeface="Arial" charset="0"/>
+                        <a:ea typeface="Arial" charset="0"/>
+                        <a:cs typeface="Arial" charset="0"/>
+                      </a:endParaRPr>
+                    </a:p>
+                  </a:txBody>
+                  <a:tcPr marL="91440" marR="91440" marT="45720" marB="45720">
+                    <a:lnL w="6350" cap="flat" cmpd="sng" algn="ctr">
+                      <a:solidFill>
+                        <a:srgbClr val="CBD5E1"/>
+                      </a:solidFill>
+                      <a:prstDash val="solid"/>
+                      <a:round/>
+                      <a:headEnd type="none" w="med" len="med"/>
+                      <a:tailEnd type="none" w="med" len="med"/>
+                    </a:lnL>
+                    <a:lnR w="6350" cap="flat" cmpd="sng" algn="ctr">
+                      <a:solidFill>
+                        <a:srgbClr val="CBD5E1"/>
+                      </a:solidFill>
+                      <a:prstDash val="solid"/>
+                      <a:round/>
+                      <a:headEnd type="none" w="med" len="med"/>
+                      <a:tailEnd type="none" w="med" len="med"/>
+                    </a:lnR>
+                    <a:lnT w="6350" cap="flat" cmpd="sng" algn="ctr">
+                      <a:solidFill>
+                        <a:srgbClr val="CBD5E1"/>
+                      </a:solidFill>
+                      <a:prstDash val="solid"/>
+                      <a:round/>
+                      <a:headEnd type="none" w="med" len="med"/>
+                      <a:tailEnd type="none" w="med" len="med"/>
+                    </a:lnT>
+                    <a:lnB w="6350" cap="flat" cmpd="sng" algn="ctr">
+                      <a:solidFill>
+                        <a:srgbClr val="CBD5E1"/>
+                      </a:solidFill>
+                      <a:prstDash val="solid"/>
+                      <a:round/>
+                      <a:headEnd type="none" w="med" len="med"/>
+                      <a:tailEnd type="none" w="med" len="med"/>
+                    </a:lnB>
+                    <a:solidFill>
+                      <a:srgbClr val="FFFFFF"/>
+                    </a:solidFill>
+                  </a:tcPr>
+                </a:tc>
+                <a:tc>
+                  <a:txBody>
+                    <a:bodyPr/>
+                    <a:lstStyle/>
+                    <a:p>
+                      <a:pPr indent="0" marL="0">
+                        <a:buNone/>
+                      </a:pPr>
+                      <a:r>
+                        <a:rPr lang="en-US" sz="900" dirty="0">
+                          <a:solidFill>
+                            <a:srgbClr val="64748B"/>
+                          </a:solidFill>
+                          <a:latin typeface="Arial" pitchFamily="34" charset="0"/>
+                          <a:ea typeface="Arial" pitchFamily="34" charset="-122"/>
+                          <a:cs typeface="Arial" pitchFamily="34" charset="-120"/>
+                        </a:rPr>
+                        <a:t>タオル交換やゴミ捨ても毎日行ってくれました</a:t>
+                      </a:r>
+                      <a:endParaRPr lang="en-US" sz="900" dirty="0">
+                        <a:latin typeface="Arial" charset="0"/>
+                        <a:ea typeface="Arial" charset="0"/>
+                        <a:cs typeface="Arial" charset="0"/>
+                      </a:endParaRPr>
+                    </a:p>
+                  </a:txBody>
+                  <a:tcPr marL="91440" marR="91440" marT="45720" marB="45720">
+                    <a:lnL w="6350" cap="flat" cmpd="sng" algn="ctr">
+                      <a:solidFill>
+                        <a:srgbClr val="CBD5E1"/>
+                      </a:solidFill>
+                      <a:prstDash val="solid"/>
+                      <a:round/>
+                      <a:headEnd type="none" w="med" len="med"/>
+                      <a:tailEnd type="none" w="med" len="med"/>
+                    </a:lnL>
+                    <a:lnR w="6350" cap="flat" cmpd="sng" algn="ctr">
+                      <a:solidFill>
+                        <a:srgbClr val="CBD5E1"/>
+                      </a:solidFill>
+                      <a:prstDash val="solid"/>
+                      <a:round/>
+                      <a:headEnd type="none" w="med" len="med"/>
+                      <a:tailEnd type="none" w="med" len="med"/>
+                    </a:lnR>
+                    <a:lnT w="6350" cap="flat" cmpd="sng" algn="ctr">
+                      <a:solidFill>
+                        <a:srgbClr val="CBD5E1"/>
+                      </a:solidFill>
+                      <a:prstDash val="solid"/>
+                      <a:round/>
+                      <a:headEnd type="none" w="med" len="med"/>
+                      <a:tailEnd type="none" w="med" len="med"/>
+                    </a:lnT>
+                    <a:lnB w="6350" cap="flat" cmpd="sng" algn="ctr">
+                      <a:solidFill>
+                        <a:srgbClr val="CBD5E1"/>
+                      </a:solidFill>
+                      <a:prstDash val="solid"/>
+                      <a:round/>
+                      <a:headEnd type="none" w="med" len="med"/>
+                      <a:tailEnd type="none" w="med" len="med"/>
+                    </a:lnB>
+                    <a:solidFill>
+                      <a:srgbClr val="FFFFFF"/>
+                    </a:solidFill>
+                  </a:tcPr>
+                </a:tc>
+                <a:tc>
+                  <a:txBody>
+                    <a:bodyPr/>
+                    <a:lstStyle/>
+                    <a:p>
+                      <a:pPr algn="ctr" indent="0" marL="0">
+                        <a:buNone/>
+                      </a:pPr>
+                      <a:r>
+                        <a:rPr lang="en-US" sz="900" dirty="0">
+                          <a:solidFill>
+                            <a:srgbClr val="334155"/>
+                          </a:solidFill>
+                          <a:latin typeface="Arial" pitchFamily="34" charset="0"/>
+                          <a:ea typeface="Arial" pitchFamily="34" charset="-122"/>
+                          <a:cs typeface="Arial" pitchFamily="34" charset="-120"/>
+                        </a:rPr>
+                        <a:t>2件</a:t>
+                      </a:r>
+                      <a:endParaRPr lang="en-US" sz="900" dirty="0">
+                        <a:latin typeface="Arial" charset="0"/>
+                        <a:ea typeface="Arial" charset="0"/>
+                        <a:cs typeface="Arial" charset="0"/>
+                      </a:endParaRPr>
+                    </a:p>
+                  </a:txBody>
+                  <a:tcPr marL="91440" marR="91440" marT="45720" marB="45720">
+                    <a:lnL w="6350" cap="flat" cmpd="sng" algn="ctr">
+                      <a:solidFill>
+                        <a:srgbClr val="CBD5E1"/>
+                      </a:solidFill>
+                      <a:prstDash val="solid"/>
+                      <a:round/>
+                      <a:headEnd type="none" w="med" len="med"/>
+                      <a:tailEnd type="none" w="med" len="med"/>
+                    </a:lnL>
+                    <a:lnR w="6350" cap="flat" cmpd="sng" algn="ctr">
+                      <a:solidFill>
+                        <a:srgbClr val="CBD5E1"/>
+                      </a:solidFill>
+                      <a:prstDash val="solid"/>
+                      <a:round/>
+                      <a:headEnd type="none" w="med" len="med"/>
+                      <a:tailEnd type="none" w="med" len="med"/>
+                    </a:lnR>
+                    <a:lnT w="6350" cap="flat" cmpd="sng" algn="ctr">
+                      <a:solidFill>
+                        <a:srgbClr val="CBD5E1"/>
+                      </a:solidFill>
+                      <a:prstDash val="solid"/>
+                      <a:round/>
+                      <a:headEnd type="none" w="med" len="med"/>
+                      <a:tailEnd type="none" w="med" len="med"/>
+                    </a:lnT>
+                    <a:lnB w="6350" cap="flat" cmpd="sng" algn="ctr">
+                      <a:solidFill>
+                        <a:srgbClr val="CBD5E1"/>
+                      </a:solidFill>
+                      <a:prstDash val="solid"/>
+                      <a:round/>
+                      <a:headEnd type="none" w="med" len="med"/>
+                      <a:tailEnd type="none" w="med" len="med"/>
+                    </a:lnB>
+                    <a:solidFill>
+                      <a:srgbClr val="FFFFFF"/>
+                    </a:solidFill>
+                  </a:tcPr>
+                </a:tc>
+              </a:tr>
+              <a:tr h="320040">
+                <a:tc>
+                  <a:txBody>
+                    <a:bodyPr/>
+                    <a:lstStyle/>
+                    <a:p>
+                      <a:pPr algn="ctr" indent="0" marL="0">
+                        <a:buNone/>
+                      </a:pPr>
+                      <a:r>
+                        <a:rPr lang="en-US" sz="1200" b="1" dirty="0">
+                          <a:solidFill>
+                            <a:srgbClr val="94A3B8"/>
+                          </a:solidFill>
+                          <a:latin typeface="Arial" pitchFamily="34" charset="0"/>
+                          <a:ea typeface="Arial" pitchFamily="34" charset="-122"/>
+                          <a:cs typeface="Arial" pitchFamily="34" charset="-120"/>
+                        </a:rPr>
+                        <a:t>C</a:t>
+                      </a:r>
+                      <a:endParaRPr lang="en-US" sz="1200" dirty="0">
+                        <a:latin typeface="Arial" charset="0"/>
+                        <a:ea typeface="Arial" charset="0"/>
+                        <a:cs typeface="Arial" charset="0"/>
+                      </a:endParaRPr>
+                    </a:p>
+                  </a:txBody>
+                  <a:tcPr marL="91440" marR="91440" marT="45720" marB="45720">
+                    <a:lnL w="6350" cap="flat" cmpd="sng" algn="ctr">
+                      <a:solidFill>
+                        <a:srgbClr val="CBD5E1"/>
+                      </a:solidFill>
+                      <a:prstDash val="solid"/>
+                      <a:round/>
+                      <a:headEnd type="none" w="med" len="med"/>
+                      <a:tailEnd type="none" w="med" len="med"/>
+                    </a:lnL>
+                    <a:lnR w="6350" cap="flat" cmpd="sng" algn="ctr">
+                      <a:solidFill>
+                        <a:srgbClr val="CBD5E1"/>
+                      </a:solidFill>
+                      <a:prstDash val="solid"/>
+                      <a:round/>
+                      <a:headEnd type="none" w="med" len="med"/>
+                      <a:tailEnd type="none" w="med" len="med"/>
+                    </a:lnR>
+                    <a:lnT w="6350" cap="flat" cmpd="sng" algn="ctr">
+                      <a:solidFill>
+                        <a:srgbClr val="CBD5E1"/>
+                      </a:solidFill>
+                      <a:prstDash val="solid"/>
+                      <a:round/>
+                      <a:headEnd type="none" w="med" len="med"/>
+                      <a:tailEnd type="none" w="med" len="med"/>
+                    </a:lnT>
+                    <a:lnB w="6350" cap="flat" cmpd="sng" algn="ctr">
+                      <a:solidFill>
+                        <a:srgbClr val="CBD5E1"/>
+                      </a:solidFill>
+                      <a:prstDash val="solid"/>
+                      <a:round/>
+                      <a:headEnd type="none" w="med" len="med"/>
+                      <a:tailEnd type="none" w="med" len="med"/>
+                    </a:lnB>
+                    <a:solidFill>
+                      <a:srgbClr val="E8EFF8"/>
+                    </a:solidFill>
+                  </a:tcPr>
+                </a:tc>
+                <a:tc>
+                  <a:txBody>
+                    <a:bodyPr/>
+                    <a:lstStyle/>
+                    <a:p>
+                      <a:pPr indent="0" marL="0">
+                        <a:buNone/>
+                      </a:pPr>
+                      <a:r>
+                        <a:rPr lang="en-US" sz="900" b="1" dirty="0">
+                          <a:solidFill>
+                            <a:srgbClr val="334155"/>
+                          </a:solidFill>
+                          <a:latin typeface="Arial" pitchFamily="34" charset="0"/>
+                          <a:ea typeface="Arial" pitchFamily="34" charset="-122"/>
+                          <a:cs typeface="Arial" pitchFamily="34" charset="-120"/>
+                        </a:rPr>
+                        <a:t>窓・採光</a:t>
+                      </a:r>
+                      <a:endParaRPr lang="en-US" sz="900" dirty="0">
+                        <a:latin typeface="Arial" charset="0"/>
+                        <a:ea typeface="Arial" charset="0"/>
+                        <a:cs typeface="Arial" charset="0"/>
+                      </a:endParaRPr>
+                    </a:p>
+                  </a:txBody>
+                  <a:tcPr marL="91440" marR="91440" marT="45720" marB="45720">
+                    <a:lnL w="6350" cap="flat" cmpd="sng" algn="ctr">
+                      <a:solidFill>
+                        <a:srgbClr val="CBD5E1"/>
+                      </a:solidFill>
+                      <a:prstDash val="solid"/>
+                      <a:round/>
+                      <a:headEnd type="none" w="med" len="med"/>
+                      <a:tailEnd type="none" w="med" len="med"/>
+                    </a:lnL>
+                    <a:lnR w="6350" cap="flat" cmpd="sng" algn="ctr">
+                      <a:solidFill>
+                        <a:srgbClr val="CBD5E1"/>
+                      </a:solidFill>
+                      <a:prstDash val="solid"/>
+                      <a:round/>
+                      <a:headEnd type="none" w="med" len="med"/>
+                      <a:tailEnd type="none" w="med" len="med"/>
+                    </a:lnR>
+                    <a:lnT w="6350" cap="flat" cmpd="sng" algn="ctr">
+                      <a:solidFill>
+                        <a:srgbClr val="CBD5E1"/>
+                      </a:solidFill>
+                      <a:prstDash val="solid"/>
+                      <a:round/>
+                      <a:headEnd type="none" w="med" len="med"/>
+                      <a:tailEnd type="none" w="med" len="med"/>
+                    </a:lnT>
+                    <a:lnB w="6350" cap="flat" cmpd="sng" algn="ctr">
+                      <a:solidFill>
+                        <a:srgbClr val="CBD5E1"/>
+                      </a:solidFill>
+                      <a:prstDash val="solid"/>
+                      <a:round/>
+                      <a:headEnd type="none" w="med" len="med"/>
+                      <a:tailEnd type="none" w="med" len="med"/>
+                    </a:lnB>
+                    <a:solidFill>
+                      <a:srgbClr val="E8EFF8"/>
+                    </a:solidFill>
+                  </a:tcPr>
+                </a:tc>
+                <a:tc>
+                  <a:txBody>
+                    <a:bodyPr/>
+                    <a:lstStyle/>
+                    <a:p>
+                      <a:pPr indent="0" marL="0">
+                        <a:buNone/>
+                      </a:pPr>
+                      <a:r>
+                        <a:rPr lang="en-US" sz="900" dirty="0">
+                          <a:solidFill>
+                            <a:srgbClr val="64748B"/>
+                          </a:solidFill>
+                          <a:latin typeface="Arial" pitchFamily="34" charset="0"/>
+                          <a:ea typeface="Arial" pitchFamily="34" charset="-122"/>
+                          <a:cs typeface="Arial" pitchFamily="34" charset="-120"/>
+                        </a:rPr>
+                        <a:t>ベッドの横には景色が見える窓があり、テレビは携帯電話に接続できました</a:t>
+                      </a:r>
+                      <a:endParaRPr lang="en-US" sz="900" dirty="0">
+                        <a:latin typeface="Arial" charset="0"/>
+                        <a:ea typeface="Arial" charset="0"/>
+                        <a:cs typeface="Arial" charset="0"/>
+                      </a:endParaRPr>
+                    </a:p>
+                  </a:txBody>
+                  <a:tcPr marL="91440" marR="91440" marT="45720" marB="45720">
+                    <a:lnL w="6350" cap="flat" cmpd="sng" algn="ctr">
+                      <a:solidFill>
+                        <a:srgbClr val="CBD5E1"/>
+                      </a:solidFill>
+                      <a:prstDash val="solid"/>
+                      <a:round/>
+                      <a:headEnd type="none" w="med" len="med"/>
+                      <a:tailEnd type="none" w="med" len="med"/>
+                    </a:lnL>
+                    <a:lnR w="6350" cap="flat" cmpd="sng" algn="ctr">
+                      <a:solidFill>
+                        <a:srgbClr val="CBD5E1"/>
+                      </a:solidFill>
+                      <a:prstDash val="solid"/>
+                      <a:round/>
+                      <a:headEnd type="none" w="med" len="med"/>
+                      <a:tailEnd type="none" w="med" len="med"/>
+                    </a:lnR>
+                    <a:lnT w="6350" cap="flat" cmpd="sng" algn="ctr">
+                      <a:solidFill>
+                        <a:srgbClr val="CBD5E1"/>
+                      </a:solidFill>
+                      <a:prstDash val="solid"/>
+                      <a:round/>
+                      <a:headEnd type="none" w="med" len="med"/>
+                      <a:tailEnd type="none" w="med" len="med"/>
+                    </a:lnT>
+                    <a:lnB w="6350" cap="flat" cmpd="sng" algn="ctr">
+                      <a:solidFill>
+                        <a:srgbClr val="CBD5E1"/>
+                      </a:solidFill>
+                      <a:prstDash val="solid"/>
+                      <a:round/>
+                      <a:headEnd type="none" w="med" len="med"/>
+                      <a:tailEnd type="none" w="med" len="med"/>
+                    </a:lnB>
+                    <a:solidFill>
+                      <a:srgbClr val="E8EFF8"/>
+                    </a:solidFill>
+                  </a:tcPr>
+                </a:tc>
+                <a:tc>
+                  <a:txBody>
+                    <a:bodyPr/>
+                    <a:lstStyle/>
+                    <a:p>
+                      <a:pPr algn="ctr" indent="0" marL="0">
+                        <a:buNone/>
+                      </a:pPr>
+                      <a:r>
+                        <a:rPr lang="en-US" sz="900" dirty="0">
+                          <a:solidFill>
+                            <a:srgbClr val="334155"/>
+                          </a:solidFill>
+                          <a:latin typeface="Arial" pitchFamily="34" charset="0"/>
+                          <a:ea typeface="Arial" pitchFamily="34" charset="-122"/>
+                          <a:cs typeface="Arial" pitchFamily="34" charset="-120"/>
+                        </a:rPr>
+                        <a:t>1件</a:t>
+                      </a:r>
+                      <a:endParaRPr lang="en-US" sz="900" dirty="0">
+                        <a:latin typeface="Arial" charset="0"/>
+                        <a:ea typeface="Arial" charset="0"/>
+                        <a:cs typeface="Arial" charset="0"/>
+                      </a:endParaRPr>
+                    </a:p>
+                  </a:txBody>
+                  <a:tcPr marL="91440" marR="91440" marT="45720" marB="45720">
+                    <a:lnL w="6350" cap="flat" cmpd="sng" algn="ctr">
+                      <a:solidFill>
+                        <a:srgbClr val="CBD5E1"/>
+                      </a:solidFill>
+                      <a:prstDash val="solid"/>
+                      <a:round/>
+                      <a:headEnd type="none" w="med" len="med"/>
+                      <a:tailEnd type="none" w="med" len="med"/>
+                    </a:lnL>
+                    <a:lnR w="6350" cap="flat" cmpd="sng" algn="ctr">
+                      <a:solidFill>
+                        <a:srgbClr val="CBD5E1"/>
+                      </a:solidFill>
+                      <a:prstDash val="solid"/>
+                      <a:round/>
+                      <a:headEnd type="none" w="med" len="med"/>
+                      <a:tailEnd type="none" w="med" len="med"/>
+                    </a:lnR>
+                    <a:lnT w="6350" cap="flat" cmpd="sng" algn="ctr">
+                      <a:solidFill>
+                        <a:srgbClr val="CBD5E1"/>
+                      </a:solidFill>
+                      <a:prstDash val="solid"/>
+                      <a:round/>
+                      <a:headEnd type="none" w="med" len="med"/>
+                      <a:tailEnd type="none" w="med" len="med"/>
+                    </a:lnT>
+                    <a:lnB w="6350" cap="flat" cmpd="sng" algn="ctr">
+                      <a:solidFill>
+                        <a:srgbClr val="CBD5E1"/>
+                      </a:solidFill>
+                      <a:prstDash val="solid"/>
+                      <a:round/>
+                      <a:headEnd type="none" w="med" len="med"/>
+                      <a:tailEnd type="none" w="med" len="med"/>
+                    </a:lnB>
+                    <a:solidFill>
+                      <a:srgbClr val="E8EFF8"/>
+                    </a:solidFill>
+                  </a:tcPr>
+                </a:tc>
+              </a:tr>
             </a:tbl>
           </a:graphicData>
         </a:graphic>
@@ -14207,6 +14755,177 @@
                 <a:ea typeface="Arial" pitchFamily="34" charset="-122"/>
                 <a:cs typeface="Arial" pitchFamily="34" charset="-120"/>
               </a:rPr>
+              <a:t>客室の消臭対策の強化</a:t>
+            </a:r>
+            <a:endParaRPr lang="en-US" sz="1200" dirty="0"/>
+          </a:p>
+        </p:txBody>
+      </p:sp>
+      <p:sp>
+        <p:nvSpPr>
+          <p:cNvPr id="9" name="Text 7"/>
+          <p:cNvSpPr/>
+          <p:nvPr/>
+        </p:nvSpPr>
+        <p:spPr>
+          <a:xfrm>
+            <a:off x="594360" y="1600200"/>
+            <a:ext cx="3657600" cy="1188720"/>
+          </a:xfrm>
+          <a:prstGeom prst="rect">
+            <a:avLst/>
+          </a:prstGeom>
+          <a:noFill/>
+          <a:ln/>
+        </p:spPr>
+        <p:txBody>
+          <a:bodyPr wrap="square" lIns="0" tIns="0" rIns="0" bIns="0" rtlCol="0" anchor="ctr"/>
+          <a:lstStyle/>
+          <a:p>
+            <a:pPr marL="342900" indent="-342900">
+              <a:spcAft>
+                <a:spcPts val="300"/>
+              </a:spcAft>
+              <a:buSzPct val="100000"/>
+              <a:buChar char="•"/>
+            </a:pPr>
+            <a:r>
+              <a:rPr lang="en-US" sz="900" dirty="0">
+                <a:solidFill>
+                  <a:srgbClr val="334155"/>
+                </a:solidFill>
+                <a:latin typeface="Arial" pitchFamily="34" charset="0"/>
+                <a:ea typeface="Arial" pitchFamily="34" charset="-122"/>
+                <a:cs typeface="Arial" pitchFamily="34" charset="-120"/>
+              </a:rPr>
+              <a:t>チェックアウト後の換気・消臭スプレー処理の徹底</a:t>
+            </a:r>
+            <a:endParaRPr lang="en-US" sz="900" dirty="0"/>
+          </a:p>
+          <a:p>
+            <a:pPr marL="342900" indent="-342900">
+              <a:spcAft>
+                <a:spcPts val="300"/>
+              </a:spcAft>
+              <a:buSzPct val="100000"/>
+              <a:buChar char="•"/>
+            </a:pPr>
+            <a:r>
+              <a:rPr lang="en-US" sz="900" dirty="0">
+                <a:solidFill>
+                  <a:srgbClr val="334155"/>
+                </a:solidFill>
+                <a:latin typeface="Arial" pitchFamily="34" charset="0"/>
+                <a:ea typeface="Arial" pitchFamily="34" charset="-122"/>
+                <a:cs typeface="Arial" pitchFamily="34" charset="-120"/>
+              </a:rPr>
+              <a:t>定期的な脱臭剤の設置と交換フローの確立</a:t>
+            </a:r>
+            <a:endParaRPr lang="en-US" sz="900" dirty="0"/>
+          </a:p>
+          <a:p>
+            <a:pPr marL="342900" indent="-342900">
+              <a:spcAft>
+                <a:spcPts val="300"/>
+              </a:spcAft>
+              <a:buSzPct val="100000"/>
+              <a:buChar char="•"/>
+            </a:pPr>
+            <a:r>
+              <a:rPr lang="en-US" sz="900" dirty="0">
+                <a:solidFill>
+                  <a:srgbClr val="334155"/>
+                </a:solidFill>
+                <a:latin typeface="Arial" pitchFamily="34" charset="0"/>
+                <a:ea typeface="Arial" pitchFamily="34" charset="-122"/>
+                <a:cs typeface="Arial" pitchFamily="34" charset="-120"/>
+              </a:rPr>
+              <a:t>喫煙・臭いに関するクレーム発生時の即座対応マニュアル作成</a:t>
+            </a:r>
+            <a:endParaRPr lang="en-US" sz="900" dirty="0"/>
+          </a:p>
+        </p:txBody>
+      </p:sp>
+      <p:sp>
+        <p:nvSpPr>
+          <p:cNvPr id="10" name="Shape 8"/>
+          <p:cNvSpPr/>
+          <p:nvPr/>
+        </p:nvSpPr>
+        <p:spPr>
+          <a:xfrm>
+            <a:off x="4663440" y="1234440"/>
+            <a:ext cx="3977640" cy="1600200"/>
+          </a:xfrm>
+          <a:prstGeom prst="rect">
+            <a:avLst/>
+          </a:prstGeom>
+          <a:solidFill>
+            <a:srgbClr val="FFFFFF"/>
+          </a:solidFill>
+          <a:ln/>
+          <a:effectLst>
+            <a:outerShdw sx="100000" sy="100000" kx="0" ky="0" algn="bl" rotWithShape="0" blurRad="50800" dist="25400" dir="8100000">
+              <a:srgbClr val="000000">
+                <a:alpha val="10000"/>
+              </a:srgbClr>
+            </a:outerShdw>
+          </a:effectLst>
+        </p:spPr>
+      </p:sp>
+      <p:sp>
+        <p:nvSpPr>
+          <p:cNvPr id="11" name="Shape 9"/>
+          <p:cNvSpPr/>
+          <p:nvPr/>
+        </p:nvSpPr>
+        <p:spPr>
+          <a:xfrm>
+            <a:off x="4663440" y="1234440"/>
+            <a:ext cx="54864" cy="1600200"/>
+          </a:xfrm>
+          <a:prstGeom prst="rect">
+            <a:avLst/>
+          </a:prstGeom>
+          <a:solidFill>
+            <a:srgbClr val="3B7DD8"/>
+          </a:solidFill>
+          <a:ln/>
+        </p:spPr>
+      </p:sp>
+      <p:sp>
+        <p:nvSpPr>
+          <p:cNvPr id="12" name="Text 10"/>
+          <p:cNvSpPr/>
+          <p:nvPr/>
+        </p:nvSpPr>
+        <p:spPr>
+          <a:xfrm>
+            <a:off x="4800600" y="1280160"/>
+            <a:ext cx="3657600" cy="320040"/>
+          </a:xfrm>
+          <a:prstGeom prst="rect">
+            <a:avLst/>
+          </a:prstGeom>
+          <a:noFill/>
+          <a:ln/>
+        </p:spPr>
+        <p:txBody>
+          <a:bodyPr wrap="square" lIns="0" tIns="0" rIns="0" bIns="0" rtlCol="0" anchor="ctr"/>
+          <a:lstStyle/>
+          <a:p>
+            <a:pPr indent="0" marL="0">
+              <a:buNone/>
+            </a:pPr>
+            <a:r>
+              <a:rPr lang="en-US" sz="1200" b="1" dirty="0">
+                <a:solidFill>
+                  <a:srgbClr val="1A2744"/>
+                </a:solidFill>
+                <a:latin typeface="Arial" pitchFamily="34" charset="0"/>
+                <a:ea typeface="Arial" pitchFamily="34" charset="-122"/>
+                <a:cs typeface="Arial" pitchFamily="34" charset="-120"/>
+              </a:rPr>
               <a:t>清掃品質の向上</a:t>
             </a:r>
             <a:endParaRPr lang="en-US" sz="1200" dirty="0"/>
@@ -14215,13 +14934,13 @@
       </p:sp>
       <p:sp>
         <p:nvSpPr>
-          <p:cNvPr id="9" name="Text 7"/>
-          <p:cNvSpPr/>
-          <p:nvPr/>
-        </p:nvSpPr>
-        <p:spPr>
-          <a:xfrm>
-            <a:off x="594360" y="1600200"/>
+          <p:cNvPr id="13" name="Text 11"/>
+          <p:cNvSpPr/>
+          <p:nvPr/>
+        </p:nvSpPr>
+        <p:spPr>
+          <a:xfrm>
+            <a:off x="4800600" y="1600200"/>
             <a:ext cx="3657600" cy="1188720"/>
           </a:xfrm>
           <a:prstGeom prst="rect">
@@ -14300,13 +15019,13 @@
       </p:sp>
       <p:sp>
         <p:nvSpPr>
-          <p:cNvPr id="10" name="Shape 8"/>
-          <p:cNvSpPr/>
-          <p:nvPr/>
-        </p:nvSpPr>
-        <p:spPr>
-          <a:xfrm>
-            <a:off x="4663440" y="1234440"/>
+          <p:cNvPr id="14" name="Shape 12"/>
+          <p:cNvSpPr/>
+          <p:nvPr/>
+        </p:nvSpPr>
+        <p:spPr>
+          <a:xfrm>
+            <a:off x="457200" y="3017520"/>
             <a:ext cx="3977640" cy="1600200"/>
           </a:xfrm>
           <a:prstGeom prst="rect">
@@ -14327,13 +15046,13 @@
       </p:sp>
       <p:sp>
         <p:nvSpPr>
-          <p:cNvPr id="11" name="Shape 9"/>
-          <p:cNvSpPr/>
-          <p:nvPr/>
-        </p:nvSpPr>
-        <p:spPr>
-          <a:xfrm>
-            <a:off x="4663440" y="1234440"/>
+          <p:cNvPr id="15" name="Shape 13"/>
+          <p:cNvSpPr/>
+          <p:nvPr/>
+        </p:nvSpPr>
+        <p:spPr>
+          <a:xfrm>
+            <a:off x="457200" y="3017520"/>
             <a:ext cx="54864" cy="1600200"/>
           </a:xfrm>
           <a:prstGeom prst="rect">
@@ -14347,13 +15066,13 @@
       </p:sp>
       <p:sp>
         <p:nvSpPr>
-          <p:cNvPr id="12" name="Text 10"/>
-          <p:cNvSpPr/>
-          <p:nvPr/>
-        </p:nvSpPr>
-        <p:spPr>
-          <a:xfrm>
-            <a:off x="4800600" y="1280160"/>
+          <p:cNvPr id="16" name="Text 14"/>
+          <p:cNvSpPr/>
+          <p:nvPr/>
+        </p:nvSpPr>
+        <p:spPr>
+          <a:xfrm>
+            <a:off x="594360" y="3063240"/>
             <a:ext cx="3657600" cy="320040"/>
           </a:xfrm>
           <a:prstGeom prst="rect">
@@ -14386,13 +15105,13 @@
       </p:sp>
       <p:sp>
         <p:nvSpPr>
-          <p:cNvPr id="13" name="Text 11"/>
-          <p:cNvSpPr/>
-          <p:nvPr/>
-        </p:nvSpPr>
-        <p:spPr>
-          <a:xfrm>
-            <a:off x="4800600" y="1600200"/>
+          <p:cNvPr id="17" name="Text 15"/>
+          <p:cNvSpPr/>
+          <p:nvPr/>
+        </p:nvSpPr>
+        <p:spPr>
+          <a:xfrm>
+            <a:off x="594360" y="3383280"/>
             <a:ext cx="3657600" cy="1188720"/>
           </a:xfrm>
           <a:prstGeom prst="rect">
@@ -14471,13 +15190,13 @@
       </p:sp>
       <p:sp>
         <p:nvSpPr>
-          <p:cNvPr id="14" name="Shape 12"/>
-          <p:cNvSpPr/>
-          <p:nvPr/>
-        </p:nvSpPr>
-        <p:spPr>
-          <a:xfrm>
-            <a:off x="457200" y="3017520"/>
+          <p:cNvPr id="18" name="Shape 16"/>
+          <p:cNvSpPr/>
+          <p:nvPr/>
+        </p:nvSpPr>
+        <p:spPr>
+          <a:xfrm>
+            <a:off x="4663440" y="3017520"/>
             <a:ext cx="3977640" cy="1600200"/>
           </a:xfrm>
           <a:prstGeom prst="rect">
@@ -14498,13 +15217,13 @@
       </p:sp>
       <p:sp>
         <p:nvSpPr>
-          <p:cNvPr id="15" name="Shape 13"/>
-          <p:cNvSpPr/>
-          <p:nvPr/>
-        </p:nvSpPr>
-        <p:spPr>
-          <a:xfrm>
-            <a:off x="457200" y="3017520"/>
+          <p:cNvPr id="19" name="Shape 17"/>
+          <p:cNvSpPr/>
+          <p:nvPr/>
+        </p:nvSpPr>
+        <p:spPr>
+          <a:xfrm>
+            <a:off x="4663440" y="3017520"/>
             <a:ext cx="54864" cy="1600200"/>
           </a:xfrm>
           <a:prstGeom prst="rect">
@@ -14518,13 +15237,13 @@
       </p:sp>
       <p:sp>
         <p:nvSpPr>
-          <p:cNvPr id="16" name="Text 14"/>
-          <p:cNvSpPr/>
-          <p:nvPr/>
-        </p:nvSpPr>
-        <p:spPr>
-          <a:xfrm>
-            <a:off x="594360" y="3063240"/>
+          <p:cNvPr id="20" name="Text 18"/>
+          <p:cNvSpPr/>
+          <p:nvPr/>
+        </p:nvSpPr>
+        <p:spPr>
+          <a:xfrm>
+            <a:off x="4800600" y="3063240"/>
             <a:ext cx="3657600" cy="320040"/>
           </a:xfrm>
           <a:prstGeom prst="rect">
@@ -14557,13 +15276,13 @@
       </p:sp>
       <p:sp>
         <p:nvSpPr>
-          <p:cNvPr id="17" name="Text 15"/>
-          <p:cNvSpPr/>
-          <p:nvPr/>
-        </p:nvSpPr>
-        <p:spPr>
-          <a:xfrm>
-            <a:off x="594360" y="3383280"/>
+          <p:cNvPr id="21" name="Text 19"/>
+          <p:cNvSpPr/>
+          <p:nvPr/>
+        </p:nvSpPr>
+        <p:spPr>
+          <a:xfrm>
+            <a:off x="4800600" y="3383280"/>
             <a:ext cx="3657600" cy="1188720"/>
           </a:xfrm>
           <a:prstGeom prst="rect">
@@ -14642,7 +15361,7 @@
       </p:sp>
       <p:sp>
         <p:nvSpPr>
-          <p:cNvPr id="18" name="Shape 16"/>
+          <p:cNvPr id="22" name="Shape 20"/>
           <p:cNvSpPr/>
           <p:nvPr/>
         </p:nvSpPr>
@@ -14662,7 +15381,7 @@
       </p:sp>
       <p:sp>
         <p:nvSpPr>
-          <p:cNvPr id="19" name="Text 17"/>
+          <p:cNvPr id="23" name="Text 21"/>
           <p:cNvSpPr/>
           <p:nvPr/>
         </p:nvSpPr>
@@ -14701,7 +15420,7 @@
       </p:sp>
       <p:sp>
         <p:nvSpPr>
-          <p:cNvPr id="20" name="Text 18"/>
+          <p:cNvPr id="24" name="Text 22"/>
           <p:cNvSpPr/>
           <p:nvPr/>
         </p:nvSpPr>
@@ -15235,7 +15954,7 @@
                 <a:ea typeface="Arial" pitchFamily="34" charset="-122"/>
                 <a:cs typeface="Arial" pitchFamily="34" charset="-120"/>
               </a:rPr>
-              <a:t>口コミ返信体制の構築</a:t>
+              <a:t>窓・採光環境の改善</a:t>
             </a:r>
             <a:endParaRPr lang="en-US" sz="1000" dirty="0"/>
           </a:p>
@@ -15250,7 +15969,7 @@
         <p:spPr>
           <a:xfrm>
             <a:off x="640080" y="3803904"/>
-            <a:ext cx="3474720" cy="493776"/>
+            <a:ext cx="3474720" cy="694944"/>
           </a:xfrm>
           <a:prstGeom prst="rect">
             <a:avLst/>
@@ -15278,7 +15997,7 @@
                 <a:ea typeface="Arial" pitchFamily="34" charset="-122"/>
                 <a:cs typeface="Arial" pitchFamily="34" charset="-120"/>
               </a:rPr>
-              <a:t>全サイトの口コミに48時間以内の返信を目標に設定</a:t>
+              <a:t>遮光カーテンとレースカーテンの品質見直し</a:t>
             </a:r>
             <a:endParaRPr lang="en-US" sz="900" dirty="0"/>
           </a:p>
@@ -15299,7 +16018,28 @@
                 <a:ea typeface="Arial" pitchFamily="34" charset="-122"/>
                 <a:cs typeface="Arial" pitchFamily="34" charset="-120"/>
               </a:rPr>
-              <a:t>特に低評価レビューへのフォローアップ強化</a:t>
+              <a:t>窓の開閉可否に関する事前案内の徹底</a:t>
+            </a:r>
+            <a:endParaRPr lang="en-US" sz="900" dirty="0"/>
+          </a:p>
+          <a:p>
+            <a:pPr marL="342900" indent="-342900">
+              <a:spcAft>
+                <a:spcPts val="200"/>
+              </a:spcAft>
+              <a:buSzPct val="100000"/>
+              <a:buChar char="•"/>
+            </a:pPr>
+            <a:r>
+              <a:rPr lang="en-US" sz="900" dirty="0">
+                <a:solidFill>
+                  <a:srgbClr val="64748B"/>
+                </a:solidFill>
+                <a:latin typeface="Arial" pitchFamily="34" charset="0"/>
+                <a:ea typeface="Arial" pitchFamily="34" charset="-122"/>
+                <a:cs typeface="Arial" pitchFamily="34" charset="-120"/>
+              </a:rPr>
+              <a:t>採光の良い客室の優先割り当てルール整備</a:t>
             </a:r>
             <a:endParaRPr lang="en-US" sz="900" dirty="0"/>
           </a:p>

--- a/納品レポート/ホテル別レポート/keisei_kinshicho_口コミ分析レポート.pptx
+++ b/納品レポート/ホテル別レポート/keisei_kinshicho_口コミ分析レポート.pptx
@@ -205,10 +205,10 @@
                   <c:v>9.48</c:v>
                 </c:pt>
                 <c:pt idx="1">
-                  <c:v>9.18</c:v>
+                  <c:v>9.22</c:v>
                 </c:pt>
                 <c:pt idx="2">
-                  <c:v>8.78</c:v>
+                  <c:v>8.8</c:v>
                 </c:pt>
                 <c:pt idx="3">
                   <c:v>8</c:v>
@@ -554,7 +554,7 @@
               <c:numCache>
                 <c:ptCount val="3"/>
                 <c:pt idx="0">
-                  <c:v>114</c:v>
+                  <c:v>116</c:v>
                 </c:pt>
                 <c:pt idx="1">
                   <c:v>12</c:v>
@@ -783,7 +783,7 @@
                 <c:formatCode>General</c:formatCode>
                 <c:ptCount val="7"/>
                 <c:pt idx="0">
-                  <c:v>70</c:v>
+                  <c:v>72</c:v>
                 </c:pt>
                 <c:pt idx="1">
                   <c:v>25</c:v>
@@ -2752,7 +2752,7 @@
                 <a:ea typeface="Arial" pitchFamily="34" charset="-122"/>
                 <a:cs typeface="Arial" pitchFamily="34" charset="-120"/>
               </a:rPr>
-              <a:t>レビュー総数：127件（4サイト）</a:t>
+              <a:t>レビュー総数：129件（4サイト）</a:t>
             </a:r>
             <a:endParaRPr lang="en-US" sz="1000" dirty="0"/>
           </a:p>
@@ -2772,7 +2772,7 @@
                 <a:ea typeface="Arial" pitchFamily="34" charset="-122"/>
                 <a:cs typeface="Arial" pitchFamily="34" charset="-120"/>
               </a:rPr>
-              <a:t>作成日：2026年3月25日</a:t>
+              <a:t>作成日：2026年3月26日</a:t>
             </a:r>
             <a:endParaRPr lang="en-US" sz="1000" dirty="0"/>
           </a:p>
@@ -3318,7 +3318,7 @@
                           <a:ea typeface="Arial" pitchFamily="34" charset="-122"/>
                           <a:cs typeface="Arial" pitchFamily="34" charset="-120"/>
                         </a:rPr>
-                        <a:t>9.12点</a:t>
+                        <a:t>9.13点</a:t>
                       </a:r>
                       <a:endParaRPr lang="en-US" sz="1000" dirty="0">
                         <a:latin typeface="Arial" charset="0"/>
@@ -3592,7 +3592,7 @@
                           <a:ea typeface="Arial" pitchFamily="34" charset="-122"/>
                           <a:cs typeface="Arial" pitchFamily="34" charset="-120"/>
                         </a:rPr>
-                        <a:t>89.8%</a:t>
+                        <a:t>89.9%</a:t>
                       </a:r>
                       <a:endParaRPr lang="en-US" sz="1000" dirty="0">
                         <a:latin typeface="Arial" charset="0"/>
@@ -4688,7 +4688,7 @@
                           <a:ea typeface="Arial" pitchFamily="34" charset="-122"/>
                           <a:cs typeface="Arial" pitchFamily="34" charset="-120"/>
                         </a:rPr>
-                        <a:t>約18件/期間</a:t>
+                        <a:t>約19件/期間</a:t>
                       </a:r>
                       <a:endParaRPr lang="en-US" sz="1000" dirty="0">
                         <a:latin typeface="Arial" charset="0"/>
@@ -5327,7 +5327,7 @@
                 <a:ea typeface="Arial" pitchFamily="34" charset="-122"/>
                 <a:cs typeface="Arial" pitchFamily="34" charset="-120"/>
               </a:rPr>
-              <a:t>9.12</a:t>
+              <a:t>9.13</a:t>
             </a:r>
             <a:endParaRPr lang="en-US" sz="3200" dirty="0"/>
           </a:p>
@@ -5452,7 +5452,7 @@
                 <a:ea typeface="Arial" pitchFamily="34" charset="-122"/>
                 <a:cs typeface="Arial" pitchFamily="34" charset="-120"/>
               </a:rPr>
-              <a:t>89.8%</a:t>
+              <a:t>89.9%</a:t>
             </a:r>
             <a:endParaRPr lang="en-US" sz="3200" dirty="0"/>
           </a:p>
@@ -5702,7 +5702,7 @@
                 <a:ea typeface="Arial" pitchFamily="34" charset="-122"/>
                 <a:cs typeface="Arial" pitchFamily="34" charset="-120"/>
               </a:rPr>
-              <a:t>127件</a:t>
+              <a:t>129件</a:t>
             </a:r>
             <a:endParaRPr lang="en-US" sz="3200" dirty="0"/>
           </a:p>
@@ -6078,7 +6078,7 @@
                 <a:ea typeface="Arial" pitchFamily="34" charset="-122"/>
                 <a:cs typeface="Arial" pitchFamily="34" charset="-120"/>
               </a:rPr>
-              <a:t>  This area is less crowded, with a couple of malls nearby ...</a:t>
+              <a:t>  La proximité avec la gare, Le petit déjeuner, L'accueil e...</a:t>
             </a:r>
             <a:endParaRPr lang="en-US" sz="1100" dirty="0"/>
           </a:p>
@@ -6511,7 +6511,7 @@
                 <a:ea typeface="Arial" pitchFamily="34" charset="-122"/>
                 <a:cs typeface="Arial" pitchFamily="34" charset="-120"/>
               </a:rPr>
-              <a:t>9.12</a:t>
+              <a:t>9.13</a:t>
             </a:r>
             <a:endParaRPr lang="en-US" sz="3200" dirty="0"/>
           </a:p>
@@ -6636,7 +6636,7 @@
                 <a:ea typeface="Arial" pitchFamily="34" charset="-122"/>
                 <a:cs typeface="Arial" pitchFamily="34" charset="-120"/>
               </a:rPr>
-              <a:t>89.8%</a:t>
+              <a:t>89.9%</a:t>
             </a:r>
             <a:endParaRPr lang="en-US" sz="3200" dirty="0"/>
           </a:p>
@@ -6886,7 +6886,7 @@
                 <a:ea typeface="Arial" pitchFamily="34" charset="-122"/>
                 <a:cs typeface="Arial" pitchFamily="34" charset="-120"/>
               </a:rPr>
-              <a:t>127件</a:t>
+              <a:t>129件</a:t>
             </a:r>
             <a:endParaRPr lang="en-US" sz="3200" dirty="0"/>
           </a:p>
@@ -8207,7 +8207,7 @@
                           <a:ea typeface="Arial" pitchFamily="34" charset="-122"/>
                           <a:cs typeface="Arial" pitchFamily="34" charset="-120"/>
                         </a:rPr>
-                        <a:t>22</a:t>
+                        <a:t>23</a:t>
                       </a:r>
                       <a:endParaRPr lang="en-US" sz="900" dirty="0">
                         <a:latin typeface="Arial" charset="0"/>
@@ -8275,7 +8275,7 @@
                           <a:ea typeface="Arial" pitchFamily="34" charset="-122"/>
                           <a:cs typeface="Arial" pitchFamily="34" charset="-120"/>
                         </a:rPr>
-                        <a:t>4.59</a:t>
+                        <a:t>4.61</a:t>
                       </a:r>
                       <a:endParaRPr lang="en-US" sz="900" dirty="0">
                         <a:latin typeface="Arial" charset="0"/>
@@ -8411,7 +8411,7 @@
                           <a:ea typeface="Arial" pitchFamily="34" charset="-122"/>
                           <a:cs typeface="Arial" pitchFamily="34" charset="-120"/>
                         </a:rPr>
-                        <a:t>9.18</a:t>
+                        <a:t>9.22</a:t>
                       </a:r>
                       <a:endParaRPr lang="en-US" sz="900" dirty="0">
                         <a:latin typeface="Arial" charset="0"/>
@@ -8549,7 +8549,7 @@
                           <a:ea typeface="Arial" pitchFamily="34" charset="-122"/>
                           <a:cs typeface="Arial" pitchFamily="34" charset="-120"/>
                         </a:rPr>
-                        <a:t>50</a:t>
+                        <a:t>51</a:t>
                       </a:r>
                       <a:endParaRPr lang="en-US" sz="900" dirty="0">
                         <a:latin typeface="Arial" charset="0"/>
@@ -8617,7 +8617,7 @@
                           <a:ea typeface="Arial" pitchFamily="34" charset="-122"/>
                           <a:cs typeface="Arial" pitchFamily="34" charset="-120"/>
                         </a:rPr>
-                        <a:t>8.78</a:t>
+                        <a:t>8.8</a:t>
                       </a:r>
                       <a:endParaRPr lang="en-US" sz="900" dirty="0">
                         <a:latin typeface="Arial" charset="0"/>
@@ -8753,7 +8753,7 @@
                           <a:ea typeface="Arial" pitchFamily="34" charset="-122"/>
                           <a:cs typeface="Arial" pitchFamily="34" charset="-120"/>
                         </a:rPr>
-                        <a:t>8.78</a:t>
+                        <a:t>8.8</a:t>
                       </a:r>
                       <a:endParaRPr lang="en-US" sz="900" dirty="0">
                         <a:latin typeface="Arial" charset="0"/>
@@ -9503,7 +9503,7 @@
                 <a:ea typeface="Arial" pitchFamily="34" charset="-122"/>
                 <a:cs typeface="Arial" pitchFamily="34" charset="-120"/>
               </a:rPr>
-              <a:t>114件（89.8%）</a:t>
+              <a:t>116件（89.9%）</a:t>
             </a:r>
             <a:endParaRPr lang="en-US" sz="1100" dirty="0"/>
           </a:p>
@@ -9601,7 +9601,7 @@
                 <a:ea typeface="Arial" pitchFamily="34" charset="-122"/>
                 <a:cs typeface="Arial" pitchFamily="34" charset="-120"/>
               </a:rPr>
-              <a:t>12件（9.4%）</a:t>
+              <a:t>12件（9.3%）</a:t>
             </a:r>
             <a:endParaRPr lang="en-US" sz="1100" dirty="0"/>
           </a:p>
@@ -10741,6 +10741,229 @@
                 <a:ea typeface="Arial" pitchFamily="34" charset="-122"/>
                 <a:cs typeface="Arial" pitchFamily="34" charset="-120"/>
               </a:rPr>
+              <a:t>快適さ・設備</a:t>
+            </a:r>
+            <a:endParaRPr lang="en-US" sz="1300" dirty="0"/>
+          </a:p>
+        </p:txBody>
+      </p:sp>
+      <p:sp>
+        <p:nvSpPr>
+          <p:cNvPr id="31" name="Text 29"/>
+          <p:cNvSpPr/>
+          <p:nvPr/>
+        </p:nvSpPr>
+        <p:spPr>
+          <a:xfrm>
+            <a:off x="594360" y="3246120"/>
+            <a:ext cx="2377440" cy="365760"/>
+          </a:xfrm>
+          <a:prstGeom prst="rect">
+            <a:avLst/>
+          </a:prstGeom>
+          <a:noFill/>
+          <a:ln/>
+        </p:spPr>
+        <p:txBody>
+          <a:bodyPr wrap="square" lIns="0" tIns="0" rIns="0" bIns="0" rtlCol="0" anchor="ctr"/>
+          <a:lstStyle/>
+          <a:p>
+            <a:pPr indent="0" marL="0">
+              <a:buNone/>
+            </a:pPr>
+            <a:r>
+              <a:rPr lang="en-US" sz="900" dirty="0">
+                <a:solidFill>
+                  <a:srgbClr val="64748B"/>
+                </a:solidFill>
+                <a:latin typeface="Arial" pitchFamily="34" charset="0"/>
+                <a:ea typeface="Arial" pitchFamily="34" charset="-122"/>
+                <a:cs typeface="Arial" pitchFamily="34" charset="-120"/>
+              </a:rPr>
+              <a:t>宿泊施設はとても清潔で快適でした</a:t>
+            </a:r>
+            <a:endParaRPr lang="en-US" sz="900" dirty="0"/>
+          </a:p>
+        </p:txBody>
+      </p:sp>
+      <p:sp>
+        <p:nvSpPr>
+          <p:cNvPr id="32" name="Text 30"/>
+          <p:cNvSpPr/>
+          <p:nvPr/>
+        </p:nvSpPr>
+        <p:spPr>
+          <a:xfrm>
+            <a:off x="594360" y="3657600"/>
+            <a:ext cx="2377440" cy="640080"/>
+          </a:xfrm>
+          <a:prstGeom prst="rect">
+            <a:avLst/>
+          </a:prstGeom>
+          <a:noFill/>
+          <a:ln/>
+        </p:spPr>
+        <p:txBody>
+          <a:bodyPr wrap="square" lIns="0" tIns="0" rIns="0" bIns="0" rtlCol="0" anchor="ctr"/>
+          <a:lstStyle/>
+          <a:p>
+            <a:pPr indent="0" marL="0">
+              <a:buNone/>
+            </a:pPr>
+            <a:r>
+              <a:rPr lang="en-US" sz="900" i="1" dirty="0">
+                <a:solidFill>
+                  <a:srgbClr val="3B7DD8"/>
+                </a:solidFill>
+                <a:latin typeface="Arial" pitchFamily="34" charset="0"/>
+                <a:ea typeface="Arial" pitchFamily="34" charset="-122"/>
+                <a:cs typeface="Arial" pitchFamily="34" charset="-120"/>
+              </a:rPr>
+              <a:t>「部屋自体もとても清潔で快適で居心地が良かったです」</a:t>
+            </a:r>
+            <a:endParaRPr lang="en-US" sz="900" dirty="0"/>
+          </a:p>
+        </p:txBody>
+      </p:sp>
+      <p:sp>
+        <p:nvSpPr>
+          <p:cNvPr id="33" name="Shape 31"/>
+          <p:cNvSpPr/>
+          <p:nvPr/>
+        </p:nvSpPr>
+        <p:spPr>
+          <a:xfrm>
+            <a:off x="3291840" y="2880360"/>
+            <a:ext cx="2651760" cy="1600200"/>
+          </a:xfrm>
+          <a:prstGeom prst="rect">
+            <a:avLst/>
+          </a:prstGeom>
+          <a:solidFill>
+            <a:srgbClr val="FFFFFF"/>
+          </a:solidFill>
+          <a:ln/>
+          <a:effectLst>
+            <a:outerShdw sx="100000" sy="100000" kx="0" ky="0" algn="bl" rotWithShape="0" blurRad="50800" dist="25400" dir="8100000">
+              <a:srgbClr val="000000">
+                <a:alpha val="10000"/>
+              </a:srgbClr>
+            </a:outerShdw>
+          </a:effectLst>
+        </p:spPr>
+      </p:sp>
+      <p:sp>
+        <p:nvSpPr>
+          <p:cNvPr id="34" name="Shape 32"/>
+          <p:cNvSpPr/>
+          <p:nvPr/>
+        </p:nvSpPr>
+        <p:spPr>
+          <a:xfrm>
+            <a:off x="3291840" y="2880360"/>
+            <a:ext cx="54864" cy="1600200"/>
+          </a:xfrm>
+          <a:prstGeom prst="rect">
+            <a:avLst/>
+          </a:prstGeom>
+          <a:solidFill>
+            <a:srgbClr val="16A34A"/>
+          </a:solidFill>
+          <a:ln/>
+        </p:spPr>
+      </p:sp>
+      <p:sp>
+        <p:nvSpPr>
+          <p:cNvPr id="35" name="Shape 33"/>
+          <p:cNvSpPr/>
+          <p:nvPr/>
+        </p:nvSpPr>
+        <p:spPr>
+          <a:xfrm>
+            <a:off x="5120640" y="2953512"/>
+            <a:ext cx="658368" cy="228600"/>
+          </a:xfrm>
+          <a:prstGeom prst="rect">
+            <a:avLst/>
+          </a:prstGeom>
+          <a:solidFill>
+            <a:srgbClr val="DCFCE7"/>
+          </a:solidFill>
+          <a:ln/>
+        </p:spPr>
+      </p:sp>
+      <p:sp>
+        <p:nvSpPr>
+          <p:cNvPr id="36" name="Text 34"/>
+          <p:cNvSpPr/>
+          <p:nvPr/>
+        </p:nvSpPr>
+        <p:spPr>
+          <a:xfrm>
+            <a:off x="5120640" y="2953512"/>
+            <a:ext cx="658368" cy="228600"/>
+          </a:xfrm>
+          <a:prstGeom prst="rect">
+            <a:avLst/>
+          </a:prstGeom>
+          <a:noFill/>
+          <a:ln/>
+        </p:spPr>
+        <p:txBody>
+          <a:bodyPr wrap="square" lIns="0" tIns="0" rIns="0" bIns="0" rtlCol="0" anchor="ctr"/>
+          <a:lstStyle/>
+          <a:p>
+            <a:pPr algn="ctr" indent="0" marL="0">
+              <a:buNone/>
+            </a:pPr>
+            <a:r>
+              <a:rPr lang="en-US" sz="900" b="1" dirty="0">
+                <a:solidFill>
+                  <a:srgbClr val="16A34A"/>
+                </a:solidFill>
+                <a:latin typeface="Arial" pitchFamily="34" charset="0"/>
+                <a:ea typeface="Arial" pitchFamily="34" charset="-122"/>
+                <a:cs typeface="Arial" pitchFamily="34" charset="-120"/>
+              </a:rPr>
+              <a:t>20件+</a:t>
+            </a:r>
+            <a:endParaRPr lang="en-US" sz="900" dirty="0"/>
+          </a:p>
+        </p:txBody>
+      </p:sp>
+      <p:sp>
+        <p:nvSpPr>
+          <p:cNvPr id="37" name="Text 35"/>
+          <p:cNvSpPr/>
+          <p:nvPr/>
+        </p:nvSpPr>
+        <p:spPr>
+          <a:xfrm>
+            <a:off x="3429000" y="2953512"/>
+            <a:ext cx="1645920" cy="274320"/>
+          </a:xfrm>
+          <a:prstGeom prst="rect">
+            <a:avLst/>
+          </a:prstGeom>
+          <a:noFill/>
+          <a:ln/>
+        </p:spPr>
+        <p:txBody>
+          <a:bodyPr wrap="square" lIns="0" tIns="0" rIns="0" bIns="0" rtlCol="0" anchor="ctr"/>
+          <a:lstStyle/>
+          <a:p>
+            <a:pPr indent="0" marL="0">
+              <a:buNone/>
+            </a:pPr>
+            <a:r>
+              <a:rPr lang="en-US" sz="1300" b="1" dirty="0">
+                <a:solidFill>
+                  <a:srgbClr val="1A2744"/>
+                </a:solidFill>
+                <a:latin typeface="Arial" pitchFamily="34" charset="0"/>
+                <a:ea typeface="Arial" pitchFamily="34" charset="-122"/>
+                <a:cs typeface="Arial" pitchFamily="34" charset="-120"/>
+              </a:rPr>
               <a:t>コンビニ・周辺施設</a:t>
             </a:r>
             <a:endParaRPr lang="en-US" sz="1300" dirty="0"/>
@@ -10749,13 +10972,13 @@
       </p:sp>
       <p:sp>
         <p:nvSpPr>
-          <p:cNvPr id="31" name="Text 29"/>
-          <p:cNvSpPr/>
-          <p:nvPr/>
-        </p:nvSpPr>
-        <p:spPr>
-          <a:xfrm>
-            <a:off x="594360" y="3246120"/>
+          <p:cNvPr id="38" name="Text 36"/>
+          <p:cNvSpPr/>
+          <p:nvPr/>
+        </p:nvSpPr>
+        <p:spPr>
+          <a:xfrm>
+            <a:off x="3429000" y="3246120"/>
             <a:ext cx="2377440" cy="365760"/>
           </a:xfrm>
           <a:prstGeom prst="rect">
@@ -10788,13 +11011,13 @@
       </p:sp>
       <p:sp>
         <p:nvSpPr>
-          <p:cNvPr id="32" name="Text 30"/>
-          <p:cNvSpPr/>
-          <p:nvPr/>
-        </p:nvSpPr>
-        <p:spPr>
-          <a:xfrm>
-            <a:off x="594360" y="3657600"/>
+          <p:cNvPr id="39" name="Text 37"/>
+          <p:cNvSpPr/>
+          <p:nvPr/>
+        </p:nvSpPr>
+        <p:spPr>
+          <a:xfrm>
+            <a:off x="3429000" y="3657600"/>
             <a:ext cx="2377440" cy="640080"/>
           </a:xfrm>
           <a:prstGeom prst="rect">
@@ -10827,229 +11050,6 @@
       </p:sp>
       <p:sp>
         <p:nvSpPr>
-          <p:cNvPr id="33" name="Shape 31"/>
-          <p:cNvSpPr/>
-          <p:nvPr/>
-        </p:nvSpPr>
-        <p:spPr>
-          <a:xfrm>
-            <a:off x="3291840" y="2880360"/>
-            <a:ext cx="2651760" cy="1600200"/>
-          </a:xfrm>
-          <a:prstGeom prst="rect">
-            <a:avLst/>
-          </a:prstGeom>
-          <a:solidFill>
-            <a:srgbClr val="FFFFFF"/>
-          </a:solidFill>
-          <a:ln/>
-          <a:effectLst>
-            <a:outerShdw sx="100000" sy="100000" kx="0" ky="0" algn="bl" rotWithShape="0" blurRad="50800" dist="25400" dir="8100000">
-              <a:srgbClr val="000000">
-                <a:alpha val="10000"/>
-              </a:srgbClr>
-            </a:outerShdw>
-          </a:effectLst>
-        </p:spPr>
-      </p:sp>
-      <p:sp>
-        <p:nvSpPr>
-          <p:cNvPr id="34" name="Shape 32"/>
-          <p:cNvSpPr/>
-          <p:nvPr/>
-        </p:nvSpPr>
-        <p:spPr>
-          <a:xfrm>
-            <a:off x="3291840" y="2880360"/>
-            <a:ext cx="54864" cy="1600200"/>
-          </a:xfrm>
-          <a:prstGeom prst="rect">
-            <a:avLst/>
-          </a:prstGeom>
-          <a:solidFill>
-            <a:srgbClr val="16A34A"/>
-          </a:solidFill>
-          <a:ln/>
-        </p:spPr>
-      </p:sp>
-      <p:sp>
-        <p:nvSpPr>
-          <p:cNvPr id="35" name="Shape 33"/>
-          <p:cNvSpPr/>
-          <p:nvPr/>
-        </p:nvSpPr>
-        <p:spPr>
-          <a:xfrm>
-            <a:off x="5120640" y="2953512"/>
-            <a:ext cx="658368" cy="228600"/>
-          </a:xfrm>
-          <a:prstGeom prst="rect">
-            <a:avLst/>
-          </a:prstGeom>
-          <a:solidFill>
-            <a:srgbClr val="DCFCE7"/>
-          </a:solidFill>
-          <a:ln/>
-        </p:spPr>
-      </p:sp>
-      <p:sp>
-        <p:nvSpPr>
-          <p:cNvPr id="36" name="Text 34"/>
-          <p:cNvSpPr/>
-          <p:nvPr/>
-        </p:nvSpPr>
-        <p:spPr>
-          <a:xfrm>
-            <a:off x="5120640" y="2953512"/>
-            <a:ext cx="658368" cy="228600"/>
-          </a:xfrm>
-          <a:prstGeom prst="rect">
-            <a:avLst/>
-          </a:prstGeom>
-          <a:noFill/>
-          <a:ln/>
-        </p:spPr>
-        <p:txBody>
-          <a:bodyPr wrap="square" lIns="0" tIns="0" rIns="0" bIns="0" rtlCol="0" anchor="ctr"/>
-          <a:lstStyle/>
-          <a:p>
-            <a:pPr algn="ctr" indent="0" marL="0">
-              <a:buNone/>
-            </a:pPr>
-            <a:r>
-              <a:rPr lang="en-US" sz="900" b="1" dirty="0">
-                <a:solidFill>
-                  <a:srgbClr val="16A34A"/>
-                </a:solidFill>
-                <a:latin typeface="Arial" pitchFamily="34" charset="0"/>
-                <a:ea typeface="Arial" pitchFamily="34" charset="-122"/>
-                <a:cs typeface="Arial" pitchFamily="34" charset="-120"/>
-              </a:rPr>
-              <a:t>20件+</a:t>
-            </a:r>
-            <a:endParaRPr lang="en-US" sz="900" dirty="0"/>
-          </a:p>
-        </p:txBody>
-      </p:sp>
-      <p:sp>
-        <p:nvSpPr>
-          <p:cNvPr id="37" name="Text 35"/>
-          <p:cNvSpPr/>
-          <p:nvPr/>
-        </p:nvSpPr>
-        <p:spPr>
-          <a:xfrm>
-            <a:off x="3429000" y="2953512"/>
-            <a:ext cx="1645920" cy="274320"/>
-          </a:xfrm>
-          <a:prstGeom prst="rect">
-            <a:avLst/>
-          </a:prstGeom>
-          <a:noFill/>
-          <a:ln/>
-        </p:spPr>
-        <p:txBody>
-          <a:bodyPr wrap="square" lIns="0" tIns="0" rIns="0" bIns="0" rtlCol="0" anchor="ctr"/>
-          <a:lstStyle/>
-          <a:p>
-            <a:pPr indent="0" marL="0">
-              <a:buNone/>
-            </a:pPr>
-            <a:r>
-              <a:rPr lang="en-US" sz="1300" b="1" dirty="0">
-                <a:solidFill>
-                  <a:srgbClr val="1A2744"/>
-                </a:solidFill>
-                <a:latin typeface="Arial" pitchFamily="34" charset="0"/>
-                <a:ea typeface="Arial" pitchFamily="34" charset="-122"/>
-                <a:cs typeface="Arial" pitchFamily="34" charset="-120"/>
-              </a:rPr>
-              <a:t>快適さ・設備</a:t>
-            </a:r>
-            <a:endParaRPr lang="en-US" sz="1300" dirty="0"/>
-          </a:p>
-        </p:txBody>
-      </p:sp>
-      <p:sp>
-        <p:nvSpPr>
-          <p:cNvPr id="38" name="Text 36"/>
-          <p:cNvSpPr/>
-          <p:nvPr/>
-        </p:nvSpPr>
-        <p:spPr>
-          <a:xfrm>
-            <a:off x="3429000" y="3246120"/>
-            <a:ext cx="2377440" cy="365760"/>
-          </a:xfrm>
-          <a:prstGeom prst="rect">
-            <a:avLst/>
-          </a:prstGeom>
-          <a:noFill/>
-          <a:ln/>
-        </p:spPr>
-        <p:txBody>
-          <a:bodyPr wrap="square" lIns="0" tIns="0" rIns="0" bIns="0" rtlCol="0" anchor="ctr"/>
-          <a:lstStyle/>
-          <a:p>
-            <a:pPr indent="0" marL="0">
-              <a:buNone/>
-            </a:pPr>
-            <a:r>
-              <a:rPr lang="en-US" sz="900" dirty="0">
-                <a:solidFill>
-                  <a:srgbClr val="64748B"/>
-                </a:solidFill>
-                <a:latin typeface="Arial" pitchFamily="34" charset="0"/>
-                <a:ea typeface="Arial" pitchFamily="34" charset="-122"/>
-                <a:cs typeface="Arial" pitchFamily="34" charset="-120"/>
-              </a:rPr>
-              <a:t>宿泊施設はとても清潔で快適でした</a:t>
-            </a:r>
-            <a:endParaRPr lang="en-US" sz="900" dirty="0"/>
-          </a:p>
-        </p:txBody>
-      </p:sp>
-      <p:sp>
-        <p:nvSpPr>
-          <p:cNvPr id="39" name="Text 37"/>
-          <p:cNvSpPr/>
-          <p:nvPr/>
-        </p:nvSpPr>
-        <p:spPr>
-          <a:xfrm>
-            <a:off x="3429000" y="3657600"/>
-            <a:ext cx="2377440" cy="640080"/>
-          </a:xfrm>
-          <a:prstGeom prst="rect">
-            <a:avLst/>
-          </a:prstGeom>
-          <a:noFill/>
-          <a:ln/>
-        </p:spPr>
-        <p:txBody>
-          <a:bodyPr wrap="square" lIns="0" tIns="0" rIns="0" bIns="0" rtlCol="0" anchor="ctr"/>
-          <a:lstStyle/>
-          <a:p>
-            <a:pPr indent="0" marL="0">
-              <a:buNone/>
-            </a:pPr>
-            <a:r>
-              <a:rPr lang="en-US" sz="900" i="1" dirty="0">
-                <a:solidFill>
-                  <a:srgbClr val="3B7DD8"/>
-                </a:solidFill>
-                <a:latin typeface="Arial" pitchFamily="34" charset="0"/>
-                <a:ea typeface="Arial" pitchFamily="34" charset="-122"/>
-                <a:cs typeface="Arial" pitchFamily="34" charset="-120"/>
-              </a:rPr>
-              <a:t>「部屋自体もとても清潔で快適で居心地が良かったです」</a:t>
-            </a:r>
-            <a:endParaRPr lang="en-US" sz="900" dirty="0"/>
-          </a:p>
-        </p:txBody>
-      </p:sp>
-      <p:sp>
-        <p:nvSpPr>
           <p:cNvPr id="40" name="Shape 38"/>
           <p:cNvSpPr/>
           <p:nvPr/>
@@ -11187,7 +11187,7 @@
                 <a:ea typeface="Arial" pitchFamily="34" charset="-122"/>
                 <a:cs typeface="Arial" pitchFamily="34" charset="-120"/>
               </a:rPr>
-              <a:t>朝食</a:t>
+              <a:t>部屋の広さ</a:t>
             </a:r>
             <a:endParaRPr lang="en-US" sz="1300" dirty="0"/>
           </a:p>
@@ -11226,7 +11226,7 @@
                 <a:ea typeface="Arial" pitchFamily="34" charset="-122"/>
                 <a:cs typeface="Arial" pitchFamily="34" charset="-120"/>
               </a:rPr>
-              <a:t>朝食の種類は限られています</a:t>
+              <a:t>部屋には荷物を置くのに十分なスペースがありました</a:t>
             </a:r>
             <a:endParaRPr lang="en-US" sz="900" dirty="0"/>
           </a:p>
@@ -11265,7 +11265,7 @@
                 <a:ea typeface="Arial" pitchFamily="34" charset="-122"/>
                 <a:cs typeface="Arial" pitchFamily="34" charset="-120"/>
               </a:rPr>
-              <a:t>「また、3月9日の朝食開始時間は午前6時30分とかなり遅かったです」</a:t>
+              <a:t>「東京の宿泊施設としてはかなり広い部屋で、バスタブまでありました」</a:t>
             </a:r>
             <a:endParaRPr lang="en-US" sz="900" dirty="0"/>
           </a:p>
@@ -11955,7 +11955,7 @@
                           <a:ea typeface="Arial" pitchFamily="34" charset="-122"/>
                           <a:cs typeface="Arial" pitchFamily="34" charset="-120"/>
                         </a:rPr>
-                        <a:t>This area is less crowded, with a couple of malls nearby ...</a:t>
+                        <a:t>La proximité avec la gare, Le petit déjeuner, L'accueil e...</a:t>
                       </a:r>
                       <a:endParaRPr lang="en-US" sz="900" dirty="0">
                         <a:latin typeface="Arial" charset="0"/>
@@ -12023,7 +12023,7 @@
                           <a:ea typeface="Arial" pitchFamily="34" charset="-122"/>
                           <a:cs typeface="Arial" pitchFamily="34" charset="-120"/>
                         </a:rPr>
-                        <a:t>18件</a:t>
+                        <a:t>19件</a:t>
                       </a:r>
                       <a:endParaRPr lang="en-US" sz="900" dirty="0">
                         <a:latin typeface="Arial" charset="0"/>
@@ -12297,7 +12297,7 @@
                           <a:ea typeface="Arial" pitchFamily="34" charset="-122"/>
                           <a:cs typeface="Arial" pitchFamily="34" charset="-120"/>
                         </a:rPr>
-                        <a:t>17件</a:t>
+                        <a:t>18件</a:t>
                       </a:r>
                       <a:endParaRPr lang="en-US" sz="900" dirty="0">
                         <a:latin typeface="Arial" charset="0"/>
@@ -12983,7 +12983,7 @@
                           <a:ea typeface="Arial" pitchFamily="34" charset="-122"/>
                           <a:cs typeface="Arial" pitchFamily="34" charset="-120"/>
                         </a:rPr>
-                        <a:t>設備の老朽化</a:t>
+                        <a:t>臭い・匂い</a:t>
                       </a:r>
                       <a:endParaRPr lang="en-US" sz="900" dirty="0">
                         <a:latin typeface="Arial" charset="0"/>
@@ -13051,7 +13051,7 @@
                           <a:ea typeface="Arial" pitchFamily="34" charset="-122"/>
                           <a:cs typeface="Arial" pitchFamily="34" charset="-120"/>
                         </a:rPr>
-                        <a:t>ホテル自体は少し古い感じがしますが、手入れが行き届いています（仙台で泊まった同じ系列のホテルと似ています</a:t>
+                        <a:t>電車とバスの駅にも非常に近く（徒歩5～7分）、毎日清掃が行われ、部屋にタバコの臭いもありませんでした</a:t>
                       </a:r>
                       <a:endParaRPr lang="en-US" sz="900" dirty="0">
                         <a:latin typeface="Arial" charset="0"/>
@@ -13119,7 +13119,7 @@
                           <a:ea typeface="Arial" pitchFamily="34" charset="-122"/>
                           <a:cs typeface="Arial" pitchFamily="34" charset="-120"/>
                         </a:rPr>
-                        <a:t>2件</a:t>
+                        <a:t>3件</a:t>
                       </a:r>
                       <a:endParaRPr lang="en-US" sz="900" dirty="0">
                         <a:latin typeface="Arial" charset="0"/>
@@ -13257,7 +13257,7 @@
                           <a:ea typeface="Arial" pitchFamily="34" charset="-122"/>
                           <a:cs typeface="Arial" pitchFamily="34" charset="-120"/>
                         </a:rPr>
-                        <a:t>防音性能</a:t>
+                        <a:t>設備の老朽化</a:t>
                       </a:r>
                       <a:endParaRPr lang="en-US" sz="900" dirty="0">
                         <a:latin typeface="Arial" charset="0"/>
@@ -13325,7 +13325,7 @@
                           <a:ea typeface="Arial" pitchFamily="34" charset="-122"/>
                           <a:cs typeface="Arial" pitchFamily="34" charset="-120"/>
                         </a:rPr>
-                        <a:t>共用部分にクラシック音楽などのBGMが雰囲気程度に流していると､もっと良くなるように感じました</a:t>
+                        <a:t>ホテル自体は少し古い感じがしますが、手入れが行き届いています（仙台で泊まった同じ系列のホテルと似ています</a:t>
                       </a:r>
                       <a:endParaRPr lang="en-US" sz="900" dirty="0">
                         <a:latin typeface="Arial" charset="0"/>
@@ -13531,7 +13531,7 @@
                           <a:ea typeface="Arial" pitchFamily="34" charset="-122"/>
                           <a:cs typeface="Arial" pitchFamily="34" charset="-120"/>
                         </a:rPr>
-                        <a:t>臭い・匂い</a:t>
+                        <a:t>防音性能</a:t>
                       </a:r>
                       <a:endParaRPr lang="en-US" sz="900" dirty="0">
                         <a:latin typeface="Arial" charset="0"/>
@@ -13599,7 +13599,7 @@
                           <a:ea typeface="Arial" pitchFamily="34" charset="-122"/>
                           <a:cs typeface="Arial" pitchFamily="34" charset="-120"/>
                         </a:rPr>
-                        <a:t>電車とバスの駅にも非常に近く（徒歩5～7分）、毎日清掃が行われ、部屋にタバコの臭いもありませんでした</a:t>
+                        <a:t>共用部分にクラシック音楽などのBGMが雰囲気程度に流していると､もっと良くなるように感じました</a:t>
                       </a:r>
                       <a:endParaRPr lang="en-US" sz="900" dirty="0">
                         <a:latin typeface="Arial" charset="0"/>

--- a/納品レポート/ホテル別レポート/keisei_kinshicho_口コミ分析レポート.pptx
+++ b/納品レポート/ホテル別レポート/keisei_kinshicho_口コミ分析レポート.pptx
@@ -202,10 +202,10 @@
                 <c:formatCode>General</c:formatCode>
                 <c:ptCount val="4"/>
                 <c:pt idx="0">
-                  <c:v>9.48</c:v>
+                  <c:v>9.5</c:v>
                 </c:pt>
                 <c:pt idx="1">
-                  <c:v>9.22</c:v>
+                  <c:v>9.18</c:v>
                 </c:pt>
                 <c:pt idx="2">
                   <c:v>8.8</c:v>
@@ -554,7 +554,7 @@
               <c:numCache>
                 <c:ptCount val="3"/>
                 <c:pt idx="0">
-                  <c:v>116</c:v>
+                  <c:v>118</c:v>
                 </c:pt>
                 <c:pt idx="1">
                   <c:v>12</c:v>
@@ -783,7 +783,7 @@
                 <c:formatCode>General</c:formatCode>
                 <c:ptCount val="7"/>
                 <c:pt idx="0">
-                  <c:v>72</c:v>
+                  <c:v>74</c:v>
                 </c:pt>
                 <c:pt idx="1">
                   <c:v>25</c:v>
@@ -2752,7 +2752,7 @@
                 <a:ea typeface="Arial" pitchFamily="34" charset="-122"/>
                 <a:cs typeface="Arial" pitchFamily="34" charset="-120"/>
               </a:rPr>
-              <a:t>レビュー総数：129件（4サイト）</a:t>
+              <a:t>レビュー総数：131件（4サイト）</a:t>
             </a:r>
             <a:endParaRPr lang="en-US" sz="1000" dirty="0"/>
           </a:p>
@@ -2772,7 +2772,7 @@
                 <a:ea typeface="Arial" pitchFamily="34" charset="-122"/>
                 <a:cs typeface="Arial" pitchFamily="34" charset="-120"/>
               </a:rPr>
-              <a:t>作成日：2026年3月26日</a:t>
+              <a:t>作成日：2026年3月27日</a:t>
             </a:r>
             <a:endParaRPr lang="en-US" sz="1000" dirty="0"/>
           </a:p>
@@ -3318,7 +3318,7 @@
                           <a:ea typeface="Arial" pitchFamily="34" charset="-122"/>
                           <a:cs typeface="Arial" pitchFamily="34" charset="-120"/>
                         </a:rPr>
-                        <a:t>9.13点</a:t>
+                        <a:t>9.15点</a:t>
                       </a:r>
                       <a:endParaRPr lang="en-US" sz="1000" dirty="0">
                         <a:latin typeface="Arial" charset="0"/>
@@ -3592,7 +3592,7 @@
                           <a:ea typeface="Arial" pitchFamily="34" charset="-122"/>
                           <a:cs typeface="Arial" pitchFamily="34" charset="-120"/>
                         </a:rPr>
-                        <a:t>89.9%</a:t>
+                        <a:t>90.1%</a:t>
                       </a:r>
                       <a:endParaRPr lang="en-US" sz="1000" dirty="0">
                         <a:latin typeface="Arial" charset="0"/>
@@ -3660,7 +3660,7 @@
                           <a:ea typeface="Arial" pitchFamily="34" charset="-122"/>
                           <a:cs typeface="Arial" pitchFamily="34" charset="-120"/>
                         </a:rPr>
-                        <a:t>95%以上</a:t>
+                        <a:t>92%以上</a:t>
                       </a:r>
                       <a:endParaRPr lang="en-US" sz="1000" dirty="0">
                         <a:latin typeface="Arial" charset="0"/>
@@ -4688,7 +4688,7 @@
                           <a:ea typeface="Arial" pitchFamily="34" charset="-122"/>
                           <a:cs typeface="Arial" pitchFamily="34" charset="-120"/>
                         </a:rPr>
-                        <a:t>約19件/期間</a:t>
+                        <a:t>約20件/期間</a:t>
                       </a:r>
                       <a:endParaRPr lang="en-US" sz="1000" dirty="0">
                         <a:latin typeface="Arial" charset="0"/>
@@ -4756,7 +4756,7 @@
                           <a:ea typeface="Arial" pitchFamily="34" charset="-122"/>
                           <a:cs typeface="Arial" pitchFamily="34" charset="-120"/>
                         </a:rPr>
-                        <a:t>9件以下</a:t>
+                        <a:t>10件以下</a:t>
                       </a:r>
                       <a:endParaRPr lang="en-US" sz="1000" dirty="0">
                         <a:latin typeface="Arial" charset="0"/>
@@ -5327,7 +5327,7 @@
                 <a:ea typeface="Arial" pitchFamily="34" charset="-122"/>
                 <a:cs typeface="Arial" pitchFamily="34" charset="-120"/>
               </a:rPr>
-              <a:t>9.13</a:t>
+              <a:t>9.15</a:t>
             </a:r>
             <a:endParaRPr lang="en-US" sz="3200" dirty="0"/>
           </a:p>
@@ -5452,7 +5452,7 @@
                 <a:ea typeface="Arial" pitchFamily="34" charset="-122"/>
                 <a:cs typeface="Arial" pitchFamily="34" charset="-120"/>
               </a:rPr>
-              <a:t>89.9%</a:t>
+              <a:t>90.1%</a:t>
             </a:r>
             <a:endParaRPr lang="en-US" sz="3200" dirty="0"/>
           </a:p>
@@ -5702,7 +5702,7 @@
                 <a:ea typeface="Arial" pitchFamily="34" charset="-122"/>
                 <a:cs typeface="Arial" pitchFamily="34" charset="-120"/>
               </a:rPr>
-              <a:t>129件</a:t>
+              <a:t>131件</a:t>
             </a:r>
             <a:endParaRPr lang="en-US" sz="3200" dirty="0"/>
           </a:p>
@@ -5850,7 +5850,7 @@
                 <a:ea typeface="Arial" pitchFamily="34" charset="-122"/>
                 <a:cs typeface="Arial" pitchFamily="34" charset="-120"/>
               </a:rPr>
-              <a:t>  電車とバスの駅にも非常に近く（徒歩5～7分）、毎日清掃が行われ、部屋にタバコの臭いもありませんでした</a:t>
+              <a:t>  JR錦糸町駅から遠くなく、周辺には飲食店やショッピング施設、24時間営業のスーパーマーケットなどがあり賑やかである...</a:t>
             </a:r>
             <a:endParaRPr lang="en-US" sz="1100" dirty="0"/>
           </a:p>
@@ -5890,7 +5890,7 @@
                 <a:ea typeface="Arial" pitchFamily="34" charset="-122"/>
                 <a:cs typeface="Arial" pitchFamily="34" charset="-120"/>
               </a:rPr>
-              <a:t>  バスルームのアメニティは、階下のフロントデスクでセルフサービスで利用できました</a:t>
+              <a:t>  體驗感超好👍👍👍 サービスは最高でした</a:t>
             </a:r>
             <a:endParaRPr lang="en-US" sz="1100" dirty="0"/>
           </a:p>
@@ -5930,7 +5930,7 @@
                 <a:ea typeface="Arial" pitchFamily="34" charset="-122"/>
                 <a:cs typeface="Arial" pitchFamily="34" charset="-120"/>
               </a:rPr>
-              <a:t>  宿泊施設はとても清潔で快適でした</a:t>
+              <a:t>  部屋は清潔で整頓されていて、雰囲気も素晴らしかったです</a:t>
             </a:r>
             <a:endParaRPr lang="en-US" sz="1100" dirty="0"/>
           </a:p>
@@ -6078,7 +6078,7 @@
                 <a:ea typeface="Arial" pitchFamily="34" charset="-122"/>
                 <a:cs typeface="Arial" pitchFamily="34" charset="-120"/>
               </a:rPr>
-              <a:t>  La proximité avec la gare, Le petit déjeuner, L'accueil e...</a:t>
+              <a:t>  Highly recommend if you want to be close to the action</a:t>
             </a:r>
             <a:endParaRPr lang="en-US" sz="1100" dirty="0"/>
           </a:p>
@@ -6118,7 +6118,7 @@
                 <a:ea typeface="Arial" pitchFamily="34" charset="-122"/>
                 <a:cs typeface="Arial" pitchFamily="34" charset="-120"/>
               </a:rPr>
-              <a:t>  バスルームのアメニティは、階下のフロントデスクでセルフサービスで利用できました</a:t>
+              <a:t>  欠点は、禁煙室を予約したのに、トイレ付近でタバコの臭いがしたことです</a:t>
             </a:r>
             <a:endParaRPr lang="en-US" sz="1100" dirty="0"/>
           </a:p>
@@ -6158,7 +6158,7 @@
                 <a:ea typeface="Arial" pitchFamily="34" charset="-122"/>
                 <a:cs typeface="Arial" pitchFamily="34" charset="-120"/>
               </a:rPr>
-              <a:t>  部屋は小さいですが、必要なものはすべて揃っています</a:t>
+              <a:t>  ただし、欠点はベッドが標準サイズなので、部屋のスペースが比較的狭いことです</a:t>
             </a:r>
             <a:endParaRPr lang="en-US" sz="1100" dirty="0"/>
           </a:p>
@@ -6511,7 +6511,7 @@
                 <a:ea typeface="Arial" pitchFamily="34" charset="-122"/>
                 <a:cs typeface="Arial" pitchFamily="34" charset="-120"/>
               </a:rPr>
-              <a:t>9.13</a:t>
+              <a:t>9.15</a:t>
             </a:r>
             <a:endParaRPr lang="en-US" sz="3200" dirty="0"/>
           </a:p>
@@ -6636,7 +6636,7 @@
                 <a:ea typeface="Arial" pitchFamily="34" charset="-122"/>
                 <a:cs typeface="Arial" pitchFamily="34" charset="-120"/>
               </a:rPr>
-              <a:t>89.9%</a:t>
+              <a:t>90.1%</a:t>
             </a:r>
             <a:endParaRPr lang="en-US" sz="3200" dirty="0"/>
           </a:p>
@@ -6886,7 +6886,7 @@
                 <a:ea typeface="Arial" pitchFamily="34" charset="-122"/>
                 <a:cs typeface="Arial" pitchFamily="34" charset="-120"/>
               </a:rPr>
-              <a:t>129件</a:t>
+              <a:t>131件</a:t>
             </a:r>
             <a:endParaRPr lang="en-US" sz="3200" dirty="0"/>
           </a:p>
@@ -7307,7 +7307,7 @@
                 <a:ea typeface="Arial" pitchFamily="34" charset="-122"/>
                 <a:cs typeface="Arial" pitchFamily="34" charset="-120"/>
               </a:rPr>
-              <a:t>Trip.com(9.48)が最高スコア。</a:t>
+              <a:t>Trip.com(9.50)が最高スコア。</a:t>
             </a:r>
             <a:endParaRPr lang="en-US" sz="1100" dirty="0"/>
           </a:p>
@@ -7865,7 +7865,7 @@
                           <a:ea typeface="Arial" pitchFamily="34" charset="-122"/>
                           <a:cs typeface="Arial" pitchFamily="34" charset="-120"/>
                         </a:rPr>
-                        <a:t>52</a:t>
+                        <a:t>56</a:t>
                       </a:r>
                       <a:endParaRPr lang="en-US" sz="900" dirty="0">
                         <a:latin typeface="Arial" charset="0"/>
@@ -7933,7 +7933,7 @@
                           <a:ea typeface="Arial" pitchFamily="34" charset="-122"/>
                           <a:cs typeface="Arial" pitchFamily="34" charset="-120"/>
                         </a:rPr>
-                        <a:t>9.48</a:t>
+                        <a:t>9.5</a:t>
                       </a:r>
                       <a:endParaRPr lang="en-US" sz="900" dirty="0">
                         <a:latin typeface="Arial" charset="0"/>
@@ -8069,7 +8069,7 @@
                           <a:ea typeface="Arial" pitchFamily="34" charset="-122"/>
                           <a:cs typeface="Arial" pitchFamily="34" charset="-120"/>
                         </a:rPr>
-                        <a:t>9.48</a:t>
+                        <a:t>9.5</a:t>
                       </a:r>
                       <a:endParaRPr lang="en-US" sz="900" dirty="0">
                         <a:latin typeface="Arial" charset="0"/>
@@ -8207,7 +8207,7 @@
                           <a:ea typeface="Arial" pitchFamily="34" charset="-122"/>
                           <a:cs typeface="Arial" pitchFamily="34" charset="-120"/>
                         </a:rPr>
-                        <a:t>23</a:t>
+                        <a:t>22</a:t>
                       </a:r>
                       <a:endParaRPr lang="en-US" sz="900" dirty="0">
                         <a:latin typeface="Arial" charset="0"/>
@@ -8275,7 +8275,7 @@
                           <a:ea typeface="Arial" pitchFamily="34" charset="-122"/>
                           <a:cs typeface="Arial" pitchFamily="34" charset="-120"/>
                         </a:rPr>
-                        <a:t>4.61</a:t>
+                        <a:t>4.59</a:t>
                       </a:r>
                       <a:endParaRPr lang="en-US" sz="900" dirty="0">
                         <a:latin typeface="Arial" charset="0"/>
@@ -8411,7 +8411,7 @@
                           <a:ea typeface="Arial" pitchFamily="34" charset="-122"/>
                           <a:cs typeface="Arial" pitchFamily="34" charset="-120"/>
                         </a:rPr>
-                        <a:t>9.22</a:t>
+                        <a:t>9.18</a:t>
                       </a:r>
                       <a:endParaRPr lang="en-US" sz="900" dirty="0">
                         <a:latin typeface="Arial" charset="0"/>
@@ -8549,7 +8549,7 @@
                           <a:ea typeface="Arial" pitchFamily="34" charset="-122"/>
                           <a:cs typeface="Arial" pitchFamily="34" charset="-120"/>
                         </a:rPr>
-                        <a:t>51</a:t>
+                        <a:t>50</a:t>
                       </a:r>
                       <a:endParaRPr lang="en-US" sz="900" dirty="0">
                         <a:latin typeface="Arial" charset="0"/>
@@ -9503,7 +9503,7 @@
                 <a:ea typeface="Arial" pitchFamily="34" charset="-122"/>
                 <a:cs typeface="Arial" pitchFamily="34" charset="-120"/>
               </a:rPr>
-              <a:t>116件（89.9%）</a:t>
+              <a:t>118件（90.1%）</a:t>
             </a:r>
             <a:endParaRPr lang="en-US" sz="1100" dirty="0"/>
           </a:p>
@@ -9601,7 +9601,7 @@
                 <a:ea typeface="Arial" pitchFamily="34" charset="-122"/>
                 <a:cs typeface="Arial" pitchFamily="34" charset="-120"/>
               </a:rPr>
-              <a:t>12件（9.3%）</a:t>
+              <a:t>12件（9.2%）</a:t>
             </a:r>
             <a:endParaRPr lang="en-US" sz="1100" dirty="0"/>
           </a:p>
@@ -10111,7 +10111,7 @@
                 <a:ea typeface="Arial" pitchFamily="34" charset="-122"/>
                 <a:cs typeface="Arial" pitchFamily="34" charset="-120"/>
               </a:rPr>
-              <a:t>電車とバスの駅にも非常に近く（徒歩5～7分）、毎日清掃が行われ、部屋にタバコの臭いもありませんでした</a:t>
+              <a:t>JR錦糸町駅から遠くなく、周辺には飲食店やショッピング施設、24時間営業のスーパーマーケットなどがあり賑やかである...</a:t>
             </a:r>
             <a:endParaRPr lang="en-US" sz="900" dirty="0"/>
           </a:p>
@@ -10150,7 +10150,7 @@
                 <a:ea typeface="Arial" pitchFamily="34" charset="-122"/>
                 <a:cs typeface="Arial" pitchFamily="34" charset="-120"/>
               </a:rPr>
-              <a:t>「立地は最高で、錦糸町駅から徒歩圏内、JR線と半蔵門線にもアクセスでき、交通の便が非常に良いです」</a:t>
+              <a:t>「錦糸町駅から徒歩5分という好立地」</a:t>
             </a:r>
             <a:endParaRPr lang="en-US" sz="900" dirty="0"/>
           </a:p>
@@ -10334,7 +10334,7 @@
                 <a:ea typeface="Arial" pitchFamily="34" charset="-122"/>
                 <a:cs typeface="Arial" pitchFamily="34" charset="-120"/>
               </a:rPr>
-              <a:t>バスルームのアメニティは、階下のフロントデスクでセルフサービスで利用できました</a:t>
+              <a:t>體驗感超好👍👍👍 サービスは最高でした</a:t>
             </a:r>
             <a:endParaRPr lang="en-US" sz="900" dirty="0"/>
           </a:p>
@@ -10373,7 +10373,7 @@
                 <a:ea typeface="Arial" pitchFamily="34" charset="-122"/>
                 <a:cs typeface="Arial" pitchFamily="34" charset="-120"/>
               </a:rPr>
-              <a:t>「）フロントのスタッフもとてもフレンドリーで親切でした」</a:t>
+              <a:t>「スタッフも親切でした」</a:t>
             </a:r>
             <a:endParaRPr lang="en-US" sz="900" dirty="0"/>
           </a:p>
@@ -10557,7 +10557,7 @@
                 <a:ea typeface="Arial" pitchFamily="34" charset="-122"/>
                 <a:cs typeface="Arial" pitchFamily="34" charset="-120"/>
               </a:rPr>
-              <a:t>宿泊施設はとても清潔で快適でした</a:t>
+              <a:t>部屋は清潔で整頓されていて、雰囲気も素晴らしかったです</a:t>
             </a:r>
             <a:endParaRPr lang="en-US" sz="900" dirty="0"/>
           </a:p>
@@ -10596,7 +10596,7 @@
                 <a:ea typeface="Arial" pitchFamily="34" charset="-122"/>
                 <a:cs typeface="Arial" pitchFamily="34" charset="-120"/>
               </a:rPr>
-              <a:t>「部屋自体もとても清潔で快適で居心地が良かったです」</a:t>
+              <a:t>「ホテルはとても素敵で、清潔で快適でした」</a:t>
             </a:r>
             <a:endParaRPr lang="en-US" sz="900" dirty="0"/>
           </a:p>
@@ -10780,7 +10780,7 @@
                 <a:ea typeface="Arial" pitchFamily="34" charset="-122"/>
                 <a:cs typeface="Arial" pitchFamily="34" charset="-120"/>
               </a:rPr>
-              <a:t>宿泊施設はとても清潔で快適でした</a:t>
+              <a:t>2人でも窮屈さを感じずに快適に眠れます</a:t>
             </a:r>
             <a:endParaRPr lang="en-US" sz="900" dirty="0"/>
           </a:p>
@@ -10819,7 +10819,7 @@
                 <a:ea typeface="Arial" pitchFamily="34" charset="-122"/>
                 <a:cs typeface="Arial" pitchFamily="34" charset="-120"/>
               </a:rPr>
-              <a:t>「部屋自体もとても清潔で快適で居心地が良かったです」</a:t>
+              <a:t>「ホテルはとても素敵で、清潔で快適でした」</a:t>
             </a:r>
             <a:endParaRPr lang="en-US" sz="900" dirty="0"/>
           </a:p>
@@ -11003,7 +11003,7 @@
                 <a:ea typeface="Arial" pitchFamily="34" charset="-122"/>
                 <a:cs typeface="Arial" pitchFamily="34" charset="-120"/>
               </a:rPr>
-              <a:t>周辺にはレストラン、コンビニ、24時間営業のスーパーマーケットもたくさんあり、日常生活や食事にとても便利です</a:t>
+              <a:t>JR錦糸町駅から遠くなく、周辺には飲食店やショッピング施設、24時間営業のスーパーマーケットなどがあり賑やかである...</a:t>
             </a:r>
             <a:endParaRPr lang="en-US" sz="900" dirty="0"/>
           </a:p>
@@ -11042,7 +11042,7 @@
                 <a:ea typeface="Arial" pitchFamily="34" charset="-122"/>
                 <a:cs typeface="Arial" pitchFamily="34" charset="-120"/>
               </a:rPr>
-              <a:t>「24時間営業のスーパーマーケットも利用可能です」</a:t>
+              <a:t>「ショッピングセンター、お店、レストランも近くにあります」</a:t>
             </a:r>
             <a:endParaRPr lang="en-US" sz="900" dirty="0"/>
           </a:p>
@@ -11226,7 +11226,7 @@
                 <a:ea typeface="Arial" pitchFamily="34" charset="-122"/>
                 <a:cs typeface="Arial" pitchFamily="34" charset="-120"/>
               </a:rPr>
-              <a:t>部屋には荷物を置くのに十分なスペースがありました</a:t>
+              <a:t>ただし、欠点はベッドが標準サイズなので、部屋のスペースが比較的狭いことです</a:t>
             </a:r>
             <a:endParaRPr lang="en-US" sz="900" dirty="0"/>
           </a:p>
@@ -11265,7 +11265,7 @@
                 <a:ea typeface="Arial" pitchFamily="34" charset="-122"/>
                 <a:cs typeface="Arial" pitchFamily="34" charset="-120"/>
               </a:rPr>
-              <a:t>「東京の宿泊施設としてはかなり広い部屋で、バスタブまでありました」</a:t>
+              <a:t>「部屋には荷物を置くのに十分なスペースがありました」</a:t>
             </a:r>
             <a:endParaRPr lang="en-US" sz="900" dirty="0"/>
           </a:p>
@@ -11955,7 +11955,7 @@
                           <a:ea typeface="Arial" pitchFamily="34" charset="-122"/>
                           <a:cs typeface="Arial" pitchFamily="34" charset="-120"/>
                         </a:rPr>
-                        <a:t>La proximité avec la gare, Le petit déjeuner, L'accueil e...</a:t>
+                        <a:t>Highly recommend if you want to be close to the action</a:t>
                       </a:r>
                       <a:endParaRPr lang="en-US" sz="900" dirty="0">
                         <a:latin typeface="Arial" charset="0"/>
@@ -12023,7 +12023,7 @@
                           <a:ea typeface="Arial" pitchFamily="34" charset="-122"/>
                           <a:cs typeface="Arial" pitchFamily="34" charset="-120"/>
                         </a:rPr>
-                        <a:t>19件</a:t>
+                        <a:t>20件</a:t>
                       </a:r>
                       <a:endParaRPr lang="en-US" sz="900" dirty="0">
                         <a:latin typeface="Arial" charset="0"/>
@@ -12229,7 +12229,7 @@
                           <a:ea typeface="Arial" pitchFamily="34" charset="-122"/>
                           <a:cs typeface="Arial" pitchFamily="34" charset="-120"/>
                         </a:rPr>
-                        <a:t>バスルームのアメニティは、階下のフロントデスクでセルフサービスで利用できました</a:t>
+                        <a:t>欠点は、禁煙室を予約したのに、トイレ付近でタバコの臭いがしたことです</a:t>
                       </a:r>
                       <a:endParaRPr lang="en-US" sz="900" dirty="0">
                         <a:latin typeface="Arial" charset="0"/>
@@ -12297,7 +12297,7 @@
                           <a:ea typeface="Arial" pitchFamily="34" charset="-122"/>
                           <a:cs typeface="Arial" pitchFamily="34" charset="-120"/>
                         </a:rPr>
-                        <a:t>18件</a:t>
+                        <a:t>19件</a:t>
                       </a:r>
                       <a:endParaRPr lang="en-US" sz="900" dirty="0">
                         <a:latin typeface="Arial" charset="0"/>
@@ -12503,7 +12503,7 @@
                           <a:ea typeface="Arial" pitchFamily="34" charset="-122"/>
                           <a:cs typeface="Arial" pitchFamily="34" charset="-120"/>
                         </a:rPr>
-                        <a:t>部屋は小さいですが、必要なものはすべて揃っています</a:t>
+                        <a:t>ただし、欠点はベッドが標準サイズなので、部屋のスペースが比較的狭いことです</a:t>
                       </a:r>
                       <a:endParaRPr lang="en-US" sz="900" dirty="0">
                         <a:latin typeface="Arial" charset="0"/>
@@ -12571,7 +12571,7 @@
                           <a:ea typeface="Arial" pitchFamily="34" charset="-122"/>
                           <a:cs typeface="Arial" pitchFamily="34" charset="-120"/>
                         </a:rPr>
-                        <a:t>4件</a:t>
+                        <a:t>5件</a:t>
                       </a:r>
                       <a:endParaRPr lang="en-US" sz="900" dirty="0">
                         <a:latin typeface="Arial" charset="0"/>
@@ -12709,7 +12709,7 @@
                           <a:ea typeface="Arial" pitchFamily="34" charset="-122"/>
                           <a:cs typeface="Arial" pitchFamily="34" charset="-120"/>
                         </a:rPr>
-                        <a:t>対応・サービスの不満</a:t>
+                        <a:t>臭い・匂い</a:t>
                       </a:r>
                       <a:endParaRPr lang="en-US" sz="900" dirty="0">
                         <a:latin typeface="Arial" charset="0"/>
@@ -12777,7 +12777,7 @@
                           <a:ea typeface="Arial" pitchFamily="34" charset="-122"/>
                           <a:cs typeface="Arial" pitchFamily="34" charset="-120"/>
                         </a:rPr>
-                        <a:t>酒店員工服務態度良好，房間乾淨企理</a:t>
+                        <a:t>欠点は、禁煙室を予約したのに、トイレ付近でタバコの臭いがしたことです</a:t>
                       </a:r>
                       <a:endParaRPr lang="en-US" sz="900" dirty="0">
                         <a:latin typeface="Arial" charset="0"/>
@@ -12983,7 +12983,7 @@
                           <a:ea typeface="Arial" pitchFamily="34" charset="-122"/>
                           <a:cs typeface="Arial" pitchFamily="34" charset="-120"/>
                         </a:rPr>
-                        <a:t>臭い・匂い</a:t>
+                        <a:t>対応・サービスの不満</a:t>
                       </a:r>
                       <a:endParaRPr lang="en-US" sz="900" dirty="0">
                         <a:latin typeface="Arial" charset="0"/>
@@ -13051,7 +13051,7 @@
                           <a:ea typeface="Arial" pitchFamily="34" charset="-122"/>
                           <a:cs typeface="Arial" pitchFamily="34" charset="-120"/>
                         </a:rPr>
-                        <a:t>電車とバスの駅にも非常に近く（徒歩5～7分）、毎日清掃が行われ、部屋にタバコの臭いもありませんでした</a:t>
+                        <a:t>酒店員工服務態度良好，房間乾淨企理</a:t>
                       </a:r>
                       <a:endParaRPr lang="en-US" sz="900" dirty="0">
                         <a:latin typeface="Arial" charset="0"/>
@@ -13119,7 +13119,7 @@
                           <a:ea typeface="Arial" pitchFamily="34" charset="-122"/>
                           <a:cs typeface="Arial" pitchFamily="34" charset="-120"/>
                         </a:rPr>
-                        <a:t>3件</a:t>
+                        <a:t>4件</a:t>
                       </a:r>
                       <a:endParaRPr lang="en-US" sz="900" dirty="0">
                         <a:latin typeface="Arial" charset="0"/>

--- a/納品レポート/ホテル別レポート/keisei_kinshicho_口コミ分析レポート.pptx
+++ b/納品レポート/ホテル別レポート/keisei_kinshicho_口コミ分析レポート.pptx
@@ -202,13 +202,13 @@
                 <c:formatCode>General</c:formatCode>
                 <c:ptCount val="4"/>
                 <c:pt idx="0">
-                  <c:v>9.5</c:v>
+                  <c:v>9.43</c:v>
                 </c:pt>
                 <c:pt idx="1">
                   <c:v>9.18</c:v>
                 </c:pt>
                 <c:pt idx="2">
-                  <c:v>8.8</c:v>
+                  <c:v>8.82</c:v>
                 </c:pt>
                 <c:pt idx="3">
                   <c:v>8</c:v>
@@ -560,7 +560,7 @@
                   <c:v>12</c:v>
                 </c:pt>
                 <c:pt idx="2">
-                  <c:v>1</c:v>
+                  <c:v>2</c:v>
                 </c:pt>
               </c:numCache>
             </c:numRef>
@@ -783,13 +783,13 @@
                 <c:formatCode>General</c:formatCode>
                 <c:ptCount val="7"/>
                 <c:pt idx="0">
-                  <c:v>74</c:v>
+                  <c:v>75</c:v>
                 </c:pt>
                 <c:pt idx="1">
                   <c:v>25</c:v>
                 </c:pt>
                 <c:pt idx="2">
-                  <c:v>19</c:v>
+                  <c:v>18</c:v>
                 </c:pt>
                 <c:pt idx="3">
                   <c:v>6</c:v>
@@ -801,7 +801,7 @@
                   <c:v>1</c:v>
                 </c:pt>
                 <c:pt idx="6">
-                  <c:v>1</c:v>
+                  <c:v>2</c:v>
                 </c:pt>
               </c:numCache>
             </c:numRef>
@@ -2752,7 +2752,7 @@
                 <a:ea typeface="Arial" pitchFamily="34" charset="-122"/>
                 <a:cs typeface="Arial" pitchFamily="34" charset="-120"/>
               </a:rPr>
-              <a:t>レビュー総数：131件（4サイト）</a:t>
+              <a:t>レビュー総数：132件（4サイト）</a:t>
             </a:r>
             <a:endParaRPr lang="en-US" sz="1000" dirty="0"/>
           </a:p>
@@ -2772,7 +2772,7 @@
                 <a:ea typeface="Arial" pitchFamily="34" charset="-122"/>
                 <a:cs typeface="Arial" pitchFamily="34" charset="-120"/>
               </a:rPr>
-              <a:t>作成日：2026年3月27日</a:t>
+              <a:t>作成日：2026年3月28日</a:t>
             </a:r>
             <a:endParaRPr lang="en-US" sz="1000" dirty="0"/>
           </a:p>
@@ -3318,7 +3318,7 @@
                           <a:ea typeface="Arial" pitchFamily="34" charset="-122"/>
                           <a:cs typeface="Arial" pitchFamily="34" charset="-120"/>
                         </a:rPr>
-                        <a:t>9.15点</a:t>
+                        <a:t>9.12点</a:t>
                       </a:r>
                       <a:endParaRPr lang="en-US" sz="1000" dirty="0">
                         <a:latin typeface="Arial" charset="0"/>
@@ -3592,7 +3592,7 @@
                           <a:ea typeface="Arial" pitchFamily="34" charset="-122"/>
                           <a:cs typeface="Arial" pitchFamily="34" charset="-120"/>
                         </a:rPr>
-                        <a:t>90.1%</a:t>
+                        <a:t>89.4%</a:t>
                       </a:r>
                       <a:endParaRPr lang="en-US" sz="1000" dirty="0">
                         <a:latin typeface="Arial" charset="0"/>
@@ -3660,7 +3660,7 @@
                           <a:ea typeface="Arial" pitchFamily="34" charset="-122"/>
                           <a:cs typeface="Arial" pitchFamily="34" charset="-120"/>
                         </a:rPr>
-                        <a:t>92%以上</a:t>
+                        <a:t>94%以上</a:t>
                       </a:r>
                       <a:endParaRPr lang="en-US" sz="1000" dirty="0">
                         <a:latin typeface="Arial" charset="0"/>
@@ -3866,7 +3866,7 @@
                           <a:ea typeface="Arial" pitchFamily="34" charset="-122"/>
                           <a:cs typeface="Arial" pitchFamily="34" charset="-120"/>
                         </a:rPr>
-                        <a:t>0.8%</a:t>
+                        <a:t>1.5%</a:t>
                       </a:r>
                       <a:endParaRPr lang="en-US" sz="1000" dirty="0">
                         <a:latin typeface="Arial" charset="0"/>
@@ -5327,7 +5327,7 @@
                 <a:ea typeface="Arial" pitchFamily="34" charset="-122"/>
                 <a:cs typeface="Arial" pitchFamily="34" charset="-120"/>
               </a:rPr>
-              <a:t>9.15</a:t>
+              <a:t>9.12</a:t>
             </a:r>
             <a:endParaRPr lang="en-US" sz="3200" dirty="0"/>
           </a:p>
@@ -5452,7 +5452,7 @@
                 <a:ea typeface="Arial" pitchFamily="34" charset="-122"/>
                 <a:cs typeface="Arial" pitchFamily="34" charset="-120"/>
               </a:rPr>
-              <a:t>90.1%</a:t>
+              <a:t>89.4%</a:t>
             </a:r>
             <a:endParaRPr lang="en-US" sz="3200" dirty="0"/>
           </a:p>
@@ -5577,7 +5577,7 @@
                 <a:ea typeface="Arial" pitchFamily="34" charset="-122"/>
                 <a:cs typeface="Arial" pitchFamily="34" charset="-120"/>
               </a:rPr>
-              <a:t>0.8%</a:t>
+              <a:t>1.5%</a:t>
             </a:r>
             <a:endParaRPr lang="en-US" sz="3200" dirty="0"/>
           </a:p>
@@ -5702,7 +5702,7 @@
                 <a:ea typeface="Arial" pitchFamily="34" charset="-122"/>
                 <a:cs typeface="Arial" pitchFamily="34" charset="-120"/>
               </a:rPr>
-              <a:t>131件</a:t>
+              <a:t>132件</a:t>
             </a:r>
             <a:endParaRPr lang="en-US" sz="3200" dirty="0"/>
           </a:p>
@@ -5850,7 +5850,7 @@
                 <a:ea typeface="Arial" pitchFamily="34" charset="-122"/>
                 <a:cs typeface="Arial" pitchFamily="34" charset="-120"/>
               </a:rPr>
-              <a:t>  JR錦糸町駅から遠くなく、周辺には飲食店やショッピング施設、24時間営業のスーパーマーケットなどがあり賑やかである...</a:t>
+              <a:t>  Very good and interesting location and the great view of ...</a:t>
             </a:r>
             <a:endParaRPr lang="en-US" sz="1100" dirty="0"/>
           </a:p>
@@ -6511,7 +6511,7 @@
                 <a:ea typeface="Arial" pitchFamily="34" charset="-122"/>
                 <a:cs typeface="Arial" pitchFamily="34" charset="-120"/>
               </a:rPr>
-              <a:t>9.15</a:t>
+              <a:t>9.12</a:t>
             </a:r>
             <a:endParaRPr lang="en-US" sz="3200" dirty="0"/>
           </a:p>
@@ -6636,7 +6636,7 @@
                 <a:ea typeface="Arial" pitchFamily="34" charset="-122"/>
                 <a:cs typeface="Arial" pitchFamily="34" charset="-120"/>
               </a:rPr>
-              <a:t>90.1%</a:t>
+              <a:t>89.4%</a:t>
             </a:r>
             <a:endParaRPr lang="en-US" sz="3200" dirty="0"/>
           </a:p>
@@ -6761,7 +6761,7 @@
                 <a:ea typeface="Arial" pitchFamily="34" charset="-122"/>
                 <a:cs typeface="Arial" pitchFamily="34" charset="-120"/>
               </a:rPr>
-              <a:t>0.8%</a:t>
+              <a:t>1.5%</a:t>
             </a:r>
             <a:endParaRPr lang="en-US" sz="3200" dirty="0"/>
           </a:p>
@@ -6886,7 +6886,7 @@
                 <a:ea typeface="Arial" pitchFamily="34" charset="-122"/>
                 <a:cs typeface="Arial" pitchFamily="34" charset="-120"/>
               </a:rPr>
-              <a:t>131件</a:t>
+              <a:t>132件</a:t>
             </a:r>
             <a:endParaRPr lang="en-US" sz="3200" dirty="0"/>
           </a:p>
@@ -7307,7 +7307,7 @@
                 <a:ea typeface="Arial" pitchFamily="34" charset="-122"/>
                 <a:cs typeface="Arial" pitchFamily="34" charset="-120"/>
               </a:rPr>
-              <a:t>Trip.com(9.50)が最高スコア。</a:t>
+              <a:t>Trip.com(9.43)が最高スコア。</a:t>
             </a:r>
             <a:endParaRPr lang="en-US" sz="1100" dirty="0"/>
           </a:p>
@@ -7933,7 +7933,7 @@
                           <a:ea typeface="Arial" pitchFamily="34" charset="-122"/>
                           <a:cs typeface="Arial" pitchFamily="34" charset="-120"/>
                         </a:rPr>
-                        <a:t>9.5</a:t>
+                        <a:t>9.43</a:t>
                       </a:r>
                       <a:endParaRPr lang="en-US" sz="900" dirty="0">
                         <a:latin typeface="Arial" charset="0"/>
@@ -8069,7 +8069,7 @@
                           <a:ea typeface="Arial" pitchFamily="34" charset="-122"/>
                           <a:cs typeface="Arial" pitchFamily="34" charset="-120"/>
                         </a:rPr>
-                        <a:t>9.5</a:t>
+                        <a:t>9.43</a:t>
                       </a:r>
                       <a:endParaRPr lang="en-US" sz="900" dirty="0">
                         <a:latin typeface="Arial" charset="0"/>
@@ -8549,7 +8549,7 @@
                           <a:ea typeface="Arial" pitchFamily="34" charset="-122"/>
                           <a:cs typeface="Arial" pitchFamily="34" charset="-120"/>
                         </a:rPr>
-                        <a:t>50</a:t>
+                        <a:t>51</a:t>
                       </a:r>
                       <a:endParaRPr lang="en-US" sz="900" dirty="0">
                         <a:latin typeface="Arial" charset="0"/>
@@ -8617,7 +8617,7 @@
                           <a:ea typeface="Arial" pitchFamily="34" charset="-122"/>
                           <a:cs typeface="Arial" pitchFamily="34" charset="-120"/>
                         </a:rPr>
-                        <a:t>8.8</a:t>
+                        <a:t>8.82</a:t>
                       </a:r>
                       <a:endParaRPr lang="en-US" sz="900" dirty="0">
                         <a:latin typeface="Arial" charset="0"/>
@@ -8753,7 +8753,7 @@
                           <a:ea typeface="Arial" pitchFamily="34" charset="-122"/>
                           <a:cs typeface="Arial" pitchFamily="34" charset="-120"/>
                         </a:rPr>
-                        <a:t>8.8</a:t>
+                        <a:t>8.82</a:t>
                       </a:r>
                       <a:endParaRPr lang="en-US" sz="900" dirty="0">
                         <a:latin typeface="Arial" charset="0"/>
@@ -9503,7 +9503,7 @@
                 <a:ea typeface="Arial" pitchFamily="34" charset="-122"/>
                 <a:cs typeface="Arial" pitchFamily="34" charset="-120"/>
               </a:rPr>
-              <a:t>118件（90.1%）</a:t>
+              <a:t>118件（89.4%）</a:t>
             </a:r>
             <a:endParaRPr lang="en-US" sz="1100" dirty="0"/>
           </a:p>
@@ -9601,7 +9601,7 @@
                 <a:ea typeface="Arial" pitchFamily="34" charset="-122"/>
                 <a:cs typeface="Arial" pitchFamily="34" charset="-120"/>
               </a:rPr>
-              <a:t>12件（9.2%）</a:t>
+              <a:t>12件（9.1%）</a:t>
             </a:r>
             <a:endParaRPr lang="en-US" sz="1100" dirty="0"/>
           </a:p>
@@ -9699,7 +9699,7 @@
                 <a:ea typeface="Arial" pitchFamily="34" charset="-122"/>
                 <a:cs typeface="Arial" pitchFamily="34" charset="-120"/>
               </a:rPr>
-              <a:t>1件（0.8%）</a:t>
+              <a:t>2件（1.5%）</a:t>
             </a:r>
             <a:endParaRPr lang="en-US" sz="1100" dirty="0"/>
           </a:p>
@@ -10111,7 +10111,7 @@
                 <a:ea typeface="Arial" pitchFamily="34" charset="-122"/>
                 <a:cs typeface="Arial" pitchFamily="34" charset="-120"/>
               </a:rPr>
-              <a:t>JR錦糸町駅から遠くなく、周辺には飲食店やショッピング施設、24時間営業のスーパーマーケットなどがあり賑やかである...</a:t>
+              <a:t>Very good and interesting location and the great view of ...</a:t>
             </a:r>
             <a:endParaRPr lang="en-US" sz="900" dirty="0"/>
           </a:p>
@@ -10150,7 +10150,7 @@
                 <a:ea typeface="Arial" pitchFamily="34" charset="-122"/>
                 <a:cs typeface="Arial" pitchFamily="34" charset="-120"/>
               </a:rPr>
-              <a:t>「錦糸町駅から徒歩5分という好立地」</a:t>
+              <a:t>「JR錦糸町駅から遠くなく、周辺には飲食店やショッピング施設、24時間営業のスーパーマーケットなどがあり賑やかである...」</a:t>
             </a:r>
             <a:endParaRPr lang="en-US" sz="900" dirty="0"/>
           </a:p>
@@ -11042,7 +11042,7 @@
                 <a:ea typeface="Arial" pitchFamily="34" charset="-122"/>
                 <a:cs typeface="Arial" pitchFamily="34" charset="-120"/>
               </a:rPr>
-              <a:t>「ショッピングセンター、お店、レストランも近くにあります」</a:t>
+              <a:t>「ショッピングセンター、ショップ、レストランも近くにあります」</a:t>
             </a:r>
             <a:endParaRPr lang="en-US" sz="900" dirty="0"/>
           </a:p>
@@ -12983,7 +12983,7 @@
                           <a:ea typeface="Arial" pitchFamily="34" charset="-122"/>
                           <a:cs typeface="Arial" pitchFamily="34" charset="-120"/>
                         </a:rPr>
-                        <a:t>対応・サービスの不満</a:t>
+                        <a:t>防音性能</a:t>
                       </a:r>
                       <a:endParaRPr lang="en-US" sz="900" dirty="0">
                         <a:latin typeface="Arial" charset="0"/>
@@ -13051,7 +13051,7 @@
                           <a:ea typeface="Arial" pitchFamily="34" charset="-122"/>
                           <a:cs typeface="Arial" pitchFamily="34" charset="-120"/>
                         </a:rPr>
-                        <a:t>酒店員工服務態度良好，房間乾淨企理</a:t>
+                        <a:t>有啲污糟，隔音好差 少し汚れていて、防音性も低い</a:t>
                       </a:r>
                       <a:endParaRPr lang="en-US" sz="900" dirty="0">
                         <a:latin typeface="Arial" charset="0"/>
@@ -13119,7 +13119,7 @@
                           <a:ea typeface="Arial" pitchFamily="34" charset="-122"/>
                           <a:cs typeface="Arial" pitchFamily="34" charset="-120"/>
                         </a:rPr>
-                        <a:t>4件</a:t>
+                        <a:t>3件</a:t>
                       </a:r>
                       <a:endParaRPr lang="en-US" sz="900" dirty="0">
                         <a:latin typeface="Arial" charset="0"/>
@@ -13257,7 +13257,7 @@
                           <a:ea typeface="Arial" pitchFamily="34" charset="-122"/>
                           <a:cs typeface="Arial" pitchFamily="34" charset="-120"/>
                         </a:rPr>
-                        <a:t>設備の老朽化</a:t>
+                        <a:t>対応・サービスの不満</a:t>
                       </a:r>
                       <a:endParaRPr lang="en-US" sz="900" dirty="0">
                         <a:latin typeface="Arial" charset="0"/>
@@ -13325,7 +13325,7 @@
                           <a:ea typeface="Arial" pitchFamily="34" charset="-122"/>
                           <a:cs typeface="Arial" pitchFamily="34" charset="-120"/>
                         </a:rPr>
-                        <a:t>ホテル自体は少し古い感じがしますが、手入れが行き届いています（仙台で泊まった同じ系列のホテルと似ています</a:t>
+                        <a:t>酒店員工服務態度良好，房間乾淨企理</a:t>
                       </a:r>
                       <a:endParaRPr lang="en-US" sz="900" dirty="0">
                         <a:latin typeface="Arial" charset="0"/>
@@ -13393,7 +13393,7 @@
                           <a:ea typeface="Arial" pitchFamily="34" charset="-122"/>
                           <a:cs typeface="Arial" pitchFamily="34" charset="-120"/>
                         </a:rPr>
-                        <a:t>2件</a:t>
+                        <a:t>3件</a:t>
                       </a:r>
                       <a:endParaRPr lang="en-US" sz="900" dirty="0">
                         <a:latin typeface="Arial" charset="0"/>
@@ -13531,7 +13531,7 @@
                           <a:ea typeface="Arial" pitchFamily="34" charset="-122"/>
                           <a:cs typeface="Arial" pitchFamily="34" charset="-120"/>
                         </a:rPr>
-                        <a:t>防音性能</a:t>
+                        <a:t>清掃不備</a:t>
                       </a:r>
                       <a:endParaRPr lang="en-US" sz="900" dirty="0">
                         <a:latin typeface="Arial" charset="0"/>
@@ -13599,7 +13599,7 @@
                           <a:ea typeface="Arial" pitchFamily="34" charset="-122"/>
                           <a:cs typeface="Arial" pitchFamily="34" charset="-120"/>
                         </a:rPr>
-                        <a:t>共用部分にクラシック音楽などのBGMが雰囲気程度に流していると､もっと良くなるように感じました</a:t>
+                        <a:t>有啲污糟，隔音好差 少し汚れていて、防音性も低い</a:t>
                       </a:r>
                       <a:endParaRPr lang="en-US" sz="900" dirty="0">
                         <a:latin typeface="Arial" charset="0"/>
@@ -13667,7 +13667,7 @@
                           <a:ea typeface="Arial" pitchFamily="34" charset="-122"/>
                           <a:cs typeface="Arial" pitchFamily="34" charset="-120"/>
                         </a:rPr>
-                        <a:t>2件</a:t>
+                        <a:t>3件</a:t>
                       </a:r>
                       <a:endParaRPr lang="en-US" sz="900" dirty="0">
                         <a:latin typeface="Arial" charset="0"/>
@@ -13805,7 +13805,7 @@
                           <a:ea typeface="Arial" pitchFamily="34" charset="-122"/>
                           <a:cs typeface="Arial" pitchFamily="34" charset="-120"/>
                         </a:rPr>
-                        <a:t>清掃不備</a:t>
+                        <a:t>設備の老朽化</a:t>
                       </a:r>
                       <a:endParaRPr lang="en-US" sz="900" dirty="0">
                         <a:latin typeface="Arial" charset="0"/>
@@ -13873,7 +13873,7 @@
                           <a:ea typeface="Arial" pitchFamily="34" charset="-122"/>
                           <a:cs typeface="Arial" pitchFamily="34" charset="-120"/>
                         </a:rPr>
-                        <a:t>タオル交換やゴミ捨ても毎日行ってくれました</a:t>
+                        <a:t>ホテル自体は少し古い感じがしますが、手入れが行き届いています（仙台で泊まった同じ系列のホテルと似ています</a:t>
                       </a:r>
                       <a:endParaRPr lang="en-US" sz="900" dirty="0">
                         <a:latin typeface="Arial" charset="0"/>

--- a/納品レポート/ホテル別レポート/keisei_kinshicho_口コミ分析レポート.pptx
+++ b/納品レポート/ホテル別レポート/keisei_kinshicho_口コミ分析レポート.pptx
@@ -252,7 +252,7 @@
                   <c:v>9.18</c:v>
                 </c:pt>
                 <c:pt idx="2">
-                  <c:v>8.82</c:v>
+                  <c:v>8.79</c:v>
                 </c:pt>
                 <c:pt idx="3">
                   <c:v>8</c:v>
@@ -586,7 +586,7 @@
                   <c:v>25</c:v>
                 </c:pt>
                 <c:pt idx="2">
-                  <c:v>18</c:v>
+                  <c:v>20</c:v>
                 </c:pt>
                 <c:pt idx="3">
                   <c:v>6</c:v>
@@ -2486,7 +2486,7 @@
                 <a:ea typeface="Arial" pitchFamily="34" charset="-122"/>
                 <a:cs typeface="Arial" pitchFamily="34" charset="-120"/>
               </a:rPr>
-              <a:t>レビュー総数：132件</a:t>
+              <a:t>レビュー総数：134件</a:t>
             </a:r>
             <a:endParaRPr lang="en-US" sz="1000" dirty="0"/>
           </a:p>
@@ -2766,7 +2766,7 @@
                 <a:ea typeface="Arial" pitchFamily="34" charset="-122"/>
                 <a:cs typeface="Arial" pitchFamily="34" charset="-120"/>
               </a:rPr>
-              <a:t>京成リッチモンドホテル東京錦糸町は全体平均9.12点（10pt換算）、高評価率89.4%を達成しています。本レポートで示した改善施策を段階的に実施することで、さらなる顧客満足度向上が期待できます。</a:t>
+              <a:t>京成リッチモンドホテル東京錦糸町は全体平均9.10点（10pt換算）、高評価率89.6%を達成しています。本レポートで示した改善施策を段階的に実施することで、さらなる顧客満足度向上が期待できます。</a:t>
             </a:r>
             <a:endParaRPr lang="en-US" sz="1200" dirty="0"/>
           </a:p>
@@ -3203,7 +3203,7 @@
                 <a:ea typeface="Arial" pitchFamily="34" charset="-122"/>
                 <a:cs typeface="Arial" pitchFamily="34" charset="-120"/>
               </a:rPr>
-              <a:t>9.12</a:t>
+              <a:t>9.10</a:t>
             </a:r>
             <a:endParaRPr lang="en-US" sz="2800" dirty="0"/>
           </a:p>
@@ -3321,7 +3321,7 @@
                 <a:ea typeface="Arial" pitchFamily="34" charset="-122"/>
                 <a:cs typeface="Arial" pitchFamily="34" charset="-120"/>
               </a:rPr>
-              <a:t>89.4%</a:t>
+              <a:t>89.6%</a:t>
             </a:r>
             <a:endParaRPr lang="en-US" sz="2800" dirty="0"/>
           </a:p>
@@ -3557,7 +3557,7 @@
                 <a:ea typeface="Arial" pitchFamily="34" charset="-122"/>
                 <a:cs typeface="Arial" pitchFamily="34" charset="-120"/>
               </a:rPr>
-              <a:t>132件</a:t>
+              <a:t>134件</a:t>
             </a:r>
             <a:endParaRPr lang="en-US" sz="2800" dirty="0"/>
           </a:p>
@@ -4980,7 +4980,7 @@
                           <a:ea typeface="Arial" pitchFamily="34" charset="-122"/>
                           <a:cs typeface="Arial" pitchFamily="34" charset="-120"/>
                         </a:rPr>
-                        <a:t>51</a:t>
+                        <a:t>53</a:t>
                       </a:r>
                       <a:endParaRPr lang="en-US" sz="800" dirty="0">
                         <a:latin typeface="Arial" charset="0"/>
@@ -5048,7 +5048,7 @@
                           <a:ea typeface="Arial" pitchFamily="34" charset="-122"/>
                           <a:cs typeface="Arial" pitchFamily="34" charset="-120"/>
                         </a:rPr>
-                        <a:t>8.82/10</a:t>
+                        <a:t>8.79/10</a:t>
                       </a:r>
                       <a:endParaRPr lang="en-US" sz="800" dirty="0">
                         <a:latin typeface="Arial" charset="0"/>
@@ -5116,7 +5116,7 @@
                           <a:ea typeface="Arial" pitchFamily="34" charset="-122"/>
                           <a:cs typeface="Arial" pitchFamily="34" charset="-120"/>
                         </a:rPr>
-                        <a:t>8.82</a:t>
+                        <a:t>8.79</a:t>
                       </a:r>
                       <a:endParaRPr lang="en-US" sz="800" dirty="0">
                         <a:latin typeface="Arial" charset="0"/>
@@ -5911,7 +5911,7 @@
                 <a:ea typeface="Arial" pitchFamily="34" charset="-122"/>
                 <a:cs typeface="Arial" pitchFamily="34" charset="-120"/>
               </a:rPr>
-              <a:t>118件（89.4%）</a:t>
+              <a:t>120件（89.6%）</a:t>
             </a:r>
             <a:endParaRPr lang="en-US" sz="1600" dirty="0"/>
           </a:p>
@@ -6009,7 +6009,7 @@
                 <a:ea typeface="Arial" pitchFamily="34" charset="-122"/>
                 <a:cs typeface="Arial" pitchFamily="34" charset="-120"/>
               </a:rPr>
-              <a:t>12件（9.1%）</a:t>
+              <a:t>12件（9.0%）</a:t>
             </a:r>
             <a:endParaRPr lang="en-US" sz="1600" dirty="0"/>
           </a:p>
@@ -6269,7 +6269,7 @@
                 <a:ea typeface="Arial" pitchFamily="34" charset="-122"/>
                 <a:cs typeface="Arial" pitchFamily="34" charset="-120"/>
               </a:rPr>
-              <a:t>高評価レビュー（8-10点: 118件）の分析から、主要な強みテーマを抽出しています。立地・アクセス、客室清潔感、スタッフ対応が高評価の中心的テーマです。</a:t>
+              <a:t>高評価レビュー（8-10点: 120件）の分析から、主要な強みテーマを抽出しています。立地・アクセス、客室清潔感、スタッフ対応が高評価の中心的テーマです。</a:t>
             </a:r>
             <a:endParaRPr lang="en-US" sz="1200" dirty="0"/>
           </a:p>
@@ -7309,7 +7309,7 @@
                 <a:ea typeface="Arial" pitchFamily="34" charset="-122"/>
                 <a:cs typeface="Arial" pitchFamily="34" charset="-120"/>
               </a:rPr>
-              <a:t>全体平均 9.12点 → 目標 9.62点</a:t>
+              <a:t>全体平均 9.10点 → 目標 9.60点</a:t>
             </a:r>
             <a:endParaRPr lang="en-US" sz="1200" dirty="0"/>
           </a:p>
@@ -7326,7 +7326,7 @@
                 <a:ea typeface="Arial" pitchFamily="34" charset="-122"/>
                 <a:cs typeface="Arial" pitchFamily="34" charset="-120"/>
               </a:rPr>
-              <a:t>高評価率 89.4% → 目標 94.4%</a:t>
+              <a:t>高評価率 89.6% → 目標 94.6%</a:t>
             </a:r>
             <a:endParaRPr lang="en-US" sz="1200" dirty="0"/>
           </a:p>

--- a/納品レポート/ホテル別レポート/keisei_kinshicho_口コミ分析レポート.pptx
+++ b/納品レポート/ホテル別レポート/keisei_kinshicho_口コミ分析レポート.pptx
@@ -212,7 +212,7 @@
             <c:bubble3D val="0"/>
             <c:spPr>
               <a:solidFill>
-                <a:srgbClr val="16A34A"/>
+                <a:srgbClr val="EA580C"/>
               </a:solidFill>
               <a:effectLst/>
             </c:spPr>
@@ -249,13 +249,13 @@
                   <c:v>9.43</c:v>
                 </c:pt>
                 <c:pt idx="1">
-                  <c:v>9.18</c:v>
+                  <c:v>9.13</c:v>
                 </c:pt>
                 <c:pt idx="2">
-                  <c:v>8.79</c:v>
+                  <c:v>8.76</c:v>
                 </c:pt>
                 <c:pt idx="3">
-                  <c:v>8</c:v>
+                  <c:v>7</c:v>
                 </c:pt>
               </c:numCache>
             </c:numRef>
@@ -580,13 +580,13 @@
                 <c:formatCode>General</c:formatCode>
                 <c:ptCount val="7"/>
                 <c:pt idx="0">
-                  <c:v>75</c:v>
+                  <c:v>74</c:v>
                 </c:pt>
                 <c:pt idx="1">
                   <c:v>25</c:v>
                 </c:pt>
                 <c:pt idx="2">
-                  <c:v>20</c:v>
+                  <c:v>21</c:v>
                 </c:pt>
                 <c:pt idx="3">
                   <c:v>6</c:v>
@@ -2766,7 +2766,7 @@
                 <a:ea typeface="Arial" pitchFamily="34" charset="-122"/>
                 <a:cs typeface="Arial" pitchFamily="34" charset="-120"/>
               </a:rPr>
-              <a:t>京成リッチモンドホテル東京錦糸町は全体平均9.10点（10pt換算）、高評価率89.6%を達成しています。本レポートで示した改善施策を段階的に実施することで、さらなる顧客満足度向上が期待できます。</a:t>
+              <a:t>京成リッチモンドホテル東京錦糸町は全体平均9.09点（10pt換算）、高評価率89.6%を達成しています。本レポートで示した改善施策を段階的に実施することで、さらなる顧客満足度向上が期待できます。</a:t>
             </a:r>
             <a:endParaRPr lang="en-US" sz="1200" dirty="0"/>
           </a:p>
@@ -3203,7 +3203,7 @@
                 <a:ea typeface="Arial" pitchFamily="34" charset="-122"/>
                 <a:cs typeface="Arial" pitchFamily="34" charset="-120"/>
               </a:rPr>
-              <a:t>9.10</a:t>
+              <a:t>9.09</a:t>
             </a:r>
             <a:endParaRPr lang="en-US" sz="2800" dirty="0"/>
           </a:p>
@@ -4296,7 +4296,7 @@
                           <a:ea typeface="Arial" pitchFamily="34" charset="-122"/>
                           <a:cs typeface="Arial" pitchFamily="34" charset="-120"/>
                         </a:rPr>
-                        <a:t>56</a:t>
+                        <a:t>58</a:t>
                       </a:r>
                       <a:endParaRPr lang="en-US" sz="800" dirty="0">
                         <a:latin typeface="Arial" charset="0"/>
@@ -4638,7 +4638,7 @@
                           <a:ea typeface="Arial" pitchFamily="34" charset="-122"/>
                           <a:cs typeface="Arial" pitchFamily="34" charset="-120"/>
                         </a:rPr>
-                        <a:t>22</a:t>
+                        <a:t>23</a:t>
                       </a:r>
                       <a:endParaRPr lang="en-US" sz="800" dirty="0">
                         <a:latin typeface="Arial" charset="0"/>
@@ -4706,7 +4706,7 @@
                           <a:ea typeface="Arial" pitchFamily="34" charset="-122"/>
                           <a:cs typeface="Arial" pitchFamily="34" charset="-120"/>
                         </a:rPr>
-                        <a:t>4.59/5</a:t>
+                        <a:t>4.57/5</a:t>
                       </a:r>
                       <a:endParaRPr lang="en-US" sz="800" dirty="0">
                         <a:latin typeface="Arial" charset="0"/>
@@ -4774,7 +4774,7 @@
                           <a:ea typeface="Arial" pitchFamily="34" charset="-122"/>
                           <a:cs typeface="Arial" pitchFamily="34" charset="-120"/>
                         </a:rPr>
-                        <a:t>9.18</a:t>
+                        <a:t>9.13</a:t>
                       </a:r>
                       <a:endParaRPr lang="en-US" sz="800" dirty="0">
                         <a:latin typeface="Arial" charset="0"/>
@@ -4980,7 +4980,7 @@
                           <a:ea typeface="Arial" pitchFamily="34" charset="-122"/>
                           <a:cs typeface="Arial" pitchFamily="34" charset="-120"/>
                         </a:rPr>
-                        <a:t>53</a:t>
+                        <a:t>51</a:t>
                       </a:r>
                       <a:endParaRPr lang="en-US" sz="800" dirty="0">
                         <a:latin typeface="Arial" charset="0"/>
@@ -5048,7 +5048,7 @@
                           <a:ea typeface="Arial" pitchFamily="34" charset="-122"/>
                           <a:cs typeface="Arial" pitchFamily="34" charset="-120"/>
                         </a:rPr>
-                        <a:t>8.79/10</a:t>
+                        <a:t>8.76/10</a:t>
                       </a:r>
                       <a:endParaRPr lang="en-US" sz="800" dirty="0">
                         <a:latin typeface="Arial" charset="0"/>
@@ -5116,7 +5116,7 @@
                           <a:ea typeface="Arial" pitchFamily="34" charset="-122"/>
                           <a:cs typeface="Arial" pitchFamily="34" charset="-120"/>
                         </a:rPr>
-                        <a:t>8.79</a:t>
+                        <a:t>8.76</a:t>
                       </a:r>
                       <a:endParaRPr lang="en-US" sz="800" dirty="0">
                         <a:latin typeface="Arial" charset="0"/>
@@ -5322,7 +5322,7 @@
                           <a:ea typeface="Arial" pitchFamily="34" charset="-122"/>
                           <a:cs typeface="Arial" pitchFamily="34" charset="-120"/>
                         </a:rPr>
-                        <a:t>3</a:t>
+                        <a:t>2</a:t>
                       </a:r>
                       <a:endParaRPr lang="en-US" sz="800" dirty="0">
                         <a:latin typeface="Arial" charset="0"/>
@@ -5390,7 +5390,7 @@
                           <a:ea typeface="Arial" pitchFamily="34" charset="-122"/>
                           <a:cs typeface="Arial" pitchFamily="34" charset="-120"/>
                         </a:rPr>
-                        <a:t>4.00/5</a:t>
+                        <a:t>3.50/5</a:t>
                       </a:r>
                       <a:endParaRPr lang="en-US" sz="800" dirty="0">
                         <a:latin typeface="Arial" charset="0"/>
@@ -5458,7 +5458,7 @@
                           <a:ea typeface="Arial" pitchFamily="34" charset="-122"/>
                           <a:cs typeface="Arial" pitchFamily="34" charset="-120"/>
                         </a:rPr>
-                        <a:t>8.00</a:t>
+                        <a:t>7.00</a:t>
                       </a:r>
                       <a:endParaRPr lang="en-US" sz="800" dirty="0">
                         <a:latin typeface="Arial" charset="0"/>
@@ -5526,7 +5526,7 @@
                           <a:ea typeface="Arial" pitchFamily="34" charset="-122"/>
                           <a:cs typeface="Arial" pitchFamily="34" charset="-120"/>
                         </a:rPr>
-                        <a:t>良好</a:t>
+                        <a:t>概ね良好</a:t>
                       </a:r>
                       <a:endParaRPr lang="en-US" sz="800" dirty="0">
                         <a:latin typeface="Arial" charset="0"/>
@@ -7309,7 +7309,7 @@
                 <a:ea typeface="Arial" pitchFamily="34" charset="-122"/>
                 <a:cs typeface="Arial" pitchFamily="34" charset="-120"/>
               </a:rPr>
-              <a:t>全体平均 9.10点 → 目標 9.60点</a:t>
+              <a:t>全体平均 9.09点 → 目標 9.59点</a:t>
             </a:r>
             <a:endParaRPr lang="en-US" sz="1200" dirty="0"/>
           </a:p>

--- a/納品レポート/ホテル別レポート/keisei_kinshicho_口コミ分析レポート.pptx
+++ b/納品レポート/ホテル別レポート/keisei_kinshicho_口コミ分析レポート.pptx
@@ -249,13 +249,13 @@
                   <c:v>9.43</c:v>
                 </c:pt>
                 <c:pt idx="1">
-                  <c:v>9.13</c:v>
+                  <c:v>9</c:v>
                 </c:pt>
                 <c:pt idx="2">
-                  <c:v>8.76</c:v>
+                  <c:v>8.73</c:v>
                 </c:pt>
                 <c:pt idx="3">
-                  <c:v>7</c:v>
+                  <c:v>7.33</c:v>
                 </c:pt>
               </c:numCache>
             </c:numRef>
@@ -580,16 +580,16 @@
                 <c:formatCode>General</c:formatCode>
                 <c:ptCount val="7"/>
                 <c:pt idx="0">
-                  <c:v>74</c:v>
+                  <c:v>72</c:v>
                 </c:pt>
                 <c:pt idx="1">
-                  <c:v>25</c:v>
+                  <c:v>24</c:v>
                 </c:pt>
                 <c:pt idx="2">
-                  <c:v>21</c:v>
+                  <c:v>23</c:v>
                 </c:pt>
                 <c:pt idx="3">
-                  <c:v>6</c:v>
+                  <c:v>7</c:v>
                 </c:pt>
                 <c:pt idx="4">
                   <c:v>5</c:v>
@@ -2766,7 +2766,7 @@
                 <a:ea typeface="Arial" pitchFamily="34" charset="-122"/>
                 <a:cs typeface="Arial" pitchFamily="34" charset="-120"/>
               </a:rPr>
-              <a:t>京成リッチモンドホテル東京錦糸町は全体平均9.09点（10pt換算）、高評価率89.6%を達成しています。本レポートで示した改善施策を段階的に実施することで、さらなる顧客満足度向上が期待できます。</a:t>
+              <a:t>京成リッチモンドホテル東京錦糸町は全体平均9.04点（10pt換算）、高評価率88.8%を達成しています。本レポートで示した改善施策を段階的に実施することで、さらなる顧客満足度向上が期待できます。</a:t>
             </a:r>
             <a:endParaRPr lang="en-US" sz="1200" dirty="0"/>
           </a:p>
@@ -3203,7 +3203,7 @@
                 <a:ea typeface="Arial" pitchFamily="34" charset="-122"/>
                 <a:cs typeface="Arial" pitchFamily="34" charset="-120"/>
               </a:rPr>
-              <a:t>9.09</a:t>
+              <a:t>9.04</a:t>
             </a:r>
             <a:endParaRPr lang="en-US" sz="2800" dirty="0"/>
           </a:p>
@@ -3321,7 +3321,7 @@
                 <a:ea typeface="Arial" pitchFamily="34" charset="-122"/>
                 <a:cs typeface="Arial" pitchFamily="34" charset="-120"/>
               </a:rPr>
-              <a:t>89.6%</a:t>
+              <a:t>88.8%</a:t>
             </a:r>
             <a:endParaRPr lang="en-US" sz="2800" dirty="0"/>
           </a:p>
@@ -4638,7 +4638,7 @@
                           <a:ea typeface="Arial" pitchFamily="34" charset="-122"/>
                           <a:cs typeface="Arial" pitchFamily="34" charset="-120"/>
                         </a:rPr>
-                        <a:t>23</a:t>
+                        <a:t>22</a:t>
                       </a:r>
                       <a:endParaRPr lang="en-US" sz="800" dirty="0">
                         <a:latin typeface="Arial" charset="0"/>
@@ -4706,7 +4706,7 @@
                           <a:ea typeface="Arial" pitchFamily="34" charset="-122"/>
                           <a:cs typeface="Arial" pitchFamily="34" charset="-120"/>
                         </a:rPr>
-                        <a:t>4.57/5</a:t>
+                        <a:t>4.50/5</a:t>
                       </a:r>
                       <a:endParaRPr lang="en-US" sz="800" dirty="0">
                         <a:latin typeface="Arial" charset="0"/>
@@ -4774,7 +4774,7 @@
                           <a:ea typeface="Arial" pitchFamily="34" charset="-122"/>
                           <a:cs typeface="Arial" pitchFamily="34" charset="-120"/>
                         </a:rPr>
-                        <a:t>9.13</a:t>
+                        <a:t>9.00</a:t>
                       </a:r>
                       <a:endParaRPr lang="en-US" sz="800" dirty="0">
                         <a:latin typeface="Arial" charset="0"/>
@@ -5048,7 +5048,7 @@
                           <a:ea typeface="Arial" pitchFamily="34" charset="-122"/>
                           <a:cs typeface="Arial" pitchFamily="34" charset="-120"/>
                         </a:rPr>
-                        <a:t>8.76/10</a:t>
+                        <a:t>8.73/10</a:t>
                       </a:r>
                       <a:endParaRPr lang="en-US" sz="800" dirty="0">
                         <a:latin typeface="Arial" charset="0"/>
@@ -5116,7 +5116,7 @@
                           <a:ea typeface="Arial" pitchFamily="34" charset="-122"/>
                           <a:cs typeface="Arial" pitchFamily="34" charset="-120"/>
                         </a:rPr>
-                        <a:t>8.76</a:t>
+                        <a:t>8.73</a:t>
                       </a:r>
                       <a:endParaRPr lang="en-US" sz="800" dirty="0">
                         <a:latin typeface="Arial" charset="0"/>
@@ -5322,7 +5322,7 @@
                           <a:ea typeface="Arial" pitchFamily="34" charset="-122"/>
                           <a:cs typeface="Arial" pitchFamily="34" charset="-120"/>
                         </a:rPr>
-                        <a:t>2</a:t>
+                        <a:t>3</a:t>
                       </a:r>
                       <a:endParaRPr lang="en-US" sz="800" dirty="0">
                         <a:latin typeface="Arial" charset="0"/>
@@ -5390,7 +5390,7 @@
                           <a:ea typeface="Arial" pitchFamily="34" charset="-122"/>
                           <a:cs typeface="Arial" pitchFamily="34" charset="-120"/>
                         </a:rPr>
-                        <a:t>3.50/5</a:t>
+                        <a:t>3.67/5</a:t>
                       </a:r>
                       <a:endParaRPr lang="en-US" sz="800" dirty="0">
                         <a:latin typeface="Arial" charset="0"/>
@@ -5458,7 +5458,7 @@
                           <a:ea typeface="Arial" pitchFamily="34" charset="-122"/>
                           <a:cs typeface="Arial" pitchFamily="34" charset="-120"/>
                         </a:rPr>
-                        <a:t>7.00</a:t>
+                        <a:t>7.33</a:t>
                       </a:r>
                       <a:endParaRPr lang="en-US" sz="800" dirty="0">
                         <a:latin typeface="Arial" charset="0"/>
@@ -5911,7 +5911,7 @@
                 <a:ea typeface="Arial" pitchFamily="34" charset="-122"/>
                 <a:cs typeface="Arial" pitchFamily="34" charset="-120"/>
               </a:rPr>
-              <a:t>120件（89.6%）</a:t>
+              <a:t>119件（88.8%）</a:t>
             </a:r>
             <a:endParaRPr lang="en-US" sz="1600" dirty="0"/>
           </a:p>
@@ -6009,7 +6009,7 @@
                 <a:ea typeface="Arial" pitchFamily="34" charset="-122"/>
                 <a:cs typeface="Arial" pitchFamily="34" charset="-120"/>
               </a:rPr>
-              <a:t>12件（9.0%）</a:t>
+              <a:t>13件（9.7%）</a:t>
             </a:r>
             <a:endParaRPr lang="en-US" sz="1600" dirty="0"/>
           </a:p>
@@ -6269,7 +6269,7 @@
                 <a:ea typeface="Arial" pitchFamily="34" charset="-122"/>
                 <a:cs typeface="Arial" pitchFamily="34" charset="-120"/>
               </a:rPr>
-              <a:t>高評価レビュー（8-10点: 120件）の分析から、主要な強みテーマを抽出しています。立地・アクセス、客室清潔感、スタッフ対応が高評価の中心的テーマです。</a:t>
+              <a:t>高評価レビュー（8-10点: 119件）の分析から、主要な強みテーマを抽出しています。立地・アクセス、客室清潔感、スタッフ対応が高評価の中心的テーマです。</a:t>
             </a:r>
             <a:endParaRPr lang="en-US" sz="1200" dirty="0"/>
           </a:p>
@@ -6529,7 +6529,7 @@
                 <a:ea typeface="Arial" pitchFamily="34" charset="-122"/>
                 <a:cs typeface="Arial" pitchFamily="34" charset="-120"/>
               </a:rPr>
-              <a:t>低評価・中評価レビュー（14件）から改善課題を優先度別に整理しています。S/A/B/Cの4段階で優先度を設定し、計画的な改善を推進します。</a:t>
+              <a:t>低評価・中評価レビュー（15件）から改善課題を優先度別に整理しています。S/A/B/Cの4段階で優先度を設定し、計画的な改善を推進します。</a:t>
             </a:r>
             <a:endParaRPr lang="en-US" sz="1200" dirty="0"/>
           </a:p>
@@ -7309,7 +7309,7 @@
                 <a:ea typeface="Arial" pitchFamily="34" charset="-122"/>
                 <a:cs typeface="Arial" pitchFamily="34" charset="-120"/>
               </a:rPr>
-              <a:t>全体平均 9.09点 → 目標 9.59点</a:t>
+              <a:t>全体平均 9.04点 → 目標 9.54点</a:t>
             </a:r>
             <a:endParaRPr lang="en-US" sz="1200" dirty="0"/>
           </a:p>
@@ -7326,7 +7326,7 @@
                 <a:ea typeface="Arial" pitchFamily="34" charset="-122"/>
                 <a:cs typeface="Arial" pitchFamily="34" charset="-120"/>
               </a:rPr>
-              <a:t>高評価率 89.6% → 目標 94.6%</a:t>
+              <a:t>高評価率 88.8% → 目標 93.8%</a:t>
             </a:r>
             <a:endParaRPr lang="en-US" sz="1200" dirty="0"/>
           </a:p>

--- a/納品レポート/ホテル別レポート/keisei_kinshicho_口コミ分析レポート.pptx
+++ b/納品レポート/ホテル別レポート/keisei_kinshicho_口コミ分析レポート.pptx
@@ -202,13 +202,13 @@
                 <c:formatCode>General</c:formatCode>
                 <c:ptCount val="4"/>
                 <c:pt idx="0">
-                  <c:v>9.53</c:v>
+                  <c:v>9.59</c:v>
                 </c:pt>
                 <c:pt idx="1">
-                  <c:v>9.11</c:v>
+                  <c:v>9.27</c:v>
                 </c:pt>
                 <c:pt idx="2">
-                  <c:v>8.96</c:v>
+                  <c:v>8.97</c:v>
                 </c:pt>
                 <c:pt idx="3">
                   <c:v>8</c:v>
@@ -554,7 +554,7 @@
               <c:numCache>
                 <c:ptCount val="3"/>
                 <c:pt idx="0">
-                  <c:v>66</c:v>
+                  <c:v>75</c:v>
                 </c:pt>
                 <c:pt idx="1">
                   <c:v>4</c:v>
@@ -755,13 +755,13 @@
                 <c:formatCode>General</c:formatCode>
                 <c:ptCount val="5"/>
                 <c:pt idx="0">
-                  <c:v>42</c:v>
+                  <c:v>50</c:v>
                 </c:pt>
                 <c:pt idx="1">
                   <c:v>12</c:v>
                 </c:pt>
                 <c:pt idx="2">
-                  <c:v>12</c:v>
+                  <c:v>13</c:v>
                 </c:pt>
                 <c:pt idx="3">
                   <c:v>4</c:v>
@@ -2718,7 +2718,7 @@
                 <a:ea typeface="Arial" pitchFamily="34" charset="-122"/>
                 <a:cs typeface="Arial" pitchFamily="34" charset="-120"/>
               </a:rPr>
-              <a:t>レビュー総数：71件（4サイト）</a:t>
+              <a:t>レビュー総数：80件（4サイト）</a:t>
             </a:r>
             <a:endParaRPr lang="en-US" sz="1000" dirty="0"/>
           </a:p>
@@ -2738,7 +2738,7 @@
                 <a:ea typeface="Arial" pitchFamily="34" charset="-122"/>
                 <a:cs typeface="Arial" pitchFamily="34" charset="-120"/>
               </a:rPr>
-              <a:t>作成日：2026年4月2日</a:t>
+              <a:t>作成日：2026年4月5日</a:t>
             </a:r>
             <a:endParaRPr lang="en-US" sz="1000" dirty="0"/>
           </a:p>
@@ -3284,7 +3284,7 @@
                           <a:ea typeface="Arial" pitchFamily="34" charset="-122"/>
                           <a:cs typeface="Arial" pitchFamily="34" charset="-120"/>
                         </a:rPr>
-                        <a:t>9.24点</a:t>
+                        <a:t>9.30点</a:t>
                       </a:r>
                       <a:endParaRPr lang="en-US" sz="1000" dirty="0">
                         <a:latin typeface="Arial" charset="0"/>
@@ -3352,7 +3352,7 @@
                           <a:ea typeface="Arial" pitchFamily="34" charset="-122"/>
                           <a:cs typeface="Arial" pitchFamily="34" charset="-120"/>
                         </a:rPr>
-                        <a:t>9.4点以上</a:t>
+                        <a:t>9.5点以上</a:t>
                       </a:r>
                       <a:endParaRPr lang="en-US" sz="1000" dirty="0">
                         <a:latin typeface="Arial" charset="0"/>
@@ -3558,7 +3558,7 @@
                           <a:ea typeface="Arial" pitchFamily="34" charset="-122"/>
                           <a:cs typeface="Arial" pitchFamily="34" charset="-120"/>
                         </a:rPr>
-                        <a:t>93.0%</a:t>
+                        <a:t>93.8%</a:t>
                       </a:r>
                       <a:endParaRPr lang="en-US" sz="1000" dirty="0">
                         <a:latin typeface="Arial" charset="0"/>
@@ -3626,7 +3626,7 @@
                           <a:ea typeface="Arial" pitchFamily="34" charset="-122"/>
                           <a:cs typeface="Arial" pitchFamily="34" charset="-120"/>
                         </a:rPr>
-                        <a:t>95%以上</a:t>
+                        <a:t>96%以上</a:t>
                       </a:r>
                       <a:endParaRPr lang="en-US" sz="1000" dirty="0">
                         <a:latin typeface="Arial" charset="0"/>
@@ -3832,7 +3832,7 @@
                           <a:ea typeface="Arial" pitchFamily="34" charset="-122"/>
                           <a:cs typeface="Arial" pitchFamily="34" charset="-120"/>
                         </a:rPr>
-                        <a:t>1.4%</a:t>
+                        <a:t>1.2%</a:t>
                       </a:r>
                       <a:endParaRPr lang="en-US" sz="1000" dirty="0">
                         <a:latin typeface="Arial" charset="0"/>
@@ -4654,7 +4654,7 @@
                           <a:ea typeface="Arial" pitchFamily="34" charset="-122"/>
                           <a:cs typeface="Arial" pitchFamily="34" charset="-120"/>
                         </a:rPr>
-                        <a:t>約10件/期間</a:t>
+                        <a:t>約12件/期間</a:t>
                       </a:r>
                       <a:endParaRPr lang="en-US" sz="1000" dirty="0">
                         <a:latin typeface="Arial" charset="0"/>
@@ -4722,7 +4722,7 @@
                           <a:ea typeface="Arial" pitchFamily="34" charset="-122"/>
                           <a:cs typeface="Arial" pitchFamily="34" charset="-120"/>
                         </a:rPr>
-                        <a:t>5件以下</a:t>
+                        <a:t>6件以下</a:t>
                       </a:r>
                       <a:endParaRPr lang="en-US" sz="1000" dirty="0">
                         <a:latin typeface="Arial" charset="0"/>
@@ -5293,7 +5293,7 @@
                 <a:ea typeface="Arial" pitchFamily="34" charset="-122"/>
                 <a:cs typeface="Arial" pitchFamily="34" charset="-120"/>
               </a:rPr>
-              <a:t>9.24</a:t>
+              <a:t>9.30</a:t>
             </a:r>
             <a:endParaRPr lang="en-US" sz="3200" dirty="0"/>
           </a:p>
@@ -5418,7 +5418,7 @@
                 <a:ea typeface="Arial" pitchFamily="34" charset="-122"/>
                 <a:cs typeface="Arial" pitchFamily="34" charset="-120"/>
               </a:rPr>
-              <a:t>93.0%</a:t>
+              <a:t>93.8%</a:t>
             </a:r>
             <a:endParaRPr lang="en-US" sz="3200" dirty="0"/>
           </a:p>
@@ -5543,7 +5543,7 @@
                 <a:ea typeface="Arial" pitchFamily="34" charset="-122"/>
                 <a:cs typeface="Arial" pitchFamily="34" charset="-120"/>
               </a:rPr>
-              <a:t>1.4%</a:t>
+              <a:t>1.2%</a:t>
             </a:r>
             <a:endParaRPr lang="en-US" sz="3200" dirty="0"/>
           </a:p>
@@ -5668,7 +5668,7 @@
                 <a:ea typeface="Arial" pitchFamily="34" charset="-122"/>
                 <a:cs typeface="Arial" pitchFamily="34" charset="-120"/>
               </a:rPr>
-              <a:t>71件</a:t>
+              <a:t>80件</a:t>
             </a:r>
             <a:endParaRPr lang="en-US" sz="3200" dirty="0"/>
           </a:p>
@@ -5816,7 +5816,47 @@
                 <a:ea typeface="Arial" pitchFamily="34" charset="-122"/>
                 <a:cs typeface="Arial" pitchFamily="34" charset="-120"/>
               </a:rPr>
-              <a:t>  Very convenient location, close to main station with many...</a:t>
+              <a:t>  立地も便利で、移動や観光も楽でした</a:t>
+            </a:r>
+            <a:endParaRPr lang="en-US" sz="1100" dirty="0"/>
+          </a:p>
+          <a:p>
+            <a:pPr indent="0" marL="0">
+              <a:spcAft>
+                <a:spcPts val="200"/>
+              </a:spcAft>
+              <a:buNone/>
+            </a:pPr>
+            <a:r>
+              <a:rPr lang="en-US" sz="1100" b="1" dirty="0">
+                <a:solidFill>
+                  <a:srgbClr val="334155"/>
+                </a:solidFill>
+                <a:latin typeface="Arial" pitchFamily="34" charset="0"/>
+                <a:ea typeface="Arial" pitchFamily="34" charset="-122"/>
+                <a:cs typeface="Arial" pitchFamily="34" charset="-120"/>
+              </a:rPr>
+              <a:t>清潔さ・清掃 </a:t>
+            </a:r>
+            <a:endParaRPr lang="en-US" sz="1100" dirty="0"/>
+          </a:p>
+          <a:p>
+            <a:pPr indent="0" marL="0">
+              <a:spcAft>
+                <a:spcPts val="200"/>
+              </a:spcAft>
+              <a:buNone/>
+            </a:pPr>
+            <a:r>
+              <a:rPr lang="en-US" sz="900" dirty="0">
+                <a:solidFill>
+                  <a:srgbClr val="64748B"/>
+                </a:solidFill>
+                <a:latin typeface="Arial" pitchFamily="34" charset="0"/>
+                <a:ea typeface="Arial" pitchFamily="34" charset="-122"/>
+                <a:cs typeface="Arial" pitchFamily="34" charset="-120"/>
+              </a:rPr>
+              <a:t>  朝のバイキングもとても美味しく頂き、部屋もすごく綺麗でした</a:t>
             </a:r>
             <a:endParaRPr lang="en-US" sz="1100" dirty="0"/>
           </a:p>
@@ -5856,47 +5896,7 @@
                 <a:ea typeface="Arial" pitchFamily="34" charset="-122"/>
                 <a:cs typeface="Arial" pitchFamily="34" charset="-120"/>
               </a:rPr>
-              <a:t>  Staff were friendly and service was  efficient</a:t>
-            </a:r>
-            <a:endParaRPr lang="en-US" sz="1100" dirty="0"/>
-          </a:p>
-          <a:p>
-            <a:pPr indent="0" marL="0">
-              <a:spcAft>
-                <a:spcPts val="200"/>
-              </a:spcAft>
-              <a:buNone/>
-            </a:pPr>
-            <a:r>
-              <a:rPr lang="en-US" sz="1100" b="1" dirty="0">
-                <a:solidFill>
-                  <a:srgbClr val="334155"/>
-                </a:solidFill>
-                <a:latin typeface="Arial" pitchFamily="34" charset="0"/>
-                <a:ea typeface="Arial" pitchFamily="34" charset="-122"/>
-                <a:cs typeface="Arial" pitchFamily="34" charset="-120"/>
-              </a:rPr>
-              <a:t>清潔さ・清掃 </a:t>
-            </a:r>
-            <a:endParaRPr lang="en-US" sz="1100" dirty="0"/>
-          </a:p>
-          <a:p>
-            <a:pPr indent="0" marL="0">
-              <a:spcAft>
-                <a:spcPts val="200"/>
-              </a:spcAft>
-              <a:buNone/>
-            </a:pPr>
-            <a:r>
-              <a:rPr lang="en-US" sz="900" dirty="0">
-                <a:solidFill>
-                  <a:srgbClr val="64748B"/>
-                </a:solidFill>
-                <a:latin typeface="Arial" pitchFamily="34" charset="0"/>
-                <a:ea typeface="Arial" pitchFamily="34" charset="-122"/>
-                <a:cs typeface="Arial" pitchFamily="34" charset="-120"/>
-              </a:rPr>
-              <a:t>  Rooms and beds are a good size, clean and comfortable</a:t>
+              <a:t>  スタッフは親切で協力的で、部屋は滞在中ずっと清潔で快適、そして手入れが行き届いていました</a:t>
             </a:r>
             <a:endParaRPr lang="en-US" sz="1100" dirty="0"/>
           </a:p>
@@ -6044,7 +6044,7 @@
                 <a:ea typeface="Arial" pitchFamily="34" charset="-122"/>
                 <a:cs typeface="Arial" pitchFamily="34" charset="-120"/>
               </a:rPr>
-              <a:t>  La posizione dell'hotel è strategica, è vicina alla stazi...</a:t>
+              <a:t>  We had a great 7-night stay at this hotel</a:t>
             </a:r>
             <a:endParaRPr lang="en-US" sz="1100" dirty="0"/>
           </a:p>
@@ -6477,7 +6477,7 @@
                 <a:ea typeface="Arial" pitchFamily="34" charset="-122"/>
                 <a:cs typeface="Arial" pitchFamily="34" charset="-120"/>
               </a:rPr>
-              <a:t>9.24</a:t>
+              <a:t>9.30</a:t>
             </a:r>
             <a:endParaRPr lang="en-US" sz="3200" dirty="0"/>
           </a:p>
@@ -6602,7 +6602,7 @@
                 <a:ea typeface="Arial" pitchFamily="34" charset="-122"/>
                 <a:cs typeface="Arial" pitchFamily="34" charset="-120"/>
               </a:rPr>
-              <a:t>93.0%</a:t>
+              <a:t>93.8%</a:t>
             </a:r>
             <a:endParaRPr lang="en-US" sz="3200" dirty="0"/>
           </a:p>
@@ -6727,7 +6727,7 @@
                 <a:ea typeface="Arial" pitchFamily="34" charset="-122"/>
                 <a:cs typeface="Arial" pitchFamily="34" charset="-120"/>
               </a:rPr>
-              <a:t>1.4%</a:t>
+              <a:t>1.2%</a:t>
             </a:r>
             <a:endParaRPr lang="en-US" sz="3200" dirty="0"/>
           </a:p>
@@ -6852,7 +6852,7 @@
                 <a:ea typeface="Arial" pitchFamily="34" charset="-122"/>
                 <a:cs typeface="Arial" pitchFamily="34" charset="-120"/>
               </a:rPr>
-              <a:t>71件</a:t>
+              <a:t>80件</a:t>
             </a:r>
             <a:endParaRPr lang="en-US" sz="3200" dirty="0"/>
           </a:p>
@@ -7273,7 +7273,7 @@
                 <a:ea typeface="Arial" pitchFamily="34" charset="-122"/>
                 <a:cs typeface="Arial" pitchFamily="34" charset="-120"/>
               </a:rPr>
-              <a:t>Trip.com(9.53)が最高スコア。</a:t>
+              <a:t>Trip.com(9.59)が最高スコア。</a:t>
             </a:r>
             <a:endParaRPr lang="en-US" sz="1100" dirty="0"/>
           </a:p>
@@ -7831,7 +7831,7 @@
                           <a:ea typeface="Arial" pitchFamily="34" charset="-122"/>
                           <a:cs typeface="Arial" pitchFamily="34" charset="-120"/>
                         </a:rPr>
-                        <a:t>34</a:t>
+                        <a:t>39</a:t>
                       </a:r>
                       <a:endParaRPr lang="en-US" sz="900" dirty="0">
                         <a:latin typeface="Arial" charset="0"/>
@@ -7899,7 +7899,7 @@
                           <a:ea typeface="Arial" pitchFamily="34" charset="-122"/>
                           <a:cs typeface="Arial" pitchFamily="34" charset="-120"/>
                         </a:rPr>
-                        <a:t>9.53</a:t>
+                        <a:t>9.59</a:t>
                       </a:r>
                       <a:endParaRPr lang="en-US" sz="900" dirty="0">
                         <a:latin typeface="Arial" charset="0"/>
@@ -8035,7 +8035,7 @@
                           <a:ea typeface="Arial" pitchFamily="34" charset="-122"/>
                           <a:cs typeface="Arial" pitchFamily="34" charset="-120"/>
                         </a:rPr>
-                        <a:t>9.53</a:t>
+                        <a:t>9.59</a:t>
                       </a:r>
                       <a:endParaRPr lang="en-US" sz="900" dirty="0">
                         <a:latin typeface="Arial" charset="0"/>
@@ -8173,7 +8173,7 @@
                           <a:ea typeface="Arial" pitchFamily="34" charset="-122"/>
                           <a:cs typeface="Arial" pitchFamily="34" charset="-120"/>
                         </a:rPr>
-                        <a:t>9</a:t>
+                        <a:t>11</a:t>
                       </a:r>
                       <a:endParaRPr lang="en-US" sz="900" dirty="0">
                         <a:latin typeface="Arial" charset="0"/>
@@ -8241,7 +8241,7 @@
                           <a:ea typeface="Arial" pitchFamily="34" charset="-122"/>
                           <a:cs typeface="Arial" pitchFamily="34" charset="-120"/>
                         </a:rPr>
-                        <a:t>4.56</a:t>
+                        <a:t>4.64</a:t>
                       </a:r>
                       <a:endParaRPr lang="en-US" sz="900" dirty="0">
                         <a:latin typeface="Arial" charset="0"/>
@@ -8377,7 +8377,7 @@
                           <a:ea typeface="Arial" pitchFamily="34" charset="-122"/>
                           <a:cs typeface="Arial" pitchFamily="34" charset="-120"/>
                         </a:rPr>
-                        <a:t>9.11</a:t>
+                        <a:t>9.27</a:t>
                       </a:r>
                       <a:endParaRPr lang="en-US" sz="900" dirty="0">
                         <a:latin typeface="Arial" charset="0"/>
@@ -8515,7 +8515,7 @@
                           <a:ea typeface="Arial" pitchFamily="34" charset="-122"/>
                           <a:cs typeface="Arial" pitchFamily="34" charset="-120"/>
                         </a:rPr>
-                        <a:t>27</a:t>
+                        <a:t>29</a:t>
                       </a:r>
                       <a:endParaRPr lang="en-US" sz="900" dirty="0">
                         <a:latin typeface="Arial" charset="0"/>
@@ -8583,7 +8583,7 @@
                           <a:ea typeface="Arial" pitchFamily="34" charset="-122"/>
                           <a:cs typeface="Arial" pitchFamily="34" charset="-120"/>
                         </a:rPr>
-                        <a:t>8.96</a:t>
+                        <a:t>8.97</a:t>
                       </a:r>
                       <a:endParaRPr lang="en-US" sz="900" dirty="0">
                         <a:latin typeface="Arial" charset="0"/>
@@ -8719,7 +8719,7 @@
                           <a:ea typeface="Arial" pitchFamily="34" charset="-122"/>
                           <a:cs typeface="Arial" pitchFamily="34" charset="-120"/>
                         </a:rPr>
-                        <a:t>8.96</a:t>
+                        <a:t>8.97</a:t>
                       </a:r>
                       <a:endParaRPr lang="en-US" sz="900" dirty="0">
                         <a:latin typeface="Arial" charset="0"/>
@@ -9469,7 +9469,7 @@
                 <a:ea typeface="Arial" pitchFamily="34" charset="-122"/>
                 <a:cs typeface="Arial" pitchFamily="34" charset="-120"/>
               </a:rPr>
-              <a:t>66件（93.0%）</a:t>
+              <a:t>75件（93.8%）</a:t>
             </a:r>
             <a:endParaRPr lang="en-US" sz="1100" dirty="0"/>
           </a:p>
@@ -9567,7 +9567,7 @@
                 <a:ea typeface="Arial" pitchFamily="34" charset="-122"/>
                 <a:cs typeface="Arial" pitchFamily="34" charset="-120"/>
               </a:rPr>
-              <a:t>4件（5.6%）</a:t>
+              <a:t>4件（5.0%）</a:t>
             </a:r>
             <a:endParaRPr lang="en-US" sz="1100" dirty="0"/>
           </a:p>
@@ -9665,7 +9665,7 @@
                 <a:ea typeface="Arial" pitchFamily="34" charset="-122"/>
                 <a:cs typeface="Arial" pitchFamily="34" charset="-120"/>
               </a:rPr>
-              <a:t>1件（1.4%）</a:t>
+              <a:t>1件（1.2%）</a:t>
             </a:r>
             <a:endParaRPr lang="en-US" sz="1100" dirty="0"/>
           </a:p>
@@ -10077,7 +10077,7 @@
                 <a:ea typeface="Arial" pitchFamily="34" charset="-122"/>
                 <a:cs typeface="Arial" pitchFamily="34" charset="-120"/>
               </a:rPr>
-              <a:t>Very convenient location, close to main station with many...</a:t>
+              <a:t>立地も便利で、移動や観光も楽でした</a:t>
             </a:r>
             <a:endParaRPr lang="en-US" sz="900" dirty="0"/>
           </a:p>
@@ -10116,7 +10116,7 @@
                 <a:ea typeface="Arial" pitchFamily="34" charset="-122"/>
                 <a:cs typeface="Arial" pitchFamily="34" charset="-120"/>
               </a:rPr>
-              <a:t>「La posizione dell'hotel è strategica, è vicina alla stazi...」</a:t>
+              <a:t>「駅、お店、美しい桜のある公園が近くにあります」</a:t>
             </a:r>
             <a:endParaRPr lang="en-US" sz="900" dirty="0"/>
           </a:p>
@@ -10261,7 +10261,7 @@
                 <a:ea typeface="Arial" pitchFamily="34" charset="-122"/>
                 <a:cs typeface="Arial" pitchFamily="34" charset="-120"/>
               </a:rPr>
-              <a:t>スタッフの対応</a:t>
+              <a:t>清潔さ・清掃</a:t>
             </a:r>
             <a:endParaRPr lang="en-US" sz="1300" dirty="0"/>
           </a:p>
@@ -10300,7 +10300,7 @@
                 <a:ea typeface="Arial" pitchFamily="34" charset="-122"/>
                 <a:cs typeface="Arial" pitchFamily="34" charset="-120"/>
               </a:rPr>
-              <a:t>Staff were friendly and service was  efficient</a:t>
+              <a:t>朝のバイキングもとても美味しく頂き、部屋もすごく綺麗でした</a:t>
             </a:r>
             <a:endParaRPr lang="en-US" sz="900" dirty="0"/>
           </a:p>
@@ -10339,7 +10339,7 @@
                 <a:ea typeface="Arial" pitchFamily="34" charset="-122"/>
                 <a:cs typeface="Arial" pitchFamily="34" charset="-120"/>
               </a:rPr>
-              <a:t>「ただ海外スタッフの方の日本語、マナーは素晴らしいものがありました」</a:t>
+              <a:t>「スタッフは親切で協力的で、部屋は滞在中ずっと清潔で快適、そして手入れが行き届いていました」</a:t>
             </a:r>
             <a:endParaRPr lang="en-US" sz="900" dirty="0"/>
           </a:p>
@@ -10484,7 +10484,7 @@
                 <a:ea typeface="Arial" pitchFamily="34" charset="-122"/>
                 <a:cs typeface="Arial" pitchFamily="34" charset="-120"/>
               </a:rPr>
-              <a:t>清潔さ・清掃</a:t>
+              <a:t>スタッフの対応</a:t>
             </a:r>
             <a:endParaRPr lang="en-US" sz="1300" dirty="0"/>
           </a:p>
@@ -10523,7 +10523,7 @@
                 <a:ea typeface="Arial" pitchFamily="34" charset="-122"/>
                 <a:cs typeface="Arial" pitchFamily="34" charset="-120"/>
               </a:rPr>
-              <a:t>Rooms and beds are a good size, clean and comfortable</a:t>
+              <a:t>スタッフは親切で協力的で、部屋は滞在中ずっと清潔で快適、そして手入れが行き届いていました</a:t>
             </a:r>
             <a:endParaRPr lang="en-US" sz="900" dirty="0"/>
           </a:p>
@@ -10562,7 +10562,7 @@
                 <a:ea typeface="Arial" pitchFamily="34" charset="-122"/>
                 <a:cs typeface="Arial" pitchFamily="34" charset="-120"/>
               </a:rPr>
-              <a:t>「綺麗」</a:t>
+              <a:t>「Staff were friendly and service was  efficient」</a:t>
             </a:r>
             <a:endParaRPr lang="en-US" sz="900" dirty="0"/>
           </a:p>
@@ -10746,7 +10746,7 @@
                 <a:ea typeface="Arial" pitchFamily="34" charset="-122"/>
                 <a:cs typeface="Arial" pitchFamily="34" charset="-120"/>
               </a:rPr>
-              <a:t>Rooms and beds are a good size, clean and comfortable</a:t>
+              <a:t>アメニティが本当に豊富でした</a:t>
             </a:r>
             <a:endParaRPr lang="en-US" sz="900" dirty="0"/>
           </a:p>
@@ -10785,7 +10785,7 @@
                 <a:ea typeface="Arial" pitchFamily="34" charset="-122"/>
                 <a:cs typeface="Arial" pitchFamily="34" charset="-120"/>
               </a:rPr>
-              <a:t>「設備上都還不錯，有翻新，服務人員的服務態度真的一百分」</a:t>
+              <a:t>「スタッフは親切で協力的で、部屋は滞在中ずっと清潔で快適、そして手入れが行き届いていました」</a:t>
             </a:r>
             <a:endParaRPr lang="en-US" sz="900" dirty="0"/>
           </a:p>
@@ -10969,7 +10969,7 @@
                 <a:ea typeface="Arial" pitchFamily="34" charset="-122"/>
                 <a:cs typeface="Arial" pitchFamily="34" charset="-120"/>
               </a:rPr>
-              <a:t>駅から徒歩約8分で、周辺には24時間営業のスーパー（セイユ）をはじめ、たくさんの飲食店があります</a:t>
+              <a:t>周辺には飲食店もたくさんあります</a:t>
             </a:r>
             <a:endParaRPr lang="en-US" sz="900" dirty="0"/>
           </a:p>
@@ -11008,7 +11008,7 @@
                 <a:ea typeface="Arial" pitchFamily="34" charset="-122"/>
                 <a:cs typeface="Arial" pitchFamily="34" charset="-120"/>
               </a:rPr>
-              <a:t>「JR錦糸町駅から遠くなく、周辺には飲食店やショッピング施設、24時間営業のスーパーマーケットなどがあり賑やかである...」</a:t>
+              <a:t>「駅から徒歩約8分で、周辺には24時間営業のスーパー（セイユ）をはじめ、たくさんの飲食店があります」</a:t>
             </a:r>
             <a:endParaRPr lang="en-US" sz="900" dirty="0"/>
           </a:p>
@@ -11921,7 +11921,7 @@
                           <a:ea typeface="Arial" pitchFamily="34" charset="-122"/>
                           <a:cs typeface="Arial" pitchFamily="34" charset="-120"/>
                         </a:rPr>
-                        <a:t>La posizione dell'hotel è strategica, è vicina alla stazi...</a:t>
+                        <a:t>We had a great 7-night stay at this hotel</a:t>
                       </a:r>
                       <a:endParaRPr lang="en-US" sz="900" dirty="0">
                         <a:latin typeface="Arial" charset="0"/>
@@ -11989,7 +11989,7 @@
                           <a:ea typeface="Arial" pitchFamily="34" charset="-122"/>
                           <a:cs typeface="Arial" pitchFamily="34" charset="-120"/>
                         </a:rPr>
-                        <a:t>10件</a:t>
+                        <a:t>12件</a:t>
                       </a:r>
                       <a:endParaRPr lang="en-US" sz="900" dirty="0">
                         <a:latin typeface="Arial" charset="0"/>
@@ -13839,7 +13839,7 @@
                           <a:ea typeface="Arial" pitchFamily="34" charset="-122"/>
                           <a:cs typeface="Arial" pitchFamily="34" charset="-120"/>
                         </a:rPr>
-                        <a:t>東京の宿泊施設としてはかなり広く、バスタブとベッドサイドの景色が見える窓もありました</a:t>
+                        <a:t>東京の宿泊施設としてはかなり広々としていて、バスタブとベッドサイドの景色が見える窓もありました</a:t>
                       </a:r>
                       <a:endParaRPr lang="en-US" sz="900" dirty="0">
                         <a:latin typeface="Arial" charset="0"/>

--- a/納品レポート/ホテル別レポート/keisei_kinshicho_口コミ分析レポート.pptx
+++ b/納品レポート/ホテル別レポート/keisei_kinshicho_口コミ分析レポート.pptx
@@ -202,7 +202,7 @@
                 <c:formatCode>General</c:formatCode>
                 <c:ptCount val="4"/>
                 <c:pt idx="0">
-                  <c:v>9.59</c:v>
+                  <c:v>9.61</c:v>
                 </c:pt>
                 <c:pt idx="1">
                   <c:v>9.27</c:v>
@@ -554,7 +554,7 @@
               <c:numCache>
                 <c:ptCount val="3"/>
                 <c:pt idx="0">
-                  <c:v>75</c:v>
+                  <c:v>77</c:v>
                 </c:pt>
                 <c:pt idx="1">
                   <c:v>4</c:v>
@@ -755,7 +755,7 @@
                 <c:formatCode>General</c:formatCode>
                 <c:ptCount val="5"/>
                 <c:pt idx="0">
-                  <c:v>50</c:v>
+                  <c:v>52</c:v>
                 </c:pt>
                 <c:pt idx="1">
                   <c:v>12</c:v>
@@ -2718,7 +2718,7 @@
                 <a:ea typeface="Arial" pitchFamily="34" charset="-122"/>
                 <a:cs typeface="Arial" pitchFamily="34" charset="-120"/>
               </a:rPr>
-              <a:t>レビュー総数：80件（4サイト）</a:t>
+              <a:t>レビュー総数：82件（4サイト）</a:t>
             </a:r>
             <a:endParaRPr lang="en-US" sz="1000" dirty="0"/>
           </a:p>
@@ -3284,7 +3284,7 @@
                           <a:ea typeface="Arial" pitchFamily="34" charset="-122"/>
                           <a:cs typeface="Arial" pitchFamily="34" charset="-120"/>
                         </a:rPr>
-                        <a:t>9.30点</a:t>
+                        <a:t>9.32点</a:t>
                       </a:r>
                       <a:endParaRPr lang="en-US" sz="1000" dirty="0">
                         <a:latin typeface="Arial" charset="0"/>
@@ -3558,7 +3558,7 @@
                           <a:ea typeface="Arial" pitchFamily="34" charset="-122"/>
                           <a:cs typeface="Arial" pitchFamily="34" charset="-120"/>
                         </a:rPr>
-                        <a:t>93.8%</a:t>
+                        <a:t>93.9%</a:t>
                       </a:r>
                       <a:endParaRPr lang="en-US" sz="1000" dirty="0">
                         <a:latin typeface="Arial" charset="0"/>
@@ -5293,7 +5293,7 @@
                 <a:ea typeface="Arial" pitchFamily="34" charset="-122"/>
                 <a:cs typeface="Arial" pitchFamily="34" charset="-120"/>
               </a:rPr>
-              <a:t>9.30</a:t>
+              <a:t>9.32</a:t>
             </a:r>
             <a:endParaRPr lang="en-US" sz="3200" dirty="0"/>
           </a:p>
@@ -5418,7 +5418,7 @@
                 <a:ea typeface="Arial" pitchFamily="34" charset="-122"/>
                 <a:cs typeface="Arial" pitchFamily="34" charset="-120"/>
               </a:rPr>
-              <a:t>93.8%</a:t>
+              <a:t>93.9%</a:t>
             </a:r>
             <a:endParaRPr lang="en-US" sz="3200" dirty="0"/>
           </a:p>
@@ -5668,7 +5668,7 @@
                 <a:ea typeface="Arial" pitchFamily="34" charset="-122"/>
                 <a:cs typeface="Arial" pitchFamily="34" charset="-120"/>
               </a:rPr>
-              <a:t>80件</a:t>
+              <a:t>82件</a:t>
             </a:r>
             <a:endParaRPr lang="en-US" sz="3200" dirty="0"/>
           </a:p>
@@ -5816,7 +5816,47 @@
                 <a:ea typeface="Arial" pitchFamily="34" charset="-122"/>
                 <a:cs typeface="Arial" pitchFamily="34" charset="-120"/>
               </a:rPr>
-              <a:t>  立地も便利で、移動や観光も楽でした</a:t>
+              <a:t>  立地は便利で、JR駅や地下鉄駅に近く、周辺には多くのレストランがあります</a:t>
+            </a:r>
+            <a:endParaRPr lang="en-US" sz="1100" dirty="0"/>
+          </a:p>
+          <a:p>
+            <a:pPr indent="0" marL="0">
+              <a:spcAft>
+                <a:spcPts val="200"/>
+              </a:spcAft>
+              <a:buNone/>
+            </a:pPr>
+            <a:r>
+              <a:rPr lang="en-US" sz="1100" b="1" dirty="0">
+                <a:solidFill>
+                  <a:srgbClr val="334155"/>
+                </a:solidFill>
+                <a:latin typeface="Arial" pitchFamily="34" charset="0"/>
+                <a:ea typeface="Arial" pitchFamily="34" charset="-122"/>
+                <a:cs typeface="Arial" pitchFamily="34" charset="-120"/>
+              </a:rPr>
+              <a:t>スタッフの対応 </a:t>
+            </a:r>
+            <a:endParaRPr lang="en-US" sz="1100" dirty="0"/>
+          </a:p>
+          <a:p>
+            <a:pPr indent="0" marL="0">
+              <a:spcAft>
+                <a:spcPts val="200"/>
+              </a:spcAft>
+              <a:buNone/>
+            </a:pPr>
+            <a:r>
+              <a:rPr lang="en-US" sz="900" dirty="0">
+                <a:solidFill>
+                  <a:srgbClr val="64748B"/>
+                </a:solidFill>
+                <a:latin typeface="Arial" pitchFamily="34" charset="0"/>
+                <a:ea typeface="Arial" pitchFamily="34" charset="-122"/>
+                <a:cs typeface="Arial" pitchFamily="34" charset="-120"/>
+              </a:rPr>
+              <a:t>  ベッドは快適で、スタッフも親切だったなど、良い点もたくさんありました</a:t>
             </a:r>
             <a:endParaRPr lang="en-US" sz="1100" dirty="0"/>
           </a:p>
@@ -5856,47 +5896,7 @@
                 <a:ea typeface="Arial" pitchFamily="34" charset="-122"/>
                 <a:cs typeface="Arial" pitchFamily="34" charset="-120"/>
               </a:rPr>
-              <a:t>  朝のバイキングもとても美味しく頂き、部屋もすごく綺麗でした</a:t>
-            </a:r>
-            <a:endParaRPr lang="en-US" sz="1100" dirty="0"/>
-          </a:p>
-          <a:p>
-            <a:pPr indent="0" marL="0">
-              <a:spcAft>
-                <a:spcPts val="200"/>
-              </a:spcAft>
-              <a:buNone/>
-            </a:pPr>
-            <a:r>
-              <a:rPr lang="en-US" sz="1100" b="1" dirty="0">
-                <a:solidFill>
-                  <a:srgbClr val="334155"/>
-                </a:solidFill>
-                <a:latin typeface="Arial" pitchFamily="34" charset="0"/>
-                <a:ea typeface="Arial" pitchFamily="34" charset="-122"/>
-                <a:cs typeface="Arial" pitchFamily="34" charset="-120"/>
-              </a:rPr>
-              <a:t>スタッフの対応 </a:t>
-            </a:r>
-            <a:endParaRPr lang="en-US" sz="1100" dirty="0"/>
-          </a:p>
-          <a:p>
-            <a:pPr indent="0" marL="0">
-              <a:spcAft>
-                <a:spcPts val="200"/>
-              </a:spcAft>
-              <a:buNone/>
-            </a:pPr>
-            <a:r>
-              <a:rPr lang="en-US" sz="900" dirty="0">
-                <a:solidFill>
-                  <a:srgbClr val="64748B"/>
-                </a:solidFill>
-                <a:latin typeface="Arial" pitchFamily="34" charset="0"/>
-                <a:ea typeface="Arial" pitchFamily="34" charset="-122"/>
-                <a:cs typeface="Arial" pitchFamily="34" charset="-120"/>
-              </a:rPr>
-              <a:t>  スタッフは親切で協力的で、部屋は滞在中ずっと清潔で快適、そして手入れが行き届いていました</a:t>
+              <a:t>  ホテルは清潔で、サービスも素晴らしいです</a:t>
             </a:r>
             <a:endParaRPr lang="en-US" sz="1100" dirty="0"/>
           </a:p>
@@ -6477,7 +6477,7 @@
                 <a:ea typeface="Arial" pitchFamily="34" charset="-122"/>
                 <a:cs typeface="Arial" pitchFamily="34" charset="-120"/>
               </a:rPr>
-              <a:t>9.30</a:t>
+              <a:t>9.32</a:t>
             </a:r>
             <a:endParaRPr lang="en-US" sz="3200" dirty="0"/>
           </a:p>
@@ -6602,7 +6602,7 @@
                 <a:ea typeface="Arial" pitchFamily="34" charset="-122"/>
                 <a:cs typeface="Arial" pitchFamily="34" charset="-120"/>
               </a:rPr>
-              <a:t>93.8%</a:t>
+              <a:t>93.9%</a:t>
             </a:r>
             <a:endParaRPr lang="en-US" sz="3200" dirty="0"/>
           </a:p>
@@ -6852,7 +6852,7 @@
                 <a:ea typeface="Arial" pitchFamily="34" charset="-122"/>
                 <a:cs typeface="Arial" pitchFamily="34" charset="-120"/>
               </a:rPr>
-              <a:t>80件</a:t>
+              <a:t>82件</a:t>
             </a:r>
             <a:endParaRPr lang="en-US" sz="3200" dirty="0"/>
           </a:p>
@@ -7273,7 +7273,7 @@
                 <a:ea typeface="Arial" pitchFamily="34" charset="-122"/>
                 <a:cs typeface="Arial" pitchFamily="34" charset="-120"/>
               </a:rPr>
-              <a:t>Trip.com(9.59)が最高スコア。</a:t>
+              <a:t>Trip.com(9.61)が最高スコア。</a:t>
             </a:r>
             <a:endParaRPr lang="en-US" sz="1100" dirty="0"/>
           </a:p>
@@ -7831,7 +7831,7 @@
                           <a:ea typeface="Arial" pitchFamily="34" charset="-122"/>
                           <a:cs typeface="Arial" pitchFamily="34" charset="-120"/>
                         </a:rPr>
-                        <a:t>39</a:t>
+                        <a:t>41</a:t>
                       </a:r>
                       <a:endParaRPr lang="en-US" sz="900" dirty="0">
                         <a:latin typeface="Arial" charset="0"/>
@@ -7899,7 +7899,7 @@
                           <a:ea typeface="Arial" pitchFamily="34" charset="-122"/>
                           <a:cs typeface="Arial" pitchFamily="34" charset="-120"/>
                         </a:rPr>
-                        <a:t>9.59</a:t>
+                        <a:t>9.61</a:t>
                       </a:r>
                       <a:endParaRPr lang="en-US" sz="900" dirty="0">
                         <a:latin typeface="Arial" charset="0"/>
@@ -8035,7 +8035,7 @@
                           <a:ea typeface="Arial" pitchFamily="34" charset="-122"/>
                           <a:cs typeface="Arial" pitchFamily="34" charset="-120"/>
                         </a:rPr>
-                        <a:t>9.59</a:t>
+                        <a:t>9.61</a:t>
                       </a:r>
                       <a:endParaRPr lang="en-US" sz="900" dirty="0">
                         <a:latin typeface="Arial" charset="0"/>
@@ -9469,7 +9469,7 @@
                 <a:ea typeface="Arial" pitchFamily="34" charset="-122"/>
                 <a:cs typeface="Arial" pitchFamily="34" charset="-120"/>
               </a:rPr>
-              <a:t>75件（93.8%）</a:t>
+              <a:t>77件（93.9%）</a:t>
             </a:r>
             <a:endParaRPr lang="en-US" sz="1100" dirty="0"/>
           </a:p>
@@ -9567,7 +9567,7 @@
                 <a:ea typeface="Arial" pitchFamily="34" charset="-122"/>
                 <a:cs typeface="Arial" pitchFamily="34" charset="-120"/>
               </a:rPr>
-              <a:t>4件（5.0%）</a:t>
+              <a:t>4件（4.9%）</a:t>
             </a:r>
             <a:endParaRPr lang="en-US" sz="1100" dirty="0"/>
           </a:p>
@@ -10077,7 +10077,7 @@
                 <a:ea typeface="Arial" pitchFamily="34" charset="-122"/>
                 <a:cs typeface="Arial" pitchFamily="34" charset="-120"/>
               </a:rPr>
-              <a:t>立地も便利で、移動や観光も楽でした</a:t>
+              <a:t>立地は便利で、JR駅や地下鉄駅に近く、周辺には多くのレストランがあります</a:t>
             </a:r>
             <a:endParaRPr lang="en-US" sz="900" dirty="0"/>
           </a:p>
@@ -10116,7 +10116,7 @@
                 <a:ea typeface="Arial" pitchFamily="34" charset="-122"/>
                 <a:cs typeface="Arial" pitchFamily="34" charset="-120"/>
               </a:rPr>
-              <a:t>「駅、お店、美しい桜のある公園が近くにあります」</a:t>
+              <a:t>「立地も便利で、移動や観光も楽でした」</a:t>
             </a:r>
             <a:endParaRPr lang="en-US" sz="900" dirty="0"/>
           </a:p>
@@ -10198,6 +10198,452 @@
         <p:spPr>
           <a:xfrm>
             <a:off x="5120640" y="1124712"/>
+            <a:ext cx="658368" cy="228600"/>
+          </a:xfrm>
+          <a:prstGeom prst="rect">
+            <a:avLst/>
+          </a:prstGeom>
+          <a:noFill/>
+          <a:ln/>
+        </p:spPr>
+        <p:txBody>
+          <a:bodyPr wrap="square" lIns="0" tIns="0" rIns="0" bIns="0" rtlCol="0" anchor="ctr"/>
+          <a:lstStyle/>
+          <a:p>
+            <a:pPr algn="ctr" indent="0" marL="0">
+              <a:buNone/>
+            </a:pPr>
+            <a:r>
+              <a:rPr lang="en-US" sz="900" b="1" dirty="0">
+                <a:solidFill>
+                  <a:srgbClr val="16A34A"/>
+                </a:solidFill>
+                <a:latin typeface="Arial" pitchFamily="34" charset="0"/>
+                <a:ea typeface="Arial" pitchFamily="34" charset="-122"/>
+                <a:cs typeface="Arial" pitchFamily="34" charset="-120"/>
+              </a:rPr>
+              <a:t>20件+</a:t>
+            </a:r>
+            <a:endParaRPr lang="en-US" sz="900" dirty="0"/>
+          </a:p>
+        </p:txBody>
+      </p:sp>
+      <p:sp>
+        <p:nvSpPr>
+          <p:cNvPr id="16" name="Text 14"/>
+          <p:cNvSpPr/>
+          <p:nvPr/>
+        </p:nvSpPr>
+        <p:spPr>
+          <a:xfrm>
+            <a:off x="3429000" y="1124712"/>
+            <a:ext cx="1645920" cy="274320"/>
+          </a:xfrm>
+          <a:prstGeom prst="rect">
+            <a:avLst/>
+          </a:prstGeom>
+          <a:noFill/>
+          <a:ln/>
+        </p:spPr>
+        <p:txBody>
+          <a:bodyPr wrap="square" lIns="0" tIns="0" rIns="0" bIns="0" rtlCol="0" anchor="ctr"/>
+          <a:lstStyle/>
+          <a:p>
+            <a:pPr indent="0" marL="0">
+              <a:buNone/>
+            </a:pPr>
+            <a:r>
+              <a:rPr lang="en-US" sz="1300" b="1" dirty="0">
+                <a:solidFill>
+                  <a:srgbClr val="1A2744"/>
+                </a:solidFill>
+                <a:latin typeface="Arial" pitchFamily="34" charset="0"/>
+                <a:ea typeface="Arial" pitchFamily="34" charset="-122"/>
+                <a:cs typeface="Arial" pitchFamily="34" charset="-120"/>
+              </a:rPr>
+              <a:t>スタッフの対応</a:t>
+            </a:r>
+            <a:endParaRPr lang="en-US" sz="1300" dirty="0"/>
+          </a:p>
+        </p:txBody>
+      </p:sp>
+      <p:sp>
+        <p:nvSpPr>
+          <p:cNvPr id="17" name="Text 15"/>
+          <p:cNvSpPr/>
+          <p:nvPr/>
+        </p:nvSpPr>
+        <p:spPr>
+          <a:xfrm>
+            <a:off x="3429000" y="1417320"/>
+            <a:ext cx="2377440" cy="365760"/>
+          </a:xfrm>
+          <a:prstGeom prst="rect">
+            <a:avLst/>
+          </a:prstGeom>
+          <a:noFill/>
+          <a:ln/>
+        </p:spPr>
+        <p:txBody>
+          <a:bodyPr wrap="square" lIns="0" tIns="0" rIns="0" bIns="0" rtlCol="0" anchor="ctr"/>
+          <a:lstStyle/>
+          <a:p>
+            <a:pPr indent="0" marL="0">
+              <a:buNone/>
+            </a:pPr>
+            <a:r>
+              <a:rPr lang="en-US" sz="900" dirty="0">
+                <a:solidFill>
+                  <a:srgbClr val="64748B"/>
+                </a:solidFill>
+                <a:latin typeface="Arial" pitchFamily="34" charset="0"/>
+                <a:ea typeface="Arial" pitchFamily="34" charset="-122"/>
+                <a:cs typeface="Arial" pitchFamily="34" charset="-120"/>
+              </a:rPr>
+              <a:t>ベッドは快適で、スタッフも親切だったなど、良い点もたくさんありました</a:t>
+            </a:r>
+            <a:endParaRPr lang="en-US" sz="900" dirty="0"/>
+          </a:p>
+        </p:txBody>
+      </p:sp>
+      <p:sp>
+        <p:nvSpPr>
+          <p:cNvPr id="18" name="Text 16"/>
+          <p:cNvSpPr/>
+          <p:nvPr/>
+        </p:nvSpPr>
+        <p:spPr>
+          <a:xfrm>
+            <a:off x="3429000" y="1828800"/>
+            <a:ext cx="2377440" cy="640080"/>
+          </a:xfrm>
+          <a:prstGeom prst="rect">
+            <a:avLst/>
+          </a:prstGeom>
+          <a:noFill/>
+          <a:ln/>
+        </p:spPr>
+        <p:txBody>
+          <a:bodyPr wrap="square" lIns="0" tIns="0" rIns="0" bIns="0" rtlCol="0" anchor="ctr"/>
+          <a:lstStyle/>
+          <a:p>
+            <a:pPr indent="0" marL="0">
+              <a:buNone/>
+            </a:pPr>
+            <a:r>
+              <a:rPr lang="en-US" sz="900" i="1" dirty="0">
+                <a:solidFill>
+                  <a:srgbClr val="3B7DD8"/>
+                </a:solidFill>
+                <a:latin typeface="Arial" pitchFamily="34" charset="0"/>
+                <a:ea typeface="Arial" pitchFamily="34" charset="-122"/>
+                <a:cs typeface="Arial" pitchFamily="34" charset="-120"/>
+              </a:rPr>
+              <a:t>「ホテルは清潔で、サービスも素晴らしいです」</a:t>
+            </a:r>
+            <a:endParaRPr lang="en-US" sz="900" dirty="0"/>
+          </a:p>
+        </p:txBody>
+      </p:sp>
+      <p:sp>
+        <p:nvSpPr>
+          <p:cNvPr id="19" name="Shape 17"/>
+          <p:cNvSpPr/>
+          <p:nvPr/>
+        </p:nvSpPr>
+        <p:spPr>
+          <a:xfrm>
+            <a:off x="6126480" y="1051560"/>
+            <a:ext cx="2651760" cy="1600200"/>
+          </a:xfrm>
+          <a:prstGeom prst="rect">
+            <a:avLst/>
+          </a:prstGeom>
+          <a:solidFill>
+            <a:srgbClr val="FFFFFF"/>
+          </a:solidFill>
+          <a:ln/>
+          <a:effectLst>
+            <a:outerShdw sx="100000" sy="100000" kx="0" ky="0" algn="bl" rotWithShape="0" blurRad="50800" dist="25400" dir="8100000">
+              <a:srgbClr val="000000">
+                <a:alpha val="10000"/>
+              </a:srgbClr>
+            </a:outerShdw>
+          </a:effectLst>
+        </p:spPr>
+      </p:sp>
+      <p:sp>
+        <p:nvSpPr>
+          <p:cNvPr id="20" name="Shape 18"/>
+          <p:cNvSpPr/>
+          <p:nvPr/>
+        </p:nvSpPr>
+        <p:spPr>
+          <a:xfrm>
+            <a:off x="6126480" y="1051560"/>
+            <a:ext cx="54864" cy="1600200"/>
+          </a:xfrm>
+          <a:prstGeom prst="rect">
+            <a:avLst/>
+          </a:prstGeom>
+          <a:solidFill>
+            <a:srgbClr val="16A34A"/>
+          </a:solidFill>
+          <a:ln/>
+        </p:spPr>
+      </p:sp>
+      <p:sp>
+        <p:nvSpPr>
+          <p:cNvPr id="21" name="Shape 19"/>
+          <p:cNvSpPr/>
+          <p:nvPr/>
+        </p:nvSpPr>
+        <p:spPr>
+          <a:xfrm>
+            <a:off x="7955280" y="1124712"/>
+            <a:ext cx="658368" cy="228600"/>
+          </a:xfrm>
+          <a:prstGeom prst="rect">
+            <a:avLst/>
+          </a:prstGeom>
+          <a:solidFill>
+            <a:srgbClr val="DCFCE7"/>
+          </a:solidFill>
+          <a:ln/>
+        </p:spPr>
+      </p:sp>
+      <p:sp>
+        <p:nvSpPr>
+          <p:cNvPr id="22" name="Text 20"/>
+          <p:cNvSpPr/>
+          <p:nvPr/>
+        </p:nvSpPr>
+        <p:spPr>
+          <a:xfrm>
+            <a:off x="7955280" y="1124712"/>
+            <a:ext cx="658368" cy="228600"/>
+          </a:xfrm>
+          <a:prstGeom prst="rect">
+            <a:avLst/>
+          </a:prstGeom>
+          <a:noFill/>
+          <a:ln/>
+        </p:spPr>
+        <p:txBody>
+          <a:bodyPr wrap="square" lIns="0" tIns="0" rIns="0" bIns="0" rtlCol="0" anchor="ctr"/>
+          <a:lstStyle/>
+          <a:p>
+            <a:pPr algn="ctr" indent="0" marL="0">
+              <a:buNone/>
+            </a:pPr>
+            <a:r>
+              <a:rPr lang="en-US" sz="900" b="1" dirty="0">
+                <a:solidFill>
+                  <a:srgbClr val="16A34A"/>
+                </a:solidFill>
+                <a:latin typeface="Arial" pitchFamily="34" charset="0"/>
+                <a:ea typeface="Arial" pitchFamily="34" charset="-122"/>
+                <a:cs typeface="Arial" pitchFamily="34" charset="-120"/>
+              </a:rPr>
+              <a:t>20件+</a:t>
+            </a:r>
+            <a:endParaRPr lang="en-US" sz="900" dirty="0"/>
+          </a:p>
+        </p:txBody>
+      </p:sp>
+      <p:sp>
+        <p:nvSpPr>
+          <p:cNvPr id="23" name="Text 21"/>
+          <p:cNvSpPr/>
+          <p:nvPr/>
+        </p:nvSpPr>
+        <p:spPr>
+          <a:xfrm>
+            <a:off x="6263640" y="1124712"/>
+            <a:ext cx="1645920" cy="274320"/>
+          </a:xfrm>
+          <a:prstGeom prst="rect">
+            <a:avLst/>
+          </a:prstGeom>
+          <a:noFill/>
+          <a:ln/>
+        </p:spPr>
+        <p:txBody>
+          <a:bodyPr wrap="square" lIns="0" tIns="0" rIns="0" bIns="0" rtlCol="0" anchor="ctr"/>
+          <a:lstStyle/>
+          <a:p>
+            <a:pPr indent="0" marL="0">
+              <a:buNone/>
+            </a:pPr>
+            <a:r>
+              <a:rPr lang="en-US" sz="1300" b="1" dirty="0">
+                <a:solidFill>
+                  <a:srgbClr val="1A2744"/>
+                </a:solidFill>
+                <a:latin typeface="Arial" pitchFamily="34" charset="0"/>
+                <a:ea typeface="Arial" pitchFamily="34" charset="-122"/>
+                <a:cs typeface="Arial" pitchFamily="34" charset="-120"/>
+              </a:rPr>
+              <a:t>清潔さ・清掃</a:t>
+            </a:r>
+            <a:endParaRPr lang="en-US" sz="1300" dirty="0"/>
+          </a:p>
+        </p:txBody>
+      </p:sp>
+      <p:sp>
+        <p:nvSpPr>
+          <p:cNvPr id="24" name="Text 22"/>
+          <p:cNvSpPr/>
+          <p:nvPr/>
+        </p:nvSpPr>
+        <p:spPr>
+          <a:xfrm>
+            <a:off x="6263640" y="1417320"/>
+            <a:ext cx="2377440" cy="365760"/>
+          </a:xfrm>
+          <a:prstGeom prst="rect">
+            <a:avLst/>
+          </a:prstGeom>
+          <a:noFill/>
+          <a:ln/>
+        </p:spPr>
+        <p:txBody>
+          <a:bodyPr wrap="square" lIns="0" tIns="0" rIns="0" bIns="0" rtlCol="0" anchor="ctr"/>
+          <a:lstStyle/>
+          <a:p>
+            <a:pPr indent="0" marL="0">
+              <a:buNone/>
+            </a:pPr>
+            <a:r>
+              <a:rPr lang="en-US" sz="900" dirty="0">
+                <a:solidFill>
+                  <a:srgbClr val="64748B"/>
+                </a:solidFill>
+                <a:latin typeface="Arial" pitchFamily="34" charset="0"/>
+                <a:ea typeface="Arial" pitchFamily="34" charset="-122"/>
+                <a:cs typeface="Arial" pitchFamily="34" charset="-120"/>
+              </a:rPr>
+              <a:t>ホテルは清潔で、サービスも素晴らしいです</a:t>
+            </a:r>
+            <a:endParaRPr lang="en-US" sz="900" dirty="0"/>
+          </a:p>
+        </p:txBody>
+      </p:sp>
+      <p:sp>
+        <p:nvSpPr>
+          <p:cNvPr id="25" name="Text 23"/>
+          <p:cNvSpPr/>
+          <p:nvPr/>
+        </p:nvSpPr>
+        <p:spPr>
+          <a:xfrm>
+            <a:off x="6263640" y="1828800"/>
+            <a:ext cx="2377440" cy="640080"/>
+          </a:xfrm>
+          <a:prstGeom prst="rect">
+            <a:avLst/>
+          </a:prstGeom>
+          <a:noFill/>
+          <a:ln/>
+        </p:spPr>
+        <p:txBody>
+          <a:bodyPr wrap="square" lIns="0" tIns="0" rIns="0" bIns="0" rtlCol="0" anchor="ctr"/>
+          <a:lstStyle/>
+          <a:p>
+            <a:pPr indent="0" marL="0">
+              <a:buNone/>
+            </a:pPr>
+            <a:r>
+              <a:rPr lang="en-US" sz="900" i="1" dirty="0">
+                <a:solidFill>
+                  <a:srgbClr val="3B7DD8"/>
+                </a:solidFill>
+                <a:latin typeface="Arial" pitchFamily="34" charset="0"/>
+                <a:ea typeface="Arial" pitchFamily="34" charset="-122"/>
+                <a:cs typeface="Arial" pitchFamily="34" charset="-120"/>
+              </a:rPr>
+              <a:t>「朝のバイキングもとても美味しく頂き、部屋もすごく綺麗でした」</a:t>
+            </a:r>
+            <a:endParaRPr lang="en-US" sz="900" dirty="0"/>
+          </a:p>
+        </p:txBody>
+      </p:sp>
+      <p:sp>
+        <p:nvSpPr>
+          <p:cNvPr id="26" name="Shape 24"/>
+          <p:cNvSpPr/>
+          <p:nvPr/>
+        </p:nvSpPr>
+        <p:spPr>
+          <a:xfrm>
+            <a:off x="457200" y="2880360"/>
+            <a:ext cx="2651760" cy="1600200"/>
+          </a:xfrm>
+          <a:prstGeom prst="rect">
+            <a:avLst/>
+          </a:prstGeom>
+          <a:solidFill>
+            <a:srgbClr val="FFFFFF"/>
+          </a:solidFill>
+          <a:ln/>
+          <a:effectLst>
+            <a:outerShdw sx="100000" sy="100000" kx="0" ky="0" algn="bl" rotWithShape="0" blurRad="50800" dist="25400" dir="8100000">
+              <a:srgbClr val="000000">
+                <a:alpha val="10000"/>
+              </a:srgbClr>
+            </a:outerShdw>
+          </a:effectLst>
+        </p:spPr>
+      </p:sp>
+      <p:sp>
+        <p:nvSpPr>
+          <p:cNvPr id="27" name="Shape 25"/>
+          <p:cNvSpPr/>
+          <p:nvPr/>
+        </p:nvSpPr>
+        <p:spPr>
+          <a:xfrm>
+            <a:off x="457200" y="2880360"/>
+            <a:ext cx="54864" cy="1600200"/>
+          </a:xfrm>
+          <a:prstGeom prst="rect">
+            <a:avLst/>
+          </a:prstGeom>
+          <a:solidFill>
+            <a:srgbClr val="16A34A"/>
+          </a:solidFill>
+          <a:ln/>
+        </p:spPr>
+      </p:sp>
+      <p:sp>
+        <p:nvSpPr>
+          <p:cNvPr id="28" name="Shape 26"/>
+          <p:cNvSpPr/>
+          <p:nvPr/>
+        </p:nvSpPr>
+        <p:spPr>
+          <a:xfrm>
+            <a:off x="2286000" y="2953512"/>
+            <a:ext cx="658368" cy="228600"/>
+          </a:xfrm>
+          <a:prstGeom prst="rect">
+            <a:avLst/>
+          </a:prstGeom>
+          <a:solidFill>
+            <a:srgbClr val="DCFCE7"/>
+          </a:solidFill>
+          <a:ln/>
+        </p:spPr>
+      </p:sp>
+      <p:sp>
+        <p:nvSpPr>
+          <p:cNvPr id="29" name="Text 27"/>
+          <p:cNvSpPr/>
+          <p:nvPr/>
+        </p:nvSpPr>
+        <p:spPr>
+          <a:xfrm>
+            <a:off x="2286000" y="2953512"/>
             <a:ext cx="658368" cy="228600"/>
           </a:xfrm>
           <a:prstGeom prst="rect">
@@ -10230,13 +10676,13 @@
       </p:sp>
       <p:sp>
         <p:nvSpPr>
-          <p:cNvPr id="16" name="Text 14"/>
-          <p:cNvSpPr/>
-          <p:nvPr/>
-        </p:nvSpPr>
-        <p:spPr>
-          <a:xfrm>
-            <a:off x="3429000" y="1124712"/>
+          <p:cNvPr id="30" name="Text 28"/>
+          <p:cNvSpPr/>
+          <p:nvPr/>
+        </p:nvSpPr>
+        <p:spPr>
+          <a:xfrm>
+            <a:off x="594360" y="2953512"/>
             <a:ext cx="1645920" cy="274320"/>
           </a:xfrm>
           <a:prstGeom prst="rect">
@@ -10261,7 +10707,7 @@
                 <a:ea typeface="Arial" pitchFamily="34" charset="-122"/>
                 <a:cs typeface="Arial" pitchFamily="34" charset="-120"/>
               </a:rPr>
-              <a:t>清潔さ・清掃</a:t>
+              <a:t>快適さ・設備</a:t>
             </a:r>
             <a:endParaRPr lang="en-US" sz="1300" dirty="0"/>
           </a:p>
@@ -10269,13 +10715,13 @@
       </p:sp>
       <p:sp>
         <p:nvSpPr>
-          <p:cNvPr id="17" name="Text 15"/>
-          <p:cNvSpPr/>
-          <p:nvPr/>
-        </p:nvSpPr>
-        <p:spPr>
-          <a:xfrm>
-            <a:off x="3429000" y="1417320"/>
+          <p:cNvPr id="31" name="Text 29"/>
+          <p:cNvSpPr/>
+          <p:nvPr/>
+        </p:nvSpPr>
+        <p:spPr>
+          <a:xfrm>
+            <a:off x="594360" y="3246120"/>
             <a:ext cx="2377440" cy="365760"/>
           </a:xfrm>
           <a:prstGeom prst="rect">
@@ -10300,7 +10746,7 @@
                 <a:ea typeface="Arial" pitchFamily="34" charset="-122"/>
                 <a:cs typeface="Arial" pitchFamily="34" charset="-120"/>
               </a:rPr>
-              <a:t>朝のバイキングもとても美味しく頂き、部屋もすごく綺麗でした</a:t>
+              <a:t>ベッドは快適で、スタッフも親切だったなど、良い点もたくさんありました</a:t>
             </a:r>
             <a:endParaRPr lang="en-US" sz="900" dirty="0"/>
           </a:p>
@@ -10308,13 +10754,13 @@
       </p:sp>
       <p:sp>
         <p:nvSpPr>
-          <p:cNvPr id="18" name="Text 16"/>
-          <p:cNvSpPr/>
-          <p:nvPr/>
-        </p:nvSpPr>
-        <p:spPr>
-          <a:xfrm>
-            <a:off x="3429000" y="1828800"/>
+          <p:cNvPr id="32" name="Text 30"/>
+          <p:cNvSpPr/>
+          <p:nvPr/>
+        </p:nvSpPr>
+        <p:spPr>
+          <a:xfrm>
+            <a:off x="594360" y="3657600"/>
             <a:ext cx="2377440" cy="640080"/>
           </a:xfrm>
           <a:prstGeom prst="rect">
@@ -10339,7 +10785,7 @@
                 <a:ea typeface="Arial" pitchFamily="34" charset="-122"/>
                 <a:cs typeface="Arial" pitchFamily="34" charset="-120"/>
               </a:rPr>
-              <a:t>「スタッフは親切で協力的で、部屋は滞在中ずっと清潔で快適、そして手入れが行き届いていました」</a:t>
+              <a:t>「アメニティが本当に豊富でした」</a:t>
             </a:r>
             <a:endParaRPr lang="en-US" sz="900" dirty="0"/>
           </a:p>
@@ -10347,13 +10793,13 @@
       </p:sp>
       <p:sp>
         <p:nvSpPr>
-          <p:cNvPr id="19" name="Shape 17"/>
-          <p:cNvSpPr/>
-          <p:nvPr/>
-        </p:nvSpPr>
-        <p:spPr>
-          <a:xfrm>
-            <a:off x="6126480" y="1051560"/>
+          <p:cNvPr id="33" name="Shape 31"/>
+          <p:cNvSpPr/>
+          <p:nvPr/>
+        </p:nvSpPr>
+        <p:spPr>
+          <a:xfrm>
+            <a:off x="3291840" y="2880360"/>
             <a:ext cx="2651760" cy="1600200"/>
           </a:xfrm>
           <a:prstGeom prst="rect">
@@ -10374,13 +10820,13 @@
       </p:sp>
       <p:sp>
         <p:nvSpPr>
-          <p:cNvPr id="20" name="Shape 18"/>
-          <p:cNvSpPr/>
-          <p:nvPr/>
-        </p:nvSpPr>
-        <p:spPr>
-          <a:xfrm>
-            <a:off x="6126480" y="1051560"/>
+          <p:cNvPr id="34" name="Shape 32"/>
+          <p:cNvSpPr/>
+          <p:nvPr/>
+        </p:nvSpPr>
+        <p:spPr>
+          <a:xfrm>
+            <a:off x="3291840" y="2880360"/>
             <a:ext cx="54864" cy="1600200"/>
           </a:xfrm>
           <a:prstGeom prst="rect">
@@ -10394,13 +10840,13 @@
       </p:sp>
       <p:sp>
         <p:nvSpPr>
-          <p:cNvPr id="21" name="Shape 19"/>
-          <p:cNvSpPr/>
-          <p:nvPr/>
-        </p:nvSpPr>
-        <p:spPr>
-          <a:xfrm>
-            <a:off x="7955280" y="1124712"/>
+          <p:cNvPr id="35" name="Shape 33"/>
+          <p:cNvSpPr/>
+          <p:nvPr/>
+        </p:nvSpPr>
+        <p:spPr>
+          <a:xfrm>
+            <a:off x="5120640" y="2953512"/>
             <a:ext cx="658368" cy="228600"/>
           </a:xfrm>
           <a:prstGeom prst="rect">
@@ -10414,13 +10860,13 @@
       </p:sp>
       <p:sp>
         <p:nvSpPr>
-          <p:cNvPr id="22" name="Text 20"/>
-          <p:cNvSpPr/>
-          <p:nvPr/>
-        </p:nvSpPr>
-        <p:spPr>
-          <a:xfrm>
-            <a:off x="7955280" y="1124712"/>
+          <p:cNvPr id="36" name="Text 34"/>
+          <p:cNvSpPr/>
+          <p:nvPr/>
+        </p:nvSpPr>
+        <p:spPr>
+          <a:xfrm>
+            <a:off x="5120640" y="2953512"/>
             <a:ext cx="658368" cy="228600"/>
           </a:xfrm>
           <a:prstGeom prst="rect">
@@ -10453,452 +10899,6 @@
       </p:sp>
       <p:sp>
         <p:nvSpPr>
-          <p:cNvPr id="23" name="Text 21"/>
-          <p:cNvSpPr/>
-          <p:nvPr/>
-        </p:nvSpPr>
-        <p:spPr>
-          <a:xfrm>
-            <a:off x="6263640" y="1124712"/>
-            <a:ext cx="1645920" cy="274320"/>
-          </a:xfrm>
-          <a:prstGeom prst="rect">
-            <a:avLst/>
-          </a:prstGeom>
-          <a:noFill/>
-          <a:ln/>
-        </p:spPr>
-        <p:txBody>
-          <a:bodyPr wrap="square" lIns="0" tIns="0" rIns="0" bIns="0" rtlCol="0" anchor="ctr"/>
-          <a:lstStyle/>
-          <a:p>
-            <a:pPr indent="0" marL="0">
-              <a:buNone/>
-            </a:pPr>
-            <a:r>
-              <a:rPr lang="en-US" sz="1300" b="1" dirty="0">
-                <a:solidFill>
-                  <a:srgbClr val="1A2744"/>
-                </a:solidFill>
-                <a:latin typeface="Arial" pitchFamily="34" charset="0"/>
-                <a:ea typeface="Arial" pitchFamily="34" charset="-122"/>
-                <a:cs typeface="Arial" pitchFamily="34" charset="-120"/>
-              </a:rPr>
-              <a:t>スタッフの対応</a:t>
-            </a:r>
-            <a:endParaRPr lang="en-US" sz="1300" dirty="0"/>
-          </a:p>
-        </p:txBody>
-      </p:sp>
-      <p:sp>
-        <p:nvSpPr>
-          <p:cNvPr id="24" name="Text 22"/>
-          <p:cNvSpPr/>
-          <p:nvPr/>
-        </p:nvSpPr>
-        <p:spPr>
-          <a:xfrm>
-            <a:off x="6263640" y="1417320"/>
-            <a:ext cx="2377440" cy="365760"/>
-          </a:xfrm>
-          <a:prstGeom prst="rect">
-            <a:avLst/>
-          </a:prstGeom>
-          <a:noFill/>
-          <a:ln/>
-        </p:spPr>
-        <p:txBody>
-          <a:bodyPr wrap="square" lIns="0" tIns="0" rIns="0" bIns="0" rtlCol="0" anchor="ctr"/>
-          <a:lstStyle/>
-          <a:p>
-            <a:pPr indent="0" marL="0">
-              <a:buNone/>
-            </a:pPr>
-            <a:r>
-              <a:rPr lang="en-US" sz="900" dirty="0">
-                <a:solidFill>
-                  <a:srgbClr val="64748B"/>
-                </a:solidFill>
-                <a:latin typeface="Arial" pitchFamily="34" charset="0"/>
-                <a:ea typeface="Arial" pitchFamily="34" charset="-122"/>
-                <a:cs typeface="Arial" pitchFamily="34" charset="-120"/>
-              </a:rPr>
-              <a:t>スタッフは親切で協力的で、部屋は滞在中ずっと清潔で快適、そして手入れが行き届いていました</a:t>
-            </a:r>
-            <a:endParaRPr lang="en-US" sz="900" dirty="0"/>
-          </a:p>
-        </p:txBody>
-      </p:sp>
-      <p:sp>
-        <p:nvSpPr>
-          <p:cNvPr id="25" name="Text 23"/>
-          <p:cNvSpPr/>
-          <p:nvPr/>
-        </p:nvSpPr>
-        <p:spPr>
-          <a:xfrm>
-            <a:off x="6263640" y="1828800"/>
-            <a:ext cx="2377440" cy="640080"/>
-          </a:xfrm>
-          <a:prstGeom prst="rect">
-            <a:avLst/>
-          </a:prstGeom>
-          <a:noFill/>
-          <a:ln/>
-        </p:spPr>
-        <p:txBody>
-          <a:bodyPr wrap="square" lIns="0" tIns="0" rIns="0" bIns="0" rtlCol="0" anchor="ctr"/>
-          <a:lstStyle/>
-          <a:p>
-            <a:pPr indent="0" marL="0">
-              <a:buNone/>
-            </a:pPr>
-            <a:r>
-              <a:rPr lang="en-US" sz="900" i="1" dirty="0">
-                <a:solidFill>
-                  <a:srgbClr val="3B7DD8"/>
-                </a:solidFill>
-                <a:latin typeface="Arial" pitchFamily="34" charset="0"/>
-                <a:ea typeface="Arial" pitchFamily="34" charset="-122"/>
-                <a:cs typeface="Arial" pitchFamily="34" charset="-120"/>
-              </a:rPr>
-              <a:t>「Staff were friendly and service was  efficient」</a:t>
-            </a:r>
-            <a:endParaRPr lang="en-US" sz="900" dirty="0"/>
-          </a:p>
-        </p:txBody>
-      </p:sp>
-      <p:sp>
-        <p:nvSpPr>
-          <p:cNvPr id="26" name="Shape 24"/>
-          <p:cNvSpPr/>
-          <p:nvPr/>
-        </p:nvSpPr>
-        <p:spPr>
-          <a:xfrm>
-            <a:off x="457200" y="2880360"/>
-            <a:ext cx="2651760" cy="1600200"/>
-          </a:xfrm>
-          <a:prstGeom prst="rect">
-            <a:avLst/>
-          </a:prstGeom>
-          <a:solidFill>
-            <a:srgbClr val="FFFFFF"/>
-          </a:solidFill>
-          <a:ln/>
-          <a:effectLst>
-            <a:outerShdw sx="100000" sy="100000" kx="0" ky="0" algn="bl" rotWithShape="0" blurRad="50800" dist="25400" dir="8100000">
-              <a:srgbClr val="000000">
-                <a:alpha val="10000"/>
-              </a:srgbClr>
-            </a:outerShdw>
-          </a:effectLst>
-        </p:spPr>
-      </p:sp>
-      <p:sp>
-        <p:nvSpPr>
-          <p:cNvPr id="27" name="Shape 25"/>
-          <p:cNvSpPr/>
-          <p:nvPr/>
-        </p:nvSpPr>
-        <p:spPr>
-          <a:xfrm>
-            <a:off x="457200" y="2880360"/>
-            <a:ext cx="54864" cy="1600200"/>
-          </a:xfrm>
-          <a:prstGeom prst="rect">
-            <a:avLst/>
-          </a:prstGeom>
-          <a:solidFill>
-            <a:srgbClr val="16A34A"/>
-          </a:solidFill>
-          <a:ln/>
-        </p:spPr>
-      </p:sp>
-      <p:sp>
-        <p:nvSpPr>
-          <p:cNvPr id="28" name="Shape 26"/>
-          <p:cNvSpPr/>
-          <p:nvPr/>
-        </p:nvSpPr>
-        <p:spPr>
-          <a:xfrm>
-            <a:off x="2286000" y="2953512"/>
-            <a:ext cx="658368" cy="228600"/>
-          </a:xfrm>
-          <a:prstGeom prst="rect">
-            <a:avLst/>
-          </a:prstGeom>
-          <a:solidFill>
-            <a:srgbClr val="DCFCE7"/>
-          </a:solidFill>
-          <a:ln/>
-        </p:spPr>
-      </p:sp>
-      <p:sp>
-        <p:nvSpPr>
-          <p:cNvPr id="29" name="Text 27"/>
-          <p:cNvSpPr/>
-          <p:nvPr/>
-        </p:nvSpPr>
-        <p:spPr>
-          <a:xfrm>
-            <a:off x="2286000" y="2953512"/>
-            <a:ext cx="658368" cy="228600"/>
-          </a:xfrm>
-          <a:prstGeom prst="rect">
-            <a:avLst/>
-          </a:prstGeom>
-          <a:noFill/>
-          <a:ln/>
-        </p:spPr>
-        <p:txBody>
-          <a:bodyPr wrap="square" lIns="0" tIns="0" rIns="0" bIns="0" rtlCol="0" anchor="ctr"/>
-          <a:lstStyle/>
-          <a:p>
-            <a:pPr algn="ctr" indent="0" marL="0">
-              <a:buNone/>
-            </a:pPr>
-            <a:r>
-              <a:rPr lang="en-US" sz="900" b="1" dirty="0">
-                <a:solidFill>
-                  <a:srgbClr val="16A34A"/>
-                </a:solidFill>
-                <a:latin typeface="Arial" pitchFamily="34" charset="0"/>
-                <a:ea typeface="Arial" pitchFamily="34" charset="-122"/>
-                <a:cs typeface="Arial" pitchFamily="34" charset="-120"/>
-              </a:rPr>
-              <a:t>10件+</a:t>
-            </a:r>
-            <a:endParaRPr lang="en-US" sz="900" dirty="0"/>
-          </a:p>
-        </p:txBody>
-      </p:sp>
-      <p:sp>
-        <p:nvSpPr>
-          <p:cNvPr id="30" name="Text 28"/>
-          <p:cNvSpPr/>
-          <p:nvPr/>
-        </p:nvSpPr>
-        <p:spPr>
-          <a:xfrm>
-            <a:off x="594360" y="2953512"/>
-            <a:ext cx="1645920" cy="274320"/>
-          </a:xfrm>
-          <a:prstGeom prst="rect">
-            <a:avLst/>
-          </a:prstGeom>
-          <a:noFill/>
-          <a:ln/>
-        </p:spPr>
-        <p:txBody>
-          <a:bodyPr wrap="square" lIns="0" tIns="0" rIns="0" bIns="0" rtlCol="0" anchor="ctr"/>
-          <a:lstStyle/>
-          <a:p>
-            <a:pPr indent="0" marL="0">
-              <a:buNone/>
-            </a:pPr>
-            <a:r>
-              <a:rPr lang="en-US" sz="1300" b="1" dirty="0">
-                <a:solidFill>
-                  <a:srgbClr val="1A2744"/>
-                </a:solidFill>
-                <a:latin typeface="Arial" pitchFamily="34" charset="0"/>
-                <a:ea typeface="Arial" pitchFamily="34" charset="-122"/>
-                <a:cs typeface="Arial" pitchFamily="34" charset="-120"/>
-              </a:rPr>
-              <a:t>快適さ・設備</a:t>
-            </a:r>
-            <a:endParaRPr lang="en-US" sz="1300" dirty="0"/>
-          </a:p>
-        </p:txBody>
-      </p:sp>
-      <p:sp>
-        <p:nvSpPr>
-          <p:cNvPr id="31" name="Text 29"/>
-          <p:cNvSpPr/>
-          <p:nvPr/>
-        </p:nvSpPr>
-        <p:spPr>
-          <a:xfrm>
-            <a:off x="594360" y="3246120"/>
-            <a:ext cx="2377440" cy="365760"/>
-          </a:xfrm>
-          <a:prstGeom prst="rect">
-            <a:avLst/>
-          </a:prstGeom>
-          <a:noFill/>
-          <a:ln/>
-        </p:spPr>
-        <p:txBody>
-          <a:bodyPr wrap="square" lIns="0" tIns="0" rIns="0" bIns="0" rtlCol="0" anchor="ctr"/>
-          <a:lstStyle/>
-          <a:p>
-            <a:pPr indent="0" marL="0">
-              <a:buNone/>
-            </a:pPr>
-            <a:r>
-              <a:rPr lang="en-US" sz="900" dirty="0">
-                <a:solidFill>
-                  <a:srgbClr val="64748B"/>
-                </a:solidFill>
-                <a:latin typeface="Arial" pitchFamily="34" charset="0"/>
-                <a:ea typeface="Arial" pitchFamily="34" charset="-122"/>
-                <a:cs typeface="Arial" pitchFamily="34" charset="-120"/>
-              </a:rPr>
-              <a:t>アメニティが本当に豊富でした</a:t>
-            </a:r>
-            <a:endParaRPr lang="en-US" sz="900" dirty="0"/>
-          </a:p>
-        </p:txBody>
-      </p:sp>
-      <p:sp>
-        <p:nvSpPr>
-          <p:cNvPr id="32" name="Text 30"/>
-          <p:cNvSpPr/>
-          <p:nvPr/>
-        </p:nvSpPr>
-        <p:spPr>
-          <a:xfrm>
-            <a:off x="594360" y="3657600"/>
-            <a:ext cx="2377440" cy="640080"/>
-          </a:xfrm>
-          <a:prstGeom prst="rect">
-            <a:avLst/>
-          </a:prstGeom>
-          <a:noFill/>
-          <a:ln/>
-        </p:spPr>
-        <p:txBody>
-          <a:bodyPr wrap="square" lIns="0" tIns="0" rIns="0" bIns="0" rtlCol="0" anchor="ctr"/>
-          <a:lstStyle/>
-          <a:p>
-            <a:pPr indent="0" marL="0">
-              <a:buNone/>
-            </a:pPr>
-            <a:r>
-              <a:rPr lang="en-US" sz="900" i="1" dirty="0">
-                <a:solidFill>
-                  <a:srgbClr val="3B7DD8"/>
-                </a:solidFill>
-                <a:latin typeface="Arial" pitchFamily="34" charset="0"/>
-                <a:ea typeface="Arial" pitchFamily="34" charset="-122"/>
-                <a:cs typeface="Arial" pitchFamily="34" charset="-120"/>
-              </a:rPr>
-              <a:t>「スタッフは親切で協力的で、部屋は滞在中ずっと清潔で快適、そして手入れが行き届いていました」</a:t>
-            </a:r>
-            <a:endParaRPr lang="en-US" sz="900" dirty="0"/>
-          </a:p>
-        </p:txBody>
-      </p:sp>
-      <p:sp>
-        <p:nvSpPr>
-          <p:cNvPr id="33" name="Shape 31"/>
-          <p:cNvSpPr/>
-          <p:nvPr/>
-        </p:nvSpPr>
-        <p:spPr>
-          <a:xfrm>
-            <a:off x="3291840" y="2880360"/>
-            <a:ext cx="2651760" cy="1600200"/>
-          </a:xfrm>
-          <a:prstGeom prst="rect">
-            <a:avLst/>
-          </a:prstGeom>
-          <a:solidFill>
-            <a:srgbClr val="FFFFFF"/>
-          </a:solidFill>
-          <a:ln/>
-          <a:effectLst>
-            <a:outerShdw sx="100000" sy="100000" kx="0" ky="0" algn="bl" rotWithShape="0" blurRad="50800" dist="25400" dir="8100000">
-              <a:srgbClr val="000000">
-                <a:alpha val="10000"/>
-              </a:srgbClr>
-            </a:outerShdw>
-          </a:effectLst>
-        </p:spPr>
-      </p:sp>
-      <p:sp>
-        <p:nvSpPr>
-          <p:cNvPr id="34" name="Shape 32"/>
-          <p:cNvSpPr/>
-          <p:nvPr/>
-        </p:nvSpPr>
-        <p:spPr>
-          <a:xfrm>
-            <a:off x="3291840" y="2880360"/>
-            <a:ext cx="54864" cy="1600200"/>
-          </a:xfrm>
-          <a:prstGeom prst="rect">
-            <a:avLst/>
-          </a:prstGeom>
-          <a:solidFill>
-            <a:srgbClr val="16A34A"/>
-          </a:solidFill>
-          <a:ln/>
-        </p:spPr>
-      </p:sp>
-      <p:sp>
-        <p:nvSpPr>
-          <p:cNvPr id="35" name="Shape 33"/>
-          <p:cNvSpPr/>
-          <p:nvPr/>
-        </p:nvSpPr>
-        <p:spPr>
-          <a:xfrm>
-            <a:off x="5120640" y="2953512"/>
-            <a:ext cx="658368" cy="228600"/>
-          </a:xfrm>
-          <a:prstGeom prst="rect">
-            <a:avLst/>
-          </a:prstGeom>
-          <a:solidFill>
-            <a:srgbClr val="DCFCE7"/>
-          </a:solidFill>
-          <a:ln/>
-        </p:spPr>
-      </p:sp>
-      <p:sp>
-        <p:nvSpPr>
-          <p:cNvPr id="36" name="Text 34"/>
-          <p:cNvSpPr/>
-          <p:nvPr/>
-        </p:nvSpPr>
-        <p:spPr>
-          <a:xfrm>
-            <a:off x="5120640" y="2953512"/>
-            <a:ext cx="658368" cy="228600"/>
-          </a:xfrm>
-          <a:prstGeom prst="rect">
-            <a:avLst/>
-          </a:prstGeom>
-          <a:noFill/>
-          <a:ln/>
-        </p:spPr>
-        <p:txBody>
-          <a:bodyPr wrap="square" lIns="0" tIns="0" rIns="0" bIns="0" rtlCol="0" anchor="ctr"/>
-          <a:lstStyle/>
-          <a:p>
-            <a:pPr algn="ctr" indent="0" marL="0">
-              <a:buNone/>
-            </a:pPr>
-            <a:r>
-              <a:rPr lang="en-US" sz="900" b="1" dirty="0">
-                <a:solidFill>
-                  <a:srgbClr val="16A34A"/>
-                </a:solidFill>
-                <a:latin typeface="Arial" pitchFamily="34" charset="0"/>
-                <a:ea typeface="Arial" pitchFamily="34" charset="-122"/>
-                <a:cs typeface="Arial" pitchFamily="34" charset="-120"/>
-              </a:rPr>
-              <a:t>10件+</a:t>
-            </a:r>
-            <a:endParaRPr lang="en-US" sz="900" dirty="0"/>
-          </a:p>
-        </p:txBody>
-      </p:sp>
-      <p:sp>
-        <p:nvSpPr>
           <p:cNvPr id="37" name="Text 35"/>
           <p:cNvSpPr/>
           <p:nvPr/>
@@ -10969,7 +10969,7 @@
                 <a:ea typeface="Arial" pitchFamily="34" charset="-122"/>
                 <a:cs typeface="Arial" pitchFamily="34" charset="-120"/>
               </a:rPr>
-              <a:t>周辺には飲食店もたくさんあります</a:t>
+              <a:t>立地は便利で、JR駅や地下鉄駅に近く、周辺には多くのレストランがあります</a:t>
             </a:r>
             <a:endParaRPr lang="en-US" sz="900" dirty="0"/>
           </a:p>
@@ -11008,7 +11008,7 @@
                 <a:ea typeface="Arial" pitchFamily="34" charset="-122"/>
                 <a:cs typeface="Arial" pitchFamily="34" charset="-120"/>
               </a:rPr>
-              <a:t>「駅から徒歩約8分で、周辺には24時間営業のスーパー（セイユ）をはじめ、たくさんの飲食店があります」</a:t>
+              <a:t>「周辺には飲食店もたくさんあります」</a:t>
             </a:r>
             <a:endParaRPr lang="en-US" sz="900" dirty="0"/>
           </a:p>
@@ -11114,7 +11114,7 @@
                 <a:ea typeface="Arial" pitchFamily="34" charset="-122"/>
                 <a:cs typeface="Arial" pitchFamily="34" charset="-120"/>
               </a:rPr>
-              <a:t>6件</a:t>
+              <a:t>7件</a:t>
             </a:r>
             <a:endParaRPr lang="en-US" sz="900" dirty="0"/>
           </a:p>
@@ -13017,7 +13017,7 @@
                           <a:ea typeface="Arial" pitchFamily="34" charset="-122"/>
                           <a:cs typeface="Arial" pitchFamily="34" charset="-120"/>
                         </a:rPr>
-                        <a:t>設備上都還不錯，有翻新，服務人員的服務態度真的一百分</a:t>
+                        <a:t>地點方便近JR , 近地鐵站，有好多食肆，酒店乾淨，服務態度非常好</a:t>
                       </a:r>
                       <a:endParaRPr lang="en-US" sz="900" dirty="0">
                         <a:latin typeface="Arial" charset="0"/>
@@ -13085,7 +13085,7 @@
                           <a:ea typeface="Arial" pitchFamily="34" charset="-122"/>
                           <a:cs typeface="Arial" pitchFamily="34" charset="-120"/>
                         </a:rPr>
-                        <a:t>2件</a:t>
+                        <a:t>3件</a:t>
                       </a:r>
                       <a:endParaRPr lang="en-US" sz="900" dirty="0">
                         <a:latin typeface="Arial" charset="0"/>
@@ -13839,7 +13839,7 @@
                           <a:ea typeface="Arial" pitchFamily="34" charset="-122"/>
                           <a:cs typeface="Arial" pitchFamily="34" charset="-120"/>
                         </a:rPr>
-                        <a:t>東京の宿泊施設としてはかなり広々としていて、バスタブとベッドサイドの景色が見える窓もありました</a:t>
+                        <a:t>ベッドの横には景色が見える窓があり、テレビは携帯電話に接続できました</a:t>
                       </a:r>
                       <a:endParaRPr lang="en-US" sz="900" dirty="0">
                         <a:latin typeface="Arial" charset="0"/>

--- a/納品レポート/ホテル別レポート/keisei_kinshicho_口コミ分析レポート.pptx
+++ b/納品レポート/ホテル別レポート/keisei_kinshicho_口コミ分析レポート.pptx
@@ -183,10 +183,10 @@
                     <c:v>Trip.com</c:v>
                   </c:pt>
                   <c:pt idx="1">
-                    <c:v>Google</c:v>
+                    <c:v>Booking.com</c:v>
                   </c:pt>
                   <c:pt idx="2">
-                    <c:v>Booking.com</c:v>
+                    <c:v>Google</c:v>
                   </c:pt>
                   <c:pt idx="3">
                     <c:v>楽天トラベル</c:v>
@@ -202,13 +202,13 @@
                 <c:formatCode>General</c:formatCode>
                 <c:ptCount val="4"/>
                 <c:pt idx="0">
-                  <c:v>9.6</c:v>
+                  <c:v>9.62</c:v>
                 </c:pt>
                 <c:pt idx="1">
-                  <c:v>9.27</c:v>
+                  <c:v>9</c:v>
                 </c:pt>
                 <c:pt idx="2">
-                  <c:v>8.97</c:v>
+                  <c:v>9</c:v>
                 </c:pt>
                 <c:pt idx="3">
                   <c:v>8</c:v>
@@ -554,10 +554,10 @@
               <c:numCache>
                 <c:ptCount val="3"/>
                 <c:pt idx="0">
-                  <c:v>79</c:v>
+                  <c:v>82</c:v>
                 </c:pt>
                 <c:pt idx="1">
-                  <c:v>4</c:v>
+                  <c:v>5</c:v>
                 </c:pt>
                 <c:pt idx="2">
                   <c:v>1</c:v>
@@ -718,6 +718,17 @@
             <c:bubble3D val="0"/>
             <c:spPr>
               <a:solidFill>
+                <a:srgbClr val="D4A843"/>
+              </a:solidFill>
+              <a:effectLst/>
+            </c:spPr>
+          </c:dPt>
+          <c:dPt>
+            <c:idx val="5"/>
+            <c:invertIfNegative val="0"/>
+            <c:bubble3D val="0"/>
+            <c:spPr>
+              <a:solidFill>
                 <a:srgbClr val="DC2626"/>
               </a:solidFill>
               <a:effectLst/>
@@ -725,9 +736,9 @@
           </c:dPt>
           <c:cat>
             <c:multiLvlStrRef>
-              <c:f>Sheet1!$A$2:$A$6</c:f>
+              <c:f>Sheet1!$A$2:$A$7</c:f>
               <c:multiLvlStrCache>
-                <c:ptCount val="5"/>
+                <c:ptCount val="6"/>
                 <c:lvl>
                   <c:pt idx="0">
                     <c:v>10点</c:v>
@@ -742,6 +753,9 @@
                     <c:v>7点</c:v>
                   </c:pt>
                   <c:pt idx="4">
+                    <c:v>6点</c:v>
+                  </c:pt>
+                  <c:pt idx="5">
                     <c:v>4点</c:v>
                   </c:pt>
                 </c:lvl>
@@ -750,12 +764,12 @@
           </c:cat>
           <c:val>
             <c:numRef>
-              <c:f>Sheet1!$B$2:$B$6</c:f>
+              <c:f>Sheet1!$B$2:$B$7</c:f>
               <c:numCache>
                 <c:formatCode>General</c:formatCode>
-                <c:ptCount val="5"/>
+                <c:ptCount val="6"/>
                 <c:pt idx="0">
-                  <c:v>53</c:v>
+                  <c:v>56</c:v>
                 </c:pt>
                 <c:pt idx="1">
                   <c:v>13</c:v>
@@ -767,6 +781,9 @@
                   <c:v>4</c:v>
                 </c:pt>
                 <c:pt idx="4">
+                  <c:v>1</c:v>
+                </c:pt>
+                <c:pt idx="5">
                   <c:v>1</c:v>
                 </c:pt>
               </c:numCache>
@@ -2718,7 +2735,7 @@
                 <a:ea typeface="Arial" pitchFamily="34" charset="-122"/>
                 <a:cs typeface="Arial" pitchFamily="34" charset="-120"/>
               </a:rPr>
-              <a:t>レビュー総数：84件（4サイト）</a:t>
+              <a:t>レビュー総数：88件（4サイト）</a:t>
             </a:r>
             <a:endParaRPr lang="en-US" sz="1000" dirty="0"/>
           </a:p>
@@ -2738,7 +2755,7 @@
                 <a:ea typeface="Arial" pitchFamily="34" charset="-122"/>
                 <a:cs typeface="Arial" pitchFamily="34" charset="-120"/>
               </a:rPr>
-              <a:t>作成日：2026年4月6日</a:t>
+              <a:t>作成日：2026年4月7日</a:t>
             </a:r>
             <a:endParaRPr lang="en-US" sz="1000" dirty="0"/>
           </a:p>
@@ -3284,7 +3301,7 @@
                           <a:ea typeface="Arial" pitchFamily="34" charset="-122"/>
                           <a:cs typeface="Arial" pitchFamily="34" charset="-120"/>
                         </a:rPr>
-                        <a:t>9.32点</a:t>
+                        <a:t>9.31点</a:t>
                       </a:r>
                       <a:endParaRPr lang="en-US" sz="1000" dirty="0">
                         <a:latin typeface="Arial" charset="0"/>
@@ -3558,7 +3575,7 @@
                           <a:ea typeface="Arial" pitchFamily="34" charset="-122"/>
                           <a:cs typeface="Arial" pitchFamily="34" charset="-120"/>
                         </a:rPr>
-                        <a:t>94.0%</a:t>
+                        <a:t>93.2%</a:t>
                       </a:r>
                       <a:endParaRPr lang="en-US" sz="1000" dirty="0">
                         <a:latin typeface="Arial" charset="0"/>
@@ -3626,7 +3643,7 @@
                           <a:ea typeface="Arial" pitchFamily="34" charset="-122"/>
                           <a:cs typeface="Arial" pitchFamily="34" charset="-120"/>
                         </a:rPr>
-                        <a:t>96%以上</a:t>
+                        <a:t>95%以上</a:t>
                       </a:r>
                       <a:endParaRPr lang="en-US" sz="1000" dirty="0">
                         <a:latin typeface="Arial" charset="0"/>
@@ -3832,7 +3849,7 @@
                           <a:ea typeface="Arial" pitchFamily="34" charset="-122"/>
                           <a:cs typeface="Arial" pitchFamily="34" charset="-120"/>
                         </a:rPr>
-                        <a:t>1.2%</a:t>
+                        <a:t>1.1%</a:t>
                       </a:r>
                       <a:endParaRPr lang="en-US" sz="1000" dirty="0">
                         <a:latin typeface="Arial" charset="0"/>
@@ -5293,7 +5310,7 @@
                 <a:ea typeface="Arial" pitchFamily="34" charset="-122"/>
                 <a:cs typeface="Arial" pitchFamily="34" charset="-120"/>
               </a:rPr>
-              <a:t>9.32</a:t>
+              <a:t>9.31</a:t>
             </a:r>
             <a:endParaRPr lang="en-US" sz="3200" dirty="0"/>
           </a:p>
@@ -5418,7 +5435,7 @@
                 <a:ea typeface="Arial" pitchFamily="34" charset="-122"/>
                 <a:cs typeface="Arial" pitchFamily="34" charset="-120"/>
               </a:rPr>
-              <a:t>94.0%</a:t>
+              <a:t>93.2%</a:t>
             </a:r>
             <a:endParaRPr lang="en-US" sz="3200" dirty="0"/>
           </a:p>
@@ -5543,7 +5560,7 @@
                 <a:ea typeface="Arial" pitchFamily="34" charset="-122"/>
                 <a:cs typeface="Arial" pitchFamily="34" charset="-120"/>
               </a:rPr>
-              <a:t>1.2%</a:t>
+              <a:t>1.1%</a:t>
             </a:r>
             <a:endParaRPr lang="en-US" sz="3200" dirty="0"/>
           </a:p>
@@ -5668,7 +5685,7 @@
                 <a:ea typeface="Arial" pitchFamily="34" charset="-122"/>
                 <a:cs typeface="Arial" pitchFamily="34" charset="-120"/>
               </a:rPr>
-              <a:t>84件</a:t>
+              <a:t>88件</a:t>
             </a:r>
             <a:endParaRPr lang="en-US" sz="3200" dirty="0"/>
           </a:p>
@@ -5856,7 +5873,7 @@
                 <a:ea typeface="Arial" pitchFamily="34" charset="-122"/>
                 <a:cs typeface="Arial" pitchFamily="34" charset="-120"/>
               </a:rPr>
-              <a:t>  ベッドは快適で、スタッフも親切だったなど、良い点もたくさんありました</a:t>
+              <a:t>  サービスも良く、スタッフも親切で、立地も良く、衛生状態も良好でした</a:t>
             </a:r>
             <a:endParaRPr lang="en-US" sz="1100" dirty="0"/>
           </a:p>
@@ -5896,7 +5913,7 @@
                 <a:ea typeface="Arial" pitchFamily="34" charset="-122"/>
                 <a:cs typeface="Arial" pitchFamily="34" charset="-120"/>
               </a:rPr>
-              <a:t>  ホテルは清潔で、サービスも素晴らしいです</a:t>
+              <a:t>  服務良好，態度優良，地理位置良好，衛生不錯</a:t>
             </a:r>
             <a:endParaRPr lang="en-US" sz="1100" dirty="0"/>
           </a:p>
@@ -6104,7 +6121,7 @@
                 <a:ea typeface="Arial" pitchFamily="34" charset="-122"/>
                 <a:cs typeface="Arial" pitchFamily="34" charset="-120"/>
               </a:rPr>
-              <a:t>臭い・匂い </a:t>
+              <a:t>対応・サービスの不満 </a:t>
             </a:r>
             <a:endParaRPr lang="en-US" sz="1100" dirty="0"/>
           </a:p>
@@ -6124,7 +6141,7 @@
                 <a:ea typeface="Arial" pitchFamily="34" charset="-122"/>
                 <a:cs typeface="Arial" pitchFamily="34" charset="-120"/>
               </a:rPr>
-              <a:t>  欠点は、禁煙室を予約したのに、トイレ付近でタバコの臭いがしたことです</a:t>
+              <a:t>  服務良好，態度優良，地理位置良好，衛生不錯</a:t>
             </a:r>
             <a:endParaRPr lang="en-US" sz="1100" dirty="0"/>
           </a:p>
@@ -6477,7 +6494,7 @@
                 <a:ea typeface="Arial" pitchFamily="34" charset="-122"/>
                 <a:cs typeface="Arial" pitchFamily="34" charset="-120"/>
               </a:rPr>
-              <a:t>9.32</a:t>
+              <a:t>9.31</a:t>
             </a:r>
             <a:endParaRPr lang="en-US" sz="3200" dirty="0"/>
           </a:p>
@@ -6602,7 +6619,7 @@
                 <a:ea typeface="Arial" pitchFamily="34" charset="-122"/>
                 <a:cs typeface="Arial" pitchFamily="34" charset="-120"/>
               </a:rPr>
-              <a:t>94.0%</a:t>
+              <a:t>93.2%</a:t>
             </a:r>
             <a:endParaRPr lang="en-US" sz="3200" dirty="0"/>
           </a:p>
@@ -6727,7 +6744,7 @@
                 <a:ea typeface="Arial" pitchFamily="34" charset="-122"/>
                 <a:cs typeface="Arial" pitchFamily="34" charset="-120"/>
               </a:rPr>
-              <a:t>1.2%</a:t>
+              <a:t>1.1%</a:t>
             </a:r>
             <a:endParaRPr lang="en-US" sz="3200" dirty="0"/>
           </a:p>
@@ -6852,7 +6869,7 @@
                 <a:ea typeface="Arial" pitchFamily="34" charset="-122"/>
                 <a:cs typeface="Arial" pitchFamily="34" charset="-120"/>
               </a:rPr>
-              <a:t>84件</a:t>
+              <a:t>88件</a:t>
             </a:r>
             <a:endParaRPr lang="en-US" sz="3200" dirty="0"/>
           </a:p>
@@ -7273,7 +7290,7 @@
                 <a:ea typeface="Arial" pitchFamily="34" charset="-122"/>
                 <a:cs typeface="Arial" pitchFamily="34" charset="-120"/>
               </a:rPr>
-              <a:t>Trip.com(9.60)が最高スコア。</a:t>
+              <a:t>Trip.com(9.62)が最高スコア。</a:t>
             </a:r>
             <a:endParaRPr lang="en-US" sz="1100" dirty="0"/>
           </a:p>
@@ -7831,7 +7848,7 @@
                           <a:ea typeface="Arial" pitchFamily="34" charset="-122"/>
                           <a:cs typeface="Arial" pitchFamily="34" charset="-120"/>
                         </a:rPr>
-                        <a:t>43</a:t>
+                        <a:t>45</a:t>
                       </a:r>
                       <a:endParaRPr lang="en-US" sz="900" dirty="0">
                         <a:latin typeface="Arial" charset="0"/>
@@ -7899,7 +7916,7 @@
                           <a:ea typeface="Arial" pitchFamily="34" charset="-122"/>
                           <a:cs typeface="Arial" pitchFamily="34" charset="-120"/>
                         </a:rPr>
-                        <a:t>9.6</a:t>
+                        <a:t>9.62</a:t>
                       </a:r>
                       <a:endParaRPr lang="en-US" sz="900" dirty="0">
                         <a:latin typeface="Arial" charset="0"/>
@@ -8035,7 +8052,7 @@
                           <a:ea typeface="Arial" pitchFamily="34" charset="-122"/>
                           <a:cs typeface="Arial" pitchFamily="34" charset="-120"/>
                         </a:rPr>
-                        <a:t>9.6</a:t>
+                        <a:t>9.62</a:t>
                       </a:r>
                       <a:endParaRPr lang="en-US" sz="900" dirty="0">
                         <a:latin typeface="Arial" charset="0"/>
@@ -8083,6 +8100,348 @@
                     </a:lnB>
                     <a:solidFill>
                       <a:srgbClr val="E8EFF8"/>
+                    </a:solidFill>
+                  </a:tcPr>
+                </a:tc>
+              </a:tr>
+              <a:tr h="201168">
+                <a:tc>
+                  <a:txBody>
+                    <a:bodyPr/>
+                    <a:lstStyle/>
+                    <a:p>
+                      <a:pPr algn="ctr" indent="0" marL="0">
+                        <a:buNone/>
+                      </a:pPr>
+                      <a:r>
+                        <a:rPr lang="en-US" sz="900" dirty="0">
+                          <a:solidFill>
+                            <a:srgbClr val="000000"/>
+                          </a:solidFill>
+                          <a:latin typeface="Arial" pitchFamily="34" charset="0"/>
+                          <a:ea typeface="Arial" pitchFamily="34" charset="-122"/>
+                          <a:cs typeface="Arial" pitchFamily="34" charset="-120"/>
+                        </a:rPr>
+                        <a:t>Booking.com</a:t>
+                      </a:r>
+                      <a:endParaRPr lang="en-US" sz="900" dirty="0">
+                        <a:latin typeface="Arial" charset="0"/>
+                        <a:ea typeface="Arial" charset="0"/>
+                        <a:cs typeface="Arial" charset="0"/>
+                      </a:endParaRPr>
+                    </a:p>
+                  </a:txBody>
+                  <a:tcPr marL="91440" marR="91440" marT="45720" marB="45720">
+                    <a:lnL w="6350" cap="flat" cmpd="sng" algn="ctr">
+                      <a:solidFill>
+                        <a:srgbClr val="CBD5E1"/>
+                      </a:solidFill>
+                      <a:prstDash val="solid"/>
+                      <a:round/>
+                      <a:headEnd type="none" w="med" len="med"/>
+                      <a:tailEnd type="none" w="med" len="med"/>
+                    </a:lnL>
+                    <a:lnR w="6350" cap="flat" cmpd="sng" algn="ctr">
+                      <a:solidFill>
+                        <a:srgbClr val="CBD5E1"/>
+                      </a:solidFill>
+                      <a:prstDash val="solid"/>
+                      <a:round/>
+                      <a:headEnd type="none" w="med" len="med"/>
+                      <a:tailEnd type="none" w="med" len="med"/>
+                    </a:lnR>
+                    <a:lnT w="6350" cap="flat" cmpd="sng" algn="ctr">
+                      <a:solidFill>
+                        <a:srgbClr val="CBD5E1"/>
+                      </a:solidFill>
+                      <a:prstDash val="solid"/>
+                      <a:round/>
+                      <a:headEnd type="none" w="med" len="med"/>
+                      <a:tailEnd type="none" w="med" len="med"/>
+                    </a:lnT>
+                    <a:lnB w="6350" cap="flat" cmpd="sng" algn="ctr">
+                      <a:solidFill>
+                        <a:srgbClr val="CBD5E1"/>
+                      </a:solidFill>
+                      <a:prstDash val="solid"/>
+                      <a:round/>
+                      <a:headEnd type="none" w="med" len="med"/>
+                      <a:tailEnd type="none" w="med" len="med"/>
+                    </a:lnB>
+                    <a:solidFill>
+                      <a:srgbClr val="FFFFFF"/>
+                    </a:solidFill>
+                  </a:tcPr>
+                </a:tc>
+                <a:tc>
+                  <a:txBody>
+                    <a:bodyPr/>
+                    <a:lstStyle/>
+                    <a:p>
+                      <a:pPr algn="ctr" indent="0" marL="0">
+                        <a:buNone/>
+                      </a:pPr>
+                      <a:r>
+                        <a:rPr lang="en-US" sz="900" dirty="0">
+                          <a:solidFill>
+                            <a:srgbClr val="000000"/>
+                          </a:solidFill>
+                          <a:latin typeface="Arial" pitchFamily="34" charset="0"/>
+                          <a:ea typeface="Arial" pitchFamily="34" charset="-122"/>
+                          <a:cs typeface="Arial" pitchFamily="34" charset="-120"/>
+                        </a:rPr>
+                        <a:t>30</a:t>
+                      </a:r>
+                      <a:endParaRPr lang="en-US" sz="900" dirty="0">
+                        <a:latin typeface="Arial" charset="0"/>
+                        <a:ea typeface="Arial" charset="0"/>
+                        <a:cs typeface="Arial" charset="0"/>
+                      </a:endParaRPr>
+                    </a:p>
+                  </a:txBody>
+                  <a:tcPr marL="91440" marR="91440" marT="45720" marB="45720">
+                    <a:lnL w="6350" cap="flat" cmpd="sng" algn="ctr">
+                      <a:solidFill>
+                        <a:srgbClr val="CBD5E1"/>
+                      </a:solidFill>
+                      <a:prstDash val="solid"/>
+                      <a:round/>
+                      <a:headEnd type="none" w="med" len="med"/>
+                      <a:tailEnd type="none" w="med" len="med"/>
+                    </a:lnL>
+                    <a:lnR w="6350" cap="flat" cmpd="sng" algn="ctr">
+                      <a:solidFill>
+                        <a:srgbClr val="CBD5E1"/>
+                      </a:solidFill>
+                      <a:prstDash val="solid"/>
+                      <a:round/>
+                      <a:headEnd type="none" w="med" len="med"/>
+                      <a:tailEnd type="none" w="med" len="med"/>
+                    </a:lnR>
+                    <a:lnT w="6350" cap="flat" cmpd="sng" algn="ctr">
+                      <a:solidFill>
+                        <a:srgbClr val="CBD5E1"/>
+                      </a:solidFill>
+                      <a:prstDash val="solid"/>
+                      <a:round/>
+                      <a:headEnd type="none" w="med" len="med"/>
+                      <a:tailEnd type="none" w="med" len="med"/>
+                    </a:lnT>
+                    <a:lnB w="6350" cap="flat" cmpd="sng" algn="ctr">
+                      <a:solidFill>
+                        <a:srgbClr val="CBD5E1"/>
+                      </a:solidFill>
+                      <a:prstDash val="solid"/>
+                      <a:round/>
+                      <a:headEnd type="none" w="med" len="med"/>
+                      <a:tailEnd type="none" w="med" len="med"/>
+                    </a:lnB>
+                    <a:solidFill>
+                      <a:srgbClr val="FFFFFF"/>
+                    </a:solidFill>
+                  </a:tcPr>
+                </a:tc>
+                <a:tc>
+                  <a:txBody>
+                    <a:bodyPr/>
+                    <a:lstStyle/>
+                    <a:p>
+                      <a:pPr algn="ctr" indent="0" marL="0">
+                        <a:buNone/>
+                      </a:pPr>
+                      <a:r>
+                        <a:rPr lang="en-US" sz="900" dirty="0">
+                          <a:solidFill>
+                            <a:srgbClr val="000000"/>
+                          </a:solidFill>
+                          <a:latin typeface="Arial" pitchFamily="34" charset="0"/>
+                          <a:ea typeface="Arial" pitchFamily="34" charset="-122"/>
+                          <a:cs typeface="Arial" pitchFamily="34" charset="-120"/>
+                        </a:rPr>
+                        <a:t>9</a:t>
+                      </a:r>
+                      <a:endParaRPr lang="en-US" sz="900" dirty="0">
+                        <a:latin typeface="Arial" charset="0"/>
+                        <a:ea typeface="Arial" charset="0"/>
+                        <a:cs typeface="Arial" charset="0"/>
+                      </a:endParaRPr>
+                    </a:p>
+                  </a:txBody>
+                  <a:tcPr marL="91440" marR="91440" marT="45720" marB="45720">
+                    <a:lnL w="6350" cap="flat" cmpd="sng" algn="ctr">
+                      <a:solidFill>
+                        <a:srgbClr val="CBD5E1"/>
+                      </a:solidFill>
+                      <a:prstDash val="solid"/>
+                      <a:round/>
+                      <a:headEnd type="none" w="med" len="med"/>
+                      <a:tailEnd type="none" w="med" len="med"/>
+                    </a:lnL>
+                    <a:lnR w="6350" cap="flat" cmpd="sng" algn="ctr">
+                      <a:solidFill>
+                        <a:srgbClr val="CBD5E1"/>
+                      </a:solidFill>
+                      <a:prstDash val="solid"/>
+                      <a:round/>
+                      <a:headEnd type="none" w="med" len="med"/>
+                      <a:tailEnd type="none" w="med" len="med"/>
+                    </a:lnR>
+                    <a:lnT w="6350" cap="flat" cmpd="sng" algn="ctr">
+                      <a:solidFill>
+                        <a:srgbClr val="CBD5E1"/>
+                      </a:solidFill>
+                      <a:prstDash val="solid"/>
+                      <a:round/>
+                      <a:headEnd type="none" w="med" len="med"/>
+                      <a:tailEnd type="none" w="med" len="med"/>
+                    </a:lnT>
+                    <a:lnB w="6350" cap="flat" cmpd="sng" algn="ctr">
+                      <a:solidFill>
+                        <a:srgbClr val="CBD5E1"/>
+                      </a:solidFill>
+                      <a:prstDash val="solid"/>
+                      <a:round/>
+                      <a:headEnd type="none" w="med" len="med"/>
+                      <a:tailEnd type="none" w="med" len="med"/>
+                    </a:lnB>
+                    <a:solidFill>
+                      <a:srgbClr val="FFFFFF"/>
+                    </a:solidFill>
+                  </a:tcPr>
+                </a:tc>
+                <a:tc>
+                  <a:txBody>
+                    <a:bodyPr/>
+                    <a:lstStyle/>
+                    <a:p>
+                      <a:pPr algn="ctr" indent="0" marL="0">
+                        <a:buNone/>
+                      </a:pPr>
+                      <a:r>
+                        <a:rPr lang="en-US" sz="900" dirty="0">
+                          <a:solidFill>
+                            <a:srgbClr val="000000"/>
+                          </a:solidFill>
+                          <a:latin typeface="Arial" pitchFamily="34" charset="0"/>
+                          <a:ea typeface="Arial" pitchFamily="34" charset="-122"/>
+                          <a:cs typeface="Arial" pitchFamily="34" charset="-120"/>
+                        </a:rPr>
+                        <a:t>/10</a:t>
+                      </a:r>
+                      <a:endParaRPr lang="en-US" sz="900" dirty="0">
+                        <a:latin typeface="Arial" charset="0"/>
+                        <a:ea typeface="Arial" charset="0"/>
+                        <a:cs typeface="Arial" charset="0"/>
+                      </a:endParaRPr>
+                    </a:p>
+                  </a:txBody>
+                  <a:tcPr marL="91440" marR="91440" marT="45720" marB="45720">
+                    <a:lnL w="6350" cap="flat" cmpd="sng" algn="ctr">
+                      <a:solidFill>
+                        <a:srgbClr val="CBD5E1"/>
+                      </a:solidFill>
+                      <a:prstDash val="solid"/>
+                      <a:round/>
+                      <a:headEnd type="none" w="med" len="med"/>
+                      <a:tailEnd type="none" w="med" len="med"/>
+                    </a:lnL>
+                    <a:lnR w="6350" cap="flat" cmpd="sng" algn="ctr">
+                      <a:solidFill>
+                        <a:srgbClr val="CBD5E1"/>
+                      </a:solidFill>
+                      <a:prstDash val="solid"/>
+                      <a:round/>
+                      <a:headEnd type="none" w="med" len="med"/>
+                      <a:tailEnd type="none" w="med" len="med"/>
+                    </a:lnR>
+                    <a:lnT w="6350" cap="flat" cmpd="sng" algn="ctr">
+                      <a:solidFill>
+                        <a:srgbClr val="CBD5E1"/>
+                      </a:solidFill>
+                      <a:prstDash val="solid"/>
+                      <a:round/>
+                      <a:headEnd type="none" w="med" len="med"/>
+                      <a:tailEnd type="none" w="med" len="med"/>
+                    </a:lnT>
+                    <a:lnB w="6350" cap="flat" cmpd="sng" algn="ctr">
+                      <a:solidFill>
+                        <a:srgbClr val="CBD5E1"/>
+                      </a:solidFill>
+                      <a:prstDash val="solid"/>
+                      <a:round/>
+                      <a:headEnd type="none" w="med" len="med"/>
+                      <a:tailEnd type="none" w="med" len="med"/>
+                    </a:lnB>
+                    <a:solidFill>
+                      <a:srgbClr val="FFFFFF"/>
+                    </a:solidFill>
+                  </a:tcPr>
+                </a:tc>
+                <a:tc>
+                  <a:txBody>
+                    <a:bodyPr/>
+                    <a:lstStyle/>
+                    <a:p>
+                      <a:pPr algn="ctr" indent="0" marL="0">
+                        <a:buNone/>
+                      </a:pPr>
+                      <a:r>
+                        <a:rPr lang="en-US" sz="900" dirty="0">
+                          <a:solidFill>
+                            <a:srgbClr val="000000"/>
+                          </a:solidFill>
+                          <a:latin typeface="Arial" pitchFamily="34" charset="0"/>
+                          <a:ea typeface="Arial" pitchFamily="34" charset="-122"/>
+                          <a:cs typeface="Arial" pitchFamily="34" charset="-120"/>
+                        </a:rPr>
+                        <a:t>9</a:t>
+                      </a:r>
+                      <a:endParaRPr lang="en-US" sz="900" dirty="0">
+                        <a:latin typeface="Arial" charset="0"/>
+                        <a:ea typeface="Arial" charset="0"/>
+                        <a:cs typeface="Arial" charset="0"/>
+                      </a:endParaRPr>
+                    </a:p>
+                  </a:txBody>
+                  <a:tcPr marL="91440" marR="91440" marT="45720" marB="45720">
+                    <a:lnL w="6350" cap="flat" cmpd="sng" algn="ctr">
+                      <a:solidFill>
+                        <a:srgbClr val="CBD5E1"/>
+                      </a:solidFill>
+                      <a:prstDash val="solid"/>
+                      <a:round/>
+                      <a:headEnd type="none" w="med" len="med"/>
+                      <a:tailEnd type="none" w="med" len="med"/>
+                    </a:lnL>
+                    <a:lnR w="6350" cap="flat" cmpd="sng" algn="ctr">
+                      <a:solidFill>
+                        <a:srgbClr val="CBD5E1"/>
+                      </a:solidFill>
+                      <a:prstDash val="solid"/>
+                      <a:round/>
+                      <a:headEnd type="none" w="med" len="med"/>
+                      <a:tailEnd type="none" w="med" len="med"/>
+                    </a:lnR>
+                    <a:lnT w="6350" cap="flat" cmpd="sng" algn="ctr">
+                      <a:solidFill>
+                        <a:srgbClr val="CBD5E1"/>
+                      </a:solidFill>
+                      <a:prstDash val="solid"/>
+                      <a:round/>
+                      <a:headEnd type="none" w="med" len="med"/>
+                      <a:tailEnd type="none" w="med" len="med"/>
+                    </a:lnT>
+                    <a:lnB w="6350" cap="flat" cmpd="sng" algn="ctr">
+                      <a:solidFill>
+                        <a:srgbClr val="CBD5E1"/>
+                      </a:solidFill>
+                      <a:prstDash val="solid"/>
+                      <a:round/>
+                      <a:headEnd type="none" w="med" len="med"/>
+                      <a:tailEnd type="none" w="med" len="med"/>
+                    </a:lnB>
+                    <a:solidFill>
+                      <a:srgbClr val="FFFFFF"/>
                     </a:solidFill>
                   </a:tcPr>
                 </a:tc>
@@ -8152,7 +8511,7 @@
                       <a:tailEnd type="none" w="med" len="med"/>
                     </a:lnB>
                     <a:solidFill>
-                      <a:srgbClr val="FFFFFF"/>
+                      <a:srgbClr val="E8EFF8"/>
                     </a:solidFill>
                   </a:tcPr>
                 </a:tc>
@@ -8173,7 +8532,7 @@
                           <a:ea typeface="Arial" pitchFamily="34" charset="-122"/>
                           <a:cs typeface="Arial" pitchFamily="34" charset="-120"/>
                         </a:rPr>
-                        <a:t>11</a:t>
+                        <a:t>12</a:t>
                       </a:r>
                       <a:endParaRPr lang="en-US" sz="900" dirty="0">
                         <a:latin typeface="Arial" charset="0"/>
@@ -8220,7 +8579,7 @@
                       <a:tailEnd type="none" w="med" len="med"/>
                     </a:lnB>
                     <a:solidFill>
-                      <a:srgbClr val="FFFFFF"/>
+                      <a:srgbClr val="E8EFF8"/>
                     </a:solidFill>
                   </a:tcPr>
                 </a:tc>
@@ -8241,7 +8600,7 @@
                           <a:ea typeface="Arial" pitchFamily="34" charset="-122"/>
                           <a:cs typeface="Arial" pitchFamily="34" charset="-120"/>
                         </a:rPr>
-                        <a:t>4.64</a:t>
+                        <a:t>4.5</a:t>
                       </a:r>
                       <a:endParaRPr lang="en-US" sz="900" dirty="0">
                         <a:latin typeface="Arial" charset="0"/>
@@ -8288,7 +8647,7 @@
                       <a:tailEnd type="none" w="med" len="med"/>
                     </a:lnB>
                     <a:solidFill>
-                      <a:srgbClr val="FFFFFF"/>
+                      <a:srgbClr val="E8EFF8"/>
                     </a:solidFill>
                   </a:tcPr>
                 </a:tc>
@@ -8356,144 +8715,6 @@
                       <a:tailEnd type="none" w="med" len="med"/>
                     </a:lnB>
                     <a:solidFill>
-                      <a:srgbClr val="FFFFFF"/>
-                    </a:solidFill>
-                  </a:tcPr>
-                </a:tc>
-                <a:tc>
-                  <a:txBody>
-                    <a:bodyPr/>
-                    <a:lstStyle/>
-                    <a:p>
-                      <a:pPr algn="ctr" indent="0" marL="0">
-                        <a:buNone/>
-                      </a:pPr>
-                      <a:r>
-                        <a:rPr lang="en-US" sz="900" dirty="0">
-                          <a:solidFill>
-                            <a:srgbClr val="000000"/>
-                          </a:solidFill>
-                          <a:latin typeface="Arial" pitchFamily="34" charset="0"/>
-                          <a:ea typeface="Arial" pitchFamily="34" charset="-122"/>
-                          <a:cs typeface="Arial" pitchFamily="34" charset="-120"/>
-                        </a:rPr>
-                        <a:t>9.27</a:t>
-                      </a:r>
-                      <a:endParaRPr lang="en-US" sz="900" dirty="0">
-                        <a:latin typeface="Arial" charset="0"/>
-                        <a:ea typeface="Arial" charset="0"/>
-                        <a:cs typeface="Arial" charset="0"/>
-                      </a:endParaRPr>
-                    </a:p>
-                  </a:txBody>
-                  <a:tcPr marL="91440" marR="91440" marT="45720" marB="45720">
-                    <a:lnL w="6350" cap="flat" cmpd="sng" algn="ctr">
-                      <a:solidFill>
-                        <a:srgbClr val="CBD5E1"/>
-                      </a:solidFill>
-                      <a:prstDash val="solid"/>
-                      <a:round/>
-                      <a:headEnd type="none" w="med" len="med"/>
-                      <a:tailEnd type="none" w="med" len="med"/>
-                    </a:lnL>
-                    <a:lnR w="6350" cap="flat" cmpd="sng" algn="ctr">
-                      <a:solidFill>
-                        <a:srgbClr val="CBD5E1"/>
-                      </a:solidFill>
-                      <a:prstDash val="solid"/>
-                      <a:round/>
-                      <a:headEnd type="none" w="med" len="med"/>
-                      <a:tailEnd type="none" w="med" len="med"/>
-                    </a:lnR>
-                    <a:lnT w="6350" cap="flat" cmpd="sng" algn="ctr">
-                      <a:solidFill>
-                        <a:srgbClr val="CBD5E1"/>
-                      </a:solidFill>
-                      <a:prstDash val="solid"/>
-                      <a:round/>
-                      <a:headEnd type="none" w="med" len="med"/>
-                      <a:tailEnd type="none" w="med" len="med"/>
-                    </a:lnT>
-                    <a:lnB w="6350" cap="flat" cmpd="sng" algn="ctr">
-                      <a:solidFill>
-                        <a:srgbClr val="CBD5E1"/>
-                      </a:solidFill>
-                      <a:prstDash val="solid"/>
-                      <a:round/>
-                      <a:headEnd type="none" w="med" len="med"/>
-                      <a:tailEnd type="none" w="med" len="med"/>
-                    </a:lnB>
-                    <a:solidFill>
-                      <a:srgbClr val="FFFFFF"/>
-                    </a:solidFill>
-                  </a:tcPr>
-                </a:tc>
-              </a:tr>
-              <a:tr h="201168">
-                <a:tc>
-                  <a:txBody>
-                    <a:bodyPr/>
-                    <a:lstStyle/>
-                    <a:p>
-                      <a:pPr algn="ctr" indent="0" marL="0">
-                        <a:buNone/>
-                      </a:pPr>
-                      <a:r>
-                        <a:rPr lang="en-US" sz="900" dirty="0">
-                          <a:solidFill>
-                            <a:srgbClr val="000000"/>
-                          </a:solidFill>
-                          <a:latin typeface="Arial" pitchFamily="34" charset="0"/>
-                          <a:ea typeface="Arial" pitchFamily="34" charset="-122"/>
-                          <a:cs typeface="Arial" pitchFamily="34" charset="-120"/>
-                        </a:rPr>
-                        <a:t>Booking.com</a:t>
-                      </a:r>
-                      <a:endParaRPr lang="en-US" sz="900" dirty="0">
-                        <a:latin typeface="Arial" charset="0"/>
-                        <a:ea typeface="Arial" charset="0"/>
-                        <a:cs typeface="Arial" charset="0"/>
-                      </a:endParaRPr>
-                    </a:p>
-                  </a:txBody>
-                  <a:tcPr marL="91440" marR="91440" marT="45720" marB="45720">
-                    <a:lnL w="6350" cap="flat" cmpd="sng" algn="ctr">
-                      <a:solidFill>
-                        <a:srgbClr val="CBD5E1"/>
-                      </a:solidFill>
-                      <a:prstDash val="solid"/>
-                      <a:round/>
-                      <a:headEnd type="none" w="med" len="med"/>
-                      <a:tailEnd type="none" w="med" len="med"/>
-                    </a:lnL>
-                    <a:lnR w="6350" cap="flat" cmpd="sng" algn="ctr">
-                      <a:solidFill>
-                        <a:srgbClr val="CBD5E1"/>
-                      </a:solidFill>
-                      <a:prstDash val="solid"/>
-                      <a:round/>
-                      <a:headEnd type="none" w="med" len="med"/>
-                      <a:tailEnd type="none" w="med" len="med"/>
-                    </a:lnR>
-                    <a:lnT w="6350" cap="flat" cmpd="sng" algn="ctr">
-                      <a:solidFill>
-                        <a:srgbClr val="CBD5E1"/>
-                      </a:solidFill>
-                      <a:prstDash val="solid"/>
-                      <a:round/>
-                      <a:headEnd type="none" w="med" len="med"/>
-                      <a:tailEnd type="none" w="med" len="med"/>
-                    </a:lnT>
-                    <a:lnB w="6350" cap="flat" cmpd="sng" algn="ctr">
-                      <a:solidFill>
-                        <a:srgbClr val="CBD5E1"/>
-                      </a:solidFill>
-                      <a:prstDash val="solid"/>
-                      <a:round/>
-                      <a:headEnd type="none" w="med" len="med"/>
-                      <a:tailEnd type="none" w="med" len="med"/>
-                    </a:lnB>
-                    <a:solidFill>
                       <a:srgbClr val="E8EFF8"/>
                     </a:solidFill>
                   </a:tcPr>
@@ -8515,211 +8736,7 @@
                           <a:ea typeface="Arial" pitchFamily="34" charset="-122"/>
                           <a:cs typeface="Arial" pitchFamily="34" charset="-120"/>
                         </a:rPr>
-                        <a:t>29</a:t>
-                      </a:r>
-                      <a:endParaRPr lang="en-US" sz="900" dirty="0">
-                        <a:latin typeface="Arial" charset="0"/>
-                        <a:ea typeface="Arial" charset="0"/>
-                        <a:cs typeface="Arial" charset="0"/>
-                      </a:endParaRPr>
-                    </a:p>
-                  </a:txBody>
-                  <a:tcPr marL="91440" marR="91440" marT="45720" marB="45720">
-                    <a:lnL w="6350" cap="flat" cmpd="sng" algn="ctr">
-                      <a:solidFill>
-                        <a:srgbClr val="CBD5E1"/>
-                      </a:solidFill>
-                      <a:prstDash val="solid"/>
-                      <a:round/>
-                      <a:headEnd type="none" w="med" len="med"/>
-                      <a:tailEnd type="none" w="med" len="med"/>
-                    </a:lnL>
-                    <a:lnR w="6350" cap="flat" cmpd="sng" algn="ctr">
-                      <a:solidFill>
-                        <a:srgbClr val="CBD5E1"/>
-                      </a:solidFill>
-                      <a:prstDash val="solid"/>
-                      <a:round/>
-                      <a:headEnd type="none" w="med" len="med"/>
-                      <a:tailEnd type="none" w="med" len="med"/>
-                    </a:lnR>
-                    <a:lnT w="6350" cap="flat" cmpd="sng" algn="ctr">
-                      <a:solidFill>
-                        <a:srgbClr val="CBD5E1"/>
-                      </a:solidFill>
-                      <a:prstDash val="solid"/>
-                      <a:round/>
-                      <a:headEnd type="none" w="med" len="med"/>
-                      <a:tailEnd type="none" w="med" len="med"/>
-                    </a:lnT>
-                    <a:lnB w="6350" cap="flat" cmpd="sng" algn="ctr">
-                      <a:solidFill>
-                        <a:srgbClr val="CBD5E1"/>
-                      </a:solidFill>
-                      <a:prstDash val="solid"/>
-                      <a:round/>
-                      <a:headEnd type="none" w="med" len="med"/>
-                      <a:tailEnd type="none" w="med" len="med"/>
-                    </a:lnB>
-                    <a:solidFill>
-                      <a:srgbClr val="E8EFF8"/>
-                    </a:solidFill>
-                  </a:tcPr>
-                </a:tc>
-                <a:tc>
-                  <a:txBody>
-                    <a:bodyPr/>
-                    <a:lstStyle/>
-                    <a:p>
-                      <a:pPr algn="ctr" indent="0" marL="0">
-                        <a:buNone/>
-                      </a:pPr>
-                      <a:r>
-                        <a:rPr lang="en-US" sz="900" dirty="0">
-                          <a:solidFill>
-                            <a:srgbClr val="000000"/>
-                          </a:solidFill>
-                          <a:latin typeface="Arial" pitchFamily="34" charset="0"/>
-                          <a:ea typeface="Arial" pitchFamily="34" charset="-122"/>
-                          <a:cs typeface="Arial" pitchFamily="34" charset="-120"/>
-                        </a:rPr>
-                        <a:t>8.97</a:t>
-                      </a:r>
-                      <a:endParaRPr lang="en-US" sz="900" dirty="0">
-                        <a:latin typeface="Arial" charset="0"/>
-                        <a:ea typeface="Arial" charset="0"/>
-                        <a:cs typeface="Arial" charset="0"/>
-                      </a:endParaRPr>
-                    </a:p>
-                  </a:txBody>
-                  <a:tcPr marL="91440" marR="91440" marT="45720" marB="45720">
-                    <a:lnL w="6350" cap="flat" cmpd="sng" algn="ctr">
-                      <a:solidFill>
-                        <a:srgbClr val="CBD5E1"/>
-                      </a:solidFill>
-                      <a:prstDash val="solid"/>
-                      <a:round/>
-                      <a:headEnd type="none" w="med" len="med"/>
-                      <a:tailEnd type="none" w="med" len="med"/>
-                    </a:lnL>
-                    <a:lnR w="6350" cap="flat" cmpd="sng" algn="ctr">
-                      <a:solidFill>
-                        <a:srgbClr val="CBD5E1"/>
-                      </a:solidFill>
-                      <a:prstDash val="solid"/>
-                      <a:round/>
-                      <a:headEnd type="none" w="med" len="med"/>
-                      <a:tailEnd type="none" w="med" len="med"/>
-                    </a:lnR>
-                    <a:lnT w="6350" cap="flat" cmpd="sng" algn="ctr">
-                      <a:solidFill>
-                        <a:srgbClr val="CBD5E1"/>
-                      </a:solidFill>
-                      <a:prstDash val="solid"/>
-                      <a:round/>
-                      <a:headEnd type="none" w="med" len="med"/>
-                      <a:tailEnd type="none" w="med" len="med"/>
-                    </a:lnT>
-                    <a:lnB w="6350" cap="flat" cmpd="sng" algn="ctr">
-                      <a:solidFill>
-                        <a:srgbClr val="CBD5E1"/>
-                      </a:solidFill>
-                      <a:prstDash val="solid"/>
-                      <a:round/>
-                      <a:headEnd type="none" w="med" len="med"/>
-                      <a:tailEnd type="none" w="med" len="med"/>
-                    </a:lnB>
-                    <a:solidFill>
-                      <a:srgbClr val="E8EFF8"/>
-                    </a:solidFill>
-                  </a:tcPr>
-                </a:tc>
-                <a:tc>
-                  <a:txBody>
-                    <a:bodyPr/>
-                    <a:lstStyle/>
-                    <a:p>
-                      <a:pPr algn="ctr" indent="0" marL="0">
-                        <a:buNone/>
-                      </a:pPr>
-                      <a:r>
-                        <a:rPr lang="en-US" sz="900" dirty="0">
-                          <a:solidFill>
-                            <a:srgbClr val="000000"/>
-                          </a:solidFill>
-                          <a:latin typeface="Arial" pitchFamily="34" charset="0"/>
-                          <a:ea typeface="Arial" pitchFamily="34" charset="-122"/>
-                          <a:cs typeface="Arial" pitchFamily="34" charset="-120"/>
-                        </a:rPr>
-                        <a:t>/10</a:t>
-                      </a:r>
-                      <a:endParaRPr lang="en-US" sz="900" dirty="0">
-                        <a:latin typeface="Arial" charset="0"/>
-                        <a:ea typeface="Arial" charset="0"/>
-                        <a:cs typeface="Arial" charset="0"/>
-                      </a:endParaRPr>
-                    </a:p>
-                  </a:txBody>
-                  <a:tcPr marL="91440" marR="91440" marT="45720" marB="45720">
-                    <a:lnL w="6350" cap="flat" cmpd="sng" algn="ctr">
-                      <a:solidFill>
-                        <a:srgbClr val="CBD5E1"/>
-                      </a:solidFill>
-                      <a:prstDash val="solid"/>
-                      <a:round/>
-                      <a:headEnd type="none" w="med" len="med"/>
-                      <a:tailEnd type="none" w="med" len="med"/>
-                    </a:lnL>
-                    <a:lnR w="6350" cap="flat" cmpd="sng" algn="ctr">
-                      <a:solidFill>
-                        <a:srgbClr val="CBD5E1"/>
-                      </a:solidFill>
-                      <a:prstDash val="solid"/>
-                      <a:round/>
-                      <a:headEnd type="none" w="med" len="med"/>
-                      <a:tailEnd type="none" w="med" len="med"/>
-                    </a:lnR>
-                    <a:lnT w="6350" cap="flat" cmpd="sng" algn="ctr">
-                      <a:solidFill>
-                        <a:srgbClr val="CBD5E1"/>
-                      </a:solidFill>
-                      <a:prstDash val="solid"/>
-                      <a:round/>
-                      <a:headEnd type="none" w="med" len="med"/>
-                      <a:tailEnd type="none" w="med" len="med"/>
-                    </a:lnT>
-                    <a:lnB w="6350" cap="flat" cmpd="sng" algn="ctr">
-                      <a:solidFill>
-                        <a:srgbClr val="CBD5E1"/>
-                      </a:solidFill>
-                      <a:prstDash val="solid"/>
-                      <a:round/>
-                      <a:headEnd type="none" w="med" len="med"/>
-                      <a:tailEnd type="none" w="med" len="med"/>
-                    </a:lnB>
-                    <a:solidFill>
-                      <a:srgbClr val="E8EFF8"/>
-                    </a:solidFill>
-                  </a:tcPr>
-                </a:tc>
-                <a:tc>
-                  <a:txBody>
-                    <a:bodyPr/>
-                    <a:lstStyle/>
-                    <a:p>
-                      <a:pPr algn="ctr" indent="0" marL="0">
-                        <a:buNone/>
-                      </a:pPr>
-                      <a:r>
-                        <a:rPr lang="en-US" sz="900" dirty="0">
-                          <a:solidFill>
-                            <a:srgbClr val="000000"/>
-                          </a:solidFill>
-                          <a:latin typeface="Arial" pitchFamily="34" charset="0"/>
-                          <a:ea typeface="Arial" pitchFamily="34" charset="-122"/>
-                          <a:cs typeface="Arial" pitchFamily="34" charset="-120"/>
-                        </a:rPr>
-                        <a:t>8.97</a:t>
+                        <a:t>9</a:t>
                       </a:r>
                       <a:endParaRPr lang="en-US" sz="900" dirty="0">
                         <a:latin typeface="Arial" charset="0"/>
@@ -9469,7 +9486,7 @@
                 <a:ea typeface="Arial" pitchFamily="34" charset="-122"/>
                 <a:cs typeface="Arial" pitchFamily="34" charset="-120"/>
               </a:rPr>
-              <a:t>79件（94.0%）</a:t>
+              <a:t>82件（93.2%）</a:t>
             </a:r>
             <a:endParaRPr lang="en-US" sz="1100" dirty="0"/>
           </a:p>
@@ -9567,7 +9584,7 @@
                 <a:ea typeface="Arial" pitchFamily="34" charset="-122"/>
                 <a:cs typeface="Arial" pitchFamily="34" charset="-120"/>
               </a:rPr>
-              <a:t>4件（4.8%）</a:t>
+              <a:t>5件（5.7%）</a:t>
             </a:r>
             <a:endParaRPr lang="en-US" sz="1100" dirty="0"/>
           </a:p>
@@ -9665,7 +9682,7 @@
                 <a:ea typeface="Arial" pitchFamily="34" charset="-122"/>
                 <a:cs typeface="Arial" pitchFamily="34" charset="-120"/>
               </a:rPr>
-              <a:t>1件（1.2%）</a:t>
+              <a:t>1件（1.1%）</a:t>
             </a:r>
             <a:endParaRPr lang="en-US" sz="1100" dirty="0"/>
           </a:p>
@@ -10116,7 +10133,7 @@
                 <a:ea typeface="Arial" pitchFamily="34" charset="-122"/>
                 <a:cs typeface="Arial" pitchFamily="34" charset="-120"/>
               </a:rPr>
-              <a:t>「立地は便利で、JR駅や地下鉄駅に近く、周辺には多くのレストランがあります」</a:t>
+              <a:t>「交通方便，附近很多食店 交通の便が良く、近くにレストランも多数あります」</a:t>
             </a:r>
             <a:endParaRPr lang="en-US" sz="900" dirty="0"/>
           </a:p>
@@ -10300,7 +10317,7 @@
                 <a:ea typeface="Arial" pitchFamily="34" charset="-122"/>
                 <a:cs typeface="Arial" pitchFamily="34" charset="-120"/>
               </a:rPr>
-              <a:t>ベッドは快適で、スタッフも親切だったなど、良い点もたくさんありました</a:t>
+              <a:t>サービスも良く、スタッフも親切で、立地も良く、衛生状態も良好でした</a:t>
             </a:r>
             <a:endParaRPr lang="en-US" sz="900" dirty="0"/>
           </a:p>
@@ -10315,6 +10332,229 @@
         <p:spPr>
           <a:xfrm>
             <a:off x="3429000" y="1828800"/>
+            <a:ext cx="2377440" cy="640080"/>
+          </a:xfrm>
+          <a:prstGeom prst="rect">
+            <a:avLst/>
+          </a:prstGeom>
+          <a:noFill/>
+          <a:ln/>
+        </p:spPr>
+        <p:txBody>
+          <a:bodyPr wrap="square" lIns="0" tIns="0" rIns="0" bIns="0" rtlCol="0" anchor="ctr"/>
+          <a:lstStyle/>
+          <a:p>
+            <a:pPr indent="0" marL="0">
+              <a:buNone/>
+            </a:pPr>
+            <a:r>
+              <a:rPr lang="en-US" sz="900" i="1" dirty="0">
+                <a:solidFill>
+                  <a:srgbClr val="3B7DD8"/>
+                </a:solidFill>
+                <a:latin typeface="Arial" pitchFamily="34" charset="0"/>
+                <a:ea typeface="Arial" pitchFamily="34" charset="-122"/>
+                <a:cs typeface="Arial" pitchFamily="34" charset="-120"/>
+              </a:rPr>
+              <a:t>「ベッドは快適で、スタッフも親切だったなど、良い点もたくさんありました」</a:t>
+            </a:r>
+            <a:endParaRPr lang="en-US" sz="900" dirty="0"/>
+          </a:p>
+        </p:txBody>
+      </p:sp>
+      <p:sp>
+        <p:nvSpPr>
+          <p:cNvPr id="19" name="Shape 17"/>
+          <p:cNvSpPr/>
+          <p:nvPr/>
+        </p:nvSpPr>
+        <p:spPr>
+          <a:xfrm>
+            <a:off x="6126480" y="1051560"/>
+            <a:ext cx="2651760" cy="1600200"/>
+          </a:xfrm>
+          <a:prstGeom prst="rect">
+            <a:avLst/>
+          </a:prstGeom>
+          <a:solidFill>
+            <a:srgbClr val="FFFFFF"/>
+          </a:solidFill>
+          <a:ln/>
+          <a:effectLst>
+            <a:outerShdw sx="100000" sy="100000" kx="0" ky="0" algn="bl" rotWithShape="0" blurRad="50800" dist="25400" dir="8100000">
+              <a:srgbClr val="000000">
+                <a:alpha val="10000"/>
+              </a:srgbClr>
+            </a:outerShdw>
+          </a:effectLst>
+        </p:spPr>
+      </p:sp>
+      <p:sp>
+        <p:nvSpPr>
+          <p:cNvPr id="20" name="Shape 18"/>
+          <p:cNvSpPr/>
+          <p:nvPr/>
+        </p:nvSpPr>
+        <p:spPr>
+          <a:xfrm>
+            <a:off x="6126480" y="1051560"/>
+            <a:ext cx="54864" cy="1600200"/>
+          </a:xfrm>
+          <a:prstGeom prst="rect">
+            <a:avLst/>
+          </a:prstGeom>
+          <a:solidFill>
+            <a:srgbClr val="16A34A"/>
+          </a:solidFill>
+          <a:ln/>
+        </p:spPr>
+      </p:sp>
+      <p:sp>
+        <p:nvSpPr>
+          <p:cNvPr id="21" name="Shape 19"/>
+          <p:cNvSpPr/>
+          <p:nvPr/>
+        </p:nvSpPr>
+        <p:spPr>
+          <a:xfrm>
+            <a:off x="7955280" y="1124712"/>
+            <a:ext cx="658368" cy="228600"/>
+          </a:xfrm>
+          <a:prstGeom prst="rect">
+            <a:avLst/>
+          </a:prstGeom>
+          <a:solidFill>
+            <a:srgbClr val="DCFCE7"/>
+          </a:solidFill>
+          <a:ln/>
+        </p:spPr>
+      </p:sp>
+      <p:sp>
+        <p:nvSpPr>
+          <p:cNvPr id="22" name="Text 20"/>
+          <p:cNvSpPr/>
+          <p:nvPr/>
+        </p:nvSpPr>
+        <p:spPr>
+          <a:xfrm>
+            <a:off x="7955280" y="1124712"/>
+            <a:ext cx="658368" cy="228600"/>
+          </a:xfrm>
+          <a:prstGeom prst="rect">
+            <a:avLst/>
+          </a:prstGeom>
+          <a:noFill/>
+          <a:ln/>
+        </p:spPr>
+        <p:txBody>
+          <a:bodyPr wrap="square" lIns="0" tIns="0" rIns="0" bIns="0" rtlCol="0" anchor="ctr"/>
+          <a:lstStyle/>
+          <a:p>
+            <a:pPr algn="ctr" indent="0" marL="0">
+              <a:buNone/>
+            </a:pPr>
+            <a:r>
+              <a:rPr lang="en-US" sz="900" b="1" dirty="0">
+                <a:solidFill>
+                  <a:srgbClr val="16A34A"/>
+                </a:solidFill>
+                <a:latin typeface="Arial" pitchFamily="34" charset="0"/>
+                <a:ea typeface="Arial" pitchFamily="34" charset="-122"/>
+                <a:cs typeface="Arial" pitchFamily="34" charset="-120"/>
+              </a:rPr>
+              <a:t>20件+</a:t>
+            </a:r>
+            <a:endParaRPr lang="en-US" sz="900" dirty="0"/>
+          </a:p>
+        </p:txBody>
+      </p:sp>
+      <p:sp>
+        <p:nvSpPr>
+          <p:cNvPr id="23" name="Text 21"/>
+          <p:cNvSpPr/>
+          <p:nvPr/>
+        </p:nvSpPr>
+        <p:spPr>
+          <a:xfrm>
+            <a:off x="6263640" y="1124712"/>
+            <a:ext cx="1645920" cy="274320"/>
+          </a:xfrm>
+          <a:prstGeom prst="rect">
+            <a:avLst/>
+          </a:prstGeom>
+          <a:noFill/>
+          <a:ln/>
+        </p:spPr>
+        <p:txBody>
+          <a:bodyPr wrap="square" lIns="0" tIns="0" rIns="0" bIns="0" rtlCol="0" anchor="ctr"/>
+          <a:lstStyle/>
+          <a:p>
+            <a:pPr indent="0" marL="0">
+              <a:buNone/>
+            </a:pPr>
+            <a:r>
+              <a:rPr lang="en-US" sz="1300" b="1" dirty="0">
+                <a:solidFill>
+                  <a:srgbClr val="1A2744"/>
+                </a:solidFill>
+                <a:latin typeface="Arial" pitchFamily="34" charset="0"/>
+                <a:ea typeface="Arial" pitchFamily="34" charset="-122"/>
+                <a:cs typeface="Arial" pitchFamily="34" charset="-120"/>
+              </a:rPr>
+              <a:t>清潔さ・清掃</a:t>
+            </a:r>
+            <a:endParaRPr lang="en-US" sz="1300" dirty="0"/>
+          </a:p>
+        </p:txBody>
+      </p:sp>
+      <p:sp>
+        <p:nvSpPr>
+          <p:cNvPr id="24" name="Text 22"/>
+          <p:cNvSpPr/>
+          <p:nvPr/>
+        </p:nvSpPr>
+        <p:spPr>
+          <a:xfrm>
+            <a:off x="6263640" y="1417320"/>
+            <a:ext cx="2377440" cy="365760"/>
+          </a:xfrm>
+          <a:prstGeom prst="rect">
+            <a:avLst/>
+          </a:prstGeom>
+          <a:noFill/>
+          <a:ln/>
+        </p:spPr>
+        <p:txBody>
+          <a:bodyPr wrap="square" lIns="0" tIns="0" rIns="0" bIns="0" rtlCol="0" anchor="ctr"/>
+          <a:lstStyle/>
+          <a:p>
+            <a:pPr indent="0" marL="0">
+              <a:buNone/>
+            </a:pPr>
+            <a:r>
+              <a:rPr lang="en-US" sz="900" dirty="0">
+                <a:solidFill>
+                  <a:srgbClr val="64748B"/>
+                </a:solidFill>
+                <a:latin typeface="Arial" pitchFamily="34" charset="0"/>
+                <a:ea typeface="Arial" pitchFamily="34" charset="-122"/>
+                <a:cs typeface="Arial" pitchFamily="34" charset="-120"/>
+              </a:rPr>
+              <a:t>服務良好，態度優良，地理位置良好，衛生不錯</a:t>
+            </a:r>
+            <a:endParaRPr lang="en-US" sz="900" dirty="0"/>
+          </a:p>
+        </p:txBody>
+      </p:sp>
+      <p:sp>
+        <p:nvSpPr>
+          <p:cNvPr id="25" name="Text 23"/>
+          <p:cNvSpPr/>
+          <p:nvPr/>
+        </p:nvSpPr>
+        <p:spPr>
+          <a:xfrm>
+            <a:off x="6263640" y="1828800"/>
             <a:ext cx="2377440" cy="640080"/>
           </a:xfrm>
           <a:prstGeom prst="rect">
@@ -10347,13 +10587,13 @@
       </p:sp>
       <p:sp>
         <p:nvSpPr>
-          <p:cNvPr id="19" name="Shape 17"/>
-          <p:cNvSpPr/>
-          <p:nvPr/>
-        </p:nvSpPr>
-        <p:spPr>
-          <a:xfrm>
-            <a:off x="6126480" y="1051560"/>
+          <p:cNvPr id="26" name="Shape 24"/>
+          <p:cNvSpPr/>
+          <p:nvPr/>
+        </p:nvSpPr>
+        <p:spPr>
+          <a:xfrm>
+            <a:off x="457200" y="2880360"/>
             <a:ext cx="2651760" cy="1600200"/>
           </a:xfrm>
           <a:prstGeom prst="rect">
@@ -10374,13 +10614,13 @@
       </p:sp>
       <p:sp>
         <p:nvSpPr>
-          <p:cNvPr id="20" name="Shape 18"/>
-          <p:cNvSpPr/>
-          <p:nvPr/>
-        </p:nvSpPr>
-        <p:spPr>
-          <a:xfrm>
-            <a:off x="6126480" y="1051560"/>
+          <p:cNvPr id="27" name="Shape 25"/>
+          <p:cNvSpPr/>
+          <p:nvPr/>
+        </p:nvSpPr>
+        <p:spPr>
+          <a:xfrm>
+            <a:off x="457200" y="2880360"/>
             <a:ext cx="54864" cy="1600200"/>
           </a:xfrm>
           <a:prstGeom prst="rect">
@@ -10394,13 +10634,13 @@
       </p:sp>
       <p:sp>
         <p:nvSpPr>
-          <p:cNvPr id="21" name="Shape 19"/>
-          <p:cNvSpPr/>
-          <p:nvPr/>
-        </p:nvSpPr>
-        <p:spPr>
-          <a:xfrm>
-            <a:off x="7955280" y="1124712"/>
+          <p:cNvPr id="28" name="Shape 26"/>
+          <p:cNvSpPr/>
+          <p:nvPr/>
+        </p:nvSpPr>
+        <p:spPr>
+          <a:xfrm>
+            <a:off x="2286000" y="2953512"/>
             <a:ext cx="658368" cy="228600"/>
           </a:xfrm>
           <a:prstGeom prst="rect">
@@ -10414,13 +10654,13 @@
       </p:sp>
       <p:sp>
         <p:nvSpPr>
-          <p:cNvPr id="22" name="Text 20"/>
-          <p:cNvSpPr/>
-          <p:nvPr/>
-        </p:nvSpPr>
-        <p:spPr>
-          <a:xfrm>
-            <a:off x="7955280" y="1124712"/>
+          <p:cNvPr id="29" name="Text 27"/>
+          <p:cNvSpPr/>
+          <p:nvPr/>
+        </p:nvSpPr>
+        <p:spPr>
+          <a:xfrm>
+            <a:off x="2286000" y="2953512"/>
             <a:ext cx="658368" cy="228600"/>
           </a:xfrm>
           <a:prstGeom prst="rect">
@@ -10453,229 +10693,6 @@
       </p:sp>
       <p:sp>
         <p:nvSpPr>
-          <p:cNvPr id="23" name="Text 21"/>
-          <p:cNvSpPr/>
-          <p:nvPr/>
-        </p:nvSpPr>
-        <p:spPr>
-          <a:xfrm>
-            <a:off x="6263640" y="1124712"/>
-            <a:ext cx="1645920" cy="274320"/>
-          </a:xfrm>
-          <a:prstGeom prst="rect">
-            <a:avLst/>
-          </a:prstGeom>
-          <a:noFill/>
-          <a:ln/>
-        </p:spPr>
-        <p:txBody>
-          <a:bodyPr wrap="square" lIns="0" tIns="0" rIns="0" bIns="0" rtlCol="0" anchor="ctr"/>
-          <a:lstStyle/>
-          <a:p>
-            <a:pPr indent="0" marL="0">
-              <a:buNone/>
-            </a:pPr>
-            <a:r>
-              <a:rPr lang="en-US" sz="1300" b="1" dirty="0">
-                <a:solidFill>
-                  <a:srgbClr val="1A2744"/>
-                </a:solidFill>
-                <a:latin typeface="Arial" pitchFamily="34" charset="0"/>
-                <a:ea typeface="Arial" pitchFamily="34" charset="-122"/>
-                <a:cs typeface="Arial" pitchFamily="34" charset="-120"/>
-              </a:rPr>
-              <a:t>清潔さ・清掃</a:t>
-            </a:r>
-            <a:endParaRPr lang="en-US" sz="1300" dirty="0"/>
-          </a:p>
-        </p:txBody>
-      </p:sp>
-      <p:sp>
-        <p:nvSpPr>
-          <p:cNvPr id="24" name="Text 22"/>
-          <p:cNvSpPr/>
-          <p:nvPr/>
-        </p:nvSpPr>
-        <p:spPr>
-          <a:xfrm>
-            <a:off x="6263640" y="1417320"/>
-            <a:ext cx="2377440" cy="365760"/>
-          </a:xfrm>
-          <a:prstGeom prst="rect">
-            <a:avLst/>
-          </a:prstGeom>
-          <a:noFill/>
-          <a:ln/>
-        </p:spPr>
-        <p:txBody>
-          <a:bodyPr wrap="square" lIns="0" tIns="0" rIns="0" bIns="0" rtlCol="0" anchor="ctr"/>
-          <a:lstStyle/>
-          <a:p>
-            <a:pPr indent="0" marL="0">
-              <a:buNone/>
-            </a:pPr>
-            <a:r>
-              <a:rPr lang="en-US" sz="900" dirty="0">
-                <a:solidFill>
-                  <a:srgbClr val="64748B"/>
-                </a:solidFill>
-                <a:latin typeface="Arial" pitchFamily="34" charset="0"/>
-                <a:ea typeface="Arial" pitchFamily="34" charset="-122"/>
-                <a:cs typeface="Arial" pitchFamily="34" charset="-120"/>
-              </a:rPr>
-              <a:t>ホテルは清潔で、サービスも素晴らしいです</a:t>
-            </a:r>
-            <a:endParaRPr lang="en-US" sz="900" dirty="0"/>
-          </a:p>
-        </p:txBody>
-      </p:sp>
-      <p:sp>
-        <p:nvSpPr>
-          <p:cNvPr id="25" name="Text 23"/>
-          <p:cNvSpPr/>
-          <p:nvPr/>
-        </p:nvSpPr>
-        <p:spPr>
-          <a:xfrm>
-            <a:off x="6263640" y="1828800"/>
-            <a:ext cx="2377440" cy="640080"/>
-          </a:xfrm>
-          <a:prstGeom prst="rect">
-            <a:avLst/>
-          </a:prstGeom>
-          <a:noFill/>
-          <a:ln/>
-        </p:spPr>
-        <p:txBody>
-          <a:bodyPr wrap="square" lIns="0" tIns="0" rIns="0" bIns="0" rtlCol="0" anchor="ctr"/>
-          <a:lstStyle/>
-          <a:p>
-            <a:pPr indent="0" marL="0">
-              <a:buNone/>
-            </a:pPr>
-            <a:r>
-              <a:rPr lang="en-US" sz="900" i="1" dirty="0">
-                <a:solidFill>
-                  <a:srgbClr val="3B7DD8"/>
-                </a:solidFill>
-                <a:latin typeface="Arial" pitchFamily="34" charset="0"/>
-                <a:ea typeface="Arial" pitchFamily="34" charset="-122"/>
-                <a:cs typeface="Arial" pitchFamily="34" charset="-120"/>
-              </a:rPr>
-              <a:t>「房間乾淨、整潔，兩個28吋的行李箱打開也沒問題，服務人員態度非常好，我覺得cp值很高，離錦糸町走路也很近，附近吃的...」</a:t>
-            </a:r>
-            <a:endParaRPr lang="en-US" sz="900" dirty="0"/>
-          </a:p>
-        </p:txBody>
-      </p:sp>
-      <p:sp>
-        <p:nvSpPr>
-          <p:cNvPr id="26" name="Shape 24"/>
-          <p:cNvSpPr/>
-          <p:nvPr/>
-        </p:nvSpPr>
-        <p:spPr>
-          <a:xfrm>
-            <a:off x="457200" y="2880360"/>
-            <a:ext cx="2651760" cy="1600200"/>
-          </a:xfrm>
-          <a:prstGeom prst="rect">
-            <a:avLst/>
-          </a:prstGeom>
-          <a:solidFill>
-            <a:srgbClr val="FFFFFF"/>
-          </a:solidFill>
-          <a:ln/>
-          <a:effectLst>
-            <a:outerShdw sx="100000" sy="100000" kx="0" ky="0" algn="bl" rotWithShape="0" blurRad="50800" dist="25400" dir="8100000">
-              <a:srgbClr val="000000">
-                <a:alpha val="10000"/>
-              </a:srgbClr>
-            </a:outerShdw>
-          </a:effectLst>
-        </p:spPr>
-      </p:sp>
-      <p:sp>
-        <p:nvSpPr>
-          <p:cNvPr id="27" name="Shape 25"/>
-          <p:cNvSpPr/>
-          <p:nvPr/>
-        </p:nvSpPr>
-        <p:spPr>
-          <a:xfrm>
-            <a:off x="457200" y="2880360"/>
-            <a:ext cx="54864" cy="1600200"/>
-          </a:xfrm>
-          <a:prstGeom prst="rect">
-            <a:avLst/>
-          </a:prstGeom>
-          <a:solidFill>
-            <a:srgbClr val="16A34A"/>
-          </a:solidFill>
-          <a:ln/>
-        </p:spPr>
-      </p:sp>
-      <p:sp>
-        <p:nvSpPr>
-          <p:cNvPr id="28" name="Shape 26"/>
-          <p:cNvSpPr/>
-          <p:nvPr/>
-        </p:nvSpPr>
-        <p:spPr>
-          <a:xfrm>
-            <a:off x="2286000" y="2953512"/>
-            <a:ext cx="658368" cy="228600"/>
-          </a:xfrm>
-          <a:prstGeom prst="rect">
-            <a:avLst/>
-          </a:prstGeom>
-          <a:solidFill>
-            <a:srgbClr val="DCFCE7"/>
-          </a:solidFill>
-          <a:ln/>
-        </p:spPr>
-      </p:sp>
-      <p:sp>
-        <p:nvSpPr>
-          <p:cNvPr id="29" name="Text 27"/>
-          <p:cNvSpPr/>
-          <p:nvPr/>
-        </p:nvSpPr>
-        <p:spPr>
-          <a:xfrm>
-            <a:off x="2286000" y="2953512"/>
-            <a:ext cx="658368" cy="228600"/>
-          </a:xfrm>
-          <a:prstGeom prst="rect">
-            <a:avLst/>
-          </a:prstGeom>
-          <a:noFill/>
-          <a:ln/>
-        </p:spPr>
-        <p:txBody>
-          <a:bodyPr wrap="square" lIns="0" tIns="0" rIns="0" bIns="0" rtlCol="0" anchor="ctr"/>
-          <a:lstStyle/>
-          <a:p>
-            <a:pPr algn="ctr" indent="0" marL="0">
-              <a:buNone/>
-            </a:pPr>
-            <a:r>
-              <a:rPr lang="en-US" sz="900" b="1" dirty="0">
-                <a:solidFill>
-                  <a:srgbClr val="16A34A"/>
-                </a:solidFill>
-                <a:latin typeface="Arial" pitchFamily="34" charset="0"/>
-                <a:ea typeface="Arial" pitchFamily="34" charset="-122"/>
-                <a:cs typeface="Arial" pitchFamily="34" charset="-120"/>
-              </a:rPr>
-              <a:t>20件+</a:t>
-            </a:r>
-            <a:endParaRPr lang="en-US" sz="900" dirty="0"/>
-          </a:p>
-        </p:txBody>
-      </p:sp>
-      <p:sp>
-        <p:nvSpPr>
           <p:cNvPr id="30" name="Text 28"/>
           <p:cNvSpPr/>
           <p:nvPr/>
@@ -10969,7 +10986,7 @@
                 <a:ea typeface="Arial" pitchFamily="34" charset="-122"/>
                 <a:cs typeface="Arial" pitchFamily="34" charset="-120"/>
               </a:rPr>
-              <a:t>立地は便利で、JR駅や地下鉄駅に近く、周辺には多くのレストランがあります</a:t>
+              <a:t>交通方便，附近很多食店 交通の便が良く、近くにレストランも多数あります</a:t>
             </a:r>
             <a:endParaRPr lang="en-US" sz="900" dirty="0"/>
           </a:p>
@@ -11008,7 +11025,7 @@
                 <a:ea typeface="Arial" pitchFamily="34" charset="-122"/>
                 <a:cs typeface="Arial" pitchFamily="34" charset="-120"/>
               </a:rPr>
-              <a:t>「錦糸町にもとても近く、周辺にはたくさんの飲食店があります」</a:t>
+              <a:t>「立地は便利で、JR駅や地下鉄駅に近く、周辺には多くのレストランがあります」</a:t>
             </a:r>
             <a:endParaRPr lang="en-US" sz="900" dirty="0"/>
           </a:p>
@@ -11114,7 +11131,7 @@
                 <a:ea typeface="Arial" pitchFamily="34" charset="-122"/>
                 <a:cs typeface="Arial" pitchFamily="34" charset="-120"/>
               </a:rPr>
-              <a:t>6件</a:t>
+              <a:t>7件</a:t>
             </a:r>
             <a:endParaRPr lang="en-US" sz="900" dirty="0"/>
           </a:p>
@@ -12401,7 +12418,7 @@
                           <a:ea typeface="Arial" pitchFamily="34" charset="-122"/>
                           <a:cs typeface="Arial" pitchFamily="34" charset="-120"/>
                         </a:rPr>
-                        <a:t>臭い・匂い</a:t>
+                        <a:t>対応・サービスの不満</a:t>
                       </a:r>
                       <a:endParaRPr lang="en-US" sz="900" dirty="0">
                         <a:latin typeface="Arial" charset="0"/>
@@ -12469,7 +12486,7 @@
                           <a:ea typeface="Arial" pitchFamily="34" charset="-122"/>
                           <a:cs typeface="Arial" pitchFamily="34" charset="-120"/>
                         </a:rPr>
-                        <a:t>欠点は、禁煙室を予約したのに、トイレ付近でタバコの臭いがしたことです</a:t>
+                        <a:t>服務良好，態度優良，地理位置良好，衛生不錯</a:t>
                       </a:r>
                       <a:endParaRPr lang="en-US" sz="900" dirty="0">
                         <a:latin typeface="Arial" charset="0"/>
@@ -12537,7 +12554,7 @@
                           <a:ea typeface="Arial" pitchFamily="34" charset="-122"/>
                           <a:cs typeface="Arial" pitchFamily="34" charset="-120"/>
                         </a:rPr>
-                        <a:t>4件</a:t>
+                        <a:t>5件</a:t>
                       </a:r>
                       <a:endParaRPr lang="en-US" sz="900" dirty="0">
                         <a:latin typeface="Arial" charset="0"/>
@@ -12675,7 +12692,7 @@
                           <a:ea typeface="Arial" pitchFamily="34" charset="-122"/>
                           <a:cs typeface="Arial" pitchFamily="34" charset="-120"/>
                         </a:rPr>
-                        <a:t>対応・サービスの不満</a:t>
+                        <a:t>臭い・匂い</a:t>
                       </a:r>
                       <a:endParaRPr lang="en-US" sz="900" dirty="0">
                         <a:latin typeface="Arial" charset="0"/>
@@ -12743,7 +12760,7 @@
                           <a:ea typeface="Arial" pitchFamily="34" charset="-122"/>
                           <a:cs typeface="Arial" pitchFamily="34" charset="-120"/>
                         </a:rPr>
-                        <a:t>地點方便近JR , 近地鐵站，有好多食肆，酒店乾淨，服務態度非常好</a:t>
+                        <a:t>欠点は、禁煙室を予約したのに、トイレ付近でタバコの臭いがしたことです</a:t>
                       </a:r>
                       <a:endParaRPr lang="en-US" sz="900" dirty="0">
                         <a:latin typeface="Arial" charset="0"/>
@@ -13839,7 +13856,7 @@
                           <a:ea typeface="Arial" pitchFamily="34" charset="-122"/>
                           <a:cs typeface="Arial" pitchFamily="34" charset="-120"/>
                         </a:rPr>
-                        <a:t>東京の宿泊施設としてはかなり広々としていて、バスタブとベッドサイドの景色が見える窓もありました</a:t>
+                        <a:t>ベッドの横には景色が見える窓があり、テレビは携帯電話に接続できました</a:t>
                       </a:r>
                       <a:endParaRPr lang="en-US" sz="900" dirty="0">
                         <a:latin typeface="Arial" charset="0"/>

--- a/納品レポート/ホテル別レポート/keisei_kinshicho_口コミ分析レポート.pptx
+++ b/納品レポート/ホテル別レポート/keisei_kinshicho_口コミ分析レポート.pptx
@@ -2755,7 +2755,7 @@
                 <a:ea typeface="Arial" pitchFamily="34" charset="-122"/>
                 <a:cs typeface="Arial" pitchFamily="34" charset="-120"/>
               </a:rPr>
-              <a:t>作成日：2026年4月7日</a:t>
+              <a:t>作成日：2026年4月8日</a:t>
             </a:r>
             <a:endParaRPr lang="en-US" sz="1000" dirty="0"/>
           </a:p>
@@ -5873,7 +5873,7 @@
                 <a:ea typeface="Arial" pitchFamily="34" charset="-122"/>
                 <a:cs typeface="Arial" pitchFamily="34" charset="-120"/>
               </a:rPr>
-              <a:t>  サービスも良く、スタッフも親切で、立地も良く、衛生状態も良好でした</a:t>
+              <a:t>  サービスは良く、スタッフは親切で、立地も便利で、衛生状態も良好でした</a:t>
             </a:r>
             <a:endParaRPr lang="en-US" sz="1100" dirty="0"/>
           </a:p>
@@ -10317,7 +10317,7 @@
                 <a:ea typeface="Arial" pitchFamily="34" charset="-122"/>
                 <a:cs typeface="Arial" pitchFamily="34" charset="-120"/>
               </a:rPr>
-              <a:t>サービスも良く、スタッフも親切で、立地も良く、衛生状態も良好でした</a:t>
+              <a:t>サービスは良く、スタッフは親切で、立地も便利で、衛生状態も良好でした</a:t>
             </a:r>
             <a:endParaRPr lang="en-US" sz="900" dirty="0"/>
           </a:p>

--- a/納品レポート/ホテル別レポート/keisei_kinshicho_口コミ分析レポート.pptx
+++ b/納品レポート/ホテル別レポート/keisei_kinshicho_口コミ分析レポート.pptx
@@ -2738,7 +2738,7 @@
                 <a:ea typeface="Arial" pitchFamily="34" charset="-122"/>
                 <a:cs typeface="Arial" pitchFamily="34" charset="-120"/>
               </a:rPr>
-              <a:t>作成日：2026年4月10日</a:t>
+              <a:t>作成日：2026年4月11日</a:t>
             </a:r>
             <a:endParaRPr lang="en-US" sz="1000" dirty="0"/>
           </a:p>
@@ -11008,7 +11008,7 @@
                 <a:ea typeface="Arial" pitchFamily="34" charset="-122"/>
                 <a:cs typeface="Arial" pitchFamily="34" charset="-120"/>
               </a:rPr>
-              <a:t>「ショッピングセンター、ショップ、レストランも近くにあります」</a:t>
+              <a:t>「ショッピングセンター、お店、レストランも近くにあります」</a:t>
             </a:r>
             <a:endParaRPr lang="en-US" sz="900" dirty="0"/>
           </a:p>
@@ -11114,7 +11114,7 @@
                 <a:ea typeface="Arial" pitchFamily="34" charset="-122"/>
                 <a:cs typeface="Arial" pitchFamily="34" charset="-120"/>
               </a:rPr>
-              <a:t>7件</a:t>
+              <a:t>6件</a:t>
             </a:r>
             <a:endParaRPr lang="en-US" sz="900" dirty="0"/>
           </a:p>
@@ -13839,7 +13839,7 @@
                           <a:ea typeface="Arial" pitchFamily="34" charset="-122"/>
                           <a:cs typeface="Arial" pitchFamily="34" charset="-120"/>
                         </a:rPr>
-                        <a:t>ベッドの横には景色が見える窓があり、テレビは携帯電話に接続できました</a:t>
+                        <a:t>東京の宿泊施設としてはかなり広々としていて、バスタブとベッドサイドの景色が見える窓もありました</a:t>
                       </a:r>
                       <a:endParaRPr lang="en-US" sz="900" dirty="0">
                         <a:latin typeface="Arial" charset="0"/>

--- a/納品レポート/ホテル別レポート/keisei_kinshicho_口コミ分析レポート.pptx
+++ b/納品レポート/ホテル別レポート/keisei_kinshicho_口コミ分析レポート.pptx
@@ -2738,7 +2738,7 @@
                 <a:ea typeface="Arial" pitchFamily="34" charset="-122"/>
                 <a:cs typeface="Arial" pitchFamily="34" charset="-120"/>
               </a:rPr>
-              <a:t>作成日：2026年4月11日</a:t>
+              <a:t>作成日：2026年4月13日</a:t>
             </a:r>
             <a:endParaRPr lang="en-US" sz="1000" dirty="0"/>
           </a:p>
@@ -11008,7 +11008,7 @@
                 <a:ea typeface="Arial" pitchFamily="34" charset="-122"/>
                 <a:cs typeface="Arial" pitchFamily="34" charset="-120"/>
               </a:rPr>
-              <a:t>「ショッピングセンター、お店、レストランも近くにあります」</a:t>
+              <a:t>「ショッピングセンター、ショップ、レストランも近くにあります」</a:t>
             </a:r>
             <a:endParaRPr lang="en-US" sz="900" dirty="0"/>
           </a:p>
@@ -11114,7 +11114,7 @@
                 <a:ea typeface="Arial" pitchFamily="34" charset="-122"/>
                 <a:cs typeface="Arial" pitchFamily="34" charset="-120"/>
               </a:rPr>
-              <a:t>6件</a:t>
+              <a:t>7件</a:t>
             </a:r>
             <a:endParaRPr lang="en-US" sz="900" dirty="0"/>
           </a:p>
@@ -13839,7 +13839,7 @@
                           <a:ea typeface="Arial" pitchFamily="34" charset="-122"/>
                           <a:cs typeface="Arial" pitchFamily="34" charset="-120"/>
                         </a:rPr>
-                        <a:t>東京の宿泊施設としてはかなり広々としていて、バスタブとベッドサイドの景色が見える窓もありました</a:t>
+                        <a:t>ベッドの横には景色が見える窓があり、テレビは携帯電話に接続できました</a:t>
                       </a:r>
                       <a:endParaRPr lang="en-US" sz="900" dirty="0">
                         <a:latin typeface="Arial" charset="0"/>

--- a/納品レポート/ホテル別レポート/keisei_kinshicho_口コミ分析レポート.pptx
+++ b/納品レポート/ホテル別レポート/keisei_kinshicho_口コミ分析レポート.pptx
@@ -2738,7 +2738,7 @@
                 <a:ea typeface="Arial" pitchFamily="34" charset="-122"/>
                 <a:cs typeface="Arial" pitchFamily="34" charset="-120"/>
               </a:rPr>
-              <a:t>作成日：2026年4月13日</a:t>
+              <a:t>作成日：2026年4月15日</a:t>
             </a:r>
             <a:endParaRPr lang="en-US" sz="1000" dirty="0"/>
           </a:p>

--- a/納品レポート/ホテル別レポート/keisei_kinshicho_口コミ分析レポート.pptx
+++ b/納品レポート/ホテル別レポート/keisei_kinshicho_口コミ分析レポート.pptx
@@ -2738,7 +2738,7 @@
                 <a:ea typeface="Arial" pitchFamily="34" charset="-122"/>
                 <a:cs typeface="Arial" pitchFamily="34" charset="-120"/>
               </a:rPr>
-              <a:t>作成日：2026年4月16日</a:t>
+              <a:t>作成日：2026年4月20日</a:t>
             </a:r>
             <a:endParaRPr lang="en-US" sz="1000" dirty="0"/>
           </a:p>
@@ -11008,7 +11008,7 @@
                 <a:ea typeface="Arial" pitchFamily="34" charset="-122"/>
                 <a:cs typeface="Arial" pitchFamily="34" charset="-120"/>
               </a:rPr>
-              <a:t>「ショッピングセンター、お店、レストランも近くにあります」</a:t>
+              <a:t>「ショッピングセンター、ショップ、レストランも近くにあります」</a:t>
             </a:r>
             <a:endParaRPr lang="en-US" sz="900" dirty="0"/>
           </a:p>
@@ -11114,7 +11114,7 @@
                 <a:ea typeface="Arial" pitchFamily="34" charset="-122"/>
                 <a:cs typeface="Arial" pitchFamily="34" charset="-120"/>
               </a:rPr>
-              <a:t>7件</a:t>
+              <a:t>6件</a:t>
             </a:r>
             <a:endParaRPr lang="en-US" sz="900" dirty="0"/>
           </a:p>
@@ -13839,7 +13839,7 @@
                           <a:ea typeface="Arial" pitchFamily="34" charset="-122"/>
                           <a:cs typeface="Arial" pitchFamily="34" charset="-120"/>
                         </a:rPr>
-                        <a:t>ベッドの横には景色が見える窓があり、テレビは携帯電話に接続できました</a:t>
+                        <a:t>東京の宿泊施設としてはかなり広々としていて、バスタブとベッドサイドの景色が見える窓もありました</a:t>
                       </a:r>
                       <a:endParaRPr lang="en-US" sz="900" dirty="0">
                         <a:latin typeface="Arial" charset="0"/>

--- a/納品レポート/ホテル別レポート/keisei_kinshicho_口コミ分析レポート.pptx
+++ b/納品レポート/ホテル別レポート/keisei_kinshicho_口コミ分析レポート.pptx
@@ -2656,7 +2656,7 @@
                 <a:ea typeface="Arial" pitchFamily="34" charset="-122"/>
                 <a:cs typeface="Arial" pitchFamily="34" charset="-120"/>
               </a:rPr>
-              <a:t>京成リッチモンドホテル東京錦糸町</a:t>
+              <a:t>京成リッチモンドホテル錦糸町</a:t>
             </a:r>
             <a:endParaRPr lang="en-US" sz="1600" dirty="0"/>
           </a:p>
@@ -2738,7 +2738,7 @@
                 <a:ea typeface="Arial" pitchFamily="34" charset="-122"/>
                 <a:cs typeface="Arial" pitchFamily="34" charset="-120"/>
               </a:rPr>
-              <a:t>作成日：2026年4月20日</a:t>
+              <a:t>作成日：2026年4月21日</a:t>
             </a:r>
             <a:endParaRPr lang="en-US" sz="1000" dirty="0"/>
           </a:p>
@@ -11008,7 +11008,7 @@
                 <a:ea typeface="Arial" pitchFamily="34" charset="-122"/>
                 <a:cs typeface="Arial" pitchFamily="34" charset="-120"/>
               </a:rPr>
-              <a:t>「ショッピングセンター、ショップ、レストランも近くにあります」</a:t>
+              <a:t>「ショッピングセンター、お店、レストランも近くにあります」</a:t>
             </a:r>
             <a:endParaRPr lang="en-US" sz="900" dirty="0"/>
           </a:p>
@@ -11114,7 +11114,7 @@
                 <a:ea typeface="Arial" pitchFamily="34" charset="-122"/>
                 <a:cs typeface="Arial" pitchFamily="34" charset="-120"/>
               </a:rPr>
-              <a:t>6件</a:t>
+              <a:t>7件</a:t>
             </a:r>
             <a:endParaRPr lang="en-US" sz="900" dirty="0"/>
           </a:p>
@@ -13839,7 +13839,7 @@
                           <a:ea typeface="Arial" pitchFamily="34" charset="-122"/>
                           <a:cs typeface="Arial" pitchFamily="34" charset="-120"/>
                         </a:rPr>
-                        <a:t>東京の宿泊施設としてはかなり広々としていて、バスタブとベッドサイドの景色が見える窓もありました</a:t>
+                        <a:t>ベッドの横には景色が見える窓があり、テレビは携帯電話に接続できました</a:t>
                       </a:r>
                       <a:endParaRPr lang="en-US" sz="900" dirty="0">
                         <a:latin typeface="Arial" charset="0"/>

--- a/納品レポート/ホテル別レポート/keisei_kinshicho_口コミ分析レポート.pptx
+++ b/納品レポート/ホテル別レポート/keisei_kinshicho_口コミ分析レポート.pptx
@@ -2656,7 +2656,7 @@
                 <a:ea typeface="Arial" pitchFamily="34" charset="-122"/>
                 <a:cs typeface="Arial" pitchFamily="34" charset="-120"/>
               </a:rPr>
-              <a:t>京成リッチモンドホテル錦糸町</a:t>
+              <a:t>京成リッチモンドホテル東京錦糸町</a:t>
             </a:r>
             <a:endParaRPr lang="en-US" sz="1600" dirty="0"/>
           </a:p>
@@ -2738,7 +2738,7 @@
                 <a:ea typeface="Arial" pitchFamily="34" charset="-122"/>
                 <a:cs typeface="Arial" pitchFamily="34" charset="-120"/>
               </a:rPr>
-              <a:t>作成日：2026年4月21日</a:t>
+              <a:t>作成日：2026年4月22日</a:t>
             </a:r>
             <a:endParaRPr lang="en-US" sz="1000" dirty="0"/>
           </a:p>
